--- a/CreditCardFraud/report/신용카드 사기 탐지 프로젝트 분석.pptx
+++ b/CreditCardFraud/report/신용카드 사기 탐지 프로젝트 분석.pptx
@@ -5,7 +5,7 @@
     <p:sldMasterId id="2147483648" r:id="rId1"/>
   </p:sldMasterIdLst>
   <p:notesMasterIdLst>
-    <p:notesMasterId r:id="rId24"/>
+    <p:notesMasterId r:id="rId25"/>
   </p:notesMasterIdLst>
   <p:sldIdLst>
     <p:sldId id="256" r:id="rId2"/>
@@ -20,16 +20,17 @@
     <p:sldId id="263" r:id="rId11"/>
     <p:sldId id="264" r:id="rId12"/>
     <p:sldId id="266" r:id="rId13"/>
-    <p:sldId id="265" r:id="rId14"/>
-    <p:sldId id="267" r:id="rId15"/>
+    <p:sldId id="267" r:id="rId14"/>
+    <p:sldId id="279" r:id="rId15"/>
     <p:sldId id="268" r:id="rId16"/>
     <p:sldId id="269" r:id="rId17"/>
-    <p:sldId id="270" r:id="rId18"/>
-    <p:sldId id="271" r:id="rId19"/>
-    <p:sldId id="272" r:id="rId20"/>
-    <p:sldId id="273" r:id="rId21"/>
-    <p:sldId id="274" r:id="rId22"/>
-    <p:sldId id="275" r:id="rId23"/>
+    <p:sldId id="265" r:id="rId18"/>
+    <p:sldId id="270" r:id="rId19"/>
+    <p:sldId id="271" r:id="rId20"/>
+    <p:sldId id="272" r:id="rId21"/>
+    <p:sldId id="273" r:id="rId22"/>
+    <p:sldId id="274" r:id="rId23"/>
+    <p:sldId id="275" r:id="rId24"/>
   </p:sldIdLst>
   <p:sldSz cx="12192000" cy="6858000"/>
   <p:notesSz cx="6858000" cy="12192000"/>
@@ -683,7 +684,13 @@
   <p:cSld>
     <p:spTree>
       <p:nvGrpSpPr>
-        <p:cNvPr id="1" name=""/>
+        <p:cNvPr id="1" name="">
+          <a:extLst>
+            <a:ext uri="{FF2B5EF4-FFF2-40B4-BE49-F238E27FC236}">
+              <a16:creationId xmlns:a16="http://schemas.microsoft.com/office/drawing/2014/main" id="{4AB30DC6-0951-CBA1-F2F2-8FB3C64D4FDD}"/>
+            </a:ext>
+          </a:extLst>
+        </p:cNvPr>
         <p:cNvGrpSpPr/>
         <p:nvPr/>
       </p:nvGrpSpPr>
@@ -697,7 +704,13 @@
       </p:grpSpPr>
       <p:sp>
         <p:nvSpPr>
-          <p:cNvPr id="2" name="Slide Image Placeholder 1"/>
+          <p:cNvPr id="2" name="Slide Image Placeholder 1">
+            <a:extLst>
+              <a:ext uri="{FF2B5EF4-FFF2-40B4-BE49-F238E27FC236}">
+                <a16:creationId xmlns:a16="http://schemas.microsoft.com/office/drawing/2014/main" id="{1B46DA95-7BA1-1D23-E67C-4745BE8F0069}"/>
+              </a:ext>
+            </a:extLst>
+          </p:cNvPr>
           <p:cNvSpPr>
             <a:spLocks noGrp="1" noRot="1" noChangeAspect="1"/>
           </p:cNvSpPr>
@@ -709,7 +722,13 @@
       </p:sp>
       <p:sp>
         <p:nvSpPr>
-          <p:cNvPr id="3" name="Notes Placeholder 2"/>
+          <p:cNvPr id="3" name="Notes Placeholder 2">
+            <a:extLst>
+              <a:ext uri="{FF2B5EF4-FFF2-40B4-BE49-F238E27FC236}">
+                <a16:creationId xmlns:a16="http://schemas.microsoft.com/office/drawing/2014/main" id="{D8D235DB-6283-D803-0BFE-92B46D1DEC77}"/>
+              </a:ext>
+            </a:extLst>
+          </p:cNvPr>
           <p:cNvSpPr>
             <a:spLocks noGrp="1"/>
           </p:cNvSpPr>
@@ -728,7 +747,13 @@
       </p:sp>
       <p:sp>
         <p:nvSpPr>
-          <p:cNvPr id="4" name="Slide Number Placeholder 3"/>
+          <p:cNvPr id="4" name="Slide Number Placeholder 3">
+            <a:extLst>
+              <a:ext uri="{FF2B5EF4-FFF2-40B4-BE49-F238E27FC236}">
+                <a16:creationId xmlns:a16="http://schemas.microsoft.com/office/drawing/2014/main" id="{D4D18F24-87AE-B0B2-07B3-12C47DDB77D7}"/>
+              </a:ext>
+            </a:extLst>
+          </p:cNvPr>
           <p:cNvSpPr>
             <a:spLocks noGrp="1"/>
           </p:cNvSpPr>
@@ -752,7 +777,7 @@
     </p:spTree>
     <p:extLst>
       <p:ext uri="{BB962C8B-B14F-4D97-AF65-F5344CB8AC3E}">
-        <p14:creationId xmlns:p14="http://schemas.microsoft.com/office/powerpoint/2010/main" val="1024086991"/>
+        <p14:creationId xmlns:p14="http://schemas.microsoft.com/office/powerpoint/2010/main" val="1356357414"/>
       </p:ext>
     </p:extLst>
   </p:cSld>
@@ -1500,6 +1525,90 @@
             <a:fld id="{F7021451-1387-4CA6-816F-3879F97B5CBC}" type="slidenum">
               <a:rPr lang="en-US"/>
               <a:t>22</a:t>
+            </a:fld>
+            <a:endParaRPr lang="en-US"/>
+          </a:p>
+        </p:txBody>
+      </p:sp>
+    </p:spTree>
+    <p:extLst>
+      <p:ext uri="{BB962C8B-B14F-4D97-AF65-F5344CB8AC3E}">
+        <p14:creationId xmlns:p14="http://schemas.microsoft.com/office/powerpoint/2010/main" val="1024086991"/>
+      </p:ext>
+    </p:extLst>
+  </p:cSld>
+  <p:clrMapOvr>
+    <a:masterClrMapping/>
+  </p:clrMapOvr>
+</p:notes>
+</file>
+
+<file path=ppt/notesSlides/notesSlide23.xml><?xml version="1.0" encoding="utf-8"?>
+<p:notes xmlns:a="http://schemas.openxmlformats.org/drawingml/2006/main" xmlns:r="http://schemas.openxmlformats.org/officeDocument/2006/relationships" xmlns:p="http://schemas.openxmlformats.org/presentationml/2006/main">
+  <p:cSld>
+    <p:spTree>
+      <p:nvGrpSpPr>
+        <p:cNvPr id="1" name=""/>
+        <p:cNvGrpSpPr/>
+        <p:nvPr/>
+      </p:nvGrpSpPr>
+      <p:grpSpPr>
+        <a:xfrm>
+          <a:off x="0" y="0"/>
+          <a:ext cx="0" cy="0"/>
+          <a:chOff x="0" y="0"/>
+          <a:chExt cx="0" cy="0"/>
+        </a:xfrm>
+      </p:grpSpPr>
+      <p:sp>
+        <p:nvSpPr>
+          <p:cNvPr id="2" name="Slide Image Placeholder 1"/>
+          <p:cNvSpPr>
+            <a:spLocks noGrp="1" noRot="1" noChangeAspect="1"/>
+          </p:cNvSpPr>
+          <p:nvPr>
+            <p:ph type="sldImg"/>
+          </p:nvPr>
+        </p:nvSpPr>
+        <p:spPr/>
+      </p:sp>
+      <p:sp>
+        <p:nvSpPr>
+          <p:cNvPr id="3" name="Notes Placeholder 2"/>
+          <p:cNvSpPr>
+            <a:spLocks noGrp="1"/>
+          </p:cNvSpPr>
+          <p:nvPr>
+            <p:ph type="body" idx="1"/>
+          </p:nvPr>
+        </p:nvSpPr>
+        <p:spPr/>
+        <p:txBody>
+          <a:bodyPr/>
+          <a:lstStyle/>
+          <a:p>
+            <a:endParaRPr lang="en-US" dirty="0"/>
+          </a:p>
+        </p:txBody>
+      </p:sp>
+      <p:sp>
+        <p:nvSpPr>
+          <p:cNvPr id="4" name="Slide Number Placeholder 3"/>
+          <p:cNvSpPr>
+            <a:spLocks noGrp="1"/>
+          </p:cNvSpPr>
+          <p:nvPr>
+            <p:ph type="sldNum" sz="quarter" idx="10"/>
+          </p:nvPr>
+        </p:nvSpPr>
+        <p:spPr/>
+        <p:txBody>
+          <a:bodyPr/>
+          <a:lstStyle/>
+          <a:p>
+            <a:fld id="{F7021451-1387-4CA6-816F-3879F97B5CBC}" type="slidenum">
+              <a:rPr lang="en-US"/>
+              <a:t>23</a:t>
             </a:fld>
             <a:endParaRPr lang="en-US"/>
           </a:p>
@@ -13850,7 +13959,7 @@
         </p:blipFill>
         <p:spPr>
           <a:xfrm>
-            <a:off x="5556949" y="3793530"/>
+            <a:off x="5533096" y="3756422"/>
             <a:ext cx="6421040" cy="1738180"/>
           </a:xfrm>
           <a:prstGeom prst="rect">
@@ -13880,8 +13989,8 @@
         </p:blipFill>
         <p:spPr>
           <a:xfrm>
-            <a:off x="5556949" y="5636484"/>
-            <a:ext cx="6421039" cy="992916"/>
+            <a:off x="5533097" y="5636484"/>
+            <a:ext cx="6444892" cy="992916"/>
           </a:xfrm>
           <a:prstGeom prst="rect">
             <a:avLst/>
@@ -14198,7 +14307,7 @@
                 <a:ea typeface="Noto Sans KR" pitchFamily="34" charset="-122"/>
                 <a:cs typeface="Noto Sans KR" pitchFamily="34" charset="-120"/>
               </a:rPr>
-              <a:t>0.9528</a:t>
+              <a:t>0.9719</a:t>
             </a:r>
             <a:endParaRPr lang="en-US" sz="1800" dirty="0"/>
           </a:p>
@@ -14390,7 +14499,7 @@
                 <a:ea typeface="Noto Sans KR" pitchFamily="34" charset="-122"/>
                 <a:cs typeface="Noto Sans KR" pitchFamily="34" charset="-120"/>
               </a:rPr>
-              <a:t>0.8514</a:t>
+              <a:t>0.2727</a:t>
             </a:r>
             <a:endParaRPr lang="en-US" sz="1800" dirty="0"/>
           </a:p>
@@ -14486,7 +14595,7 @@
                 <a:ea typeface="Noto Sans KR" pitchFamily="34" charset="-122"/>
                 <a:cs typeface="Noto Sans KR" pitchFamily="34" charset="-120"/>
               </a:rPr>
-              <a:t>0.6429</a:t>
+              <a:t>0.8571</a:t>
             </a:r>
             <a:endParaRPr lang="en-US" sz="1800" dirty="0"/>
           </a:p>
@@ -14582,7 +14691,7 @@
                 <a:ea typeface="Noto Sans KR" pitchFamily="34" charset="-122"/>
                 <a:cs typeface="Noto Sans KR" pitchFamily="34" charset="-120"/>
               </a:rPr>
-              <a:t>0.7326</a:t>
+              <a:t>0.4138</a:t>
             </a:r>
             <a:endParaRPr lang="en-US" sz="1800" dirty="0"/>
           </a:p>
@@ -14597,1295 +14706,6 @@
 </file>
 
 <file path=ppt/slides/slide13.xml><?xml version="1.0" encoding="utf-8"?>
-<p:sld xmlns:a="http://schemas.openxmlformats.org/drawingml/2006/main" xmlns:r="http://schemas.openxmlformats.org/officeDocument/2006/relationships" xmlns:p="http://schemas.openxmlformats.org/presentationml/2006/main">
-  <p:cSld name="Slide 10">
-    <p:spTree>
-      <p:nvGrpSpPr>
-        <p:cNvPr id="1" name=""/>
-        <p:cNvGrpSpPr/>
-        <p:nvPr/>
-      </p:nvGrpSpPr>
-      <p:grpSpPr>
-        <a:xfrm>
-          <a:off x="0" y="0"/>
-          <a:ext cx="0" cy="0"/>
-          <a:chOff x="0" y="0"/>
-          <a:chExt cx="0" cy="0"/>
-        </a:xfrm>
-      </p:grpSpPr>
-      <p:pic>
-        <p:nvPicPr>
-          <p:cNvPr id="2" name="Image 0" descr="preencoded.png"/>
-          <p:cNvPicPr>
-            <a:picLocks noChangeAspect="1"/>
-          </p:cNvPicPr>
-          <p:nvPr/>
-        </p:nvPicPr>
-        <p:blipFill>
-          <a:blip r:embed="rId3"/>
-          <a:stretch>
-            <a:fillRect/>
-          </a:stretch>
-        </p:blipFill>
-        <p:spPr>
-          <a:xfrm>
-            <a:off x="0" y="0"/>
-            <a:ext cx="12192000" cy="6858000"/>
-          </a:xfrm>
-          <a:prstGeom prst="rect">
-            <a:avLst/>
-          </a:prstGeom>
-        </p:spPr>
-      </p:pic>
-      <p:pic>
-        <p:nvPicPr>
-          <p:cNvPr id="3" name="Image 1" descr="preencoded.png"/>
-          <p:cNvPicPr>
-            <a:picLocks noChangeAspect="1"/>
-          </p:cNvPicPr>
-          <p:nvPr/>
-        </p:nvPicPr>
-        <p:blipFill>
-          <a:blip r:embed="rId4"/>
-          <a:stretch>
-            <a:fillRect/>
-          </a:stretch>
-        </p:blipFill>
-        <p:spPr>
-          <a:xfrm>
-            <a:off x="0" y="0"/>
-            <a:ext cx="12192000" cy="762000"/>
-          </a:xfrm>
-          <a:prstGeom prst="rect">
-            <a:avLst/>
-          </a:prstGeom>
-        </p:spPr>
-      </p:pic>
-      <p:pic>
-        <p:nvPicPr>
-          <p:cNvPr id="4" name="Image 2" descr="preencoded.png"/>
-          <p:cNvPicPr>
-            <a:picLocks noChangeAspect="1"/>
-          </p:cNvPicPr>
-          <p:nvPr/>
-        </p:nvPicPr>
-        <p:blipFill>
-          <a:blip r:embed="rId5"/>
-          <a:stretch>
-            <a:fillRect/>
-          </a:stretch>
-        </p:blipFill>
-        <p:spPr>
-          <a:xfrm>
-            <a:off x="228600" y="990600"/>
-            <a:ext cx="5715000" cy="1676400"/>
-          </a:xfrm>
-          <a:prstGeom prst="rect">
-            <a:avLst/>
-          </a:prstGeom>
-        </p:spPr>
-      </p:pic>
-      <p:pic>
-        <p:nvPicPr>
-          <p:cNvPr id="5" name="Image 3" descr="preencoded.png"/>
-          <p:cNvPicPr>
-            <a:picLocks noChangeAspect="1"/>
-          </p:cNvPicPr>
-          <p:nvPr/>
-        </p:nvPicPr>
-        <p:blipFill>
-          <a:blip r:embed="rId6"/>
-          <a:stretch>
-            <a:fillRect/>
-          </a:stretch>
-        </p:blipFill>
-        <p:spPr>
-          <a:xfrm>
-            <a:off x="457200" y="1257300"/>
-            <a:ext cx="228600" cy="228600"/>
-          </a:xfrm>
-          <a:prstGeom prst="rect">
-            <a:avLst/>
-          </a:prstGeom>
-        </p:spPr>
-      </p:pic>
-      <p:pic>
-        <p:nvPicPr>
-          <p:cNvPr id="6" name="Image 4" descr="preencoded.png"/>
-          <p:cNvPicPr>
-            <a:picLocks noChangeAspect="1"/>
-          </p:cNvPicPr>
-          <p:nvPr/>
-        </p:nvPicPr>
-        <p:blipFill>
-          <a:blip r:embed="rId7"/>
-          <a:stretch>
-            <a:fillRect/>
-          </a:stretch>
-        </p:blipFill>
-        <p:spPr>
-          <a:xfrm>
-            <a:off x="228600" y="2819400"/>
-            <a:ext cx="5715000" cy="2209800"/>
-          </a:xfrm>
-          <a:prstGeom prst="rect">
-            <a:avLst/>
-          </a:prstGeom>
-        </p:spPr>
-      </p:pic>
-      <p:pic>
-        <p:nvPicPr>
-          <p:cNvPr id="7" name="Image 5" descr="preencoded.png"/>
-          <p:cNvPicPr>
-            <a:picLocks noChangeAspect="1"/>
-          </p:cNvPicPr>
-          <p:nvPr/>
-        </p:nvPicPr>
-        <p:blipFill>
-          <a:blip r:embed="rId8"/>
-          <a:stretch>
-            <a:fillRect/>
-          </a:stretch>
-        </p:blipFill>
-        <p:spPr>
-          <a:xfrm>
-            <a:off x="6248400" y="990600"/>
-            <a:ext cx="5715000" cy="3810000"/>
-          </a:xfrm>
-          <a:prstGeom prst="rect">
-            <a:avLst/>
-          </a:prstGeom>
-        </p:spPr>
-      </p:pic>
-      <p:pic>
-        <p:nvPicPr>
-          <p:cNvPr id="8" name="Image 6" descr="preencoded.png"/>
-          <p:cNvPicPr>
-            <a:picLocks noChangeAspect="1"/>
-          </p:cNvPicPr>
-          <p:nvPr/>
-        </p:nvPicPr>
-        <p:blipFill>
-          <a:blip r:embed="rId9"/>
-          <a:stretch>
-            <a:fillRect/>
-          </a:stretch>
-        </p:blipFill>
-        <p:spPr>
-          <a:xfrm>
-            <a:off x="6477000" y="1600200"/>
-            <a:ext cx="5257800" cy="1828800"/>
-          </a:xfrm>
-          <a:prstGeom prst="rect">
-            <a:avLst/>
-          </a:prstGeom>
-        </p:spPr>
-      </p:pic>
-      <p:pic>
-        <p:nvPicPr>
-          <p:cNvPr id="9" name="Image 7" descr="preencoded.png"/>
-          <p:cNvPicPr>
-            <a:picLocks noChangeAspect="1"/>
-          </p:cNvPicPr>
-          <p:nvPr/>
-        </p:nvPicPr>
-        <p:blipFill>
-          <a:blip r:embed="rId10"/>
-          <a:stretch>
-            <a:fillRect/>
-          </a:stretch>
-        </p:blipFill>
-        <p:spPr>
-          <a:xfrm>
-            <a:off x="6248400" y="4953000"/>
-            <a:ext cx="5715000" cy="1600200"/>
-          </a:xfrm>
-          <a:prstGeom prst="rect">
-            <a:avLst/>
-          </a:prstGeom>
-        </p:spPr>
-      </p:pic>
-      <p:pic>
-        <p:nvPicPr>
-          <p:cNvPr id="10" name="Image 8" descr="preencoded.png"/>
-          <p:cNvPicPr>
-            <a:picLocks noChangeAspect="1"/>
-          </p:cNvPicPr>
-          <p:nvPr/>
-        </p:nvPicPr>
-        <p:blipFill>
-          <a:blip r:embed="rId11"/>
-          <a:stretch>
-            <a:fillRect/>
-          </a:stretch>
-        </p:blipFill>
-        <p:spPr>
-          <a:xfrm>
-            <a:off x="6477000" y="5562600"/>
-            <a:ext cx="990600" cy="762000"/>
-          </a:xfrm>
-          <a:prstGeom prst="rect">
-            <a:avLst/>
-          </a:prstGeom>
-        </p:spPr>
-      </p:pic>
-      <p:pic>
-        <p:nvPicPr>
-          <p:cNvPr id="11" name="Image 9" descr="preencoded.png"/>
-          <p:cNvPicPr>
-            <a:picLocks noChangeAspect="1"/>
-          </p:cNvPicPr>
-          <p:nvPr/>
-        </p:nvPicPr>
-        <p:blipFill>
-          <a:blip r:embed="rId11"/>
-          <a:stretch>
-            <a:fillRect/>
-          </a:stretch>
-        </p:blipFill>
-        <p:spPr>
-          <a:xfrm>
-            <a:off x="7543800" y="5562600"/>
-            <a:ext cx="990600" cy="762000"/>
-          </a:xfrm>
-          <a:prstGeom prst="rect">
-            <a:avLst/>
-          </a:prstGeom>
-        </p:spPr>
-      </p:pic>
-      <p:pic>
-        <p:nvPicPr>
-          <p:cNvPr id="12" name="Image 10" descr="preencoded.png"/>
-          <p:cNvPicPr>
-            <a:picLocks noChangeAspect="1"/>
-          </p:cNvPicPr>
-          <p:nvPr/>
-        </p:nvPicPr>
-        <p:blipFill>
-          <a:blip r:embed="rId11"/>
-          <a:stretch>
-            <a:fillRect/>
-          </a:stretch>
-        </p:blipFill>
-        <p:spPr>
-          <a:xfrm>
-            <a:off x="8610600" y="5562600"/>
-            <a:ext cx="990600" cy="762000"/>
-          </a:xfrm>
-          <a:prstGeom prst="rect">
-            <a:avLst/>
-          </a:prstGeom>
-        </p:spPr>
-      </p:pic>
-      <p:pic>
-        <p:nvPicPr>
-          <p:cNvPr id="13" name="Image 11" descr="preencoded.png"/>
-          <p:cNvPicPr>
-            <a:picLocks noChangeAspect="1"/>
-          </p:cNvPicPr>
-          <p:nvPr/>
-        </p:nvPicPr>
-        <p:blipFill>
-          <a:blip r:embed="rId11"/>
-          <a:stretch>
-            <a:fillRect/>
-          </a:stretch>
-        </p:blipFill>
-        <p:spPr>
-          <a:xfrm>
-            <a:off x="9677400" y="5562600"/>
-            <a:ext cx="990600" cy="762000"/>
-          </a:xfrm>
-          <a:prstGeom prst="rect">
-            <a:avLst/>
-          </a:prstGeom>
-        </p:spPr>
-      </p:pic>
-      <p:pic>
-        <p:nvPicPr>
-          <p:cNvPr id="14" name="Image 12" descr="preencoded.png"/>
-          <p:cNvPicPr>
-            <a:picLocks noChangeAspect="1"/>
-          </p:cNvPicPr>
-          <p:nvPr/>
-        </p:nvPicPr>
-        <p:blipFill>
-          <a:blip r:embed="rId11"/>
-          <a:stretch>
-            <a:fillRect/>
-          </a:stretch>
-        </p:blipFill>
-        <p:spPr>
-          <a:xfrm>
-            <a:off x="10744200" y="5562600"/>
-            <a:ext cx="990600" cy="762000"/>
-          </a:xfrm>
-          <a:prstGeom prst="rect">
-            <a:avLst/>
-          </a:prstGeom>
-        </p:spPr>
-      </p:pic>
-      <p:pic>
-        <p:nvPicPr>
-          <p:cNvPr id="15" name="Image 13" descr="preencoded.png"/>
-          <p:cNvPicPr>
-            <a:picLocks noChangeAspect="1"/>
-          </p:cNvPicPr>
-          <p:nvPr/>
-        </p:nvPicPr>
-        <p:blipFill>
-          <a:blip r:embed="rId12"/>
-          <a:stretch>
-            <a:fillRect/>
-          </a:stretch>
-        </p:blipFill>
-        <p:spPr>
-          <a:xfrm>
-            <a:off x="0" y="6781800"/>
-            <a:ext cx="12192000" cy="76200"/>
-          </a:xfrm>
-          <a:prstGeom prst="rect">
-            <a:avLst/>
-          </a:prstGeom>
-        </p:spPr>
-      </p:pic>
-      <p:sp>
-        <p:nvSpPr>
-          <p:cNvPr id="16" name="Text 0"/>
-          <p:cNvSpPr/>
-          <p:nvPr/>
-        </p:nvSpPr>
-        <p:spPr>
-          <a:xfrm>
-            <a:off x="381000" y="209550"/>
-            <a:ext cx="2011680" cy="342900"/>
-          </a:xfrm>
-          <a:prstGeom prst="rect">
-            <a:avLst/>
-          </a:prstGeom>
-          <a:noFill/>
-          <a:ln/>
-        </p:spPr>
-        <p:txBody>
-          <a:bodyPr vert="horz" wrap="square" lIns="0" tIns="0" rIns="0" bIns="0" rtlCol="0" anchor="t"/>
-          <a:lstStyle/>
-          <a:p>
-            <a:pPr marL="0" indent="0">
-              <a:lnSpc>
-                <a:spcPts val="2700"/>
-              </a:lnSpc>
-              <a:buNone/>
-            </a:pPr>
-            <a:r>
-              <a:rPr lang="en-US" sz="2250" b="1" dirty="0">
-                <a:solidFill>
-                  <a:srgbClr val="FFFFFF"/>
-                </a:solidFill>
-                <a:latin typeface="Noto Sans KR" pitchFamily="34" charset="0"/>
-                <a:ea typeface="Noto Sans KR" pitchFamily="34" charset="-122"/>
-                <a:cs typeface="Noto Sans KR" pitchFamily="34" charset="-120"/>
-              </a:rPr>
-              <a:t>신경망 접근법</a:t>
-            </a:r>
-            <a:endParaRPr lang="en-US" sz="2250" dirty="0"/>
-          </a:p>
-        </p:txBody>
-      </p:sp>
-      <p:sp>
-        <p:nvSpPr>
-          <p:cNvPr id="17" name="Text 1"/>
-          <p:cNvSpPr/>
-          <p:nvPr/>
-        </p:nvSpPr>
-        <p:spPr>
-          <a:xfrm>
-            <a:off x="11315700" y="247650"/>
-            <a:ext cx="594360" cy="266700"/>
-          </a:xfrm>
-          <a:prstGeom prst="rect">
-            <a:avLst/>
-          </a:prstGeom>
-          <a:noFill/>
-          <a:ln/>
-        </p:spPr>
-        <p:txBody>
-          <a:bodyPr vert="horz" wrap="square" lIns="0" tIns="0" rIns="0" bIns="0" rtlCol="0" anchor="t"/>
-          <a:lstStyle/>
-          <a:p>
-            <a:pPr marL="0" indent="0">
-              <a:lnSpc>
-                <a:spcPts val="2100"/>
-              </a:lnSpc>
-              <a:buNone/>
-            </a:pPr>
-            <a:r>
-              <a:rPr lang="en-US" sz="1500" dirty="0">
-                <a:solidFill>
-                  <a:srgbClr val="FFFFFF"/>
-                </a:solidFill>
-                <a:latin typeface="Noto Sans KR" pitchFamily="34" charset="0"/>
-                <a:ea typeface="Noto Sans KR" pitchFamily="34" charset="-122"/>
-                <a:cs typeface="Noto Sans KR" pitchFamily="34" charset="-120"/>
-              </a:rPr>
-              <a:t>10/20</a:t>
-            </a:r>
-            <a:endParaRPr lang="en-US" sz="1500" dirty="0"/>
-          </a:p>
-        </p:txBody>
-      </p:sp>
-      <p:sp>
-        <p:nvSpPr>
-          <p:cNvPr id="18" name="Text 2"/>
-          <p:cNvSpPr/>
-          <p:nvPr/>
-        </p:nvSpPr>
-        <p:spPr>
-          <a:xfrm>
-            <a:off x="800100" y="1219200"/>
-            <a:ext cx="5257800" cy="304800"/>
-          </a:xfrm>
-          <a:prstGeom prst="rect">
-            <a:avLst/>
-          </a:prstGeom>
-          <a:noFill/>
-          <a:ln/>
-        </p:spPr>
-        <p:txBody>
-          <a:bodyPr vert="horz" wrap="square" lIns="0" tIns="0" rIns="0" bIns="0" rtlCol="0" anchor="t"/>
-          <a:lstStyle/>
-          <a:p>
-            <a:pPr marL="0" indent="0">
-              <a:lnSpc>
-                <a:spcPts val="2400"/>
-              </a:lnSpc>
-              <a:buNone/>
-            </a:pPr>
-            <a:r>
-              <a:rPr lang="en-US" sz="1800" b="1" dirty="0">
-                <a:solidFill>
-                  <a:srgbClr val="1E40AF"/>
-                </a:solidFill>
-                <a:latin typeface="Noto Sans KR" pitchFamily="34" charset="0"/>
-                <a:ea typeface="Noto Sans KR" pitchFamily="34" charset="-122"/>
-                <a:cs typeface="Noto Sans KR" pitchFamily="34" charset="-120"/>
-              </a:rPr>
-              <a:t>다층 퍼셉트론 (MLP)</a:t>
-            </a:r>
-            <a:endParaRPr lang="en-US" sz="1800" dirty="0"/>
-          </a:p>
-        </p:txBody>
-      </p:sp>
-      <p:sp>
-        <p:nvSpPr>
-          <p:cNvPr id="19" name="Text 3"/>
-          <p:cNvSpPr/>
-          <p:nvPr/>
-        </p:nvSpPr>
-        <p:spPr>
-          <a:xfrm>
-            <a:off x="457200" y="1638300"/>
-            <a:ext cx="5257800" cy="457200"/>
-          </a:xfrm>
-          <a:prstGeom prst="rect">
-            <a:avLst/>
-          </a:prstGeom>
-          <a:noFill/>
-          <a:ln/>
-        </p:spPr>
-        <p:txBody>
-          <a:bodyPr vert="horz" wrap="square" lIns="0" tIns="0" rIns="0" bIns="0" rtlCol="0" anchor="t"/>
-          <a:lstStyle/>
-          <a:p>
-            <a:pPr marL="0" indent="0">
-              <a:lnSpc>
-                <a:spcPts val="1800"/>
-              </a:lnSpc>
-              <a:buNone/>
-            </a:pPr>
-            <a:r>
-              <a:rPr lang="en-US" sz="1200" dirty="0">
-                <a:solidFill>
-                  <a:srgbClr val="374151"/>
-                </a:solidFill>
-                <a:latin typeface="Noto Sans KR" pitchFamily="34" charset="0"/>
-                <a:ea typeface="Noto Sans KR" pitchFamily="34" charset="-122"/>
-                <a:cs typeface="Noto Sans KR" pitchFamily="34" charset="-120"/>
-              </a:rPr>
-              <a:t>신경망 접근법은 복잡한 비선형 패턴을 포착하는 데 효과적이며, 거래 데이터의 숨겨진 패턴을 학습할 수 있습니다.</a:t>
-            </a:r>
-            <a:endParaRPr lang="en-US" sz="1200" dirty="0"/>
-          </a:p>
-        </p:txBody>
-      </p:sp>
-      <p:sp>
-        <p:nvSpPr>
-          <p:cNvPr id="20" name="Text 4"/>
-          <p:cNvSpPr/>
-          <p:nvPr/>
-        </p:nvSpPr>
-        <p:spPr>
-          <a:xfrm>
-            <a:off x="457200" y="2209800"/>
-            <a:ext cx="6309360" cy="228600"/>
-          </a:xfrm>
-          <a:prstGeom prst="rect">
-            <a:avLst/>
-          </a:prstGeom>
-          <a:noFill/>
-          <a:ln/>
-        </p:spPr>
-        <p:txBody>
-          <a:bodyPr vert="horz" wrap="square" lIns="0" tIns="0" rIns="0" bIns="0" rtlCol="0" anchor="t"/>
-          <a:lstStyle/>
-          <a:p>
-            <a:pPr marL="0" indent="0">
-              <a:lnSpc>
-                <a:spcPts val="1800"/>
-              </a:lnSpc>
-              <a:buNone/>
-            </a:pPr>
-            <a:r>
-              <a:rPr lang="en-US" sz="1200" dirty="0">
-                <a:solidFill>
-                  <a:srgbClr val="374151"/>
-                </a:solidFill>
-                <a:latin typeface="Noto Sans KR" pitchFamily="34" charset="0"/>
-                <a:ea typeface="Noto Sans KR" pitchFamily="34" charset="-122"/>
-                <a:cs typeface="Noto Sans KR" pitchFamily="34" charset="-120"/>
-              </a:rPr>
-              <a:t>특히 사기 거래의 복잡한 패턴을 포착하는 데 유리합니다.</a:t>
-            </a:r>
-            <a:endParaRPr lang="en-US" sz="1200" dirty="0"/>
-          </a:p>
-        </p:txBody>
-      </p:sp>
-      <p:sp>
-        <p:nvSpPr>
-          <p:cNvPr id="21" name="Text 5"/>
-          <p:cNvSpPr/>
-          <p:nvPr/>
-        </p:nvSpPr>
-        <p:spPr>
-          <a:xfrm>
-            <a:off x="457200" y="3048000"/>
-            <a:ext cx="5257800" cy="266700"/>
-          </a:xfrm>
-          <a:prstGeom prst="rect">
-            <a:avLst/>
-          </a:prstGeom>
-          <a:noFill/>
-          <a:ln/>
-        </p:spPr>
-        <p:txBody>
-          <a:bodyPr vert="horz" wrap="square" lIns="0" tIns="0" rIns="0" bIns="0" rtlCol="0" anchor="t"/>
-          <a:lstStyle/>
-          <a:p>
-            <a:pPr marL="0" indent="0">
-              <a:lnSpc>
-                <a:spcPts val="2100"/>
-              </a:lnSpc>
-              <a:buNone/>
-            </a:pPr>
-            <a:r>
-              <a:rPr lang="en-US" sz="1500" b="1" dirty="0">
-                <a:solidFill>
-                  <a:srgbClr val="1D4ED8"/>
-                </a:solidFill>
-                <a:latin typeface="Noto Sans KR" pitchFamily="34" charset="0"/>
-                <a:ea typeface="Noto Sans KR" pitchFamily="34" charset="-122"/>
-                <a:cs typeface="Noto Sans KR" pitchFamily="34" charset="-120"/>
-              </a:rPr>
-              <a:t>주요 발견점</a:t>
-            </a:r>
-            <a:endParaRPr lang="en-US" sz="1500" dirty="0"/>
-          </a:p>
-        </p:txBody>
-      </p:sp>
-      <p:sp>
-        <p:nvSpPr>
-          <p:cNvPr id="22" name="Text 6"/>
-          <p:cNvSpPr/>
-          <p:nvPr/>
-        </p:nvSpPr>
-        <p:spPr>
-          <a:xfrm>
-            <a:off x="457200" y="3429000"/>
-            <a:ext cx="6309360" cy="228600"/>
-          </a:xfrm>
-          <a:prstGeom prst="rect">
-            <a:avLst/>
-          </a:prstGeom>
-          <a:noFill/>
-          <a:ln/>
-        </p:spPr>
-        <p:txBody>
-          <a:bodyPr vert="horz" wrap="square" lIns="0" tIns="0" rIns="0" bIns="0" rtlCol="0" anchor="t"/>
-          <a:lstStyle/>
-          <a:p>
-            <a:pPr marL="342900" indent="-342900" algn="l">
-              <a:lnSpc>
-                <a:spcPts val="1800"/>
-              </a:lnSpc>
-              <a:buSzPct val="100000"/>
-              <a:buChar char="•"/>
-            </a:pPr>
-            <a:r>
-              <a:rPr lang="en-US" sz="1200" dirty="0">
-                <a:solidFill>
-                  <a:srgbClr val="374151"/>
-                </a:solidFill>
-                <a:latin typeface="Noto Sans KR" pitchFamily="34" charset="0"/>
-                <a:ea typeface="Noto Sans KR" pitchFamily="34" charset="-122"/>
-                <a:cs typeface="Noto Sans KR" pitchFamily="34" charset="-120"/>
-              </a:rPr>
-              <a:t>MLP 모델은 높은 AUC 값을 보임 (0.9528)</a:t>
-            </a:r>
-            <a:endParaRPr lang="en-US" sz="1200" dirty="0"/>
-          </a:p>
-        </p:txBody>
-      </p:sp>
-      <p:sp>
-        <p:nvSpPr>
-          <p:cNvPr id="23" name="Text 7"/>
-          <p:cNvSpPr/>
-          <p:nvPr/>
-        </p:nvSpPr>
-        <p:spPr>
-          <a:xfrm>
-            <a:off x="457200" y="3733800"/>
-            <a:ext cx="6309360" cy="228600"/>
-          </a:xfrm>
-          <a:prstGeom prst="rect">
-            <a:avLst/>
-          </a:prstGeom>
-          <a:noFill/>
-          <a:ln/>
-        </p:spPr>
-        <p:txBody>
-          <a:bodyPr vert="horz" wrap="square" lIns="0" tIns="0" rIns="0" bIns="0" rtlCol="0" anchor="t"/>
-          <a:lstStyle/>
-          <a:p>
-            <a:pPr marL="342900" indent="-342900" algn="l">
-              <a:lnSpc>
-                <a:spcPts val="1800"/>
-              </a:lnSpc>
-              <a:buSzPct val="100000"/>
-              <a:buChar char="•"/>
-            </a:pPr>
-            <a:r>
-              <a:rPr lang="en-US" sz="1200" dirty="0">
-                <a:solidFill>
-                  <a:srgbClr val="374151"/>
-                </a:solidFill>
-                <a:latin typeface="Noto Sans KR" pitchFamily="34" charset="0"/>
-                <a:ea typeface="Noto Sans KR" pitchFamily="34" charset="-122"/>
-                <a:cs typeface="Noto Sans KR" pitchFamily="34" charset="-120"/>
-              </a:rPr>
-              <a:t>높은 정밀도 (0.8514)를 보이지만, 재현율은 상대적으로 낮음 (0.6429)</a:t>
-            </a:r>
-            <a:endParaRPr lang="en-US" sz="1200" dirty="0"/>
-          </a:p>
-        </p:txBody>
-      </p:sp>
-      <p:sp>
-        <p:nvSpPr>
-          <p:cNvPr id="24" name="Text 8"/>
-          <p:cNvSpPr/>
-          <p:nvPr/>
-        </p:nvSpPr>
-        <p:spPr>
-          <a:xfrm>
-            <a:off x="457200" y="4038600"/>
-            <a:ext cx="5257800" cy="457200"/>
-          </a:xfrm>
-          <a:prstGeom prst="rect">
-            <a:avLst/>
-          </a:prstGeom>
-          <a:noFill/>
-          <a:ln/>
-        </p:spPr>
-        <p:txBody>
-          <a:bodyPr vert="horz" wrap="square" lIns="0" tIns="0" rIns="0" bIns="0" rtlCol="0" anchor="t"/>
-          <a:lstStyle/>
-          <a:p>
-            <a:pPr marL="342900" indent="-342900" algn="l">
-              <a:lnSpc>
-                <a:spcPts val="1800"/>
-              </a:lnSpc>
-              <a:buSzPct val="100000"/>
-              <a:buChar char="•"/>
-            </a:pPr>
-            <a:r>
-              <a:rPr lang="en-US" sz="1200" dirty="0">
-                <a:solidFill>
-                  <a:srgbClr val="374151"/>
-                </a:solidFill>
-                <a:latin typeface="Noto Sans KR" pitchFamily="34" charset="0"/>
-                <a:ea typeface="Noto Sans KR" pitchFamily="34" charset="-122"/>
-                <a:cs typeface="Noto Sans KR" pitchFamily="34" charset="-120"/>
-              </a:rPr>
-              <a:t>SMOTE와 결합된 MLP 모델 (oversample_capped_mlp)이 가장 우수한 성능을 보임</a:t>
-            </a:r>
-            <a:endParaRPr lang="en-US" sz="1200" dirty="0"/>
-          </a:p>
-        </p:txBody>
-      </p:sp>
-      <p:sp>
-        <p:nvSpPr>
-          <p:cNvPr id="25" name="Text 9"/>
-          <p:cNvSpPr/>
-          <p:nvPr/>
-        </p:nvSpPr>
-        <p:spPr>
-          <a:xfrm>
-            <a:off x="457200" y="4572000"/>
-            <a:ext cx="6309360" cy="228600"/>
-          </a:xfrm>
-          <a:prstGeom prst="rect">
-            <a:avLst/>
-          </a:prstGeom>
-          <a:noFill/>
-          <a:ln/>
-        </p:spPr>
-        <p:txBody>
-          <a:bodyPr vert="horz" wrap="square" lIns="0" tIns="0" rIns="0" bIns="0" rtlCol="0" anchor="t"/>
-          <a:lstStyle/>
-          <a:p>
-            <a:pPr marL="342900" indent="-342900" algn="l">
-              <a:lnSpc>
-                <a:spcPts val="1800"/>
-              </a:lnSpc>
-              <a:buSzPct val="100000"/>
-              <a:buChar char="•"/>
-            </a:pPr>
-            <a:r>
-              <a:rPr lang="en-US" sz="1200" dirty="0">
-                <a:solidFill>
-                  <a:srgbClr val="374151"/>
-                </a:solidFill>
-                <a:latin typeface="Noto Sans KR" pitchFamily="34" charset="0"/>
-                <a:ea typeface="Noto Sans KR" pitchFamily="34" charset="-122"/>
-                <a:cs typeface="Noto Sans KR" pitchFamily="34" charset="-120"/>
-              </a:rPr>
-              <a:t>모델이 사기 거래를 포착하는 데에는 효과적이지만, 완벽한 모델은 아님</a:t>
-            </a:r>
-            <a:endParaRPr lang="en-US" sz="1200" dirty="0"/>
-          </a:p>
-        </p:txBody>
-      </p:sp>
-      <p:sp>
-        <p:nvSpPr>
-          <p:cNvPr id="26" name="Text 10"/>
-          <p:cNvSpPr/>
-          <p:nvPr/>
-        </p:nvSpPr>
-        <p:spPr>
-          <a:xfrm>
-            <a:off x="6477000" y="1219200"/>
-            <a:ext cx="5257800" cy="266700"/>
-          </a:xfrm>
-          <a:prstGeom prst="rect">
-            <a:avLst/>
-          </a:prstGeom>
-          <a:noFill/>
-          <a:ln/>
-        </p:spPr>
-        <p:txBody>
-          <a:bodyPr vert="horz" wrap="square" lIns="0" tIns="0" rIns="0" bIns="0" rtlCol="0" anchor="t"/>
-          <a:lstStyle/>
-          <a:p>
-            <a:pPr marL="0" indent="0">
-              <a:lnSpc>
-                <a:spcPts val="2100"/>
-              </a:lnSpc>
-              <a:buNone/>
-            </a:pPr>
-            <a:r>
-              <a:rPr lang="en-US" sz="1500" b="1" dirty="0">
-                <a:solidFill>
-                  <a:srgbClr val="1D4ED8"/>
-                </a:solidFill>
-                <a:latin typeface="Noto Sans KR" pitchFamily="34" charset="0"/>
-                <a:ea typeface="Noto Sans KR" pitchFamily="34" charset="-122"/>
-                <a:cs typeface="Noto Sans KR" pitchFamily="34" charset="-120"/>
-              </a:rPr>
-              <a:t>MLP 아키텍처</a:t>
-            </a:r>
-            <a:endParaRPr lang="en-US" sz="1500" dirty="0"/>
-          </a:p>
-        </p:txBody>
-      </p:sp>
-      <p:sp>
-        <p:nvSpPr>
-          <p:cNvPr id="27" name="Text 11"/>
-          <p:cNvSpPr/>
-          <p:nvPr/>
-        </p:nvSpPr>
-        <p:spPr>
-          <a:xfrm>
-            <a:off x="6477000" y="5181600"/>
-            <a:ext cx="5257800" cy="266700"/>
-          </a:xfrm>
-          <a:prstGeom prst="rect">
-            <a:avLst/>
-          </a:prstGeom>
-          <a:noFill/>
-          <a:ln/>
-        </p:spPr>
-        <p:txBody>
-          <a:bodyPr vert="horz" wrap="square" lIns="0" tIns="0" rIns="0" bIns="0" rtlCol="0" anchor="t"/>
-          <a:lstStyle/>
-          <a:p>
-            <a:pPr marL="0" indent="0">
-              <a:lnSpc>
-                <a:spcPts val="2100"/>
-              </a:lnSpc>
-              <a:buNone/>
-            </a:pPr>
-            <a:r>
-              <a:rPr lang="en-US" sz="1500" b="1" dirty="0">
-                <a:solidFill>
-                  <a:srgbClr val="1D4ED8"/>
-                </a:solidFill>
-                <a:latin typeface="Noto Sans KR" pitchFamily="34" charset="0"/>
-                <a:ea typeface="Noto Sans KR" pitchFamily="34" charset="-122"/>
-                <a:cs typeface="Noto Sans KR" pitchFamily="34" charset="-120"/>
-              </a:rPr>
-              <a:t>성능 메트릭</a:t>
-            </a:r>
-            <a:endParaRPr lang="en-US" sz="1500" dirty="0"/>
-          </a:p>
-        </p:txBody>
-      </p:sp>
-      <p:sp>
-        <p:nvSpPr>
-          <p:cNvPr id="28" name="Text 12"/>
-          <p:cNvSpPr/>
-          <p:nvPr/>
-        </p:nvSpPr>
-        <p:spPr>
-          <a:xfrm>
-            <a:off x="6591300" y="5676900"/>
-            <a:ext cx="762000" cy="228600"/>
-          </a:xfrm>
-          <a:prstGeom prst="rect">
-            <a:avLst/>
-          </a:prstGeom>
-          <a:noFill/>
-          <a:ln/>
-        </p:spPr>
-        <p:txBody>
-          <a:bodyPr vert="horz" wrap="square" lIns="0" tIns="0" rIns="0" bIns="0" rtlCol="0" anchor="t"/>
-          <a:lstStyle/>
-          <a:p>
-            <a:pPr marL="0" indent="0" algn="ctr">
-              <a:lnSpc>
-                <a:spcPts val="1800"/>
-              </a:lnSpc>
-              <a:buNone/>
-            </a:pPr>
-            <a:r>
-              <a:rPr lang="en-US" sz="1200" b="1" dirty="0">
-                <a:solidFill>
-                  <a:srgbClr val="1E40AF"/>
-                </a:solidFill>
-                <a:latin typeface="Noto Sans KR" pitchFamily="34" charset="0"/>
-                <a:ea typeface="Noto Sans KR" pitchFamily="34" charset="-122"/>
-                <a:cs typeface="Noto Sans KR" pitchFamily="34" charset="-120"/>
-              </a:rPr>
-              <a:t>AUC</a:t>
-            </a:r>
-            <a:endParaRPr lang="en-US" sz="1200" dirty="0"/>
-          </a:p>
-        </p:txBody>
-      </p:sp>
-      <p:sp>
-        <p:nvSpPr>
-          <p:cNvPr id="29" name="Text 13"/>
-          <p:cNvSpPr/>
-          <p:nvPr/>
-        </p:nvSpPr>
-        <p:spPr>
-          <a:xfrm>
-            <a:off x="6515100" y="5905500"/>
-            <a:ext cx="914400" cy="304800"/>
-          </a:xfrm>
-          <a:prstGeom prst="rect">
-            <a:avLst/>
-          </a:prstGeom>
-          <a:noFill/>
-          <a:ln/>
-        </p:spPr>
-        <p:txBody>
-          <a:bodyPr vert="horz" wrap="square" lIns="0" tIns="0" rIns="0" bIns="0" rtlCol="0" anchor="t"/>
-          <a:lstStyle/>
-          <a:p>
-            <a:pPr marL="0" indent="0" algn="ctr">
-              <a:lnSpc>
-                <a:spcPts val="2400"/>
-              </a:lnSpc>
-              <a:buNone/>
-            </a:pPr>
-            <a:r>
-              <a:rPr lang="en-US" sz="1800" b="1" dirty="0">
-                <a:solidFill>
-                  <a:srgbClr val="2563EB"/>
-                </a:solidFill>
-                <a:latin typeface="Noto Sans KR" pitchFamily="34" charset="0"/>
-                <a:ea typeface="Noto Sans KR" pitchFamily="34" charset="-122"/>
-                <a:cs typeface="Noto Sans KR" pitchFamily="34" charset="-120"/>
-              </a:rPr>
-              <a:t>0.9528</a:t>
-            </a:r>
-            <a:endParaRPr lang="en-US" sz="1800" dirty="0"/>
-          </a:p>
-        </p:txBody>
-      </p:sp>
-      <p:sp>
-        <p:nvSpPr>
-          <p:cNvPr id="30" name="Text 14"/>
-          <p:cNvSpPr/>
-          <p:nvPr/>
-        </p:nvSpPr>
-        <p:spPr>
-          <a:xfrm>
-            <a:off x="7658100" y="5676900"/>
-            <a:ext cx="762000" cy="228600"/>
-          </a:xfrm>
-          <a:prstGeom prst="rect">
-            <a:avLst/>
-          </a:prstGeom>
-          <a:noFill/>
-          <a:ln/>
-        </p:spPr>
-        <p:txBody>
-          <a:bodyPr vert="horz" wrap="square" lIns="0" tIns="0" rIns="0" bIns="0" rtlCol="0" anchor="t"/>
-          <a:lstStyle/>
-          <a:p>
-            <a:pPr marL="0" indent="0" algn="ctr">
-              <a:lnSpc>
-                <a:spcPts val="1800"/>
-              </a:lnSpc>
-              <a:buNone/>
-            </a:pPr>
-            <a:r>
-              <a:rPr lang="en-US" sz="1200" b="1" dirty="0">
-                <a:solidFill>
-                  <a:srgbClr val="1E40AF"/>
-                </a:solidFill>
-                <a:latin typeface="Noto Sans KR" pitchFamily="34" charset="0"/>
-                <a:ea typeface="Noto Sans KR" pitchFamily="34" charset="-122"/>
-                <a:cs typeface="Noto Sans KR" pitchFamily="34" charset="-120"/>
-              </a:rPr>
-              <a:t>정확도</a:t>
-            </a:r>
-            <a:endParaRPr lang="en-US" sz="1200" dirty="0"/>
-          </a:p>
-        </p:txBody>
-      </p:sp>
-      <p:sp>
-        <p:nvSpPr>
-          <p:cNvPr id="31" name="Text 15"/>
-          <p:cNvSpPr/>
-          <p:nvPr/>
-        </p:nvSpPr>
-        <p:spPr>
-          <a:xfrm>
-            <a:off x="7581900" y="5905500"/>
-            <a:ext cx="914400" cy="304800"/>
-          </a:xfrm>
-          <a:prstGeom prst="rect">
-            <a:avLst/>
-          </a:prstGeom>
-          <a:noFill/>
-          <a:ln/>
-        </p:spPr>
-        <p:txBody>
-          <a:bodyPr vert="horz" wrap="square" lIns="0" tIns="0" rIns="0" bIns="0" rtlCol="0" anchor="t"/>
-          <a:lstStyle/>
-          <a:p>
-            <a:pPr marL="0" indent="0" algn="ctr">
-              <a:lnSpc>
-                <a:spcPts val="2400"/>
-              </a:lnSpc>
-              <a:buNone/>
-            </a:pPr>
-            <a:r>
-              <a:rPr lang="en-US" sz="1800" b="1" dirty="0">
-                <a:solidFill>
-                  <a:srgbClr val="2563EB"/>
-                </a:solidFill>
-                <a:latin typeface="Noto Sans KR" pitchFamily="34" charset="0"/>
-                <a:ea typeface="Noto Sans KR" pitchFamily="34" charset="-122"/>
-                <a:cs typeface="Noto Sans KR" pitchFamily="34" charset="-120"/>
-              </a:rPr>
-              <a:t>0.9992</a:t>
-            </a:r>
-            <a:endParaRPr lang="en-US" sz="1800" dirty="0"/>
-          </a:p>
-        </p:txBody>
-      </p:sp>
-      <p:sp>
-        <p:nvSpPr>
-          <p:cNvPr id="32" name="Text 16"/>
-          <p:cNvSpPr/>
-          <p:nvPr/>
-        </p:nvSpPr>
-        <p:spPr>
-          <a:xfrm>
-            <a:off x="8724900" y="5676900"/>
-            <a:ext cx="762000" cy="228600"/>
-          </a:xfrm>
-          <a:prstGeom prst="rect">
-            <a:avLst/>
-          </a:prstGeom>
-          <a:noFill/>
-          <a:ln/>
-        </p:spPr>
-        <p:txBody>
-          <a:bodyPr vert="horz" wrap="square" lIns="0" tIns="0" rIns="0" bIns="0" rtlCol="0" anchor="t"/>
-          <a:lstStyle/>
-          <a:p>
-            <a:pPr marL="0" indent="0" algn="ctr">
-              <a:lnSpc>
-                <a:spcPts val="1800"/>
-              </a:lnSpc>
-              <a:buNone/>
-            </a:pPr>
-            <a:r>
-              <a:rPr lang="en-US" sz="1200" b="1" dirty="0">
-                <a:solidFill>
-                  <a:srgbClr val="1E40AF"/>
-                </a:solidFill>
-                <a:latin typeface="Noto Sans KR" pitchFamily="34" charset="0"/>
-                <a:ea typeface="Noto Sans KR" pitchFamily="34" charset="-122"/>
-                <a:cs typeface="Noto Sans KR" pitchFamily="34" charset="-120"/>
-              </a:rPr>
-              <a:t>정밀도</a:t>
-            </a:r>
-            <a:endParaRPr lang="en-US" sz="1200" dirty="0"/>
-          </a:p>
-        </p:txBody>
-      </p:sp>
-      <p:sp>
-        <p:nvSpPr>
-          <p:cNvPr id="33" name="Text 17"/>
-          <p:cNvSpPr/>
-          <p:nvPr/>
-        </p:nvSpPr>
-        <p:spPr>
-          <a:xfrm>
-            <a:off x="8648700" y="5905500"/>
-            <a:ext cx="914400" cy="304800"/>
-          </a:xfrm>
-          <a:prstGeom prst="rect">
-            <a:avLst/>
-          </a:prstGeom>
-          <a:noFill/>
-          <a:ln/>
-        </p:spPr>
-        <p:txBody>
-          <a:bodyPr vert="horz" wrap="square" lIns="0" tIns="0" rIns="0" bIns="0" rtlCol="0" anchor="t"/>
-          <a:lstStyle/>
-          <a:p>
-            <a:pPr marL="0" indent="0" algn="ctr">
-              <a:lnSpc>
-                <a:spcPts val="2400"/>
-              </a:lnSpc>
-              <a:buNone/>
-            </a:pPr>
-            <a:r>
-              <a:rPr lang="en-US" sz="1800" b="1" dirty="0">
-                <a:solidFill>
-                  <a:srgbClr val="2563EB"/>
-                </a:solidFill>
-                <a:latin typeface="Noto Sans KR" pitchFamily="34" charset="0"/>
-                <a:ea typeface="Noto Sans KR" pitchFamily="34" charset="-122"/>
-                <a:cs typeface="Noto Sans KR" pitchFamily="34" charset="-120"/>
-              </a:rPr>
-              <a:t>0.8514</a:t>
-            </a:r>
-            <a:endParaRPr lang="en-US" sz="1800" dirty="0"/>
-          </a:p>
-        </p:txBody>
-      </p:sp>
-      <p:sp>
-        <p:nvSpPr>
-          <p:cNvPr id="34" name="Text 18"/>
-          <p:cNvSpPr/>
-          <p:nvPr/>
-        </p:nvSpPr>
-        <p:spPr>
-          <a:xfrm>
-            <a:off x="9791700" y="5676900"/>
-            <a:ext cx="762000" cy="228600"/>
-          </a:xfrm>
-          <a:prstGeom prst="rect">
-            <a:avLst/>
-          </a:prstGeom>
-          <a:noFill/>
-          <a:ln/>
-        </p:spPr>
-        <p:txBody>
-          <a:bodyPr vert="horz" wrap="square" lIns="0" tIns="0" rIns="0" bIns="0" rtlCol="0" anchor="t"/>
-          <a:lstStyle/>
-          <a:p>
-            <a:pPr marL="0" indent="0" algn="ctr">
-              <a:lnSpc>
-                <a:spcPts val="1800"/>
-              </a:lnSpc>
-              <a:buNone/>
-            </a:pPr>
-            <a:r>
-              <a:rPr lang="en-US" sz="1200" b="1" dirty="0">
-                <a:solidFill>
-                  <a:srgbClr val="1E40AF"/>
-                </a:solidFill>
-                <a:latin typeface="Noto Sans KR" pitchFamily="34" charset="0"/>
-                <a:ea typeface="Noto Sans KR" pitchFamily="34" charset="-122"/>
-                <a:cs typeface="Noto Sans KR" pitchFamily="34" charset="-120"/>
-              </a:rPr>
-              <a:t>재현율</a:t>
-            </a:r>
-            <a:endParaRPr lang="en-US" sz="1200" dirty="0"/>
-          </a:p>
-        </p:txBody>
-      </p:sp>
-      <p:sp>
-        <p:nvSpPr>
-          <p:cNvPr id="35" name="Text 19"/>
-          <p:cNvSpPr/>
-          <p:nvPr/>
-        </p:nvSpPr>
-        <p:spPr>
-          <a:xfrm>
-            <a:off x="9715500" y="5905500"/>
-            <a:ext cx="914400" cy="304800"/>
-          </a:xfrm>
-          <a:prstGeom prst="rect">
-            <a:avLst/>
-          </a:prstGeom>
-          <a:noFill/>
-          <a:ln/>
-        </p:spPr>
-        <p:txBody>
-          <a:bodyPr vert="horz" wrap="square" lIns="0" tIns="0" rIns="0" bIns="0" rtlCol="0" anchor="t"/>
-          <a:lstStyle/>
-          <a:p>
-            <a:pPr marL="0" indent="0" algn="ctr">
-              <a:lnSpc>
-                <a:spcPts val="2400"/>
-              </a:lnSpc>
-              <a:buNone/>
-            </a:pPr>
-            <a:r>
-              <a:rPr lang="en-US" sz="1800" b="1" dirty="0">
-                <a:solidFill>
-                  <a:srgbClr val="2563EB"/>
-                </a:solidFill>
-                <a:latin typeface="Noto Sans KR" pitchFamily="34" charset="0"/>
-                <a:ea typeface="Noto Sans KR" pitchFamily="34" charset="-122"/>
-                <a:cs typeface="Noto Sans KR" pitchFamily="34" charset="-120"/>
-              </a:rPr>
-              <a:t>0.6429</a:t>
-            </a:r>
-            <a:endParaRPr lang="en-US" sz="1800" dirty="0"/>
-          </a:p>
-        </p:txBody>
-      </p:sp>
-      <p:sp>
-        <p:nvSpPr>
-          <p:cNvPr id="36" name="Text 20"/>
-          <p:cNvSpPr/>
-          <p:nvPr/>
-        </p:nvSpPr>
-        <p:spPr>
-          <a:xfrm>
-            <a:off x="10782300" y="5676900"/>
-            <a:ext cx="914400" cy="228600"/>
-          </a:xfrm>
-          <a:prstGeom prst="rect">
-            <a:avLst/>
-          </a:prstGeom>
-          <a:noFill/>
-          <a:ln/>
-        </p:spPr>
-        <p:txBody>
-          <a:bodyPr vert="horz" wrap="square" lIns="0" tIns="0" rIns="0" bIns="0" rtlCol="0" anchor="t"/>
-          <a:lstStyle/>
-          <a:p>
-            <a:pPr marL="0" indent="0" algn="ctr">
-              <a:lnSpc>
-                <a:spcPts val="1800"/>
-              </a:lnSpc>
-              <a:buNone/>
-            </a:pPr>
-            <a:r>
-              <a:rPr lang="en-US" sz="1200" b="1" dirty="0">
-                <a:solidFill>
-                  <a:srgbClr val="1E40AF"/>
-                </a:solidFill>
-                <a:latin typeface="Noto Sans KR" pitchFamily="34" charset="0"/>
-                <a:ea typeface="Noto Sans KR" pitchFamily="34" charset="-122"/>
-                <a:cs typeface="Noto Sans KR" pitchFamily="34" charset="-120"/>
-              </a:rPr>
-              <a:t>F1-score</a:t>
-            </a:r>
-            <a:endParaRPr lang="en-US" sz="1200" dirty="0"/>
-          </a:p>
-        </p:txBody>
-      </p:sp>
-      <p:sp>
-        <p:nvSpPr>
-          <p:cNvPr id="37" name="Text 21"/>
-          <p:cNvSpPr/>
-          <p:nvPr/>
-        </p:nvSpPr>
-        <p:spPr>
-          <a:xfrm>
-            <a:off x="10782300" y="5905500"/>
-            <a:ext cx="914400" cy="304800"/>
-          </a:xfrm>
-          <a:prstGeom prst="rect">
-            <a:avLst/>
-          </a:prstGeom>
-          <a:noFill/>
-          <a:ln/>
-        </p:spPr>
-        <p:txBody>
-          <a:bodyPr vert="horz" wrap="square" lIns="0" tIns="0" rIns="0" bIns="0" rtlCol="0" anchor="t"/>
-          <a:lstStyle/>
-          <a:p>
-            <a:pPr marL="0" indent="0" algn="ctr">
-              <a:lnSpc>
-                <a:spcPts val="2400"/>
-              </a:lnSpc>
-              <a:buNone/>
-            </a:pPr>
-            <a:r>
-              <a:rPr lang="en-US" sz="1800" b="1" dirty="0">
-                <a:solidFill>
-                  <a:srgbClr val="2563EB"/>
-                </a:solidFill>
-                <a:latin typeface="Noto Sans KR" pitchFamily="34" charset="0"/>
-                <a:ea typeface="Noto Sans KR" pitchFamily="34" charset="-122"/>
-                <a:cs typeface="Noto Sans KR" pitchFamily="34" charset="-120"/>
-              </a:rPr>
-              <a:t>0.7326</a:t>
-            </a:r>
-            <a:endParaRPr lang="en-US" sz="1800" dirty="0"/>
-          </a:p>
-        </p:txBody>
-      </p:sp>
-    </p:spTree>
-  </p:cSld>
-  <p:clrMapOvr>
-    <a:masterClrMapping/>
-  </p:clrMapOvr>
-</p:sld>
-</file>
-
-<file path=ppt/slides/slide14.xml><?xml version="1.0" encoding="utf-8"?>
 <p:sld xmlns:a="http://schemas.openxmlformats.org/drawingml/2006/main" xmlns:r="http://schemas.openxmlformats.org/officeDocument/2006/relationships" xmlns:p="http://schemas.openxmlformats.org/presentationml/2006/main">
   <p:cSld name="Slide 12">
     <p:spTree>
@@ -17721,6 +16541,949 @@
         </p:txBody>
       </p:sp>
     </p:spTree>
+  </p:cSld>
+  <p:clrMapOvr>
+    <a:masterClrMapping/>
+  </p:clrMapOvr>
+</p:sld>
+</file>
+
+<file path=ppt/slides/slide14.xml><?xml version="1.0" encoding="utf-8"?>
+<p:sld xmlns:a="http://schemas.openxmlformats.org/drawingml/2006/main" xmlns:r="http://schemas.openxmlformats.org/officeDocument/2006/relationships" xmlns:p="http://schemas.openxmlformats.org/presentationml/2006/main">
+  <p:cSld>
+    <p:spTree>
+      <p:nvGrpSpPr>
+        <p:cNvPr id="1" name="">
+          <a:extLst>
+            <a:ext uri="{FF2B5EF4-FFF2-40B4-BE49-F238E27FC236}">
+              <a16:creationId xmlns:a16="http://schemas.microsoft.com/office/drawing/2014/main" id="{960A5517-D784-2056-0606-266E47B1AE1B}"/>
+            </a:ext>
+          </a:extLst>
+        </p:cNvPr>
+        <p:cNvGrpSpPr/>
+        <p:nvPr/>
+      </p:nvGrpSpPr>
+      <p:grpSpPr>
+        <a:xfrm>
+          <a:off x="0" y="0"/>
+          <a:ext cx="0" cy="0"/>
+          <a:chOff x="0" y="0"/>
+          <a:chExt cx="0" cy="0"/>
+        </a:xfrm>
+      </p:grpSpPr>
+      <p:pic>
+        <p:nvPicPr>
+          <p:cNvPr id="2" name="Image 0" descr="preencoded.png">
+            <a:extLst>
+              <a:ext uri="{FF2B5EF4-FFF2-40B4-BE49-F238E27FC236}">
+                <a16:creationId xmlns:a16="http://schemas.microsoft.com/office/drawing/2014/main" id="{944E522C-D13A-7F00-31D1-F99882BB02D8}"/>
+              </a:ext>
+            </a:extLst>
+          </p:cNvPr>
+          <p:cNvPicPr>
+            <a:picLocks noChangeAspect="1"/>
+          </p:cNvPicPr>
+          <p:nvPr/>
+        </p:nvPicPr>
+        <p:blipFill>
+          <a:blip r:embed="rId3"/>
+          <a:stretch>
+            <a:fillRect/>
+          </a:stretch>
+        </p:blipFill>
+        <p:spPr>
+          <a:xfrm>
+            <a:off x="0" y="0"/>
+            <a:ext cx="12192000" cy="6858000"/>
+          </a:xfrm>
+          <a:prstGeom prst="rect">
+            <a:avLst/>
+          </a:prstGeom>
+        </p:spPr>
+      </p:pic>
+      <p:pic>
+        <p:nvPicPr>
+          <p:cNvPr id="3" name="Image 1" descr="preencoded.png">
+            <a:extLst>
+              <a:ext uri="{FF2B5EF4-FFF2-40B4-BE49-F238E27FC236}">
+                <a16:creationId xmlns:a16="http://schemas.microsoft.com/office/drawing/2014/main" id="{CC5B553B-0193-656A-2C0B-2C6B71005C4F}"/>
+              </a:ext>
+            </a:extLst>
+          </p:cNvPr>
+          <p:cNvPicPr>
+            <a:picLocks noChangeAspect="1"/>
+          </p:cNvPicPr>
+          <p:nvPr/>
+        </p:nvPicPr>
+        <p:blipFill>
+          <a:blip r:embed="rId4"/>
+          <a:stretch>
+            <a:fillRect/>
+          </a:stretch>
+        </p:blipFill>
+        <p:spPr>
+          <a:xfrm>
+            <a:off x="0" y="0"/>
+            <a:ext cx="12192000" cy="762000"/>
+          </a:xfrm>
+          <a:prstGeom prst="rect">
+            <a:avLst/>
+          </a:prstGeom>
+        </p:spPr>
+      </p:pic>
+      <p:pic>
+        <p:nvPicPr>
+          <p:cNvPr id="4" name="Image 2" descr="preencoded.png">
+            <a:extLst>
+              <a:ext uri="{FF2B5EF4-FFF2-40B4-BE49-F238E27FC236}">
+                <a16:creationId xmlns:a16="http://schemas.microsoft.com/office/drawing/2014/main" id="{2E58CFB5-D3AA-3B9B-AFA0-D0812BADEE41}"/>
+              </a:ext>
+            </a:extLst>
+          </p:cNvPr>
+          <p:cNvPicPr>
+            <a:picLocks noChangeAspect="1"/>
+          </p:cNvPicPr>
+          <p:nvPr/>
+        </p:nvPicPr>
+        <p:blipFill>
+          <a:blip r:embed="rId5"/>
+          <a:stretch>
+            <a:fillRect/>
+          </a:stretch>
+        </p:blipFill>
+        <p:spPr>
+          <a:xfrm>
+            <a:off x="228600" y="990600"/>
+            <a:ext cx="11734800" cy="1112044"/>
+          </a:xfrm>
+          <a:prstGeom prst="rect">
+            <a:avLst/>
+          </a:prstGeom>
+        </p:spPr>
+      </p:pic>
+      <p:pic>
+        <p:nvPicPr>
+          <p:cNvPr id="33" name="Image 31" descr="preencoded.png">
+            <a:extLst>
+              <a:ext uri="{FF2B5EF4-FFF2-40B4-BE49-F238E27FC236}">
+                <a16:creationId xmlns:a16="http://schemas.microsoft.com/office/drawing/2014/main" id="{9EDEBDE1-B75B-84F1-A747-92CC45BD6305}"/>
+              </a:ext>
+            </a:extLst>
+          </p:cNvPr>
+          <p:cNvPicPr>
+            <a:picLocks noChangeAspect="1"/>
+          </p:cNvPicPr>
+          <p:nvPr/>
+        </p:nvPicPr>
+        <p:blipFill>
+          <a:blip r:embed="rId6"/>
+          <a:stretch>
+            <a:fillRect/>
+          </a:stretch>
+        </p:blipFill>
+        <p:spPr>
+          <a:xfrm>
+            <a:off x="219044" y="2260777"/>
+            <a:ext cx="5684306" cy="1416488"/>
+          </a:xfrm>
+          <a:prstGeom prst="rect">
+            <a:avLst/>
+          </a:prstGeom>
+        </p:spPr>
+      </p:pic>
+      <p:pic>
+        <p:nvPicPr>
+          <p:cNvPr id="35" name="Image 33" descr="preencoded.png">
+            <a:extLst>
+              <a:ext uri="{FF2B5EF4-FFF2-40B4-BE49-F238E27FC236}">
+                <a16:creationId xmlns:a16="http://schemas.microsoft.com/office/drawing/2014/main" id="{5F509434-309A-26DC-F976-E2F8E2CD6B67}"/>
+              </a:ext>
+            </a:extLst>
+          </p:cNvPr>
+          <p:cNvPicPr>
+            <a:picLocks noChangeAspect="1"/>
+          </p:cNvPicPr>
+          <p:nvPr/>
+        </p:nvPicPr>
+        <p:blipFill>
+          <a:blip r:embed="rId7"/>
+          <a:stretch>
+            <a:fillRect/>
+          </a:stretch>
+        </p:blipFill>
+        <p:spPr>
+          <a:xfrm>
+            <a:off x="0" y="6781800"/>
+            <a:ext cx="12192000" cy="76200"/>
+          </a:xfrm>
+          <a:prstGeom prst="rect">
+            <a:avLst/>
+          </a:prstGeom>
+        </p:spPr>
+      </p:pic>
+      <p:sp>
+        <p:nvSpPr>
+          <p:cNvPr id="36" name="Text 0">
+            <a:extLst>
+              <a:ext uri="{FF2B5EF4-FFF2-40B4-BE49-F238E27FC236}">
+                <a16:creationId xmlns:a16="http://schemas.microsoft.com/office/drawing/2014/main" id="{0D70C464-8337-3FBA-177C-A13D7CE96485}"/>
+              </a:ext>
+            </a:extLst>
+          </p:cNvPr>
+          <p:cNvSpPr/>
+          <p:nvPr/>
+        </p:nvSpPr>
+        <p:spPr>
+          <a:xfrm>
+            <a:off x="381000" y="209550"/>
+            <a:ext cx="2423160" cy="342900"/>
+          </a:xfrm>
+          <a:prstGeom prst="rect">
+            <a:avLst/>
+          </a:prstGeom>
+          <a:noFill/>
+          <a:ln/>
+        </p:spPr>
+        <p:txBody>
+          <a:bodyPr vert="horz" wrap="square" lIns="0" tIns="0" rIns="0" bIns="0" rtlCol="0" anchor="t"/>
+          <a:lstStyle/>
+          <a:p>
+            <a:pPr marL="0" indent="0">
+              <a:lnSpc>
+                <a:spcPts val="2700"/>
+              </a:lnSpc>
+              <a:buNone/>
+            </a:pPr>
+            <a:r>
+              <a:rPr lang="ko-KR" altLang="en-US" sz="2250" b="1" dirty="0">
+                <a:solidFill>
+                  <a:srgbClr val="FFFFFF"/>
+                </a:solidFill>
+                <a:latin typeface="Noto Sans KR" pitchFamily="34" charset="0"/>
+                <a:ea typeface="Noto Sans KR" pitchFamily="34" charset="-122"/>
+              </a:rPr>
+              <a:t>모델 평가 및 해석</a:t>
+            </a:r>
+            <a:endParaRPr lang="en-US" sz="2250" dirty="0"/>
+          </a:p>
+        </p:txBody>
+      </p:sp>
+      <p:sp>
+        <p:nvSpPr>
+          <p:cNvPr id="37" name="Text 1">
+            <a:extLst>
+              <a:ext uri="{FF2B5EF4-FFF2-40B4-BE49-F238E27FC236}">
+                <a16:creationId xmlns:a16="http://schemas.microsoft.com/office/drawing/2014/main" id="{10A1863D-4E99-6E85-87EA-B0F2660A94FE}"/>
+              </a:ext>
+            </a:extLst>
+          </p:cNvPr>
+          <p:cNvSpPr/>
+          <p:nvPr/>
+        </p:nvSpPr>
+        <p:spPr>
+          <a:xfrm>
+            <a:off x="11315700" y="247650"/>
+            <a:ext cx="594360" cy="266700"/>
+          </a:xfrm>
+          <a:prstGeom prst="rect">
+            <a:avLst/>
+          </a:prstGeom>
+          <a:noFill/>
+          <a:ln/>
+        </p:spPr>
+        <p:txBody>
+          <a:bodyPr vert="horz" wrap="square" lIns="0" tIns="0" rIns="0" bIns="0" rtlCol="0" anchor="t"/>
+          <a:lstStyle/>
+          <a:p>
+            <a:pPr marL="0" indent="0">
+              <a:lnSpc>
+                <a:spcPts val="2100"/>
+              </a:lnSpc>
+              <a:buNone/>
+            </a:pPr>
+            <a:r>
+              <a:rPr lang="en-US" sz="1500" dirty="0">
+                <a:solidFill>
+                  <a:srgbClr val="FFFFFF"/>
+                </a:solidFill>
+                <a:latin typeface="Noto Sans KR" pitchFamily="34" charset="0"/>
+                <a:ea typeface="Noto Sans KR" pitchFamily="34" charset="-122"/>
+                <a:cs typeface="Noto Sans KR" pitchFamily="34" charset="-120"/>
+              </a:rPr>
+              <a:t>11/20</a:t>
+            </a:r>
+            <a:endParaRPr lang="en-US" sz="1500" dirty="0"/>
+          </a:p>
+        </p:txBody>
+      </p:sp>
+      <p:sp>
+        <p:nvSpPr>
+          <p:cNvPr id="38" name="Text 2">
+            <a:extLst>
+              <a:ext uri="{FF2B5EF4-FFF2-40B4-BE49-F238E27FC236}">
+                <a16:creationId xmlns:a16="http://schemas.microsoft.com/office/drawing/2014/main" id="{72B0D255-CEF4-4F2F-D9F5-E3A6A24DF851}"/>
+              </a:ext>
+            </a:extLst>
+          </p:cNvPr>
+          <p:cNvSpPr/>
+          <p:nvPr/>
+        </p:nvSpPr>
+        <p:spPr>
+          <a:xfrm>
+            <a:off x="819150" y="1143000"/>
+            <a:ext cx="6781800" cy="266700"/>
+          </a:xfrm>
+          <a:prstGeom prst="rect">
+            <a:avLst/>
+          </a:prstGeom>
+          <a:noFill/>
+          <a:ln/>
+        </p:spPr>
+        <p:txBody>
+          <a:bodyPr vert="horz" wrap="square" lIns="0" tIns="0" rIns="0" bIns="0" rtlCol="0" anchor="t"/>
+          <a:lstStyle/>
+          <a:p>
+            <a:pPr marL="0" indent="0">
+              <a:lnSpc>
+                <a:spcPts val="2100"/>
+              </a:lnSpc>
+              <a:buNone/>
+            </a:pPr>
+            <a:r>
+              <a:rPr lang="ko-KR" altLang="en-US" sz="1500" b="1" dirty="0">
+                <a:solidFill>
+                  <a:srgbClr val="1E40AF"/>
+                </a:solidFill>
+                <a:latin typeface="Noto Sans KR" pitchFamily="34" charset="0"/>
+                <a:ea typeface="Noto Sans KR" pitchFamily="34" charset="-122"/>
+                <a:cs typeface="Noto Sans KR" pitchFamily="34" charset="-120"/>
+              </a:rPr>
+              <a:t>최종 평가 지표 분석</a:t>
+            </a:r>
+            <a:endParaRPr lang="en-US" sz="1500" dirty="0"/>
+          </a:p>
+        </p:txBody>
+      </p:sp>
+      <p:sp>
+        <p:nvSpPr>
+          <p:cNvPr id="39" name="Text 3">
+            <a:extLst>
+              <a:ext uri="{FF2B5EF4-FFF2-40B4-BE49-F238E27FC236}">
+                <a16:creationId xmlns:a16="http://schemas.microsoft.com/office/drawing/2014/main" id="{DFB41CD7-96EB-5DA7-69C4-CBFDD4B5EA43}"/>
+              </a:ext>
+            </a:extLst>
+          </p:cNvPr>
+          <p:cNvSpPr/>
+          <p:nvPr/>
+        </p:nvSpPr>
+        <p:spPr>
+          <a:xfrm>
+            <a:off x="819150" y="1467118"/>
+            <a:ext cx="10333954" cy="440634"/>
+          </a:xfrm>
+          <a:prstGeom prst="rect">
+            <a:avLst/>
+          </a:prstGeom>
+          <a:noFill/>
+          <a:ln/>
+        </p:spPr>
+        <p:txBody>
+          <a:bodyPr vert="horz" wrap="square" lIns="0" tIns="0" rIns="0" bIns="0" rtlCol="0" anchor="t"/>
+          <a:lstStyle/>
+          <a:p>
+            <a:pPr>
+              <a:lnSpc>
+                <a:spcPts val="1800"/>
+              </a:lnSpc>
+            </a:pPr>
+            <a:r>
+              <a:rPr lang="ko-KR" altLang="en-US" sz="1200" dirty="0">
+                <a:solidFill>
+                  <a:srgbClr val="374151"/>
+                </a:solidFill>
+                <a:latin typeface="Noto Sans KR" pitchFamily="34" charset="0"/>
+                <a:ea typeface="Noto Sans KR" pitchFamily="34" charset="-122"/>
+                <a:cs typeface="Noto Sans KR" pitchFamily="34" charset="-120"/>
+              </a:rPr>
+              <a:t>신용카드 사기 거래 탐지 모델을 다각도로 평가하고</a:t>
+            </a:r>
+            <a:r>
+              <a:rPr lang="en-US" altLang="ko-KR" sz="1200" dirty="0">
+                <a:solidFill>
+                  <a:srgbClr val="374151"/>
+                </a:solidFill>
+                <a:latin typeface="Noto Sans KR" pitchFamily="34" charset="0"/>
+                <a:ea typeface="Noto Sans KR" pitchFamily="34" charset="-122"/>
+                <a:cs typeface="Noto Sans KR" pitchFamily="34" charset="-120"/>
+              </a:rPr>
+              <a:t>, </a:t>
+            </a:r>
+            <a:r>
+              <a:rPr lang="ko-KR" altLang="en-US" sz="1200" dirty="0">
+                <a:solidFill>
+                  <a:srgbClr val="374151"/>
+                </a:solidFill>
+                <a:latin typeface="Noto Sans KR" pitchFamily="34" charset="0"/>
+                <a:ea typeface="Noto Sans KR" pitchFamily="34" charset="-122"/>
+                <a:cs typeface="Noto Sans KR" pitchFamily="34" charset="-120"/>
+              </a:rPr>
+              <a:t>최종 선정 모델을 해석했습니다</a:t>
+            </a:r>
+            <a:r>
+              <a:rPr lang="en-US" altLang="ko-KR" sz="1200" dirty="0">
+                <a:solidFill>
+                  <a:srgbClr val="374151"/>
+                </a:solidFill>
+                <a:latin typeface="Noto Sans KR" pitchFamily="34" charset="0"/>
+                <a:ea typeface="Noto Sans KR" pitchFamily="34" charset="-122"/>
+                <a:cs typeface="Noto Sans KR" pitchFamily="34" charset="-120"/>
+              </a:rPr>
+              <a:t>.</a:t>
+            </a:r>
+          </a:p>
+          <a:p>
+            <a:pPr>
+              <a:lnSpc>
+                <a:spcPts val="1800"/>
+              </a:lnSpc>
+            </a:pPr>
+            <a:r>
+              <a:rPr lang="en-US" altLang="ko-KR" sz="1200" dirty="0">
+                <a:solidFill>
+                  <a:srgbClr val="374151"/>
+                </a:solidFill>
+                <a:latin typeface="Noto Sans KR" pitchFamily="34" charset="0"/>
+                <a:ea typeface="Noto Sans KR" pitchFamily="34" charset="-122"/>
+                <a:cs typeface="Noto Sans KR" pitchFamily="34" charset="-120"/>
+              </a:rPr>
+              <a:t>SMOTE </a:t>
+            </a:r>
+            <a:r>
+              <a:rPr lang="ko-KR" altLang="en-US" sz="1200" dirty="0">
+                <a:solidFill>
+                  <a:srgbClr val="374151"/>
+                </a:solidFill>
+                <a:latin typeface="Noto Sans KR" pitchFamily="34" charset="0"/>
+                <a:ea typeface="Noto Sans KR" pitchFamily="34" charset="-122"/>
+                <a:cs typeface="Noto Sans KR" pitchFamily="34" charset="-120"/>
+              </a:rPr>
+              <a:t>기반 </a:t>
+            </a:r>
+            <a:r>
+              <a:rPr lang="en-US" altLang="ko-KR" sz="1200" dirty="0">
+                <a:solidFill>
+                  <a:srgbClr val="374151"/>
+                </a:solidFill>
+                <a:latin typeface="Noto Sans KR" pitchFamily="34" charset="0"/>
+                <a:ea typeface="Noto Sans KR" pitchFamily="34" charset="-122"/>
+                <a:cs typeface="Noto Sans KR" pitchFamily="34" charset="-120"/>
+              </a:rPr>
+              <a:t>Over-sampling </a:t>
+            </a:r>
+            <a:r>
+              <a:rPr lang="ko-KR" altLang="en-US" sz="1200" dirty="0">
+                <a:solidFill>
+                  <a:srgbClr val="374151"/>
+                </a:solidFill>
+                <a:latin typeface="Noto Sans KR" pitchFamily="34" charset="0"/>
+                <a:ea typeface="Noto Sans KR" pitchFamily="34" charset="-122"/>
+                <a:cs typeface="Noto Sans KR" pitchFamily="34" charset="-120"/>
+              </a:rPr>
+              <a:t>전략을 적용해 약 </a:t>
+            </a:r>
+            <a:r>
+              <a:rPr lang="en-US" altLang="ko-KR" sz="1200" dirty="0">
+                <a:solidFill>
+                  <a:srgbClr val="374151"/>
+                </a:solidFill>
+                <a:latin typeface="Noto Sans KR" pitchFamily="34" charset="0"/>
+                <a:ea typeface="Noto Sans KR" pitchFamily="34" charset="-122"/>
+                <a:cs typeface="Noto Sans KR" pitchFamily="34" charset="-120"/>
+              </a:rPr>
+              <a:t>200</a:t>
+            </a:r>
+            <a:r>
+              <a:rPr lang="ko-KR" altLang="en-US" sz="1200" dirty="0">
+                <a:solidFill>
+                  <a:srgbClr val="374151"/>
+                </a:solidFill>
+                <a:latin typeface="Noto Sans KR" pitchFamily="34" charset="0"/>
+                <a:ea typeface="Noto Sans KR" pitchFamily="34" charset="-122"/>
+                <a:cs typeface="Noto Sans KR" pitchFamily="34" charset="-120"/>
+              </a:rPr>
+              <a:t>회 실험을 진행했고</a:t>
+            </a:r>
+            <a:r>
+              <a:rPr lang="en-US" altLang="ko-KR" sz="1200" dirty="0">
+                <a:solidFill>
+                  <a:srgbClr val="374151"/>
+                </a:solidFill>
+                <a:latin typeface="Noto Sans KR" pitchFamily="34" charset="0"/>
+                <a:ea typeface="Noto Sans KR" pitchFamily="34" charset="-122"/>
+                <a:cs typeface="Noto Sans KR" pitchFamily="34" charset="-120"/>
+              </a:rPr>
+              <a:t>, F1 </a:t>
+            </a:r>
+            <a:r>
+              <a:rPr lang="ko-KR" altLang="en-US" sz="1200" dirty="0">
+                <a:solidFill>
+                  <a:srgbClr val="374151"/>
+                </a:solidFill>
+                <a:latin typeface="Noto Sans KR" pitchFamily="34" charset="0"/>
+                <a:ea typeface="Noto Sans KR" pitchFamily="34" charset="-122"/>
+                <a:cs typeface="Noto Sans KR" pitchFamily="34" charset="-120"/>
+              </a:rPr>
+              <a:t>상위 </a:t>
+            </a:r>
+            <a:r>
+              <a:rPr lang="en-US" altLang="ko-KR" sz="1200" dirty="0">
+                <a:solidFill>
+                  <a:srgbClr val="374151"/>
+                </a:solidFill>
+                <a:latin typeface="Noto Sans KR" pitchFamily="34" charset="0"/>
+                <a:ea typeface="Noto Sans KR" pitchFamily="34" charset="-122"/>
+                <a:cs typeface="Noto Sans KR" pitchFamily="34" charset="-120"/>
+              </a:rPr>
+              <a:t>10</a:t>
+            </a:r>
+            <a:r>
+              <a:rPr lang="ko-KR" altLang="en-US" sz="1200" dirty="0">
+                <a:solidFill>
+                  <a:srgbClr val="374151"/>
+                </a:solidFill>
+                <a:latin typeface="Noto Sans KR" pitchFamily="34" charset="0"/>
+                <a:ea typeface="Noto Sans KR" pitchFamily="34" charset="-122"/>
+                <a:cs typeface="Noto Sans KR" pitchFamily="34" charset="-120"/>
+              </a:rPr>
+              <a:t>개를 선별해 평가했습니다</a:t>
+            </a:r>
+            <a:r>
+              <a:rPr lang="en-US" altLang="ko-KR" sz="1200" dirty="0">
+                <a:solidFill>
+                  <a:srgbClr val="374151"/>
+                </a:solidFill>
+                <a:latin typeface="Noto Sans KR" pitchFamily="34" charset="0"/>
+                <a:ea typeface="Noto Sans KR" pitchFamily="34" charset="-122"/>
+                <a:cs typeface="Noto Sans KR" pitchFamily="34" charset="-120"/>
+              </a:rPr>
+              <a:t>.</a:t>
+            </a:r>
+            <a:endParaRPr lang="en-US" sz="1200" dirty="0"/>
+          </a:p>
+        </p:txBody>
+      </p:sp>
+      <p:sp>
+        <p:nvSpPr>
+          <p:cNvPr id="67" name="Text 31">
+            <a:extLst>
+              <a:ext uri="{FF2B5EF4-FFF2-40B4-BE49-F238E27FC236}">
+                <a16:creationId xmlns:a16="http://schemas.microsoft.com/office/drawing/2014/main" id="{9A819A50-F5D3-2DCA-0BEC-3EBF92C9EFFF}"/>
+              </a:ext>
+            </a:extLst>
+          </p:cNvPr>
+          <p:cNvSpPr/>
+          <p:nvPr/>
+        </p:nvSpPr>
+        <p:spPr>
+          <a:xfrm>
+            <a:off x="485744" y="3018365"/>
+            <a:ext cx="4704442" cy="175246"/>
+          </a:xfrm>
+          <a:prstGeom prst="rect">
+            <a:avLst/>
+          </a:prstGeom>
+          <a:noFill/>
+          <a:ln/>
+        </p:spPr>
+        <p:txBody>
+          <a:bodyPr vert="horz" wrap="square" lIns="0" tIns="0" rIns="0" bIns="0" rtlCol="0" anchor="t"/>
+          <a:lstStyle/>
+          <a:p>
+            <a:pPr marL="342900" indent="-342900">
+              <a:lnSpc>
+                <a:spcPts val="1800"/>
+              </a:lnSpc>
+              <a:buSzPct val="100000"/>
+              <a:buChar char="•"/>
+            </a:pPr>
+            <a:r>
+              <a:rPr lang="ko-KR" altLang="en-US" sz="1200" dirty="0">
+                <a:solidFill>
+                  <a:srgbClr val="374151"/>
+                </a:solidFill>
+                <a:latin typeface="Noto Sans KR" pitchFamily="34" charset="0"/>
+                <a:ea typeface="Noto Sans KR" pitchFamily="34" charset="-122"/>
+                <a:cs typeface="Noto Sans KR" pitchFamily="34" charset="-120"/>
+              </a:rPr>
+              <a:t>하위 모델의 </a:t>
+            </a:r>
+            <a:r>
+              <a:rPr lang="en-US" altLang="ko-KR" sz="1200" dirty="0">
+                <a:solidFill>
+                  <a:srgbClr val="374151"/>
+                </a:solidFill>
+                <a:latin typeface="Noto Sans KR" pitchFamily="34" charset="0"/>
+                <a:ea typeface="Noto Sans KR" pitchFamily="34" charset="-122"/>
+                <a:cs typeface="Noto Sans KR" pitchFamily="34" charset="-120"/>
+              </a:rPr>
+              <a:t>F1 </a:t>
+            </a:r>
+            <a:r>
+              <a:rPr lang="ko-KR" altLang="en-US" sz="1200" dirty="0">
+                <a:solidFill>
+                  <a:srgbClr val="374151"/>
+                </a:solidFill>
+                <a:latin typeface="Noto Sans KR" pitchFamily="34" charset="0"/>
+                <a:ea typeface="Noto Sans KR" pitchFamily="34" charset="-122"/>
+                <a:cs typeface="Noto Sans KR" pitchFamily="34" charset="-120"/>
+              </a:rPr>
+              <a:t>하락 이유는 주로 </a:t>
+            </a:r>
+            <a:r>
+              <a:rPr lang="ko-KR" altLang="en-US" sz="1200" dirty="0" err="1">
+                <a:solidFill>
+                  <a:srgbClr val="374151"/>
+                </a:solidFill>
+                <a:latin typeface="Noto Sans KR" pitchFamily="34" charset="0"/>
+                <a:ea typeface="Noto Sans KR" pitchFamily="34" charset="-122"/>
+                <a:cs typeface="Noto Sans KR" pitchFamily="34" charset="-120"/>
+              </a:rPr>
+              <a:t>재현율</a:t>
+            </a:r>
+            <a:r>
+              <a:rPr lang="en-US" altLang="ko-KR" sz="1200" dirty="0">
+                <a:solidFill>
+                  <a:srgbClr val="374151"/>
+                </a:solidFill>
+                <a:latin typeface="Noto Sans KR" pitchFamily="34" charset="0"/>
+                <a:ea typeface="Noto Sans KR" pitchFamily="34" charset="-122"/>
+                <a:cs typeface="Noto Sans KR" pitchFamily="34" charset="-120"/>
+              </a:rPr>
+              <a:t>(Recall) </a:t>
+            </a:r>
+            <a:r>
+              <a:rPr lang="ko-KR" altLang="en-US" sz="1200" dirty="0">
+                <a:solidFill>
+                  <a:srgbClr val="374151"/>
+                </a:solidFill>
+                <a:latin typeface="Noto Sans KR" pitchFamily="34" charset="0"/>
+                <a:ea typeface="Noto Sans KR" pitchFamily="34" charset="-122"/>
+                <a:cs typeface="Noto Sans KR" pitchFamily="34" charset="-120"/>
+              </a:rPr>
+              <a:t>저하</a:t>
+            </a:r>
+            <a:endParaRPr lang="en-US" sz="1200" dirty="0"/>
+          </a:p>
+        </p:txBody>
+      </p:sp>
+      <p:sp>
+        <p:nvSpPr>
+          <p:cNvPr id="68" name="Text 32">
+            <a:extLst>
+              <a:ext uri="{FF2B5EF4-FFF2-40B4-BE49-F238E27FC236}">
+                <a16:creationId xmlns:a16="http://schemas.microsoft.com/office/drawing/2014/main" id="{D6D980B7-59D0-6944-3CE8-C3BDFD6FF2CD}"/>
+              </a:ext>
+            </a:extLst>
+          </p:cNvPr>
+          <p:cNvSpPr/>
+          <p:nvPr/>
+        </p:nvSpPr>
+        <p:spPr>
+          <a:xfrm>
+            <a:off x="485744" y="3250381"/>
+            <a:ext cx="5193839" cy="206332"/>
+          </a:xfrm>
+          <a:prstGeom prst="rect">
+            <a:avLst/>
+          </a:prstGeom>
+          <a:noFill/>
+          <a:ln/>
+        </p:spPr>
+        <p:txBody>
+          <a:bodyPr vert="horz" wrap="square" lIns="0" tIns="0" rIns="0" bIns="0" rtlCol="0" anchor="t"/>
+          <a:lstStyle/>
+          <a:p>
+            <a:pPr marL="342900" indent="-342900">
+              <a:lnSpc>
+                <a:spcPts val="1800"/>
+              </a:lnSpc>
+              <a:buSzPct val="100000"/>
+              <a:buChar char="•"/>
+            </a:pPr>
+            <a:r>
+              <a:rPr lang="ko-KR" altLang="en-US" sz="1200" dirty="0" err="1">
+                <a:solidFill>
+                  <a:srgbClr val="374151"/>
+                </a:solidFill>
+                <a:latin typeface="Noto Sans KR" pitchFamily="34" charset="0"/>
+                <a:ea typeface="Noto Sans KR" pitchFamily="34" charset="-122"/>
+                <a:cs typeface="Noto Sans KR" pitchFamily="34" charset="-120"/>
+              </a:rPr>
+              <a:t>언더샘플링</a:t>
+            </a:r>
+            <a:r>
+              <a:rPr lang="ko-KR" altLang="en-US" sz="1200" dirty="0">
+                <a:solidFill>
+                  <a:srgbClr val="374151"/>
+                </a:solidFill>
+                <a:latin typeface="Noto Sans KR" pitchFamily="34" charset="0"/>
+                <a:ea typeface="Noto Sans KR" pitchFamily="34" charset="-122"/>
+                <a:cs typeface="Noto Sans KR" pitchFamily="34" charset="-120"/>
+              </a:rPr>
+              <a:t> 모델은 </a:t>
+            </a:r>
+            <a:r>
+              <a:rPr lang="en-US" altLang="ko-KR" sz="1200" dirty="0">
+                <a:solidFill>
+                  <a:srgbClr val="374151"/>
+                </a:solidFill>
+                <a:latin typeface="Noto Sans KR" pitchFamily="34" charset="0"/>
+                <a:ea typeface="Noto Sans KR" pitchFamily="34" charset="-122"/>
+                <a:cs typeface="Noto Sans KR" pitchFamily="34" charset="-120"/>
+              </a:rPr>
+              <a:t>Top10 </a:t>
+            </a:r>
+            <a:r>
+              <a:rPr lang="ko-KR" altLang="en-US" sz="1200" dirty="0">
+                <a:solidFill>
+                  <a:srgbClr val="374151"/>
+                </a:solidFill>
+                <a:latin typeface="Noto Sans KR" pitchFamily="34" charset="0"/>
+                <a:ea typeface="Noto Sans KR" pitchFamily="34" charset="-122"/>
+                <a:cs typeface="Noto Sans KR" pitchFamily="34" charset="-120"/>
+              </a:rPr>
+              <a:t>내에서도 성능이 가장 낮음</a:t>
+            </a:r>
+            <a:endParaRPr lang="en-US" sz="1200" dirty="0"/>
+          </a:p>
+        </p:txBody>
+      </p:sp>
+      <p:sp>
+        <p:nvSpPr>
+          <p:cNvPr id="69" name="Text 33">
+            <a:extLst>
+              <a:ext uri="{FF2B5EF4-FFF2-40B4-BE49-F238E27FC236}">
+                <a16:creationId xmlns:a16="http://schemas.microsoft.com/office/drawing/2014/main" id="{831E1665-6909-E09C-3361-B24BA44F92FC}"/>
+              </a:ext>
+            </a:extLst>
+          </p:cNvPr>
+          <p:cNvSpPr/>
+          <p:nvPr/>
+        </p:nvSpPr>
+        <p:spPr>
+          <a:xfrm>
+            <a:off x="473978" y="2402475"/>
+            <a:ext cx="1228765" cy="295765"/>
+          </a:xfrm>
+          <a:prstGeom prst="rect">
+            <a:avLst/>
+          </a:prstGeom>
+          <a:noFill/>
+          <a:ln/>
+        </p:spPr>
+        <p:txBody>
+          <a:bodyPr vert="horz" wrap="square" lIns="0" tIns="0" rIns="0" bIns="0" rtlCol="0" anchor="t"/>
+          <a:lstStyle/>
+          <a:p>
+            <a:pPr marL="0" indent="0">
+              <a:lnSpc>
+                <a:spcPts val="2100"/>
+              </a:lnSpc>
+              <a:buNone/>
+            </a:pPr>
+            <a:r>
+              <a:rPr lang="ko-KR" altLang="en-US" sz="1500" b="1" dirty="0">
+                <a:solidFill>
+                  <a:srgbClr val="1E40AF"/>
+                </a:solidFill>
+                <a:latin typeface="Noto Sans KR" pitchFamily="34" charset="0"/>
+                <a:ea typeface="Noto Sans KR" pitchFamily="34" charset="-122"/>
+                <a:cs typeface="Noto Sans KR" pitchFamily="34" charset="-120"/>
+              </a:rPr>
+              <a:t>주요 </a:t>
+            </a:r>
+            <a:r>
+              <a:rPr lang="ko-KR" altLang="en-US" sz="1500" b="1" dirty="0" err="1">
+                <a:solidFill>
+                  <a:srgbClr val="1E40AF"/>
+                </a:solidFill>
+                <a:latin typeface="Noto Sans KR" pitchFamily="34" charset="0"/>
+                <a:ea typeface="Noto Sans KR" pitchFamily="34" charset="-122"/>
+                <a:cs typeface="Noto Sans KR" pitchFamily="34" charset="-120"/>
+              </a:rPr>
+              <a:t>발견점</a:t>
+            </a:r>
+            <a:endParaRPr lang="en-US" sz="1500" dirty="0"/>
+          </a:p>
+        </p:txBody>
+      </p:sp>
+      <p:sp>
+        <p:nvSpPr>
+          <p:cNvPr id="70" name="Text 34">
+            <a:extLst>
+              <a:ext uri="{FF2B5EF4-FFF2-40B4-BE49-F238E27FC236}">
+                <a16:creationId xmlns:a16="http://schemas.microsoft.com/office/drawing/2014/main" id="{26776AAC-A79D-EB50-5F7E-4C2A47F738AE}"/>
+              </a:ext>
+            </a:extLst>
+          </p:cNvPr>
+          <p:cNvSpPr/>
+          <p:nvPr/>
+        </p:nvSpPr>
+        <p:spPr>
+          <a:xfrm>
+            <a:off x="485744" y="2777728"/>
+            <a:ext cx="5417606" cy="206333"/>
+          </a:xfrm>
+          <a:prstGeom prst="rect">
+            <a:avLst/>
+          </a:prstGeom>
+          <a:noFill/>
+          <a:ln/>
+        </p:spPr>
+        <p:txBody>
+          <a:bodyPr vert="horz" wrap="square" lIns="0" tIns="0" rIns="0" bIns="0" rtlCol="0" anchor="t"/>
+          <a:lstStyle/>
+          <a:p>
+            <a:pPr marL="342900" indent="-342900">
+              <a:lnSpc>
+                <a:spcPts val="1800"/>
+              </a:lnSpc>
+              <a:buSzPct val="100000"/>
+              <a:buChar char="•"/>
+            </a:pPr>
+            <a:r>
+              <a:rPr lang="ko-KR" altLang="en-US" sz="1200" dirty="0" err="1">
+                <a:solidFill>
+                  <a:srgbClr val="374151"/>
+                </a:solidFill>
+                <a:latin typeface="Noto Sans KR" pitchFamily="34" charset="0"/>
+                <a:ea typeface="Noto Sans KR" pitchFamily="34" charset="-122"/>
+                <a:cs typeface="Noto Sans KR" pitchFamily="34" charset="-120"/>
+              </a:rPr>
+              <a:t>오버샘플링</a:t>
+            </a:r>
+            <a:r>
+              <a:rPr lang="en-US" altLang="ko-KR" sz="1200" dirty="0">
+                <a:solidFill>
+                  <a:srgbClr val="374151"/>
+                </a:solidFill>
+                <a:latin typeface="Noto Sans KR" pitchFamily="34" charset="0"/>
+                <a:ea typeface="Noto Sans KR" pitchFamily="34" charset="-122"/>
+                <a:cs typeface="Noto Sans KR" pitchFamily="34" charset="-120"/>
+              </a:rPr>
+              <a:t> </a:t>
+            </a:r>
+            <a:r>
+              <a:rPr lang="ko-KR" altLang="en-US" sz="1200" dirty="0">
+                <a:solidFill>
+                  <a:srgbClr val="374151"/>
+                </a:solidFill>
+                <a:latin typeface="Noto Sans KR" pitchFamily="34" charset="0"/>
+                <a:ea typeface="Noto Sans KR" pitchFamily="34" charset="-122"/>
+                <a:cs typeface="Noto Sans KR" pitchFamily="34" charset="-120"/>
+              </a:rPr>
+              <a:t>모델들이 전반 성능이 가장 높음</a:t>
+            </a:r>
+            <a:endParaRPr lang="en-US" sz="1200" dirty="0"/>
+          </a:p>
+        </p:txBody>
+      </p:sp>
+      <p:pic>
+        <p:nvPicPr>
+          <p:cNvPr id="75" name="Image 3" descr="preencoded.png">
+            <a:extLst>
+              <a:ext uri="{FF2B5EF4-FFF2-40B4-BE49-F238E27FC236}">
+                <a16:creationId xmlns:a16="http://schemas.microsoft.com/office/drawing/2014/main" id="{844F08D9-678E-15E1-50DC-4022A0AF2582}"/>
+              </a:ext>
+            </a:extLst>
+          </p:cNvPr>
+          <p:cNvPicPr>
+            <a:picLocks noChangeAspect="1"/>
+          </p:cNvPicPr>
+          <p:nvPr/>
+        </p:nvPicPr>
+        <p:blipFill>
+          <a:blip r:embed="rId8"/>
+          <a:stretch>
+            <a:fillRect/>
+          </a:stretch>
+        </p:blipFill>
+        <p:spPr>
+          <a:xfrm>
+            <a:off x="392766" y="1236464"/>
+            <a:ext cx="285750" cy="285750"/>
+          </a:xfrm>
+          <a:prstGeom prst="rect">
+            <a:avLst/>
+          </a:prstGeom>
+        </p:spPr>
+      </p:pic>
+      <p:pic>
+        <p:nvPicPr>
+          <p:cNvPr id="97" name="그림 96">
+            <a:extLst>
+              <a:ext uri="{FF2B5EF4-FFF2-40B4-BE49-F238E27FC236}">
+                <a16:creationId xmlns:a16="http://schemas.microsoft.com/office/drawing/2014/main" id="{7EC83088-9E21-DA9C-9125-F4D84974A55F}"/>
+              </a:ext>
+            </a:extLst>
+          </p:cNvPr>
+          <p:cNvPicPr>
+            <a:picLocks noChangeAspect="1"/>
+          </p:cNvPicPr>
+          <p:nvPr/>
+        </p:nvPicPr>
+        <p:blipFill>
+          <a:blip r:embed="rId9"/>
+          <a:stretch>
+            <a:fillRect/>
+          </a:stretch>
+        </p:blipFill>
+        <p:spPr>
+          <a:xfrm>
+            <a:off x="211291" y="3886815"/>
+            <a:ext cx="5692059" cy="2628900"/>
+          </a:xfrm>
+          <a:prstGeom prst="rect">
+            <a:avLst/>
+          </a:prstGeom>
+        </p:spPr>
+      </p:pic>
+      <p:pic>
+        <p:nvPicPr>
+          <p:cNvPr id="99" name="그림 98">
+            <a:extLst>
+              <a:ext uri="{FF2B5EF4-FFF2-40B4-BE49-F238E27FC236}">
+                <a16:creationId xmlns:a16="http://schemas.microsoft.com/office/drawing/2014/main" id="{3A3C8D81-A000-B627-194E-B28ECB6E2CF7}"/>
+              </a:ext>
+            </a:extLst>
+          </p:cNvPr>
+          <p:cNvPicPr>
+            <a:picLocks noChangeAspect="1"/>
+          </p:cNvPicPr>
+          <p:nvPr/>
+        </p:nvPicPr>
+        <p:blipFill>
+          <a:blip r:embed="rId10"/>
+          <a:stretch>
+            <a:fillRect/>
+          </a:stretch>
+        </p:blipFill>
+        <p:spPr>
+          <a:xfrm>
+            <a:off x="6096000" y="2269433"/>
+            <a:ext cx="5814060" cy="4246281"/>
+          </a:xfrm>
+          <a:prstGeom prst="rect">
+            <a:avLst/>
+          </a:prstGeom>
+        </p:spPr>
+      </p:pic>
+    </p:spTree>
+    <p:extLst>
+      <p:ext uri="{BB962C8B-B14F-4D97-AF65-F5344CB8AC3E}">
+        <p14:creationId xmlns:p14="http://schemas.microsoft.com/office/powerpoint/2010/main" val="3383549869"/>
+      </p:ext>
+    </p:extLst>
   </p:cSld>
   <p:clrMapOvr>
     <a:masterClrMapping/>
@@ -17843,7 +17606,7 @@
       </p:pic>
       <p:pic>
         <p:nvPicPr>
-          <p:cNvPr id="6" name="Image 4" descr="preencoded.png"/>
+          <p:cNvPr id="10" name="Image 8" descr="preencoded.png"/>
           <p:cNvPicPr>
             <a:picLocks noChangeAspect="1"/>
           </p:cNvPicPr>
@@ -17851,102 +17614,6 @@
         </p:nvPicPr>
         <p:blipFill>
           <a:blip r:embed="rId7"/>
-          <a:stretch>
-            <a:fillRect/>
-          </a:stretch>
-        </p:blipFill>
-        <p:spPr>
-          <a:xfrm>
-            <a:off x="533400" y="5067300"/>
-            <a:ext cx="4038600" cy="1447800"/>
-          </a:xfrm>
-          <a:prstGeom prst="rect">
-            <a:avLst/>
-          </a:prstGeom>
-        </p:spPr>
-      </p:pic>
-      <p:pic>
-        <p:nvPicPr>
-          <p:cNvPr id="7" name="Image 5" descr="preencoded.png"/>
-          <p:cNvPicPr>
-            <a:picLocks noChangeAspect="1"/>
-          </p:cNvPicPr>
-          <p:nvPr/>
-        </p:nvPicPr>
-        <p:blipFill>
-          <a:blip r:embed="rId8"/>
-          <a:stretch>
-            <a:fillRect/>
-          </a:stretch>
-        </p:blipFill>
-        <p:spPr>
-          <a:xfrm>
-            <a:off x="685800" y="5562600"/>
-            <a:ext cx="1193750" cy="800100"/>
-          </a:xfrm>
-          <a:prstGeom prst="rect">
-            <a:avLst/>
-          </a:prstGeom>
-        </p:spPr>
-      </p:pic>
-      <p:pic>
-        <p:nvPicPr>
-          <p:cNvPr id="8" name="Image 6" descr="preencoded.png"/>
-          <p:cNvPicPr>
-            <a:picLocks noChangeAspect="1"/>
-          </p:cNvPicPr>
-          <p:nvPr/>
-        </p:nvPicPr>
-        <p:blipFill>
-          <a:blip r:embed="rId9"/>
-          <a:stretch>
-            <a:fillRect/>
-          </a:stretch>
-        </p:blipFill>
-        <p:spPr>
-          <a:xfrm>
-            <a:off x="1955750" y="5562600"/>
-            <a:ext cx="1193750" cy="800100"/>
-          </a:xfrm>
-          <a:prstGeom prst="rect">
-            <a:avLst/>
-          </a:prstGeom>
-        </p:spPr>
-      </p:pic>
-      <p:pic>
-        <p:nvPicPr>
-          <p:cNvPr id="9" name="Image 7" descr="preencoded.png"/>
-          <p:cNvPicPr>
-            <a:picLocks noChangeAspect="1"/>
-          </p:cNvPicPr>
-          <p:nvPr/>
-        </p:nvPicPr>
-        <p:blipFill>
-          <a:blip r:embed="rId10"/>
-          <a:stretch>
-            <a:fillRect/>
-          </a:stretch>
-        </p:blipFill>
-        <p:spPr>
-          <a:xfrm>
-            <a:off x="3225701" y="5562600"/>
-            <a:ext cx="1193899" cy="800100"/>
-          </a:xfrm>
-          <a:prstGeom prst="rect">
-            <a:avLst/>
-          </a:prstGeom>
-        </p:spPr>
-      </p:pic>
-      <p:pic>
-        <p:nvPicPr>
-          <p:cNvPr id="10" name="Image 8" descr="preencoded.png"/>
-          <p:cNvPicPr>
-            <a:picLocks noChangeAspect="1"/>
-          </p:cNvPicPr>
-          <p:nvPr/>
-        </p:nvPicPr>
-        <p:blipFill>
-          <a:blip r:embed="rId11"/>
           <a:stretch>
             <a:fillRect/>
           </a:stretch>
@@ -17970,7 +17637,7 @@
           <p:nvPr/>
         </p:nvPicPr>
         <p:blipFill>
-          <a:blip r:embed="rId12"/>
+          <a:blip r:embed="rId8"/>
           <a:stretch>
             <a:fillRect/>
           </a:stretch>
@@ -17994,7 +17661,7 @@
           <p:nvPr/>
         </p:nvPicPr>
         <p:blipFill>
-          <a:blip r:embed="rId13"/>
+          <a:blip r:embed="rId9"/>
           <a:stretch>
             <a:fillRect/>
           </a:stretch>
@@ -18018,7 +17685,7 @@
           <p:nvPr/>
         </p:nvPicPr>
         <p:blipFill>
-          <a:blip r:embed="rId14"/>
+          <a:blip r:embed="rId10"/>
           <a:stretch>
             <a:fillRect/>
           </a:stretch>
@@ -18042,7 +17709,7 @@
           <p:nvPr/>
         </p:nvPicPr>
         <p:blipFill>
-          <a:blip r:embed="rId14"/>
+          <a:blip r:embed="rId10"/>
           <a:stretch>
             <a:fillRect/>
           </a:stretch>
@@ -18066,7 +17733,7 @@
           <p:nvPr/>
         </p:nvPicPr>
         <p:blipFill>
-          <a:blip r:embed="rId14"/>
+          <a:blip r:embed="rId10"/>
           <a:stretch>
             <a:fillRect/>
           </a:stretch>
@@ -18090,7 +17757,7 @@
           <p:nvPr/>
         </p:nvPicPr>
         <p:blipFill>
-          <a:blip r:embed="rId14"/>
+          <a:blip r:embed="rId10"/>
           <a:stretch>
             <a:fillRect/>
           </a:stretch>
@@ -18114,7 +17781,7 @@
           <p:nvPr/>
         </p:nvPicPr>
         <p:blipFill>
-          <a:blip r:embed="rId15"/>
+          <a:blip r:embed="rId11"/>
           <a:stretch>
             <a:fillRect/>
           </a:stretch>
@@ -18423,300 +18090,6 @@
               <a:t>모델의 사기 거래 감지 능력 향상</a:t>
             </a:r>
             <a:endParaRPr lang="en-US" sz="1200" dirty="0"/>
-          </a:p>
-        </p:txBody>
-      </p:sp>
-      <p:sp>
-        <p:nvSpPr>
-          <p:cNvPr id="25" name="Text 7"/>
-          <p:cNvSpPr/>
-          <p:nvPr/>
-        </p:nvSpPr>
-        <p:spPr>
-          <a:xfrm>
-            <a:off x="685800" y="5219700"/>
-            <a:ext cx="3733800" cy="266700"/>
-          </a:xfrm>
-          <a:prstGeom prst="rect">
-            <a:avLst/>
-          </a:prstGeom>
-          <a:noFill/>
-          <a:ln/>
-        </p:spPr>
-        <p:txBody>
-          <a:bodyPr vert="horz" wrap="square" lIns="0" tIns="0" rIns="0" bIns="0" rtlCol="0" anchor="t"/>
-          <a:lstStyle/>
-          <a:p>
-            <a:pPr marL="0" indent="0">
-              <a:lnSpc>
-                <a:spcPts val="2100"/>
-              </a:lnSpc>
-              <a:buNone/>
-            </a:pPr>
-            <a:r>
-              <a:rPr lang="en-US" sz="1500" b="1" dirty="0">
-                <a:solidFill>
-                  <a:srgbClr val="1D4ED8"/>
-                </a:solidFill>
-                <a:latin typeface="Noto Sans KR" pitchFamily="34" charset="0"/>
-                <a:ea typeface="Noto Sans KR" pitchFamily="34" charset="-122"/>
-                <a:cs typeface="Noto Sans KR" pitchFamily="34" charset="-120"/>
-              </a:rPr>
-              <a:t>주요 성능 지표</a:t>
-            </a:r>
-            <a:endParaRPr lang="en-US" sz="1500" dirty="0"/>
-          </a:p>
-        </p:txBody>
-      </p:sp>
-      <p:sp>
-        <p:nvSpPr>
-          <p:cNvPr id="26" name="Text 8"/>
-          <p:cNvSpPr/>
-          <p:nvPr/>
-        </p:nvSpPr>
-        <p:spPr>
-          <a:xfrm>
-            <a:off x="657865" y="5638800"/>
-            <a:ext cx="1249620" cy="190500"/>
-          </a:xfrm>
-          <a:prstGeom prst="rect">
-            <a:avLst/>
-          </a:prstGeom>
-          <a:noFill/>
-          <a:ln/>
-        </p:spPr>
-        <p:txBody>
-          <a:bodyPr vert="horz" wrap="square" lIns="0" tIns="0" rIns="0" bIns="0" rtlCol="0" anchor="t"/>
-          <a:lstStyle/>
-          <a:p>
-            <a:pPr marL="0" indent="0" algn="ctr">
-              <a:lnSpc>
-                <a:spcPts val="1500"/>
-              </a:lnSpc>
-              <a:buNone/>
-            </a:pPr>
-            <a:r>
-              <a:rPr lang="en-US" sz="1050" dirty="0">
-                <a:solidFill>
-                  <a:srgbClr val="4B5563"/>
-                </a:solidFill>
-                <a:latin typeface="Noto Sans KR" pitchFamily="34" charset="0"/>
-                <a:ea typeface="Noto Sans KR" pitchFamily="34" charset="-122"/>
-                <a:cs typeface="Noto Sans KR" pitchFamily="34" charset="-120"/>
-              </a:rPr>
-              <a:t>재현율 (Recall)</a:t>
-            </a:r>
-            <a:endParaRPr lang="en-US" sz="1050" dirty="0"/>
-          </a:p>
-        </p:txBody>
-      </p:sp>
-      <p:sp>
-        <p:nvSpPr>
-          <p:cNvPr id="27" name="Text 9"/>
-          <p:cNvSpPr/>
-          <p:nvPr/>
-        </p:nvSpPr>
-        <p:spPr>
-          <a:xfrm>
-            <a:off x="657865" y="5829300"/>
-            <a:ext cx="1249620" cy="266700"/>
-          </a:xfrm>
-          <a:prstGeom prst="rect">
-            <a:avLst/>
-          </a:prstGeom>
-          <a:noFill/>
-          <a:ln/>
-        </p:spPr>
-        <p:txBody>
-          <a:bodyPr vert="horz" wrap="square" lIns="0" tIns="0" rIns="0" bIns="0" rtlCol="0" anchor="t"/>
-          <a:lstStyle/>
-          <a:p>
-            <a:pPr marL="0" indent="0" algn="ctr">
-              <a:lnSpc>
-                <a:spcPts val="2100"/>
-              </a:lnSpc>
-              <a:buNone/>
-            </a:pPr>
-            <a:r>
-              <a:rPr lang="en-US" sz="1500" b="1" dirty="0">
-                <a:solidFill>
-                  <a:srgbClr val="1E40AF"/>
-                </a:solidFill>
-                <a:latin typeface="Noto Sans KR" pitchFamily="34" charset="0"/>
-                <a:ea typeface="Noto Sans KR" pitchFamily="34" charset="-122"/>
-                <a:cs typeface="Noto Sans KR" pitchFamily="34" charset="-120"/>
-              </a:rPr>
-              <a:t>1.0000</a:t>
-            </a:r>
-            <a:endParaRPr lang="en-US" sz="1500" dirty="0"/>
-          </a:p>
-        </p:txBody>
-      </p:sp>
-      <p:sp>
-        <p:nvSpPr>
-          <p:cNvPr id="28" name="Text 10"/>
-          <p:cNvSpPr/>
-          <p:nvPr/>
-        </p:nvSpPr>
-        <p:spPr>
-          <a:xfrm>
-            <a:off x="2031950" y="5638800"/>
-            <a:ext cx="1041350" cy="381000"/>
-          </a:xfrm>
-          <a:prstGeom prst="rect">
-            <a:avLst/>
-          </a:prstGeom>
-          <a:noFill/>
-          <a:ln/>
-        </p:spPr>
-        <p:txBody>
-          <a:bodyPr vert="horz" wrap="square" lIns="0" tIns="0" rIns="0" bIns="0" rtlCol="0" anchor="t"/>
-          <a:lstStyle/>
-          <a:p>
-            <a:pPr marL="0" indent="0" algn="ctr">
-              <a:lnSpc>
-                <a:spcPts val="1500"/>
-              </a:lnSpc>
-              <a:buNone/>
-            </a:pPr>
-            <a:r>
-              <a:rPr lang="en-US" sz="1050" dirty="0">
-                <a:solidFill>
-                  <a:srgbClr val="4B5563"/>
-                </a:solidFill>
-                <a:latin typeface="Noto Sans KR" pitchFamily="34" charset="0"/>
-                <a:ea typeface="Noto Sans KR" pitchFamily="34" charset="-122"/>
-                <a:cs typeface="Noto Sans KR" pitchFamily="34" charset="-120"/>
-              </a:rPr>
-              <a:t>정밀도 (Precision)</a:t>
-            </a:r>
-            <a:endParaRPr lang="en-US" sz="1050" dirty="0"/>
-          </a:p>
-        </p:txBody>
-      </p:sp>
-      <p:sp>
-        <p:nvSpPr>
-          <p:cNvPr id="29" name="Text 11"/>
-          <p:cNvSpPr/>
-          <p:nvPr/>
-        </p:nvSpPr>
-        <p:spPr>
-          <a:xfrm>
-            <a:off x="1927815" y="6019800"/>
-            <a:ext cx="1249620" cy="266700"/>
-          </a:xfrm>
-          <a:prstGeom prst="rect">
-            <a:avLst/>
-          </a:prstGeom>
-          <a:noFill/>
-          <a:ln/>
-        </p:spPr>
-        <p:txBody>
-          <a:bodyPr vert="horz" wrap="square" lIns="0" tIns="0" rIns="0" bIns="0" rtlCol="0" anchor="t"/>
-          <a:lstStyle/>
-          <a:p>
-            <a:pPr marL="0" indent="0" algn="ctr">
-              <a:lnSpc>
-                <a:spcPts val="2100"/>
-              </a:lnSpc>
-              <a:buNone/>
-            </a:pPr>
-            <a:r>
-              <a:rPr lang="en-US" sz="1500" b="1" dirty="0">
-                <a:solidFill>
-                  <a:srgbClr val="1E40AF"/>
-                </a:solidFill>
-                <a:latin typeface="Noto Sans KR" pitchFamily="34" charset="0"/>
-                <a:ea typeface="Noto Sans KR" pitchFamily="34" charset="-122"/>
-                <a:cs typeface="Noto Sans KR" pitchFamily="34" charset="-120"/>
-              </a:rPr>
-              <a:t>0.9994</a:t>
-            </a:r>
-            <a:endParaRPr lang="en-US" sz="1500" dirty="0"/>
-          </a:p>
-        </p:txBody>
-      </p:sp>
-      <p:sp>
-        <p:nvSpPr>
-          <p:cNvPr id="30" name="Text 12"/>
-          <p:cNvSpPr/>
-          <p:nvPr/>
-        </p:nvSpPr>
-        <p:spPr>
-          <a:xfrm>
-            <a:off x="3197751" y="5638800"/>
-            <a:ext cx="1249799" cy="190500"/>
-          </a:xfrm>
-          <a:prstGeom prst="rect">
-            <a:avLst/>
-          </a:prstGeom>
-          <a:noFill/>
-          <a:ln/>
-        </p:spPr>
-        <p:txBody>
-          <a:bodyPr vert="horz" wrap="square" lIns="0" tIns="0" rIns="0" bIns="0" rtlCol="0" anchor="t"/>
-          <a:lstStyle/>
-          <a:p>
-            <a:pPr marL="0" indent="0" algn="ctr">
-              <a:lnSpc>
-                <a:spcPts val="1500"/>
-              </a:lnSpc>
-              <a:buNone/>
-            </a:pPr>
-            <a:r>
-              <a:rPr lang="en-US" sz="1050" dirty="0">
-                <a:solidFill>
-                  <a:srgbClr val="4B5563"/>
-                </a:solidFill>
-                <a:latin typeface="Noto Sans KR" pitchFamily="34" charset="0"/>
-                <a:ea typeface="Noto Sans KR" pitchFamily="34" charset="-122"/>
-                <a:cs typeface="Noto Sans KR" pitchFamily="34" charset="-120"/>
-              </a:rPr>
-              <a:t>F1-Score</a:t>
-            </a:r>
-            <a:endParaRPr lang="en-US" sz="1050" dirty="0"/>
-          </a:p>
-        </p:txBody>
-      </p:sp>
-      <p:sp>
-        <p:nvSpPr>
-          <p:cNvPr id="31" name="Text 13"/>
-          <p:cNvSpPr/>
-          <p:nvPr/>
-        </p:nvSpPr>
-        <p:spPr>
-          <a:xfrm>
-            <a:off x="3197751" y="5829300"/>
-            <a:ext cx="1249799" cy="266700"/>
-          </a:xfrm>
-          <a:prstGeom prst="rect">
-            <a:avLst/>
-          </a:prstGeom>
-          <a:noFill/>
-          <a:ln/>
-        </p:spPr>
-        <p:txBody>
-          <a:bodyPr vert="horz" wrap="square" lIns="0" tIns="0" rIns="0" bIns="0" rtlCol="0" anchor="t"/>
-          <a:lstStyle/>
-          <a:p>
-            <a:pPr marL="0" indent="0" algn="ctr">
-              <a:lnSpc>
-                <a:spcPts val="2100"/>
-              </a:lnSpc>
-              <a:buNone/>
-            </a:pPr>
-            <a:r>
-              <a:rPr lang="en-US" sz="1500" b="1" dirty="0">
-                <a:solidFill>
-                  <a:srgbClr val="1E40AF"/>
-                </a:solidFill>
-                <a:latin typeface="Noto Sans KR" pitchFamily="34" charset="0"/>
-                <a:ea typeface="Noto Sans KR" pitchFamily="34" charset="-122"/>
-                <a:cs typeface="Noto Sans KR" pitchFamily="34" charset="-120"/>
-              </a:rPr>
-              <a:t>0.9997</a:t>
-            </a:r>
-            <a:endParaRPr lang="en-US" sz="1500" dirty="0"/>
           </a:p>
         </p:txBody>
       </p:sp>
@@ -20075,6 +19448,1295 @@
 
 <file path=ppt/slides/slide17.xml><?xml version="1.0" encoding="utf-8"?>
 <p:sld xmlns:a="http://schemas.openxmlformats.org/drawingml/2006/main" xmlns:r="http://schemas.openxmlformats.org/officeDocument/2006/relationships" xmlns:p="http://schemas.openxmlformats.org/presentationml/2006/main">
+  <p:cSld name="Slide 10">
+    <p:spTree>
+      <p:nvGrpSpPr>
+        <p:cNvPr id="1" name=""/>
+        <p:cNvGrpSpPr/>
+        <p:nvPr/>
+      </p:nvGrpSpPr>
+      <p:grpSpPr>
+        <a:xfrm>
+          <a:off x="0" y="0"/>
+          <a:ext cx="0" cy="0"/>
+          <a:chOff x="0" y="0"/>
+          <a:chExt cx="0" cy="0"/>
+        </a:xfrm>
+      </p:grpSpPr>
+      <p:pic>
+        <p:nvPicPr>
+          <p:cNvPr id="2" name="Image 0" descr="preencoded.png"/>
+          <p:cNvPicPr>
+            <a:picLocks noChangeAspect="1"/>
+          </p:cNvPicPr>
+          <p:nvPr/>
+        </p:nvPicPr>
+        <p:blipFill>
+          <a:blip r:embed="rId3"/>
+          <a:stretch>
+            <a:fillRect/>
+          </a:stretch>
+        </p:blipFill>
+        <p:spPr>
+          <a:xfrm>
+            <a:off x="0" y="0"/>
+            <a:ext cx="12192000" cy="6858000"/>
+          </a:xfrm>
+          <a:prstGeom prst="rect">
+            <a:avLst/>
+          </a:prstGeom>
+        </p:spPr>
+      </p:pic>
+      <p:pic>
+        <p:nvPicPr>
+          <p:cNvPr id="3" name="Image 1" descr="preencoded.png"/>
+          <p:cNvPicPr>
+            <a:picLocks noChangeAspect="1"/>
+          </p:cNvPicPr>
+          <p:nvPr/>
+        </p:nvPicPr>
+        <p:blipFill>
+          <a:blip r:embed="rId4"/>
+          <a:stretch>
+            <a:fillRect/>
+          </a:stretch>
+        </p:blipFill>
+        <p:spPr>
+          <a:xfrm>
+            <a:off x="0" y="0"/>
+            <a:ext cx="12192000" cy="762000"/>
+          </a:xfrm>
+          <a:prstGeom prst="rect">
+            <a:avLst/>
+          </a:prstGeom>
+        </p:spPr>
+      </p:pic>
+      <p:pic>
+        <p:nvPicPr>
+          <p:cNvPr id="4" name="Image 2" descr="preencoded.png"/>
+          <p:cNvPicPr>
+            <a:picLocks noChangeAspect="1"/>
+          </p:cNvPicPr>
+          <p:nvPr/>
+        </p:nvPicPr>
+        <p:blipFill>
+          <a:blip r:embed="rId5"/>
+          <a:stretch>
+            <a:fillRect/>
+          </a:stretch>
+        </p:blipFill>
+        <p:spPr>
+          <a:xfrm>
+            <a:off x="228600" y="990600"/>
+            <a:ext cx="5715000" cy="1676400"/>
+          </a:xfrm>
+          <a:prstGeom prst="rect">
+            <a:avLst/>
+          </a:prstGeom>
+        </p:spPr>
+      </p:pic>
+      <p:pic>
+        <p:nvPicPr>
+          <p:cNvPr id="5" name="Image 3" descr="preencoded.png"/>
+          <p:cNvPicPr>
+            <a:picLocks noChangeAspect="1"/>
+          </p:cNvPicPr>
+          <p:nvPr/>
+        </p:nvPicPr>
+        <p:blipFill>
+          <a:blip r:embed="rId6"/>
+          <a:stretch>
+            <a:fillRect/>
+          </a:stretch>
+        </p:blipFill>
+        <p:spPr>
+          <a:xfrm>
+            <a:off x="457200" y="1257300"/>
+            <a:ext cx="228600" cy="228600"/>
+          </a:xfrm>
+          <a:prstGeom prst="rect">
+            <a:avLst/>
+          </a:prstGeom>
+        </p:spPr>
+      </p:pic>
+      <p:pic>
+        <p:nvPicPr>
+          <p:cNvPr id="6" name="Image 4" descr="preencoded.png"/>
+          <p:cNvPicPr>
+            <a:picLocks noChangeAspect="1"/>
+          </p:cNvPicPr>
+          <p:nvPr/>
+        </p:nvPicPr>
+        <p:blipFill>
+          <a:blip r:embed="rId7"/>
+          <a:stretch>
+            <a:fillRect/>
+          </a:stretch>
+        </p:blipFill>
+        <p:spPr>
+          <a:xfrm>
+            <a:off x="228600" y="2819400"/>
+            <a:ext cx="5715000" cy="2209800"/>
+          </a:xfrm>
+          <a:prstGeom prst="rect">
+            <a:avLst/>
+          </a:prstGeom>
+        </p:spPr>
+      </p:pic>
+      <p:pic>
+        <p:nvPicPr>
+          <p:cNvPr id="7" name="Image 5" descr="preencoded.png"/>
+          <p:cNvPicPr>
+            <a:picLocks noChangeAspect="1"/>
+          </p:cNvPicPr>
+          <p:nvPr/>
+        </p:nvPicPr>
+        <p:blipFill>
+          <a:blip r:embed="rId8"/>
+          <a:stretch>
+            <a:fillRect/>
+          </a:stretch>
+        </p:blipFill>
+        <p:spPr>
+          <a:xfrm>
+            <a:off x="6248400" y="990600"/>
+            <a:ext cx="5715000" cy="3810000"/>
+          </a:xfrm>
+          <a:prstGeom prst="rect">
+            <a:avLst/>
+          </a:prstGeom>
+        </p:spPr>
+      </p:pic>
+      <p:pic>
+        <p:nvPicPr>
+          <p:cNvPr id="8" name="Image 6" descr="preencoded.png"/>
+          <p:cNvPicPr>
+            <a:picLocks noChangeAspect="1"/>
+          </p:cNvPicPr>
+          <p:nvPr/>
+        </p:nvPicPr>
+        <p:blipFill>
+          <a:blip r:embed="rId9"/>
+          <a:stretch>
+            <a:fillRect/>
+          </a:stretch>
+        </p:blipFill>
+        <p:spPr>
+          <a:xfrm>
+            <a:off x="6477000" y="1600200"/>
+            <a:ext cx="5257800" cy="1828800"/>
+          </a:xfrm>
+          <a:prstGeom prst="rect">
+            <a:avLst/>
+          </a:prstGeom>
+        </p:spPr>
+      </p:pic>
+      <p:pic>
+        <p:nvPicPr>
+          <p:cNvPr id="9" name="Image 7" descr="preencoded.png"/>
+          <p:cNvPicPr>
+            <a:picLocks noChangeAspect="1"/>
+          </p:cNvPicPr>
+          <p:nvPr/>
+        </p:nvPicPr>
+        <p:blipFill>
+          <a:blip r:embed="rId10"/>
+          <a:stretch>
+            <a:fillRect/>
+          </a:stretch>
+        </p:blipFill>
+        <p:spPr>
+          <a:xfrm>
+            <a:off x="6248400" y="4953000"/>
+            <a:ext cx="5715000" cy="1600200"/>
+          </a:xfrm>
+          <a:prstGeom prst="rect">
+            <a:avLst/>
+          </a:prstGeom>
+        </p:spPr>
+      </p:pic>
+      <p:pic>
+        <p:nvPicPr>
+          <p:cNvPr id="10" name="Image 8" descr="preencoded.png"/>
+          <p:cNvPicPr>
+            <a:picLocks noChangeAspect="1"/>
+          </p:cNvPicPr>
+          <p:nvPr/>
+        </p:nvPicPr>
+        <p:blipFill>
+          <a:blip r:embed="rId11"/>
+          <a:stretch>
+            <a:fillRect/>
+          </a:stretch>
+        </p:blipFill>
+        <p:spPr>
+          <a:xfrm>
+            <a:off x="6477000" y="5562600"/>
+            <a:ext cx="990600" cy="762000"/>
+          </a:xfrm>
+          <a:prstGeom prst="rect">
+            <a:avLst/>
+          </a:prstGeom>
+        </p:spPr>
+      </p:pic>
+      <p:pic>
+        <p:nvPicPr>
+          <p:cNvPr id="11" name="Image 9" descr="preencoded.png"/>
+          <p:cNvPicPr>
+            <a:picLocks noChangeAspect="1"/>
+          </p:cNvPicPr>
+          <p:nvPr/>
+        </p:nvPicPr>
+        <p:blipFill>
+          <a:blip r:embed="rId11"/>
+          <a:stretch>
+            <a:fillRect/>
+          </a:stretch>
+        </p:blipFill>
+        <p:spPr>
+          <a:xfrm>
+            <a:off x="7543800" y="5562600"/>
+            <a:ext cx="990600" cy="762000"/>
+          </a:xfrm>
+          <a:prstGeom prst="rect">
+            <a:avLst/>
+          </a:prstGeom>
+        </p:spPr>
+      </p:pic>
+      <p:pic>
+        <p:nvPicPr>
+          <p:cNvPr id="12" name="Image 10" descr="preencoded.png"/>
+          <p:cNvPicPr>
+            <a:picLocks noChangeAspect="1"/>
+          </p:cNvPicPr>
+          <p:nvPr/>
+        </p:nvPicPr>
+        <p:blipFill>
+          <a:blip r:embed="rId11"/>
+          <a:stretch>
+            <a:fillRect/>
+          </a:stretch>
+        </p:blipFill>
+        <p:spPr>
+          <a:xfrm>
+            <a:off x="8610600" y="5562600"/>
+            <a:ext cx="990600" cy="762000"/>
+          </a:xfrm>
+          <a:prstGeom prst="rect">
+            <a:avLst/>
+          </a:prstGeom>
+        </p:spPr>
+      </p:pic>
+      <p:pic>
+        <p:nvPicPr>
+          <p:cNvPr id="13" name="Image 11" descr="preencoded.png"/>
+          <p:cNvPicPr>
+            <a:picLocks noChangeAspect="1"/>
+          </p:cNvPicPr>
+          <p:nvPr/>
+        </p:nvPicPr>
+        <p:blipFill>
+          <a:blip r:embed="rId11"/>
+          <a:stretch>
+            <a:fillRect/>
+          </a:stretch>
+        </p:blipFill>
+        <p:spPr>
+          <a:xfrm>
+            <a:off x="9677400" y="5562600"/>
+            <a:ext cx="990600" cy="762000"/>
+          </a:xfrm>
+          <a:prstGeom prst="rect">
+            <a:avLst/>
+          </a:prstGeom>
+        </p:spPr>
+      </p:pic>
+      <p:pic>
+        <p:nvPicPr>
+          <p:cNvPr id="14" name="Image 12" descr="preencoded.png"/>
+          <p:cNvPicPr>
+            <a:picLocks noChangeAspect="1"/>
+          </p:cNvPicPr>
+          <p:nvPr/>
+        </p:nvPicPr>
+        <p:blipFill>
+          <a:blip r:embed="rId11"/>
+          <a:stretch>
+            <a:fillRect/>
+          </a:stretch>
+        </p:blipFill>
+        <p:spPr>
+          <a:xfrm>
+            <a:off x="10744200" y="5562600"/>
+            <a:ext cx="990600" cy="762000"/>
+          </a:xfrm>
+          <a:prstGeom prst="rect">
+            <a:avLst/>
+          </a:prstGeom>
+        </p:spPr>
+      </p:pic>
+      <p:pic>
+        <p:nvPicPr>
+          <p:cNvPr id="15" name="Image 13" descr="preencoded.png"/>
+          <p:cNvPicPr>
+            <a:picLocks noChangeAspect="1"/>
+          </p:cNvPicPr>
+          <p:nvPr/>
+        </p:nvPicPr>
+        <p:blipFill>
+          <a:blip r:embed="rId12"/>
+          <a:stretch>
+            <a:fillRect/>
+          </a:stretch>
+        </p:blipFill>
+        <p:spPr>
+          <a:xfrm>
+            <a:off x="0" y="6781800"/>
+            <a:ext cx="12192000" cy="76200"/>
+          </a:xfrm>
+          <a:prstGeom prst="rect">
+            <a:avLst/>
+          </a:prstGeom>
+        </p:spPr>
+      </p:pic>
+      <p:sp>
+        <p:nvSpPr>
+          <p:cNvPr id="16" name="Text 0"/>
+          <p:cNvSpPr/>
+          <p:nvPr/>
+        </p:nvSpPr>
+        <p:spPr>
+          <a:xfrm>
+            <a:off x="381000" y="209550"/>
+            <a:ext cx="2011680" cy="342900"/>
+          </a:xfrm>
+          <a:prstGeom prst="rect">
+            <a:avLst/>
+          </a:prstGeom>
+          <a:noFill/>
+          <a:ln/>
+        </p:spPr>
+        <p:txBody>
+          <a:bodyPr vert="horz" wrap="square" lIns="0" tIns="0" rIns="0" bIns="0" rtlCol="0" anchor="t"/>
+          <a:lstStyle/>
+          <a:p>
+            <a:pPr marL="0" indent="0">
+              <a:lnSpc>
+                <a:spcPts val="2700"/>
+              </a:lnSpc>
+              <a:buNone/>
+            </a:pPr>
+            <a:r>
+              <a:rPr lang="en-US" sz="2250" b="1" dirty="0">
+                <a:solidFill>
+                  <a:srgbClr val="FFFFFF"/>
+                </a:solidFill>
+                <a:latin typeface="Noto Sans KR" pitchFamily="34" charset="0"/>
+                <a:ea typeface="Noto Sans KR" pitchFamily="34" charset="-122"/>
+                <a:cs typeface="Noto Sans KR" pitchFamily="34" charset="-120"/>
+              </a:rPr>
+              <a:t>신경망 접근법</a:t>
+            </a:r>
+            <a:endParaRPr lang="en-US" sz="2250" dirty="0"/>
+          </a:p>
+        </p:txBody>
+      </p:sp>
+      <p:sp>
+        <p:nvSpPr>
+          <p:cNvPr id="17" name="Text 1"/>
+          <p:cNvSpPr/>
+          <p:nvPr/>
+        </p:nvSpPr>
+        <p:spPr>
+          <a:xfrm>
+            <a:off x="11315700" y="247650"/>
+            <a:ext cx="594360" cy="266700"/>
+          </a:xfrm>
+          <a:prstGeom prst="rect">
+            <a:avLst/>
+          </a:prstGeom>
+          <a:noFill/>
+          <a:ln/>
+        </p:spPr>
+        <p:txBody>
+          <a:bodyPr vert="horz" wrap="square" lIns="0" tIns="0" rIns="0" bIns="0" rtlCol="0" anchor="t"/>
+          <a:lstStyle/>
+          <a:p>
+            <a:pPr marL="0" indent="0">
+              <a:lnSpc>
+                <a:spcPts val="2100"/>
+              </a:lnSpc>
+              <a:buNone/>
+            </a:pPr>
+            <a:r>
+              <a:rPr lang="en-US" sz="1500" dirty="0">
+                <a:solidFill>
+                  <a:srgbClr val="FFFFFF"/>
+                </a:solidFill>
+                <a:latin typeface="Noto Sans KR" pitchFamily="34" charset="0"/>
+                <a:ea typeface="Noto Sans KR" pitchFamily="34" charset="-122"/>
+                <a:cs typeface="Noto Sans KR" pitchFamily="34" charset="-120"/>
+              </a:rPr>
+              <a:t>10/20</a:t>
+            </a:r>
+            <a:endParaRPr lang="en-US" sz="1500" dirty="0"/>
+          </a:p>
+        </p:txBody>
+      </p:sp>
+      <p:sp>
+        <p:nvSpPr>
+          <p:cNvPr id="18" name="Text 2"/>
+          <p:cNvSpPr/>
+          <p:nvPr/>
+        </p:nvSpPr>
+        <p:spPr>
+          <a:xfrm>
+            <a:off x="800100" y="1219200"/>
+            <a:ext cx="5257800" cy="304800"/>
+          </a:xfrm>
+          <a:prstGeom prst="rect">
+            <a:avLst/>
+          </a:prstGeom>
+          <a:noFill/>
+          <a:ln/>
+        </p:spPr>
+        <p:txBody>
+          <a:bodyPr vert="horz" wrap="square" lIns="0" tIns="0" rIns="0" bIns="0" rtlCol="0" anchor="t"/>
+          <a:lstStyle/>
+          <a:p>
+            <a:pPr marL="0" indent="0">
+              <a:lnSpc>
+                <a:spcPts val="2400"/>
+              </a:lnSpc>
+              <a:buNone/>
+            </a:pPr>
+            <a:r>
+              <a:rPr lang="en-US" sz="1800" b="1" dirty="0">
+                <a:solidFill>
+                  <a:srgbClr val="1E40AF"/>
+                </a:solidFill>
+                <a:latin typeface="Noto Sans KR" pitchFamily="34" charset="0"/>
+                <a:ea typeface="Noto Sans KR" pitchFamily="34" charset="-122"/>
+                <a:cs typeface="Noto Sans KR" pitchFamily="34" charset="-120"/>
+              </a:rPr>
+              <a:t>다층 퍼셉트론 (MLP)</a:t>
+            </a:r>
+            <a:endParaRPr lang="en-US" sz="1800" dirty="0"/>
+          </a:p>
+        </p:txBody>
+      </p:sp>
+      <p:sp>
+        <p:nvSpPr>
+          <p:cNvPr id="19" name="Text 3"/>
+          <p:cNvSpPr/>
+          <p:nvPr/>
+        </p:nvSpPr>
+        <p:spPr>
+          <a:xfrm>
+            <a:off x="457200" y="1638300"/>
+            <a:ext cx="5257800" cy="457200"/>
+          </a:xfrm>
+          <a:prstGeom prst="rect">
+            <a:avLst/>
+          </a:prstGeom>
+          <a:noFill/>
+          <a:ln/>
+        </p:spPr>
+        <p:txBody>
+          <a:bodyPr vert="horz" wrap="square" lIns="0" tIns="0" rIns="0" bIns="0" rtlCol="0" anchor="t"/>
+          <a:lstStyle/>
+          <a:p>
+            <a:pPr marL="0" indent="0">
+              <a:lnSpc>
+                <a:spcPts val="1800"/>
+              </a:lnSpc>
+              <a:buNone/>
+            </a:pPr>
+            <a:r>
+              <a:rPr lang="en-US" sz="1200" dirty="0">
+                <a:solidFill>
+                  <a:srgbClr val="374151"/>
+                </a:solidFill>
+                <a:latin typeface="Noto Sans KR" pitchFamily="34" charset="0"/>
+                <a:ea typeface="Noto Sans KR" pitchFamily="34" charset="-122"/>
+                <a:cs typeface="Noto Sans KR" pitchFamily="34" charset="-120"/>
+              </a:rPr>
+              <a:t>신경망 접근법은 복잡한 비선형 패턴을 포착하는 데 효과적이며, 거래 데이터의 숨겨진 패턴을 학습할 수 있습니다.</a:t>
+            </a:r>
+            <a:endParaRPr lang="en-US" sz="1200" dirty="0"/>
+          </a:p>
+        </p:txBody>
+      </p:sp>
+      <p:sp>
+        <p:nvSpPr>
+          <p:cNvPr id="20" name="Text 4"/>
+          <p:cNvSpPr/>
+          <p:nvPr/>
+        </p:nvSpPr>
+        <p:spPr>
+          <a:xfrm>
+            <a:off x="457200" y="2209800"/>
+            <a:ext cx="6309360" cy="228600"/>
+          </a:xfrm>
+          <a:prstGeom prst="rect">
+            <a:avLst/>
+          </a:prstGeom>
+          <a:noFill/>
+          <a:ln/>
+        </p:spPr>
+        <p:txBody>
+          <a:bodyPr vert="horz" wrap="square" lIns="0" tIns="0" rIns="0" bIns="0" rtlCol="0" anchor="t"/>
+          <a:lstStyle/>
+          <a:p>
+            <a:pPr marL="0" indent="0">
+              <a:lnSpc>
+                <a:spcPts val="1800"/>
+              </a:lnSpc>
+              <a:buNone/>
+            </a:pPr>
+            <a:r>
+              <a:rPr lang="en-US" sz="1200" dirty="0">
+                <a:solidFill>
+                  <a:srgbClr val="374151"/>
+                </a:solidFill>
+                <a:latin typeface="Noto Sans KR" pitchFamily="34" charset="0"/>
+                <a:ea typeface="Noto Sans KR" pitchFamily="34" charset="-122"/>
+                <a:cs typeface="Noto Sans KR" pitchFamily="34" charset="-120"/>
+              </a:rPr>
+              <a:t>특히 사기 거래의 복잡한 패턴을 포착하는 데 유리합니다.</a:t>
+            </a:r>
+            <a:endParaRPr lang="en-US" sz="1200" dirty="0"/>
+          </a:p>
+        </p:txBody>
+      </p:sp>
+      <p:sp>
+        <p:nvSpPr>
+          <p:cNvPr id="21" name="Text 5"/>
+          <p:cNvSpPr/>
+          <p:nvPr/>
+        </p:nvSpPr>
+        <p:spPr>
+          <a:xfrm>
+            <a:off x="457200" y="3048000"/>
+            <a:ext cx="5257800" cy="266700"/>
+          </a:xfrm>
+          <a:prstGeom prst="rect">
+            <a:avLst/>
+          </a:prstGeom>
+          <a:noFill/>
+          <a:ln/>
+        </p:spPr>
+        <p:txBody>
+          <a:bodyPr vert="horz" wrap="square" lIns="0" tIns="0" rIns="0" bIns="0" rtlCol="0" anchor="t"/>
+          <a:lstStyle/>
+          <a:p>
+            <a:pPr marL="0" indent="0">
+              <a:lnSpc>
+                <a:spcPts val="2100"/>
+              </a:lnSpc>
+              <a:buNone/>
+            </a:pPr>
+            <a:r>
+              <a:rPr lang="en-US" sz="1500" b="1" dirty="0">
+                <a:solidFill>
+                  <a:srgbClr val="1D4ED8"/>
+                </a:solidFill>
+                <a:latin typeface="Noto Sans KR" pitchFamily="34" charset="0"/>
+                <a:ea typeface="Noto Sans KR" pitchFamily="34" charset="-122"/>
+                <a:cs typeface="Noto Sans KR" pitchFamily="34" charset="-120"/>
+              </a:rPr>
+              <a:t>주요 발견점</a:t>
+            </a:r>
+            <a:endParaRPr lang="en-US" sz="1500" dirty="0"/>
+          </a:p>
+        </p:txBody>
+      </p:sp>
+      <p:sp>
+        <p:nvSpPr>
+          <p:cNvPr id="22" name="Text 6"/>
+          <p:cNvSpPr/>
+          <p:nvPr/>
+        </p:nvSpPr>
+        <p:spPr>
+          <a:xfrm>
+            <a:off x="457200" y="3429000"/>
+            <a:ext cx="6309360" cy="228600"/>
+          </a:xfrm>
+          <a:prstGeom prst="rect">
+            <a:avLst/>
+          </a:prstGeom>
+          <a:noFill/>
+          <a:ln/>
+        </p:spPr>
+        <p:txBody>
+          <a:bodyPr vert="horz" wrap="square" lIns="0" tIns="0" rIns="0" bIns="0" rtlCol="0" anchor="t"/>
+          <a:lstStyle/>
+          <a:p>
+            <a:pPr marL="342900" indent="-342900" algn="l">
+              <a:lnSpc>
+                <a:spcPts val="1800"/>
+              </a:lnSpc>
+              <a:buSzPct val="100000"/>
+              <a:buChar char="•"/>
+            </a:pPr>
+            <a:r>
+              <a:rPr lang="en-US" sz="1200" dirty="0">
+                <a:solidFill>
+                  <a:srgbClr val="374151"/>
+                </a:solidFill>
+                <a:latin typeface="Noto Sans KR" pitchFamily="34" charset="0"/>
+                <a:ea typeface="Noto Sans KR" pitchFamily="34" charset="-122"/>
+                <a:cs typeface="Noto Sans KR" pitchFamily="34" charset="-120"/>
+              </a:rPr>
+              <a:t>MLP 모델은 높은 AUC 값을 보임 (0.9528)</a:t>
+            </a:r>
+            <a:endParaRPr lang="en-US" sz="1200" dirty="0"/>
+          </a:p>
+        </p:txBody>
+      </p:sp>
+      <p:sp>
+        <p:nvSpPr>
+          <p:cNvPr id="23" name="Text 7"/>
+          <p:cNvSpPr/>
+          <p:nvPr/>
+        </p:nvSpPr>
+        <p:spPr>
+          <a:xfrm>
+            <a:off x="457200" y="3733800"/>
+            <a:ext cx="6309360" cy="228600"/>
+          </a:xfrm>
+          <a:prstGeom prst="rect">
+            <a:avLst/>
+          </a:prstGeom>
+          <a:noFill/>
+          <a:ln/>
+        </p:spPr>
+        <p:txBody>
+          <a:bodyPr vert="horz" wrap="square" lIns="0" tIns="0" rIns="0" bIns="0" rtlCol="0" anchor="t"/>
+          <a:lstStyle/>
+          <a:p>
+            <a:pPr marL="342900" indent="-342900" algn="l">
+              <a:lnSpc>
+                <a:spcPts val="1800"/>
+              </a:lnSpc>
+              <a:buSzPct val="100000"/>
+              <a:buChar char="•"/>
+            </a:pPr>
+            <a:r>
+              <a:rPr lang="en-US" sz="1200" dirty="0">
+                <a:solidFill>
+                  <a:srgbClr val="374151"/>
+                </a:solidFill>
+                <a:latin typeface="Noto Sans KR" pitchFamily="34" charset="0"/>
+                <a:ea typeface="Noto Sans KR" pitchFamily="34" charset="-122"/>
+                <a:cs typeface="Noto Sans KR" pitchFamily="34" charset="-120"/>
+              </a:rPr>
+              <a:t>높은 정밀도 (0.8514)를 보이지만, 재현율은 상대적으로 낮음 (0.6429)</a:t>
+            </a:r>
+            <a:endParaRPr lang="en-US" sz="1200" dirty="0"/>
+          </a:p>
+        </p:txBody>
+      </p:sp>
+      <p:sp>
+        <p:nvSpPr>
+          <p:cNvPr id="24" name="Text 8"/>
+          <p:cNvSpPr/>
+          <p:nvPr/>
+        </p:nvSpPr>
+        <p:spPr>
+          <a:xfrm>
+            <a:off x="457200" y="4038600"/>
+            <a:ext cx="5257800" cy="457200"/>
+          </a:xfrm>
+          <a:prstGeom prst="rect">
+            <a:avLst/>
+          </a:prstGeom>
+          <a:noFill/>
+          <a:ln/>
+        </p:spPr>
+        <p:txBody>
+          <a:bodyPr vert="horz" wrap="square" lIns="0" tIns="0" rIns="0" bIns="0" rtlCol="0" anchor="t"/>
+          <a:lstStyle/>
+          <a:p>
+            <a:pPr marL="342900" indent="-342900" algn="l">
+              <a:lnSpc>
+                <a:spcPts val="1800"/>
+              </a:lnSpc>
+              <a:buSzPct val="100000"/>
+              <a:buChar char="•"/>
+            </a:pPr>
+            <a:r>
+              <a:rPr lang="en-US" sz="1200" dirty="0">
+                <a:solidFill>
+                  <a:srgbClr val="374151"/>
+                </a:solidFill>
+                <a:latin typeface="Noto Sans KR" pitchFamily="34" charset="0"/>
+                <a:ea typeface="Noto Sans KR" pitchFamily="34" charset="-122"/>
+                <a:cs typeface="Noto Sans KR" pitchFamily="34" charset="-120"/>
+              </a:rPr>
+              <a:t>SMOTE와 결합된 MLP 모델 (oversample_capped_mlp)이 가장 우수한 성능을 보임</a:t>
+            </a:r>
+            <a:endParaRPr lang="en-US" sz="1200" dirty="0"/>
+          </a:p>
+        </p:txBody>
+      </p:sp>
+      <p:sp>
+        <p:nvSpPr>
+          <p:cNvPr id="25" name="Text 9"/>
+          <p:cNvSpPr/>
+          <p:nvPr/>
+        </p:nvSpPr>
+        <p:spPr>
+          <a:xfrm>
+            <a:off x="457200" y="4572000"/>
+            <a:ext cx="6309360" cy="228600"/>
+          </a:xfrm>
+          <a:prstGeom prst="rect">
+            <a:avLst/>
+          </a:prstGeom>
+          <a:noFill/>
+          <a:ln/>
+        </p:spPr>
+        <p:txBody>
+          <a:bodyPr vert="horz" wrap="square" lIns="0" tIns="0" rIns="0" bIns="0" rtlCol="0" anchor="t"/>
+          <a:lstStyle/>
+          <a:p>
+            <a:pPr marL="342900" indent="-342900" algn="l">
+              <a:lnSpc>
+                <a:spcPts val="1800"/>
+              </a:lnSpc>
+              <a:buSzPct val="100000"/>
+              <a:buChar char="•"/>
+            </a:pPr>
+            <a:r>
+              <a:rPr lang="en-US" sz="1200" dirty="0">
+                <a:solidFill>
+                  <a:srgbClr val="374151"/>
+                </a:solidFill>
+                <a:latin typeface="Noto Sans KR" pitchFamily="34" charset="0"/>
+                <a:ea typeface="Noto Sans KR" pitchFamily="34" charset="-122"/>
+                <a:cs typeface="Noto Sans KR" pitchFamily="34" charset="-120"/>
+              </a:rPr>
+              <a:t>모델이 사기 거래를 포착하는 데에는 효과적이지만, 완벽한 모델은 아님</a:t>
+            </a:r>
+            <a:endParaRPr lang="en-US" sz="1200" dirty="0"/>
+          </a:p>
+        </p:txBody>
+      </p:sp>
+      <p:sp>
+        <p:nvSpPr>
+          <p:cNvPr id="26" name="Text 10"/>
+          <p:cNvSpPr/>
+          <p:nvPr/>
+        </p:nvSpPr>
+        <p:spPr>
+          <a:xfrm>
+            <a:off x="6477000" y="1219200"/>
+            <a:ext cx="5257800" cy="266700"/>
+          </a:xfrm>
+          <a:prstGeom prst="rect">
+            <a:avLst/>
+          </a:prstGeom>
+          <a:noFill/>
+          <a:ln/>
+        </p:spPr>
+        <p:txBody>
+          <a:bodyPr vert="horz" wrap="square" lIns="0" tIns="0" rIns="0" bIns="0" rtlCol="0" anchor="t"/>
+          <a:lstStyle/>
+          <a:p>
+            <a:pPr marL="0" indent="0">
+              <a:lnSpc>
+                <a:spcPts val="2100"/>
+              </a:lnSpc>
+              <a:buNone/>
+            </a:pPr>
+            <a:r>
+              <a:rPr lang="en-US" sz="1500" b="1" dirty="0">
+                <a:solidFill>
+                  <a:srgbClr val="1D4ED8"/>
+                </a:solidFill>
+                <a:latin typeface="Noto Sans KR" pitchFamily="34" charset="0"/>
+                <a:ea typeface="Noto Sans KR" pitchFamily="34" charset="-122"/>
+                <a:cs typeface="Noto Sans KR" pitchFamily="34" charset="-120"/>
+              </a:rPr>
+              <a:t>MLP 아키텍처</a:t>
+            </a:r>
+            <a:endParaRPr lang="en-US" sz="1500" dirty="0"/>
+          </a:p>
+        </p:txBody>
+      </p:sp>
+      <p:sp>
+        <p:nvSpPr>
+          <p:cNvPr id="27" name="Text 11"/>
+          <p:cNvSpPr/>
+          <p:nvPr/>
+        </p:nvSpPr>
+        <p:spPr>
+          <a:xfrm>
+            <a:off x="6477000" y="5181600"/>
+            <a:ext cx="5257800" cy="266700"/>
+          </a:xfrm>
+          <a:prstGeom prst="rect">
+            <a:avLst/>
+          </a:prstGeom>
+          <a:noFill/>
+          <a:ln/>
+        </p:spPr>
+        <p:txBody>
+          <a:bodyPr vert="horz" wrap="square" lIns="0" tIns="0" rIns="0" bIns="0" rtlCol="0" anchor="t"/>
+          <a:lstStyle/>
+          <a:p>
+            <a:pPr marL="0" indent="0">
+              <a:lnSpc>
+                <a:spcPts val="2100"/>
+              </a:lnSpc>
+              <a:buNone/>
+            </a:pPr>
+            <a:r>
+              <a:rPr lang="en-US" sz="1500" b="1" dirty="0">
+                <a:solidFill>
+                  <a:srgbClr val="1D4ED8"/>
+                </a:solidFill>
+                <a:latin typeface="Noto Sans KR" pitchFamily="34" charset="0"/>
+                <a:ea typeface="Noto Sans KR" pitchFamily="34" charset="-122"/>
+                <a:cs typeface="Noto Sans KR" pitchFamily="34" charset="-120"/>
+              </a:rPr>
+              <a:t>성능 메트릭</a:t>
+            </a:r>
+            <a:endParaRPr lang="en-US" sz="1500" dirty="0"/>
+          </a:p>
+        </p:txBody>
+      </p:sp>
+      <p:sp>
+        <p:nvSpPr>
+          <p:cNvPr id="28" name="Text 12"/>
+          <p:cNvSpPr/>
+          <p:nvPr/>
+        </p:nvSpPr>
+        <p:spPr>
+          <a:xfrm>
+            <a:off x="6591300" y="5676900"/>
+            <a:ext cx="762000" cy="228600"/>
+          </a:xfrm>
+          <a:prstGeom prst="rect">
+            <a:avLst/>
+          </a:prstGeom>
+          <a:noFill/>
+          <a:ln/>
+        </p:spPr>
+        <p:txBody>
+          <a:bodyPr vert="horz" wrap="square" lIns="0" tIns="0" rIns="0" bIns="0" rtlCol="0" anchor="t"/>
+          <a:lstStyle/>
+          <a:p>
+            <a:pPr marL="0" indent="0" algn="ctr">
+              <a:lnSpc>
+                <a:spcPts val="1800"/>
+              </a:lnSpc>
+              <a:buNone/>
+            </a:pPr>
+            <a:r>
+              <a:rPr lang="en-US" sz="1200" b="1" dirty="0">
+                <a:solidFill>
+                  <a:srgbClr val="1E40AF"/>
+                </a:solidFill>
+                <a:latin typeface="Noto Sans KR" pitchFamily="34" charset="0"/>
+                <a:ea typeface="Noto Sans KR" pitchFamily="34" charset="-122"/>
+                <a:cs typeface="Noto Sans KR" pitchFamily="34" charset="-120"/>
+              </a:rPr>
+              <a:t>AUC</a:t>
+            </a:r>
+            <a:endParaRPr lang="en-US" sz="1200" dirty="0"/>
+          </a:p>
+        </p:txBody>
+      </p:sp>
+      <p:sp>
+        <p:nvSpPr>
+          <p:cNvPr id="29" name="Text 13"/>
+          <p:cNvSpPr/>
+          <p:nvPr/>
+        </p:nvSpPr>
+        <p:spPr>
+          <a:xfrm>
+            <a:off x="6515100" y="5905500"/>
+            <a:ext cx="914400" cy="304800"/>
+          </a:xfrm>
+          <a:prstGeom prst="rect">
+            <a:avLst/>
+          </a:prstGeom>
+          <a:noFill/>
+          <a:ln/>
+        </p:spPr>
+        <p:txBody>
+          <a:bodyPr vert="horz" wrap="square" lIns="0" tIns="0" rIns="0" bIns="0" rtlCol="0" anchor="t"/>
+          <a:lstStyle/>
+          <a:p>
+            <a:pPr marL="0" indent="0" algn="ctr">
+              <a:lnSpc>
+                <a:spcPts val="2400"/>
+              </a:lnSpc>
+              <a:buNone/>
+            </a:pPr>
+            <a:r>
+              <a:rPr lang="en-US" sz="1800" b="1" dirty="0">
+                <a:solidFill>
+                  <a:srgbClr val="2563EB"/>
+                </a:solidFill>
+                <a:latin typeface="Noto Sans KR" pitchFamily="34" charset="0"/>
+                <a:ea typeface="Noto Sans KR" pitchFamily="34" charset="-122"/>
+                <a:cs typeface="Noto Sans KR" pitchFamily="34" charset="-120"/>
+              </a:rPr>
+              <a:t>0.9528</a:t>
+            </a:r>
+            <a:endParaRPr lang="en-US" sz="1800" dirty="0"/>
+          </a:p>
+        </p:txBody>
+      </p:sp>
+      <p:sp>
+        <p:nvSpPr>
+          <p:cNvPr id="30" name="Text 14"/>
+          <p:cNvSpPr/>
+          <p:nvPr/>
+        </p:nvSpPr>
+        <p:spPr>
+          <a:xfrm>
+            <a:off x="7658100" y="5676900"/>
+            <a:ext cx="762000" cy="228600"/>
+          </a:xfrm>
+          <a:prstGeom prst="rect">
+            <a:avLst/>
+          </a:prstGeom>
+          <a:noFill/>
+          <a:ln/>
+        </p:spPr>
+        <p:txBody>
+          <a:bodyPr vert="horz" wrap="square" lIns="0" tIns="0" rIns="0" bIns="0" rtlCol="0" anchor="t"/>
+          <a:lstStyle/>
+          <a:p>
+            <a:pPr marL="0" indent="0" algn="ctr">
+              <a:lnSpc>
+                <a:spcPts val="1800"/>
+              </a:lnSpc>
+              <a:buNone/>
+            </a:pPr>
+            <a:r>
+              <a:rPr lang="en-US" sz="1200" b="1" dirty="0">
+                <a:solidFill>
+                  <a:srgbClr val="1E40AF"/>
+                </a:solidFill>
+                <a:latin typeface="Noto Sans KR" pitchFamily="34" charset="0"/>
+                <a:ea typeface="Noto Sans KR" pitchFamily="34" charset="-122"/>
+                <a:cs typeface="Noto Sans KR" pitchFamily="34" charset="-120"/>
+              </a:rPr>
+              <a:t>정확도</a:t>
+            </a:r>
+            <a:endParaRPr lang="en-US" sz="1200" dirty="0"/>
+          </a:p>
+        </p:txBody>
+      </p:sp>
+      <p:sp>
+        <p:nvSpPr>
+          <p:cNvPr id="31" name="Text 15"/>
+          <p:cNvSpPr/>
+          <p:nvPr/>
+        </p:nvSpPr>
+        <p:spPr>
+          <a:xfrm>
+            <a:off x="7581900" y="5905500"/>
+            <a:ext cx="914400" cy="304800"/>
+          </a:xfrm>
+          <a:prstGeom prst="rect">
+            <a:avLst/>
+          </a:prstGeom>
+          <a:noFill/>
+          <a:ln/>
+        </p:spPr>
+        <p:txBody>
+          <a:bodyPr vert="horz" wrap="square" lIns="0" tIns="0" rIns="0" bIns="0" rtlCol="0" anchor="t"/>
+          <a:lstStyle/>
+          <a:p>
+            <a:pPr marL="0" indent="0" algn="ctr">
+              <a:lnSpc>
+                <a:spcPts val="2400"/>
+              </a:lnSpc>
+              <a:buNone/>
+            </a:pPr>
+            <a:r>
+              <a:rPr lang="en-US" sz="1800" b="1" dirty="0">
+                <a:solidFill>
+                  <a:srgbClr val="2563EB"/>
+                </a:solidFill>
+                <a:latin typeface="Noto Sans KR" pitchFamily="34" charset="0"/>
+                <a:ea typeface="Noto Sans KR" pitchFamily="34" charset="-122"/>
+                <a:cs typeface="Noto Sans KR" pitchFamily="34" charset="-120"/>
+              </a:rPr>
+              <a:t>0.9992</a:t>
+            </a:r>
+            <a:endParaRPr lang="en-US" sz="1800" dirty="0"/>
+          </a:p>
+        </p:txBody>
+      </p:sp>
+      <p:sp>
+        <p:nvSpPr>
+          <p:cNvPr id="32" name="Text 16"/>
+          <p:cNvSpPr/>
+          <p:nvPr/>
+        </p:nvSpPr>
+        <p:spPr>
+          <a:xfrm>
+            <a:off x="8724900" y="5676900"/>
+            <a:ext cx="762000" cy="228600"/>
+          </a:xfrm>
+          <a:prstGeom prst="rect">
+            <a:avLst/>
+          </a:prstGeom>
+          <a:noFill/>
+          <a:ln/>
+        </p:spPr>
+        <p:txBody>
+          <a:bodyPr vert="horz" wrap="square" lIns="0" tIns="0" rIns="0" bIns="0" rtlCol="0" anchor="t"/>
+          <a:lstStyle/>
+          <a:p>
+            <a:pPr marL="0" indent="0" algn="ctr">
+              <a:lnSpc>
+                <a:spcPts val="1800"/>
+              </a:lnSpc>
+              <a:buNone/>
+            </a:pPr>
+            <a:r>
+              <a:rPr lang="en-US" sz="1200" b="1" dirty="0">
+                <a:solidFill>
+                  <a:srgbClr val="1E40AF"/>
+                </a:solidFill>
+                <a:latin typeface="Noto Sans KR" pitchFamily="34" charset="0"/>
+                <a:ea typeface="Noto Sans KR" pitchFamily="34" charset="-122"/>
+                <a:cs typeface="Noto Sans KR" pitchFamily="34" charset="-120"/>
+              </a:rPr>
+              <a:t>정밀도</a:t>
+            </a:r>
+            <a:endParaRPr lang="en-US" sz="1200" dirty="0"/>
+          </a:p>
+        </p:txBody>
+      </p:sp>
+      <p:sp>
+        <p:nvSpPr>
+          <p:cNvPr id="33" name="Text 17"/>
+          <p:cNvSpPr/>
+          <p:nvPr/>
+        </p:nvSpPr>
+        <p:spPr>
+          <a:xfrm>
+            <a:off x="8648700" y="5905500"/>
+            <a:ext cx="914400" cy="304800"/>
+          </a:xfrm>
+          <a:prstGeom prst="rect">
+            <a:avLst/>
+          </a:prstGeom>
+          <a:noFill/>
+          <a:ln/>
+        </p:spPr>
+        <p:txBody>
+          <a:bodyPr vert="horz" wrap="square" lIns="0" tIns="0" rIns="0" bIns="0" rtlCol="0" anchor="t"/>
+          <a:lstStyle/>
+          <a:p>
+            <a:pPr marL="0" indent="0" algn="ctr">
+              <a:lnSpc>
+                <a:spcPts val="2400"/>
+              </a:lnSpc>
+              <a:buNone/>
+            </a:pPr>
+            <a:r>
+              <a:rPr lang="en-US" sz="1800" b="1" dirty="0">
+                <a:solidFill>
+                  <a:srgbClr val="2563EB"/>
+                </a:solidFill>
+                <a:latin typeface="Noto Sans KR" pitchFamily="34" charset="0"/>
+                <a:ea typeface="Noto Sans KR" pitchFamily="34" charset="-122"/>
+                <a:cs typeface="Noto Sans KR" pitchFamily="34" charset="-120"/>
+              </a:rPr>
+              <a:t>0.8514</a:t>
+            </a:r>
+            <a:endParaRPr lang="en-US" sz="1800" dirty="0"/>
+          </a:p>
+        </p:txBody>
+      </p:sp>
+      <p:sp>
+        <p:nvSpPr>
+          <p:cNvPr id="34" name="Text 18"/>
+          <p:cNvSpPr/>
+          <p:nvPr/>
+        </p:nvSpPr>
+        <p:spPr>
+          <a:xfrm>
+            <a:off x="9791700" y="5676900"/>
+            <a:ext cx="762000" cy="228600"/>
+          </a:xfrm>
+          <a:prstGeom prst="rect">
+            <a:avLst/>
+          </a:prstGeom>
+          <a:noFill/>
+          <a:ln/>
+        </p:spPr>
+        <p:txBody>
+          <a:bodyPr vert="horz" wrap="square" lIns="0" tIns="0" rIns="0" bIns="0" rtlCol="0" anchor="t"/>
+          <a:lstStyle/>
+          <a:p>
+            <a:pPr marL="0" indent="0" algn="ctr">
+              <a:lnSpc>
+                <a:spcPts val="1800"/>
+              </a:lnSpc>
+              <a:buNone/>
+            </a:pPr>
+            <a:r>
+              <a:rPr lang="en-US" sz="1200" b="1" dirty="0">
+                <a:solidFill>
+                  <a:srgbClr val="1E40AF"/>
+                </a:solidFill>
+                <a:latin typeface="Noto Sans KR" pitchFamily="34" charset="0"/>
+                <a:ea typeface="Noto Sans KR" pitchFamily="34" charset="-122"/>
+                <a:cs typeface="Noto Sans KR" pitchFamily="34" charset="-120"/>
+              </a:rPr>
+              <a:t>재현율</a:t>
+            </a:r>
+            <a:endParaRPr lang="en-US" sz="1200" dirty="0"/>
+          </a:p>
+        </p:txBody>
+      </p:sp>
+      <p:sp>
+        <p:nvSpPr>
+          <p:cNvPr id="35" name="Text 19"/>
+          <p:cNvSpPr/>
+          <p:nvPr/>
+        </p:nvSpPr>
+        <p:spPr>
+          <a:xfrm>
+            <a:off x="9715500" y="5905500"/>
+            <a:ext cx="914400" cy="304800"/>
+          </a:xfrm>
+          <a:prstGeom prst="rect">
+            <a:avLst/>
+          </a:prstGeom>
+          <a:noFill/>
+          <a:ln/>
+        </p:spPr>
+        <p:txBody>
+          <a:bodyPr vert="horz" wrap="square" lIns="0" tIns="0" rIns="0" bIns="0" rtlCol="0" anchor="t"/>
+          <a:lstStyle/>
+          <a:p>
+            <a:pPr marL="0" indent="0" algn="ctr">
+              <a:lnSpc>
+                <a:spcPts val="2400"/>
+              </a:lnSpc>
+              <a:buNone/>
+            </a:pPr>
+            <a:r>
+              <a:rPr lang="en-US" sz="1800" b="1" dirty="0">
+                <a:solidFill>
+                  <a:srgbClr val="2563EB"/>
+                </a:solidFill>
+                <a:latin typeface="Noto Sans KR" pitchFamily="34" charset="0"/>
+                <a:ea typeface="Noto Sans KR" pitchFamily="34" charset="-122"/>
+                <a:cs typeface="Noto Sans KR" pitchFamily="34" charset="-120"/>
+              </a:rPr>
+              <a:t>0.6429</a:t>
+            </a:r>
+            <a:endParaRPr lang="en-US" sz="1800" dirty="0"/>
+          </a:p>
+        </p:txBody>
+      </p:sp>
+      <p:sp>
+        <p:nvSpPr>
+          <p:cNvPr id="36" name="Text 20"/>
+          <p:cNvSpPr/>
+          <p:nvPr/>
+        </p:nvSpPr>
+        <p:spPr>
+          <a:xfrm>
+            <a:off x="10782300" y="5676900"/>
+            <a:ext cx="914400" cy="228600"/>
+          </a:xfrm>
+          <a:prstGeom prst="rect">
+            <a:avLst/>
+          </a:prstGeom>
+          <a:noFill/>
+          <a:ln/>
+        </p:spPr>
+        <p:txBody>
+          <a:bodyPr vert="horz" wrap="square" lIns="0" tIns="0" rIns="0" bIns="0" rtlCol="0" anchor="t"/>
+          <a:lstStyle/>
+          <a:p>
+            <a:pPr marL="0" indent="0" algn="ctr">
+              <a:lnSpc>
+                <a:spcPts val="1800"/>
+              </a:lnSpc>
+              <a:buNone/>
+            </a:pPr>
+            <a:r>
+              <a:rPr lang="en-US" sz="1200" b="1" dirty="0">
+                <a:solidFill>
+                  <a:srgbClr val="1E40AF"/>
+                </a:solidFill>
+                <a:latin typeface="Noto Sans KR" pitchFamily="34" charset="0"/>
+                <a:ea typeface="Noto Sans KR" pitchFamily="34" charset="-122"/>
+                <a:cs typeface="Noto Sans KR" pitchFamily="34" charset="-120"/>
+              </a:rPr>
+              <a:t>F1-score</a:t>
+            </a:r>
+            <a:endParaRPr lang="en-US" sz="1200" dirty="0"/>
+          </a:p>
+        </p:txBody>
+      </p:sp>
+      <p:sp>
+        <p:nvSpPr>
+          <p:cNvPr id="37" name="Text 21"/>
+          <p:cNvSpPr/>
+          <p:nvPr/>
+        </p:nvSpPr>
+        <p:spPr>
+          <a:xfrm>
+            <a:off x="10782300" y="5905500"/>
+            <a:ext cx="914400" cy="304800"/>
+          </a:xfrm>
+          <a:prstGeom prst="rect">
+            <a:avLst/>
+          </a:prstGeom>
+          <a:noFill/>
+          <a:ln/>
+        </p:spPr>
+        <p:txBody>
+          <a:bodyPr vert="horz" wrap="square" lIns="0" tIns="0" rIns="0" bIns="0" rtlCol="0" anchor="t"/>
+          <a:lstStyle/>
+          <a:p>
+            <a:pPr marL="0" indent="0" algn="ctr">
+              <a:lnSpc>
+                <a:spcPts val="2400"/>
+              </a:lnSpc>
+              <a:buNone/>
+            </a:pPr>
+            <a:r>
+              <a:rPr lang="en-US" sz="1800" b="1" dirty="0">
+                <a:solidFill>
+                  <a:srgbClr val="2563EB"/>
+                </a:solidFill>
+                <a:latin typeface="Noto Sans KR" pitchFamily="34" charset="0"/>
+                <a:ea typeface="Noto Sans KR" pitchFamily="34" charset="-122"/>
+                <a:cs typeface="Noto Sans KR" pitchFamily="34" charset="-120"/>
+              </a:rPr>
+              <a:t>0.7326</a:t>
+            </a:r>
+            <a:endParaRPr lang="en-US" sz="1800" dirty="0"/>
+          </a:p>
+        </p:txBody>
+      </p:sp>
+    </p:spTree>
+  </p:cSld>
+  <p:clrMapOvr>
+    <a:masterClrMapping/>
+  </p:clrMapOvr>
+</p:sld>
+</file>
+
+<file path=ppt/slides/slide18.xml><?xml version="1.0" encoding="utf-8"?>
+<p:sld xmlns:a="http://schemas.openxmlformats.org/drawingml/2006/main" xmlns:r="http://schemas.openxmlformats.org/officeDocument/2006/relationships" xmlns:p="http://schemas.openxmlformats.org/presentationml/2006/main">
   <p:cSld name="Slide 15">
     <p:spTree>
       <p:nvGrpSpPr>
@@ -20779,7 +21441,7 @@
 </p:sld>
 </file>
 
-<file path=ppt/slides/slide18.xml><?xml version="1.0" encoding="utf-8"?>
+<file path=ppt/slides/slide19.xml><?xml version="1.0" encoding="utf-8"?>
 <p:sld xmlns:a="http://schemas.openxmlformats.org/drawingml/2006/main" xmlns:r="http://schemas.openxmlformats.org/officeDocument/2006/relationships" xmlns:p="http://schemas.openxmlformats.org/presentationml/2006/main">
   <p:cSld name="Slide 16">
     <p:spTree>
@@ -21541,1609 +22203,6 @@
                 <a:cs typeface="Noto Sans KR" pitchFamily="34" charset="-120"/>
               </a:rPr>
               <a:t>최종 MLPClassifier는 "블랙박스" 모델로, 개별 피처의 기여도를 직관적으로 설명하기 어렵습니다. 이는 규제 요구사항과 신뢰 구축을 위해 문제가 됩니다.</a:t>
-            </a:r>
-            <a:endParaRPr lang="en-US" sz="1200" dirty="0"/>
-          </a:p>
-        </p:txBody>
-      </p:sp>
-    </p:spTree>
-  </p:cSld>
-  <p:clrMapOvr>
-    <a:masterClrMapping/>
-  </p:clrMapOvr>
-</p:sld>
-</file>
-
-<file path=ppt/slides/slide19.xml><?xml version="1.0" encoding="utf-8"?>
-<p:sld xmlns:a="http://schemas.openxmlformats.org/drawingml/2006/main" xmlns:r="http://schemas.openxmlformats.org/officeDocument/2006/relationships" xmlns:p="http://schemas.openxmlformats.org/presentationml/2006/main">
-  <p:cSld name="Slide 17">
-    <p:spTree>
-      <p:nvGrpSpPr>
-        <p:cNvPr id="1" name=""/>
-        <p:cNvGrpSpPr/>
-        <p:nvPr/>
-      </p:nvGrpSpPr>
-      <p:grpSpPr>
-        <a:xfrm>
-          <a:off x="0" y="0"/>
-          <a:ext cx="0" cy="0"/>
-          <a:chOff x="0" y="0"/>
-          <a:chExt cx="0" cy="0"/>
-        </a:xfrm>
-      </p:grpSpPr>
-      <p:pic>
-        <p:nvPicPr>
-          <p:cNvPr id="2" name="Image 0" descr="preencoded.png"/>
-          <p:cNvPicPr>
-            <a:picLocks noChangeAspect="1"/>
-          </p:cNvPicPr>
-          <p:nvPr/>
-        </p:nvPicPr>
-        <p:blipFill>
-          <a:blip r:embed="rId3"/>
-          <a:stretch>
-            <a:fillRect/>
-          </a:stretch>
-        </p:blipFill>
-        <p:spPr>
-          <a:xfrm>
-            <a:off x="0" y="0"/>
-            <a:ext cx="12192000" cy="6858000"/>
-          </a:xfrm>
-          <a:prstGeom prst="rect">
-            <a:avLst/>
-          </a:prstGeom>
-        </p:spPr>
-      </p:pic>
-      <p:pic>
-        <p:nvPicPr>
-          <p:cNvPr id="3" name="Image 1" descr="preencoded.png"/>
-          <p:cNvPicPr>
-            <a:picLocks noChangeAspect="1"/>
-          </p:cNvPicPr>
-          <p:nvPr/>
-        </p:nvPicPr>
-        <p:blipFill>
-          <a:blip r:embed="rId4"/>
-          <a:stretch>
-            <a:fillRect/>
-          </a:stretch>
-        </p:blipFill>
-        <p:spPr>
-          <a:xfrm>
-            <a:off x="0" y="0"/>
-            <a:ext cx="12192000" cy="762000"/>
-          </a:xfrm>
-          <a:prstGeom prst="rect">
-            <a:avLst/>
-          </a:prstGeom>
-        </p:spPr>
-      </p:pic>
-      <p:pic>
-        <p:nvPicPr>
-          <p:cNvPr id="4" name="Image 2" descr="preencoded.png"/>
-          <p:cNvPicPr>
-            <a:picLocks noChangeAspect="1"/>
-          </p:cNvPicPr>
-          <p:nvPr/>
-        </p:nvPicPr>
-        <p:blipFill>
-          <a:blip r:embed="rId5"/>
-          <a:stretch>
-            <a:fillRect/>
-          </a:stretch>
-        </p:blipFill>
-        <p:spPr>
-          <a:xfrm>
-            <a:off x="304800" y="1066800"/>
-            <a:ext cx="3708350" cy="4457700"/>
-          </a:xfrm>
-          <a:prstGeom prst="rect">
-            <a:avLst/>
-          </a:prstGeom>
-        </p:spPr>
-      </p:pic>
-      <p:pic>
-        <p:nvPicPr>
-          <p:cNvPr id="5" name="Image 3" descr="preencoded.png"/>
-          <p:cNvPicPr>
-            <a:picLocks noChangeAspect="1"/>
-          </p:cNvPicPr>
-          <p:nvPr/>
-        </p:nvPicPr>
-        <p:blipFill>
-          <a:blip r:embed="rId6"/>
-          <a:stretch>
-            <a:fillRect/>
-          </a:stretch>
-        </p:blipFill>
-        <p:spPr>
-          <a:xfrm>
-            <a:off x="533400" y="1343025"/>
-            <a:ext cx="247650" cy="285750"/>
-          </a:xfrm>
-          <a:prstGeom prst="rect">
-            <a:avLst/>
-          </a:prstGeom>
-        </p:spPr>
-      </p:pic>
-      <p:pic>
-        <p:nvPicPr>
-          <p:cNvPr id="6" name="Image 4" descr="preencoded.png"/>
-          <p:cNvPicPr>
-            <a:picLocks noChangeAspect="1"/>
-          </p:cNvPicPr>
-          <p:nvPr/>
-        </p:nvPicPr>
-        <p:blipFill>
-          <a:blip r:embed="rId7"/>
-          <a:stretch>
-            <a:fillRect/>
-          </a:stretch>
-        </p:blipFill>
-        <p:spPr>
-          <a:xfrm>
-            <a:off x="533400" y="1790700"/>
-            <a:ext cx="3251150" cy="457200"/>
-          </a:xfrm>
-          <a:prstGeom prst="rect">
-            <a:avLst/>
-          </a:prstGeom>
-        </p:spPr>
-      </p:pic>
-      <p:pic>
-        <p:nvPicPr>
-          <p:cNvPr id="7" name="Image 5" descr="preencoded.png"/>
-          <p:cNvPicPr>
-            <a:picLocks noChangeAspect="1"/>
-          </p:cNvPicPr>
-          <p:nvPr/>
-        </p:nvPicPr>
-        <p:blipFill>
-          <a:blip r:embed="rId8"/>
-          <a:stretch>
-            <a:fillRect/>
-          </a:stretch>
-        </p:blipFill>
-        <p:spPr>
-          <a:xfrm>
-            <a:off x="647700" y="1943100"/>
-            <a:ext cx="152400" cy="152400"/>
-          </a:xfrm>
-          <a:prstGeom prst="rect">
-            <a:avLst/>
-          </a:prstGeom>
-        </p:spPr>
-      </p:pic>
-      <p:pic>
-        <p:nvPicPr>
-          <p:cNvPr id="8" name="Image 6" descr="preencoded.png"/>
-          <p:cNvPicPr>
-            <a:picLocks noChangeAspect="1"/>
-          </p:cNvPicPr>
-          <p:nvPr/>
-        </p:nvPicPr>
-        <p:blipFill>
-          <a:blip r:embed="rId9"/>
-          <a:stretch>
-            <a:fillRect/>
-          </a:stretch>
-        </p:blipFill>
-        <p:spPr>
-          <a:xfrm>
-            <a:off x="533400" y="2362200"/>
-            <a:ext cx="3251150" cy="685800"/>
-          </a:xfrm>
-          <a:prstGeom prst="rect">
-            <a:avLst/>
-          </a:prstGeom>
-        </p:spPr>
-      </p:pic>
-      <p:pic>
-        <p:nvPicPr>
-          <p:cNvPr id="9" name="Image 7" descr="preencoded.png"/>
-          <p:cNvPicPr>
-            <a:picLocks noChangeAspect="1"/>
-          </p:cNvPicPr>
-          <p:nvPr/>
-        </p:nvPicPr>
-        <p:blipFill>
-          <a:blip r:embed="rId10"/>
-          <a:stretch>
-            <a:fillRect/>
-          </a:stretch>
-        </p:blipFill>
-        <p:spPr>
-          <a:xfrm>
-            <a:off x="647700" y="2514600"/>
-            <a:ext cx="171450" cy="152400"/>
-          </a:xfrm>
-          <a:prstGeom prst="rect">
-            <a:avLst/>
-          </a:prstGeom>
-        </p:spPr>
-      </p:pic>
-      <p:pic>
-        <p:nvPicPr>
-          <p:cNvPr id="10" name="Image 8" descr="preencoded.png"/>
-          <p:cNvPicPr>
-            <a:picLocks noChangeAspect="1"/>
-          </p:cNvPicPr>
-          <p:nvPr/>
-        </p:nvPicPr>
-        <p:blipFill>
-          <a:blip r:embed="rId7"/>
-          <a:stretch>
-            <a:fillRect/>
-          </a:stretch>
-        </p:blipFill>
-        <p:spPr>
-          <a:xfrm>
-            <a:off x="533400" y="3162300"/>
-            <a:ext cx="3251150" cy="457200"/>
-          </a:xfrm>
-          <a:prstGeom prst="rect">
-            <a:avLst/>
-          </a:prstGeom>
-        </p:spPr>
-      </p:pic>
-      <p:pic>
-        <p:nvPicPr>
-          <p:cNvPr id="11" name="Image 9" descr="preencoded.png"/>
-          <p:cNvPicPr>
-            <a:picLocks noChangeAspect="1"/>
-          </p:cNvPicPr>
-          <p:nvPr/>
-        </p:nvPicPr>
-        <p:blipFill>
-          <a:blip r:embed="rId11"/>
-          <a:stretch>
-            <a:fillRect/>
-          </a:stretch>
-        </p:blipFill>
-        <p:spPr>
-          <a:xfrm>
-            <a:off x="647700" y="3314700"/>
-            <a:ext cx="190500" cy="152400"/>
-          </a:xfrm>
-          <a:prstGeom prst="rect">
-            <a:avLst/>
-          </a:prstGeom>
-        </p:spPr>
-      </p:pic>
-      <p:pic>
-        <p:nvPicPr>
-          <p:cNvPr id="12" name="Image 10" descr="preencoded.png"/>
-          <p:cNvPicPr>
-            <a:picLocks noChangeAspect="1"/>
-          </p:cNvPicPr>
-          <p:nvPr/>
-        </p:nvPicPr>
-        <p:blipFill>
-          <a:blip r:embed="rId7"/>
-          <a:stretch>
-            <a:fillRect/>
-          </a:stretch>
-        </p:blipFill>
-        <p:spPr>
-          <a:xfrm>
-            <a:off x="533400" y="3733800"/>
-            <a:ext cx="3251150" cy="457200"/>
-          </a:xfrm>
-          <a:prstGeom prst="rect">
-            <a:avLst/>
-          </a:prstGeom>
-        </p:spPr>
-      </p:pic>
-      <p:pic>
-        <p:nvPicPr>
-          <p:cNvPr id="13" name="Image 11" descr="preencoded.png"/>
-          <p:cNvPicPr>
-            <a:picLocks noChangeAspect="1"/>
-          </p:cNvPicPr>
-          <p:nvPr/>
-        </p:nvPicPr>
-        <p:blipFill>
-          <a:blip r:embed="rId12"/>
-          <a:stretch>
-            <a:fillRect/>
-          </a:stretch>
-        </p:blipFill>
-        <p:spPr>
-          <a:xfrm>
-            <a:off x="647700" y="3886200"/>
-            <a:ext cx="152400" cy="152400"/>
-          </a:xfrm>
-          <a:prstGeom prst="rect">
-            <a:avLst/>
-          </a:prstGeom>
-        </p:spPr>
-      </p:pic>
-      <p:pic>
-        <p:nvPicPr>
-          <p:cNvPr id="14" name="Image 12" descr="preencoded.png"/>
-          <p:cNvPicPr>
-            <a:picLocks noChangeAspect="1"/>
-          </p:cNvPicPr>
-          <p:nvPr/>
-        </p:nvPicPr>
-        <p:blipFill>
-          <a:blip r:embed="rId13"/>
-          <a:stretch>
-            <a:fillRect/>
-          </a:stretch>
-        </p:blipFill>
-        <p:spPr>
-          <a:xfrm>
-            <a:off x="4241750" y="1066800"/>
-            <a:ext cx="3708350" cy="4457700"/>
-          </a:xfrm>
-          <a:prstGeom prst="rect">
-            <a:avLst/>
-          </a:prstGeom>
-        </p:spPr>
-      </p:pic>
-      <p:pic>
-        <p:nvPicPr>
-          <p:cNvPr id="15" name="Image 13" descr="preencoded.png"/>
-          <p:cNvPicPr>
-            <a:picLocks noChangeAspect="1"/>
-          </p:cNvPicPr>
-          <p:nvPr/>
-        </p:nvPicPr>
-        <p:blipFill>
-          <a:blip r:embed="rId14"/>
-          <a:stretch>
-            <a:fillRect/>
-          </a:stretch>
-        </p:blipFill>
-        <p:spPr>
-          <a:xfrm>
-            <a:off x="4470350" y="1343025"/>
-            <a:ext cx="219075" cy="285750"/>
-          </a:xfrm>
-          <a:prstGeom prst="rect">
-            <a:avLst/>
-          </a:prstGeom>
-        </p:spPr>
-      </p:pic>
-      <p:pic>
-        <p:nvPicPr>
-          <p:cNvPr id="16" name="Image 14" descr="preencoded.png"/>
-          <p:cNvPicPr>
-            <a:picLocks noChangeAspect="1"/>
-          </p:cNvPicPr>
-          <p:nvPr/>
-        </p:nvPicPr>
-        <p:blipFill>
-          <a:blip r:embed="rId15"/>
-          <a:stretch>
-            <a:fillRect/>
-          </a:stretch>
-        </p:blipFill>
-        <p:spPr>
-          <a:xfrm>
-            <a:off x="4470350" y="1790700"/>
-            <a:ext cx="3251150" cy="1066800"/>
-          </a:xfrm>
-          <a:prstGeom prst="rect">
-            <a:avLst/>
-          </a:prstGeom>
-        </p:spPr>
-      </p:pic>
-      <p:pic>
-        <p:nvPicPr>
-          <p:cNvPr id="17" name="Image 15" descr="preencoded.png"/>
-          <p:cNvPicPr>
-            <a:picLocks noChangeAspect="1"/>
-          </p:cNvPicPr>
-          <p:nvPr/>
-        </p:nvPicPr>
-        <p:blipFill>
-          <a:blip r:embed="rId16"/>
-          <a:stretch>
-            <a:fillRect/>
-          </a:stretch>
-        </p:blipFill>
-        <p:spPr>
-          <a:xfrm>
-            <a:off x="4622750" y="1981200"/>
-            <a:ext cx="152400" cy="152400"/>
-          </a:xfrm>
-          <a:prstGeom prst="rect">
-            <a:avLst/>
-          </a:prstGeom>
-        </p:spPr>
-      </p:pic>
-      <p:pic>
-        <p:nvPicPr>
-          <p:cNvPr id="18" name="Image 16" descr="preencoded.png"/>
-          <p:cNvPicPr>
-            <a:picLocks noChangeAspect="1"/>
-          </p:cNvPicPr>
-          <p:nvPr/>
-        </p:nvPicPr>
-        <p:blipFill>
-          <a:blip r:embed="rId17"/>
-          <a:stretch>
-            <a:fillRect/>
-          </a:stretch>
-        </p:blipFill>
-        <p:spPr>
-          <a:xfrm>
-            <a:off x="4470350" y="3009900"/>
-            <a:ext cx="3251150" cy="1066800"/>
-          </a:xfrm>
-          <a:prstGeom prst="rect">
-            <a:avLst/>
-          </a:prstGeom>
-        </p:spPr>
-      </p:pic>
-      <p:pic>
-        <p:nvPicPr>
-          <p:cNvPr id="19" name="Image 17" descr="preencoded.png"/>
-          <p:cNvPicPr>
-            <a:picLocks noChangeAspect="1"/>
-          </p:cNvPicPr>
-          <p:nvPr/>
-        </p:nvPicPr>
-        <p:blipFill>
-          <a:blip r:embed="rId18"/>
-          <a:stretch>
-            <a:fillRect/>
-          </a:stretch>
-        </p:blipFill>
-        <p:spPr>
-          <a:xfrm>
-            <a:off x="4622750" y="3200400"/>
-            <a:ext cx="190500" cy="152400"/>
-          </a:xfrm>
-          <a:prstGeom prst="rect">
-            <a:avLst/>
-          </a:prstGeom>
-        </p:spPr>
-      </p:pic>
-      <p:pic>
-        <p:nvPicPr>
-          <p:cNvPr id="20" name="Image 18" descr="preencoded.png"/>
-          <p:cNvPicPr>
-            <a:picLocks noChangeAspect="1"/>
-          </p:cNvPicPr>
-          <p:nvPr/>
-        </p:nvPicPr>
-        <p:blipFill>
-          <a:blip r:embed="rId15"/>
-          <a:stretch>
-            <a:fillRect/>
-          </a:stretch>
-        </p:blipFill>
-        <p:spPr>
-          <a:xfrm>
-            <a:off x="4470350" y="4229100"/>
-            <a:ext cx="3251150" cy="1066800"/>
-          </a:xfrm>
-          <a:prstGeom prst="rect">
-            <a:avLst/>
-          </a:prstGeom>
-        </p:spPr>
-      </p:pic>
-      <p:pic>
-        <p:nvPicPr>
-          <p:cNvPr id="21" name="Image 19" descr="preencoded.png"/>
-          <p:cNvPicPr>
-            <a:picLocks noChangeAspect="1"/>
-          </p:cNvPicPr>
-          <p:nvPr/>
-        </p:nvPicPr>
-        <p:blipFill>
-          <a:blip r:embed="rId19"/>
-          <a:stretch>
-            <a:fillRect/>
-          </a:stretch>
-        </p:blipFill>
-        <p:spPr>
-          <a:xfrm>
-            <a:off x="4622750" y="4419600"/>
-            <a:ext cx="152400" cy="152400"/>
-          </a:xfrm>
-          <a:prstGeom prst="rect">
-            <a:avLst/>
-          </a:prstGeom>
-        </p:spPr>
-      </p:pic>
-      <p:pic>
-        <p:nvPicPr>
-          <p:cNvPr id="22" name="Image 20" descr="preencoded.png"/>
-          <p:cNvPicPr>
-            <a:picLocks noChangeAspect="1"/>
-          </p:cNvPicPr>
-          <p:nvPr/>
-        </p:nvPicPr>
-        <p:blipFill>
-          <a:blip r:embed="rId20"/>
-          <a:stretch>
-            <a:fillRect/>
-          </a:stretch>
-        </p:blipFill>
-        <p:spPr>
-          <a:xfrm>
-            <a:off x="8178701" y="1066800"/>
-            <a:ext cx="3708499" cy="4457700"/>
-          </a:xfrm>
-          <a:prstGeom prst="rect">
-            <a:avLst/>
-          </a:prstGeom>
-        </p:spPr>
-      </p:pic>
-      <p:pic>
-        <p:nvPicPr>
-          <p:cNvPr id="23" name="Image 21" descr="preencoded.png"/>
-          <p:cNvPicPr>
-            <a:picLocks noChangeAspect="1"/>
-          </p:cNvPicPr>
-          <p:nvPr/>
-        </p:nvPicPr>
-        <p:blipFill>
-          <a:blip r:embed="rId21"/>
-          <a:stretch>
-            <a:fillRect/>
-          </a:stretch>
-        </p:blipFill>
-        <p:spPr>
-          <a:xfrm>
-            <a:off x="8407301" y="1343025"/>
-            <a:ext cx="285750" cy="285750"/>
-          </a:xfrm>
-          <a:prstGeom prst="rect">
-            <a:avLst/>
-          </a:prstGeom>
-        </p:spPr>
-      </p:pic>
-      <p:pic>
-        <p:nvPicPr>
-          <p:cNvPr id="24" name="Image 22" descr="preencoded.png"/>
-          <p:cNvPicPr>
-            <a:picLocks noChangeAspect="1"/>
-          </p:cNvPicPr>
-          <p:nvPr/>
-        </p:nvPicPr>
-        <p:blipFill>
-          <a:blip r:embed="rId22"/>
-          <a:stretch>
-            <a:fillRect/>
-          </a:stretch>
-        </p:blipFill>
-        <p:spPr>
-          <a:xfrm>
-            <a:off x="8407301" y="1790700"/>
-            <a:ext cx="3251299" cy="685800"/>
-          </a:xfrm>
-          <a:prstGeom prst="rect">
-            <a:avLst/>
-          </a:prstGeom>
-        </p:spPr>
-      </p:pic>
-      <p:pic>
-        <p:nvPicPr>
-          <p:cNvPr id="25" name="Image 23" descr="preencoded.png"/>
-          <p:cNvPicPr>
-            <a:picLocks noChangeAspect="1"/>
-          </p:cNvPicPr>
-          <p:nvPr/>
-        </p:nvPicPr>
-        <p:blipFill>
-          <a:blip r:embed="rId23"/>
-          <a:stretch>
-            <a:fillRect/>
-          </a:stretch>
-        </p:blipFill>
-        <p:spPr>
-          <a:xfrm>
-            <a:off x="8521601" y="1943100"/>
-            <a:ext cx="133350" cy="152400"/>
-          </a:xfrm>
-          <a:prstGeom prst="rect">
-            <a:avLst/>
-          </a:prstGeom>
-        </p:spPr>
-      </p:pic>
-      <p:pic>
-        <p:nvPicPr>
-          <p:cNvPr id="26" name="Image 24" descr="preencoded.png"/>
-          <p:cNvPicPr>
-            <a:picLocks noChangeAspect="1"/>
-          </p:cNvPicPr>
-          <p:nvPr/>
-        </p:nvPicPr>
-        <p:blipFill>
-          <a:blip r:embed="rId24"/>
-          <a:stretch>
-            <a:fillRect/>
-          </a:stretch>
-        </p:blipFill>
-        <p:spPr>
-          <a:xfrm>
-            <a:off x="8407301" y="2590800"/>
-            <a:ext cx="3251299" cy="685800"/>
-          </a:xfrm>
-          <a:prstGeom prst="rect">
-            <a:avLst/>
-          </a:prstGeom>
-        </p:spPr>
-      </p:pic>
-      <p:pic>
-        <p:nvPicPr>
-          <p:cNvPr id="27" name="Image 25" descr="preencoded.png"/>
-          <p:cNvPicPr>
-            <a:picLocks noChangeAspect="1"/>
-          </p:cNvPicPr>
-          <p:nvPr/>
-        </p:nvPicPr>
-        <p:blipFill>
-          <a:blip r:embed="rId25"/>
-          <a:stretch>
-            <a:fillRect/>
-          </a:stretch>
-        </p:blipFill>
-        <p:spPr>
-          <a:xfrm>
-            <a:off x="8521601" y="2743200"/>
-            <a:ext cx="152400" cy="152400"/>
-          </a:xfrm>
-          <a:prstGeom prst="rect">
-            <a:avLst/>
-          </a:prstGeom>
-        </p:spPr>
-      </p:pic>
-      <p:pic>
-        <p:nvPicPr>
-          <p:cNvPr id="28" name="Image 26" descr="preencoded.png"/>
-          <p:cNvPicPr>
-            <a:picLocks noChangeAspect="1"/>
-          </p:cNvPicPr>
-          <p:nvPr/>
-        </p:nvPicPr>
-        <p:blipFill>
-          <a:blip r:embed="rId26"/>
-          <a:stretch>
-            <a:fillRect/>
-          </a:stretch>
-        </p:blipFill>
-        <p:spPr>
-          <a:xfrm>
-            <a:off x="8407301" y="3390900"/>
-            <a:ext cx="3251299" cy="685800"/>
-          </a:xfrm>
-          <a:prstGeom prst="rect">
-            <a:avLst/>
-          </a:prstGeom>
-        </p:spPr>
-      </p:pic>
-      <p:pic>
-        <p:nvPicPr>
-          <p:cNvPr id="29" name="Image 27" descr="preencoded.png"/>
-          <p:cNvPicPr>
-            <a:picLocks noChangeAspect="1"/>
-          </p:cNvPicPr>
-          <p:nvPr/>
-        </p:nvPicPr>
-        <p:blipFill>
-          <a:blip r:embed="rId27"/>
-          <a:stretch>
-            <a:fillRect/>
-          </a:stretch>
-        </p:blipFill>
-        <p:spPr>
-          <a:xfrm>
-            <a:off x="8521601" y="3543300"/>
-            <a:ext cx="152400" cy="152400"/>
-          </a:xfrm>
-          <a:prstGeom prst="rect">
-            <a:avLst/>
-          </a:prstGeom>
-        </p:spPr>
-      </p:pic>
-      <p:pic>
-        <p:nvPicPr>
-          <p:cNvPr id="30" name="Image 28" descr="preencoded.png"/>
-          <p:cNvPicPr>
-            <a:picLocks noChangeAspect="1"/>
-          </p:cNvPicPr>
-          <p:nvPr/>
-        </p:nvPicPr>
-        <p:blipFill>
-          <a:blip r:embed="rId28"/>
-          <a:stretch>
-            <a:fillRect/>
-          </a:stretch>
-        </p:blipFill>
-        <p:spPr>
-          <a:xfrm>
-            <a:off x="0" y="6781800"/>
-            <a:ext cx="12192000" cy="76200"/>
-          </a:xfrm>
-          <a:prstGeom prst="rect">
-            <a:avLst/>
-          </a:prstGeom>
-        </p:spPr>
-      </p:pic>
-      <p:sp>
-        <p:nvSpPr>
-          <p:cNvPr id="31" name="Text 0"/>
-          <p:cNvSpPr/>
-          <p:nvPr/>
-        </p:nvSpPr>
-        <p:spPr>
-          <a:xfrm>
-            <a:off x="381000" y="209550"/>
-            <a:ext cx="3063240" cy="342900"/>
-          </a:xfrm>
-          <a:prstGeom prst="rect">
-            <a:avLst/>
-          </a:prstGeom>
-          <a:noFill/>
-          <a:ln/>
-        </p:spPr>
-        <p:txBody>
-          <a:bodyPr vert="horz" wrap="square" lIns="0" tIns="0" rIns="0" bIns="0" rtlCol="0" anchor="t"/>
-          <a:lstStyle/>
-          <a:p>
-            <a:pPr marL="0" indent="0">
-              <a:lnSpc>
-                <a:spcPts val="2700"/>
-              </a:lnSpc>
-              <a:buNone/>
-            </a:pPr>
-            <a:r>
-              <a:rPr lang="en-US" sz="2250" b="1" dirty="0">
-                <a:solidFill>
-                  <a:srgbClr val="FFFFFF"/>
-                </a:solidFill>
-                <a:latin typeface="Noto Sans KR" pitchFamily="34" charset="0"/>
-                <a:ea typeface="Noto Sans KR" pitchFamily="34" charset="-122"/>
-                <a:cs typeface="Noto Sans KR" pitchFamily="34" charset="-120"/>
-              </a:rPr>
-              <a:t>데이터 개선 권장사항</a:t>
-            </a:r>
-            <a:endParaRPr lang="en-US" sz="2250" dirty="0"/>
-          </a:p>
-        </p:txBody>
-      </p:sp>
-      <p:sp>
-        <p:nvSpPr>
-          <p:cNvPr id="32" name="Text 1"/>
-          <p:cNvSpPr/>
-          <p:nvPr/>
-        </p:nvSpPr>
-        <p:spPr>
-          <a:xfrm>
-            <a:off x="11315700" y="247650"/>
-            <a:ext cx="594360" cy="266700"/>
-          </a:xfrm>
-          <a:prstGeom prst="rect">
-            <a:avLst/>
-          </a:prstGeom>
-          <a:noFill/>
-          <a:ln/>
-        </p:spPr>
-        <p:txBody>
-          <a:bodyPr vert="horz" wrap="square" lIns="0" tIns="0" rIns="0" bIns="0" rtlCol="0" anchor="t"/>
-          <a:lstStyle/>
-          <a:p>
-            <a:pPr marL="0" indent="0">
-              <a:lnSpc>
-                <a:spcPts val="2100"/>
-              </a:lnSpc>
-              <a:buNone/>
-            </a:pPr>
-            <a:r>
-              <a:rPr lang="en-US" sz="1500" dirty="0">
-                <a:solidFill>
-                  <a:srgbClr val="FFFFFF"/>
-                </a:solidFill>
-                <a:latin typeface="Noto Sans KR" pitchFamily="34" charset="0"/>
-                <a:ea typeface="Noto Sans KR" pitchFamily="34" charset="-122"/>
-                <a:cs typeface="Noto Sans KR" pitchFamily="34" charset="-120"/>
-              </a:rPr>
-              <a:t>17/20</a:t>
-            </a:r>
-            <a:endParaRPr lang="en-US" sz="1500" dirty="0"/>
-          </a:p>
-        </p:txBody>
-      </p:sp>
-      <p:sp>
-        <p:nvSpPr>
-          <p:cNvPr id="33" name="Text 2"/>
-          <p:cNvSpPr/>
-          <p:nvPr/>
-        </p:nvSpPr>
-        <p:spPr>
-          <a:xfrm>
-            <a:off x="895350" y="1333500"/>
-            <a:ext cx="1371600" cy="266700"/>
-          </a:xfrm>
-          <a:prstGeom prst="rect">
-            <a:avLst/>
-          </a:prstGeom>
-          <a:noFill/>
-          <a:ln/>
-        </p:spPr>
-        <p:txBody>
-          <a:bodyPr vert="horz" wrap="square" lIns="0" tIns="0" rIns="0" bIns="0" rtlCol="0" anchor="t"/>
-          <a:lstStyle/>
-          <a:p>
-            <a:pPr marL="0" indent="0">
-              <a:lnSpc>
-                <a:spcPts val="2100"/>
-              </a:lnSpc>
-              <a:buNone/>
-            </a:pPr>
-            <a:r>
-              <a:rPr lang="en-US" sz="1500" b="1" dirty="0">
-                <a:solidFill>
-                  <a:srgbClr val="1E40AF"/>
-                </a:solidFill>
-                <a:latin typeface="Noto Sans KR" pitchFamily="34" charset="0"/>
-                <a:ea typeface="Noto Sans KR" pitchFamily="34" charset="-122"/>
-                <a:cs typeface="Noto Sans KR" pitchFamily="34" charset="-120"/>
-              </a:rPr>
-              <a:t>추가 특징 수집</a:t>
-            </a:r>
-            <a:endParaRPr lang="en-US" sz="1500" dirty="0"/>
-          </a:p>
-        </p:txBody>
-      </p:sp>
-      <p:sp>
-        <p:nvSpPr>
-          <p:cNvPr id="34" name="Text 3"/>
-          <p:cNvSpPr/>
-          <p:nvPr/>
-        </p:nvSpPr>
-        <p:spPr>
-          <a:xfrm>
-            <a:off x="876300" y="1905000"/>
-            <a:ext cx="2034540" cy="228600"/>
-          </a:xfrm>
-          <a:prstGeom prst="rect">
-            <a:avLst/>
-          </a:prstGeom>
-          <a:noFill/>
-          <a:ln/>
-        </p:spPr>
-        <p:txBody>
-          <a:bodyPr vert="horz" wrap="square" lIns="0" tIns="0" rIns="0" bIns="0" rtlCol="0" anchor="t"/>
-          <a:lstStyle/>
-          <a:p>
-            <a:pPr marL="0" indent="0">
-              <a:lnSpc>
-                <a:spcPts val="1800"/>
-              </a:lnSpc>
-              <a:buNone/>
-            </a:pPr>
-            <a:r>
-              <a:rPr lang="en-US" sz="1200" dirty="0">
-                <a:solidFill>
-                  <a:srgbClr val="374151"/>
-                </a:solidFill>
-                <a:latin typeface="Noto Sans KR" pitchFamily="34" charset="0"/>
-                <a:ea typeface="Noto Sans KR" pitchFamily="34" charset="-122"/>
-                <a:cs typeface="Noto Sans KR" pitchFamily="34" charset="-120"/>
-              </a:rPr>
-              <a:t>고객 속성: 나이, 지역, 직업</a:t>
-            </a:r>
-            <a:endParaRPr lang="en-US" sz="1200" dirty="0"/>
-          </a:p>
-        </p:txBody>
-      </p:sp>
-      <p:sp>
-        <p:nvSpPr>
-          <p:cNvPr id="35" name="Text 4"/>
-          <p:cNvSpPr/>
-          <p:nvPr/>
-        </p:nvSpPr>
-        <p:spPr>
-          <a:xfrm>
-            <a:off x="895350" y="2476500"/>
-            <a:ext cx="2774900" cy="457200"/>
-          </a:xfrm>
-          <a:prstGeom prst="rect">
-            <a:avLst/>
-          </a:prstGeom>
-          <a:noFill/>
-          <a:ln/>
-        </p:spPr>
-        <p:txBody>
-          <a:bodyPr vert="horz" wrap="square" lIns="0" tIns="0" rIns="0" bIns="0" rtlCol="0" anchor="t"/>
-          <a:lstStyle/>
-          <a:p>
-            <a:pPr marL="0" indent="0">
-              <a:lnSpc>
-                <a:spcPts val="1800"/>
-              </a:lnSpc>
-              <a:buNone/>
-            </a:pPr>
-            <a:r>
-              <a:rPr lang="en-US" sz="1200" dirty="0">
-                <a:solidFill>
-                  <a:srgbClr val="374151"/>
-                </a:solidFill>
-                <a:latin typeface="Noto Sans KR" pitchFamily="34" charset="0"/>
-                <a:ea typeface="Noto Sans KR" pitchFamily="34" charset="-122"/>
-                <a:cs typeface="Noto Sans KR" pitchFamily="34" charset="-120"/>
-              </a:rPr>
-              <a:t>판매자 정보: 업 industry, 국가, 온라인/오프라인</a:t>
-            </a:r>
-            <a:endParaRPr lang="en-US" sz="1200" dirty="0"/>
-          </a:p>
-        </p:txBody>
-      </p:sp>
-      <p:sp>
-        <p:nvSpPr>
-          <p:cNvPr id="36" name="Text 5"/>
-          <p:cNvSpPr/>
-          <p:nvPr/>
-        </p:nvSpPr>
-        <p:spPr>
-          <a:xfrm>
-            <a:off x="914400" y="3276600"/>
-            <a:ext cx="2708910" cy="228600"/>
-          </a:xfrm>
-          <a:prstGeom prst="rect">
-            <a:avLst/>
-          </a:prstGeom>
-          <a:noFill/>
-          <a:ln/>
-        </p:spPr>
-        <p:txBody>
-          <a:bodyPr vert="horz" wrap="square" lIns="0" tIns="0" rIns="0" bIns="0" rtlCol="0" anchor="t"/>
-          <a:lstStyle/>
-          <a:p>
-            <a:pPr marL="0" indent="0">
-              <a:lnSpc>
-                <a:spcPts val="1800"/>
-              </a:lnSpc>
-              <a:buNone/>
-            </a:pPr>
-            <a:r>
-              <a:rPr lang="en-US" sz="1200" dirty="0">
-                <a:solidFill>
-                  <a:srgbClr val="374151"/>
-                </a:solidFill>
-                <a:latin typeface="Noto Sans KR" pitchFamily="34" charset="0"/>
-                <a:ea typeface="Noto Sans KR" pitchFamily="34" charset="-122"/>
-                <a:cs typeface="Noto Sans KR" pitchFamily="34" charset="-120"/>
-              </a:rPr>
-              <a:t>디바이스/네트워크: IP, 디바이스 ID</a:t>
-            </a:r>
-            <a:endParaRPr lang="en-US" sz="1200" dirty="0"/>
-          </a:p>
-        </p:txBody>
-      </p:sp>
-      <p:sp>
-        <p:nvSpPr>
-          <p:cNvPr id="37" name="Text 6"/>
-          <p:cNvSpPr/>
-          <p:nvPr/>
-        </p:nvSpPr>
-        <p:spPr>
-          <a:xfrm>
-            <a:off x="876300" y="3848100"/>
-            <a:ext cx="2720340" cy="228600"/>
-          </a:xfrm>
-          <a:prstGeom prst="rect">
-            <a:avLst/>
-          </a:prstGeom>
-          <a:noFill/>
-          <a:ln/>
-        </p:spPr>
-        <p:txBody>
-          <a:bodyPr vert="horz" wrap="square" lIns="0" tIns="0" rIns="0" bIns="0" rtlCol="0" anchor="t"/>
-          <a:lstStyle/>
-          <a:p>
-            <a:pPr marL="0" indent="0">
-              <a:lnSpc>
-                <a:spcPts val="1800"/>
-              </a:lnSpc>
-              <a:buNone/>
-            </a:pPr>
-            <a:r>
-              <a:rPr lang="en-US" sz="1200" dirty="0">
-                <a:solidFill>
-                  <a:srgbClr val="374151"/>
-                </a:solidFill>
-                <a:latin typeface="Noto Sans KR" pitchFamily="34" charset="0"/>
-                <a:ea typeface="Noto Sans KR" pitchFamily="34" charset="-122"/>
-                <a:cs typeface="Noto Sans KR" pitchFamily="34" charset="-120"/>
-              </a:rPr>
-              <a:t>통계적 특징: 평균 금액, 시간대 패턴</a:t>
-            </a:r>
-            <a:endParaRPr lang="en-US" sz="1200" dirty="0"/>
-          </a:p>
-        </p:txBody>
-      </p:sp>
-      <p:sp>
-        <p:nvSpPr>
-          <p:cNvPr id="38" name="Text 7"/>
-          <p:cNvSpPr/>
-          <p:nvPr/>
-        </p:nvSpPr>
-        <p:spPr>
-          <a:xfrm>
-            <a:off x="4803725" y="1333500"/>
-            <a:ext cx="1577340" cy="266700"/>
-          </a:xfrm>
-          <a:prstGeom prst="rect">
-            <a:avLst/>
-          </a:prstGeom>
-          <a:noFill/>
-          <a:ln/>
-        </p:spPr>
-        <p:txBody>
-          <a:bodyPr vert="horz" wrap="square" lIns="0" tIns="0" rIns="0" bIns="0" rtlCol="0" anchor="t"/>
-          <a:lstStyle/>
-          <a:p>
-            <a:pPr marL="0" indent="0">
-              <a:lnSpc>
-                <a:spcPts val="2100"/>
-              </a:lnSpc>
-              <a:buNone/>
-            </a:pPr>
-            <a:r>
-              <a:rPr lang="en-US" sz="1500" b="1" dirty="0">
-                <a:solidFill>
-                  <a:srgbClr val="1E40AF"/>
-                </a:solidFill>
-                <a:latin typeface="Noto Sans KR" pitchFamily="34" charset="0"/>
-                <a:ea typeface="Noto Sans KR" pitchFamily="34" charset="-122"/>
-                <a:cs typeface="Noto Sans KR" pitchFamily="34" charset="-120"/>
-              </a:rPr>
-              <a:t>외부 데이터 통합</a:t>
-            </a:r>
-            <a:endParaRPr lang="en-US" sz="1500" dirty="0"/>
-          </a:p>
-        </p:txBody>
-      </p:sp>
-      <p:sp>
-        <p:nvSpPr>
-          <p:cNvPr id="39" name="Text 8"/>
-          <p:cNvSpPr/>
-          <p:nvPr/>
-        </p:nvSpPr>
-        <p:spPr>
-          <a:xfrm>
-            <a:off x="4851350" y="1943100"/>
-            <a:ext cx="1245870" cy="228600"/>
-          </a:xfrm>
-          <a:prstGeom prst="rect">
-            <a:avLst/>
-          </a:prstGeom>
-          <a:noFill/>
-          <a:ln/>
-        </p:spPr>
-        <p:txBody>
-          <a:bodyPr vert="horz" wrap="square" lIns="0" tIns="0" rIns="0" bIns="0" rtlCol="0" anchor="t"/>
-          <a:lstStyle/>
-          <a:p>
-            <a:pPr marL="0" indent="0">
-              <a:lnSpc>
-                <a:spcPts val="1800"/>
-              </a:lnSpc>
-              <a:buNone/>
-            </a:pPr>
-            <a:r>
-              <a:rPr lang="en-US" sz="1200" b="1" dirty="0">
-                <a:solidFill>
-                  <a:srgbClr val="1D4ED8"/>
-                </a:solidFill>
-                <a:latin typeface="Noto Sans KR" pitchFamily="34" charset="0"/>
-                <a:ea typeface="Noto Sans KR" pitchFamily="34" charset="-122"/>
-                <a:cs typeface="Noto Sans KR" pitchFamily="34" charset="-120"/>
-              </a:rPr>
-              <a:t>블랙리스트 통합</a:t>
-            </a:r>
-            <a:endParaRPr lang="en-US" sz="1200" dirty="0"/>
-          </a:p>
-        </p:txBody>
-      </p:sp>
-      <p:sp>
-        <p:nvSpPr>
-          <p:cNvPr id="40" name="Text 9"/>
-          <p:cNvSpPr/>
-          <p:nvPr/>
-        </p:nvSpPr>
-        <p:spPr>
-          <a:xfrm>
-            <a:off x="4622750" y="2247900"/>
-            <a:ext cx="2946350" cy="457200"/>
-          </a:xfrm>
-          <a:prstGeom prst="rect">
-            <a:avLst/>
-          </a:prstGeom>
-          <a:noFill/>
-          <a:ln/>
-        </p:spPr>
-        <p:txBody>
-          <a:bodyPr vert="horz" wrap="square" lIns="0" tIns="0" rIns="0" bIns="0" rtlCol="0" anchor="t"/>
-          <a:lstStyle/>
-          <a:p>
-            <a:pPr marL="0" indent="0">
-              <a:lnSpc>
-                <a:spcPts val="1800"/>
-              </a:lnSpc>
-              <a:buNone/>
-            </a:pPr>
-            <a:r>
-              <a:rPr lang="en-US" sz="1200" dirty="0">
-                <a:solidFill>
-                  <a:srgbClr val="374151"/>
-                </a:solidFill>
-                <a:latin typeface="Noto Sans KR" pitchFamily="34" charset="0"/>
-                <a:ea typeface="Noto Sans KR" pitchFamily="34" charset="-122"/>
-                <a:cs typeface="Noto Sans KR" pitchFamily="34" charset="-120"/>
-              </a:rPr>
-              <a:t>거래 내역과 관련된 IP, 디바이스 ID, 카드 번호 등이 블랙리스트에 있는지 확인</a:t>
-            </a:r>
-            <a:endParaRPr lang="en-US" sz="1200" dirty="0"/>
-          </a:p>
-        </p:txBody>
-      </p:sp>
-      <p:sp>
-        <p:nvSpPr>
-          <p:cNvPr id="41" name="Text 10"/>
-          <p:cNvSpPr/>
-          <p:nvPr/>
-        </p:nvSpPr>
-        <p:spPr>
-          <a:xfrm>
-            <a:off x="4889450" y="3162300"/>
-            <a:ext cx="1508760" cy="228600"/>
-          </a:xfrm>
-          <a:prstGeom prst="rect">
-            <a:avLst/>
-          </a:prstGeom>
-          <a:noFill/>
-          <a:ln/>
-        </p:spPr>
-        <p:txBody>
-          <a:bodyPr vert="horz" wrap="square" lIns="0" tIns="0" rIns="0" bIns="0" rtlCol="0" anchor="t"/>
-          <a:lstStyle/>
-          <a:p>
-            <a:pPr marL="0" indent="0">
-              <a:lnSpc>
-                <a:spcPts val="1800"/>
-              </a:lnSpc>
-              <a:buNone/>
-            </a:pPr>
-            <a:r>
-              <a:rPr lang="en-US" sz="1200" b="1" dirty="0">
-                <a:solidFill>
-                  <a:srgbClr val="1D4ED8"/>
-                </a:solidFill>
-                <a:latin typeface="Noto Sans KR" pitchFamily="34" charset="0"/>
-                <a:ea typeface="Noto Sans KR" pitchFamily="34" charset="-122"/>
-                <a:cs typeface="Noto Sans KR" pitchFamily="34" charset="-120"/>
-              </a:rPr>
-              <a:t>규칙 기반 사기 점수</a:t>
-            </a:r>
-            <a:endParaRPr lang="en-US" sz="1200" dirty="0"/>
-          </a:p>
-        </p:txBody>
-      </p:sp>
-      <p:sp>
-        <p:nvSpPr>
-          <p:cNvPr id="42" name="Text 11"/>
-          <p:cNvSpPr/>
-          <p:nvPr/>
-        </p:nvSpPr>
-        <p:spPr>
-          <a:xfrm>
-            <a:off x="4622750" y="3467100"/>
-            <a:ext cx="2946350" cy="457200"/>
-          </a:xfrm>
-          <a:prstGeom prst="rect">
-            <a:avLst/>
-          </a:prstGeom>
-          <a:noFill/>
-          <a:ln/>
-        </p:spPr>
-        <p:txBody>
-          <a:bodyPr vert="horz" wrap="square" lIns="0" tIns="0" rIns="0" bIns="0" rtlCol="0" anchor="t"/>
-          <a:lstStyle/>
-          <a:p>
-            <a:pPr marL="0" indent="0">
-              <a:lnSpc>
-                <a:spcPts val="1800"/>
-              </a:lnSpc>
-              <a:buNone/>
-            </a:pPr>
-            <a:r>
-              <a:rPr lang="en-US" sz="1200" dirty="0">
-                <a:solidFill>
-                  <a:srgbClr val="374151"/>
-                </a:solidFill>
-                <a:latin typeface="Noto Sans KR" pitchFamily="34" charset="0"/>
-                <a:ea typeface="Noto Sans KR" pitchFamily="34" charset="-122"/>
-                <a:cs typeface="Noto Sans KR" pitchFamily="34" charset="-120"/>
-              </a:rPr>
-              <a:t>기존 규칙 기반 시스템의 사기 점수를 모델에 통합</a:t>
-            </a:r>
-            <a:endParaRPr lang="en-US" sz="1200" dirty="0"/>
-          </a:p>
-        </p:txBody>
-      </p:sp>
-      <p:sp>
-        <p:nvSpPr>
-          <p:cNvPr id="43" name="Text 12"/>
-          <p:cNvSpPr/>
-          <p:nvPr/>
-        </p:nvSpPr>
-        <p:spPr>
-          <a:xfrm>
-            <a:off x="4851350" y="4381500"/>
-            <a:ext cx="1120140" cy="228600"/>
-          </a:xfrm>
-          <a:prstGeom prst="rect">
-            <a:avLst/>
-          </a:prstGeom>
-          <a:noFill/>
-          <a:ln/>
-        </p:spPr>
-        <p:txBody>
-          <a:bodyPr vert="horz" wrap="square" lIns="0" tIns="0" rIns="0" bIns="0" rtlCol="0" anchor="t"/>
-          <a:lstStyle/>
-          <a:p>
-            <a:pPr marL="0" indent="0">
-              <a:lnSpc>
-                <a:spcPts val="1800"/>
-              </a:lnSpc>
-              <a:buNone/>
-            </a:pPr>
-            <a:r>
-              <a:rPr lang="en-US" sz="1200" b="1" dirty="0">
-                <a:solidFill>
-                  <a:srgbClr val="1D4ED8"/>
-                </a:solidFill>
-                <a:latin typeface="Noto Sans KR" pitchFamily="34" charset="0"/>
-                <a:ea typeface="Noto Sans KR" pitchFamily="34" charset="-122"/>
-                <a:cs typeface="Noto Sans KR" pitchFamily="34" charset="-120"/>
-              </a:rPr>
-              <a:t>외부 신용 정보</a:t>
-            </a:r>
-            <a:endParaRPr lang="en-US" sz="1200" dirty="0"/>
-          </a:p>
-        </p:txBody>
-      </p:sp>
-      <p:sp>
-        <p:nvSpPr>
-          <p:cNvPr id="44" name="Text 13"/>
-          <p:cNvSpPr/>
-          <p:nvPr/>
-        </p:nvSpPr>
-        <p:spPr>
-          <a:xfrm>
-            <a:off x="4622750" y="4686300"/>
-            <a:ext cx="2946350" cy="457200"/>
-          </a:xfrm>
-          <a:prstGeom prst="rect">
-            <a:avLst/>
-          </a:prstGeom>
-          <a:noFill/>
-          <a:ln/>
-        </p:spPr>
-        <p:txBody>
-          <a:bodyPr vert="horz" wrap="square" lIns="0" tIns="0" rIns="0" bIns="0" rtlCol="0" anchor="t"/>
-          <a:lstStyle/>
-          <a:p>
-            <a:pPr marL="0" indent="0">
-              <a:lnSpc>
-                <a:spcPts val="1800"/>
-              </a:lnSpc>
-              <a:buNone/>
-            </a:pPr>
-            <a:r>
-              <a:rPr lang="en-US" sz="1200" dirty="0">
-                <a:solidFill>
-                  <a:srgbClr val="374151"/>
-                </a:solidFill>
-                <a:latin typeface="Noto Sans KR" pitchFamily="34" charset="0"/>
-                <a:ea typeface="Noto Sans KR" pitchFamily="34" charset="-122"/>
-                <a:cs typeface="Noto Sans KR" pitchFamily="34" charset="-120"/>
-              </a:rPr>
-              <a:t>거래 시점의 신용 정보나 리스크 점수를 추가 특징으로 활용</a:t>
-            </a:r>
-            <a:endParaRPr lang="en-US" sz="1200" dirty="0"/>
-          </a:p>
-        </p:txBody>
-      </p:sp>
-      <p:sp>
-        <p:nvSpPr>
-          <p:cNvPr id="45" name="Text 14"/>
-          <p:cNvSpPr/>
-          <p:nvPr/>
-        </p:nvSpPr>
-        <p:spPr>
-          <a:xfrm>
-            <a:off x="8807351" y="1333500"/>
-            <a:ext cx="1577340" cy="266700"/>
-          </a:xfrm>
-          <a:prstGeom prst="rect">
-            <a:avLst/>
-          </a:prstGeom>
-          <a:noFill/>
-          <a:ln/>
-        </p:spPr>
-        <p:txBody>
-          <a:bodyPr vert="horz" wrap="square" lIns="0" tIns="0" rIns="0" bIns="0" rtlCol="0" anchor="t"/>
-          <a:lstStyle/>
-          <a:p>
-            <a:pPr marL="0" indent="0">
-              <a:lnSpc>
-                <a:spcPts val="2100"/>
-              </a:lnSpc>
-              <a:buNone/>
-            </a:pPr>
-            <a:r>
-              <a:rPr lang="en-US" sz="1500" b="1" dirty="0">
-                <a:solidFill>
-                  <a:srgbClr val="1E40AF"/>
-                </a:solidFill>
-                <a:latin typeface="Noto Sans KR" pitchFamily="34" charset="0"/>
-                <a:ea typeface="Noto Sans KR" pitchFamily="34" charset="-122"/>
-                <a:cs typeface="Noto Sans KR" pitchFamily="34" charset="-120"/>
-              </a:rPr>
-              <a:t>시계열 패턴 분석</a:t>
-            </a:r>
-            <a:endParaRPr lang="en-US" sz="1500" dirty="0"/>
-          </a:p>
-        </p:txBody>
-      </p:sp>
-      <p:sp>
-        <p:nvSpPr>
-          <p:cNvPr id="46" name="Text 15"/>
-          <p:cNvSpPr/>
-          <p:nvPr/>
-        </p:nvSpPr>
-        <p:spPr>
-          <a:xfrm>
-            <a:off x="8731151" y="1905000"/>
-            <a:ext cx="2609850" cy="228600"/>
-          </a:xfrm>
-          <a:prstGeom prst="rect">
-            <a:avLst/>
-          </a:prstGeom>
-          <a:noFill/>
-          <a:ln/>
-        </p:spPr>
-        <p:txBody>
-          <a:bodyPr vert="horz" wrap="square" lIns="0" tIns="0" rIns="0" bIns="0" rtlCol="0" anchor="t"/>
-          <a:lstStyle/>
-          <a:p>
-            <a:pPr marL="0" indent="0">
-              <a:lnSpc>
-                <a:spcPts val="1800"/>
-              </a:lnSpc>
-              <a:buNone/>
-            </a:pPr>
-            <a:r>
-              <a:rPr lang="en-US" sz="1200" b="1" dirty="0">
-                <a:solidFill>
-                  <a:srgbClr val="1D4ED8"/>
-                </a:solidFill>
-                <a:latin typeface="Noto Sans KR" pitchFamily="34" charset="0"/>
-                <a:ea typeface="Noto Sans KR" pitchFamily="34" charset="-122"/>
-                <a:cs typeface="Noto Sans KR" pitchFamily="34" charset="-120"/>
-              </a:rPr>
-              <a:t>시간대 특징</a:t>
-            </a:r>
-            <a:endParaRPr lang="en-US" sz="1200" dirty="0"/>
-          </a:p>
-        </p:txBody>
-      </p:sp>
-      <p:sp>
-        <p:nvSpPr>
-          <p:cNvPr id="47" name="Text 16"/>
-          <p:cNvSpPr/>
-          <p:nvPr/>
-        </p:nvSpPr>
-        <p:spPr>
-          <a:xfrm>
-            <a:off x="8731151" y="2133600"/>
-            <a:ext cx="3131820" cy="228600"/>
-          </a:xfrm>
-          <a:prstGeom prst="rect">
-            <a:avLst/>
-          </a:prstGeom>
-          <a:noFill/>
-          <a:ln/>
-        </p:spPr>
-        <p:txBody>
-          <a:bodyPr vert="horz" wrap="square" lIns="0" tIns="0" rIns="0" bIns="0" rtlCol="0" anchor="t"/>
-          <a:lstStyle/>
-          <a:p>
-            <a:pPr marL="0" indent="0">
-              <a:lnSpc>
-                <a:spcPts val="1800"/>
-              </a:lnSpc>
-              <a:buNone/>
-            </a:pPr>
-            <a:r>
-              <a:rPr lang="en-US" sz="1200" dirty="0">
-                <a:solidFill>
-                  <a:srgbClr val="374151"/>
-                </a:solidFill>
-                <a:latin typeface="Noto Sans KR" pitchFamily="34" charset="0"/>
-                <a:ea typeface="Noto Sans KR" pitchFamily="34" charset="-122"/>
-                <a:cs typeface="Noto Sans KR" pitchFamily="34" charset="-120"/>
-              </a:rPr>
-              <a:t>거래 시간대(시간대별 평균 금액, 거래 수)</a:t>
-            </a:r>
-            <a:endParaRPr lang="en-US" sz="1200" dirty="0"/>
-          </a:p>
-        </p:txBody>
-      </p:sp>
-      <p:sp>
-        <p:nvSpPr>
-          <p:cNvPr id="48" name="Text 17"/>
-          <p:cNvSpPr/>
-          <p:nvPr/>
-        </p:nvSpPr>
-        <p:spPr>
-          <a:xfrm>
-            <a:off x="8750201" y="2705100"/>
-            <a:ext cx="2162175" cy="228600"/>
-          </a:xfrm>
-          <a:prstGeom prst="rect">
-            <a:avLst/>
-          </a:prstGeom>
-          <a:noFill/>
-          <a:ln/>
-        </p:spPr>
-        <p:txBody>
-          <a:bodyPr vert="horz" wrap="square" lIns="0" tIns="0" rIns="0" bIns="0" rtlCol="0" anchor="t"/>
-          <a:lstStyle/>
-          <a:p>
-            <a:pPr marL="0" indent="0">
-              <a:lnSpc>
-                <a:spcPts val="1800"/>
-              </a:lnSpc>
-              <a:buNone/>
-            </a:pPr>
-            <a:r>
-              <a:rPr lang="en-US" sz="1200" b="1" dirty="0">
-                <a:solidFill>
-                  <a:srgbClr val="1D4ED8"/>
-                </a:solidFill>
-                <a:latin typeface="Noto Sans KR" pitchFamily="34" charset="0"/>
-                <a:ea typeface="Noto Sans KR" pitchFamily="34" charset="-122"/>
-                <a:cs typeface="Noto Sans KR" pitchFamily="34" charset="-120"/>
-              </a:rPr>
-              <a:t>시간 창 통계</a:t>
-            </a:r>
-            <a:endParaRPr lang="en-US" sz="1200" dirty="0"/>
-          </a:p>
-        </p:txBody>
-      </p:sp>
-      <p:sp>
-        <p:nvSpPr>
-          <p:cNvPr id="49" name="Text 18"/>
-          <p:cNvSpPr/>
-          <p:nvPr/>
-        </p:nvSpPr>
-        <p:spPr>
-          <a:xfrm>
-            <a:off x="8750201" y="2933700"/>
-            <a:ext cx="2594610" cy="228600"/>
-          </a:xfrm>
-          <a:prstGeom prst="rect">
-            <a:avLst/>
-          </a:prstGeom>
-          <a:noFill/>
-          <a:ln/>
-        </p:spPr>
-        <p:txBody>
-          <a:bodyPr vert="horz" wrap="square" lIns="0" tIns="0" rIns="0" bIns="0" rtlCol="0" anchor="t"/>
-          <a:lstStyle/>
-          <a:p>
-            <a:pPr marL="0" indent="0">
-              <a:lnSpc>
-                <a:spcPts val="1800"/>
-              </a:lnSpc>
-              <a:buNone/>
-            </a:pPr>
-            <a:r>
-              <a:rPr lang="en-US" sz="1200" dirty="0">
-                <a:solidFill>
-                  <a:srgbClr val="374151"/>
-                </a:solidFill>
-                <a:latin typeface="Noto Sans KR" pitchFamily="34" charset="0"/>
-                <a:ea typeface="Noto Sans KR" pitchFamily="34" charset="-122"/>
-                <a:cs typeface="Noto Sans KR" pitchFamily="34" charset="-120"/>
-              </a:rPr>
-              <a:t>특정 시간 창 내 거래 수, 누적 금액</a:t>
-            </a:r>
-            <a:endParaRPr lang="en-US" sz="1200" dirty="0"/>
-          </a:p>
-        </p:txBody>
-      </p:sp>
-      <p:sp>
-        <p:nvSpPr>
-          <p:cNvPr id="50" name="Text 19"/>
-          <p:cNvSpPr/>
-          <p:nvPr/>
-        </p:nvSpPr>
-        <p:spPr>
-          <a:xfrm>
-            <a:off x="8750201" y="3505200"/>
-            <a:ext cx="2695575" cy="228600"/>
-          </a:xfrm>
-          <a:prstGeom prst="rect">
-            <a:avLst/>
-          </a:prstGeom>
-          <a:noFill/>
-          <a:ln/>
-        </p:spPr>
-        <p:txBody>
-          <a:bodyPr vert="horz" wrap="square" lIns="0" tIns="0" rIns="0" bIns="0" rtlCol="0" anchor="t"/>
-          <a:lstStyle/>
-          <a:p>
-            <a:pPr marL="0" indent="0">
-              <a:lnSpc>
-                <a:spcPts val="1800"/>
-              </a:lnSpc>
-              <a:buNone/>
-            </a:pPr>
-            <a:r>
-              <a:rPr lang="en-US" sz="1200" b="1" dirty="0">
-                <a:solidFill>
-                  <a:srgbClr val="1D4ED8"/>
-                </a:solidFill>
-                <a:latin typeface="Noto Sans KR" pitchFamily="34" charset="0"/>
-                <a:ea typeface="Noto Sans KR" pitchFamily="34" charset="-122"/>
-                <a:cs typeface="Noto Sans KR" pitchFamily="34" charset="-120"/>
-              </a:rPr>
-              <a:t>시간 기반 분할</a:t>
-            </a:r>
-            <a:endParaRPr lang="en-US" sz="1200" dirty="0"/>
-          </a:p>
-        </p:txBody>
-      </p:sp>
-      <p:sp>
-        <p:nvSpPr>
-          <p:cNvPr id="51" name="Text 20"/>
-          <p:cNvSpPr/>
-          <p:nvPr/>
-        </p:nvSpPr>
-        <p:spPr>
-          <a:xfrm>
-            <a:off x="8750201" y="3733800"/>
-            <a:ext cx="3234690" cy="228600"/>
-          </a:xfrm>
-          <a:prstGeom prst="rect">
-            <a:avLst/>
-          </a:prstGeom>
-          <a:noFill/>
-          <a:ln/>
-        </p:spPr>
-        <p:txBody>
-          <a:bodyPr vert="horz" wrap="square" lIns="0" tIns="0" rIns="0" bIns="0" rtlCol="0" anchor="t"/>
-          <a:lstStyle/>
-          <a:p>
-            <a:pPr marL="0" indent="0">
-              <a:lnSpc>
-                <a:spcPts val="1800"/>
-              </a:lnSpc>
-              <a:buNone/>
-            </a:pPr>
-            <a:r>
-              <a:rPr lang="en-US" sz="1200" dirty="0">
-                <a:solidFill>
-                  <a:srgbClr val="374151"/>
-                </a:solidFill>
-                <a:latin typeface="Noto Sans KR" pitchFamily="34" charset="0"/>
-                <a:ea typeface="Noto Sans KR" pitchFamily="34" charset="-122"/>
-                <a:cs typeface="Noto Sans KR" pitchFamily="34" charset="-120"/>
-              </a:rPr>
-              <a:t>시간 기반 분할 또는 롤링 윈도우 교차 검증</a:t>
             </a:r>
             <a:endParaRPr lang="en-US" sz="1200" dirty="0"/>
           </a:p>
@@ -23915,6 +22974,1609 @@
 
 <file path=ppt/slides/slide20.xml><?xml version="1.0" encoding="utf-8"?>
 <p:sld xmlns:a="http://schemas.openxmlformats.org/drawingml/2006/main" xmlns:r="http://schemas.openxmlformats.org/officeDocument/2006/relationships" xmlns:p="http://schemas.openxmlformats.org/presentationml/2006/main">
+  <p:cSld name="Slide 17">
+    <p:spTree>
+      <p:nvGrpSpPr>
+        <p:cNvPr id="1" name=""/>
+        <p:cNvGrpSpPr/>
+        <p:nvPr/>
+      </p:nvGrpSpPr>
+      <p:grpSpPr>
+        <a:xfrm>
+          <a:off x="0" y="0"/>
+          <a:ext cx="0" cy="0"/>
+          <a:chOff x="0" y="0"/>
+          <a:chExt cx="0" cy="0"/>
+        </a:xfrm>
+      </p:grpSpPr>
+      <p:pic>
+        <p:nvPicPr>
+          <p:cNvPr id="2" name="Image 0" descr="preencoded.png"/>
+          <p:cNvPicPr>
+            <a:picLocks noChangeAspect="1"/>
+          </p:cNvPicPr>
+          <p:nvPr/>
+        </p:nvPicPr>
+        <p:blipFill>
+          <a:blip r:embed="rId3"/>
+          <a:stretch>
+            <a:fillRect/>
+          </a:stretch>
+        </p:blipFill>
+        <p:spPr>
+          <a:xfrm>
+            <a:off x="0" y="0"/>
+            <a:ext cx="12192000" cy="6858000"/>
+          </a:xfrm>
+          <a:prstGeom prst="rect">
+            <a:avLst/>
+          </a:prstGeom>
+        </p:spPr>
+      </p:pic>
+      <p:pic>
+        <p:nvPicPr>
+          <p:cNvPr id="3" name="Image 1" descr="preencoded.png"/>
+          <p:cNvPicPr>
+            <a:picLocks noChangeAspect="1"/>
+          </p:cNvPicPr>
+          <p:nvPr/>
+        </p:nvPicPr>
+        <p:blipFill>
+          <a:blip r:embed="rId4"/>
+          <a:stretch>
+            <a:fillRect/>
+          </a:stretch>
+        </p:blipFill>
+        <p:spPr>
+          <a:xfrm>
+            <a:off x="0" y="0"/>
+            <a:ext cx="12192000" cy="762000"/>
+          </a:xfrm>
+          <a:prstGeom prst="rect">
+            <a:avLst/>
+          </a:prstGeom>
+        </p:spPr>
+      </p:pic>
+      <p:pic>
+        <p:nvPicPr>
+          <p:cNvPr id="4" name="Image 2" descr="preencoded.png"/>
+          <p:cNvPicPr>
+            <a:picLocks noChangeAspect="1"/>
+          </p:cNvPicPr>
+          <p:nvPr/>
+        </p:nvPicPr>
+        <p:blipFill>
+          <a:blip r:embed="rId5"/>
+          <a:stretch>
+            <a:fillRect/>
+          </a:stretch>
+        </p:blipFill>
+        <p:spPr>
+          <a:xfrm>
+            <a:off x="304800" y="1066800"/>
+            <a:ext cx="3708350" cy="4457700"/>
+          </a:xfrm>
+          <a:prstGeom prst="rect">
+            <a:avLst/>
+          </a:prstGeom>
+        </p:spPr>
+      </p:pic>
+      <p:pic>
+        <p:nvPicPr>
+          <p:cNvPr id="5" name="Image 3" descr="preencoded.png"/>
+          <p:cNvPicPr>
+            <a:picLocks noChangeAspect="1"/>
+          </p:cNvPicPr>
+          <p:nvPr/>
+        </p:nvPicPr>
+        <p:blipFill>
+          <a:blip r:embed="rId6"/>
+          <a:stretch>
+            <a:fillRect/>
+          </a:stretch>
+        </p:blipFill>
+        <p:spPr>
+          <a:xfrm>
+            <a:off x="533400" y="1343025"/>
+            <a:ext cx="247650" cy="285750"/>
+          </a:xfrm>
+          <a:prstGeom prst="rect">
+            <a:avLst/>
+          </a:prstGeom>
+        </p:spPr>
+      </p:pic>
+      <p:pic>
+        <p:nvPicPr>
+          <p:cNvPr id="6" name="Image 4" descr="preencoded.png"/>
+          <p:cNvPicPr>
+            <a:picLocks noChangeAspect="1"/>
+          </p:cNvPicPr>
+          <p:nvPr/>
+        </p:nvPicPr>
+        <p:blipFill>
+          <a:blip r:embed="rId7"/>
+          <a:stretch>
+            <a:fillRect/>
+          </a:stretch>
+        </p:blipFill>
+        <p:spPr>
+          <a:xfrm>
+            <a:off x="533400" y="1790700"/>
+            <a:ext cx="3251150" cy="457200"/>
+          </a:xfrm>
+          <a:prstGeom prst="rect">
+            <a:avLst/>
+          </a:prstGeom>
+        </p:spPr>
+      </p:pic>
+      <p:pic>
+        <p:nvPicPr>
+          <p:cNvPr id="7" name="Image 5" descr="preencoded.png"/>
+          <p:cNvPicPr>
+            <a:picLocks noChangeAspect="1"/>
+          </p:cNvPicPr>
+          <p:nvPr/>
+        </p:nvPicPr>
+        <p:blipFill>
+          <a:blip r:embed="rId8"/>
+          <a:stretch>
+            <a:fillRect/>
+          </a:stretch>
+        </p:blipFill>
+        <p:spPr>
+          <a:xfrm>
+            <a:off x="647700" y="1943100"/>
+            <a:ext cx="152400" cy="152400"/>
+          </a:xfrm>
+          <a:prstGeom prst="rect">
+            <a:avLst/>
+          </a:prstGeom>
+        </p:spPr>
+      </p:pic>
+      <p:pic>
+        <p:nvPicPr>
+          <p:cNvPr id="8" name="Image 6" descr="preencoded.png"/>
+          <p:cNvPicPr>
+            <a:picLocks noChangeAspect="1"/>
+          </p:cNvPicPr>
+          <p:nvPr/>
+        </p:nvPicPr>
+        <p:blipFill>
+          <a:blip r:embed="rId9"/>
+          <a:stretch>
+            <a:fillRect/>
+          </a:stretch>
+        </p:blipFill>
+        <p:spPr>
+          <a:xfrm>
+            <a:off x="533400" y="2362200"/>
+            <a:ext cx="3251150" cy="685800"/>
+          </a:xfrm>
+          <a:prstGeom prst="rect">
+            <a:avLst/>
+          </a:prstGeom>
+        </p:spPr>
+      </p:pic>
+      <p:pic>
+        <p:nvPicPr>
+          <p:cNvPr id="9" name="Image 7" descr="preencoded.png"/>
+          <p:cNvPicPr>
+            <a:picLocks noChangeAspect="1"/>
+          </p:cNvPicPr>
+          <p:nvPr/>
+        </p:nvPicPr>
+        <p:blipFill>
+          <a:blip r:embed="rId10"/>
+          <a:stretch>
+            <a:fillRect/>
+          </a:stretch>
+        </p:blipFill>
+        <p:spPr>
+          <a:xfrm>
+            <a:off x="647700" y="2514600"/>
+            <a:ext cx="171450" cy="152400"/>
+          </a:xfrm>
+          <a:prstGeom prst="rect">
+            <a:avLst/>
+          </a:prstGeom>
+        </p:spPr>
+      </p:pic>
+      <p:pic>
+        <p:nvPicPr>
+          <p:cNvPr id="10" name="Image 8" descr="preencoded.png"/>
+          <p:cNvPicPr>
+            <a:picLocks noChangeAspect="1"/>
+          </p:cNvPicPr>
+          <p:nvPr/>
+        </p:nvPicPr>
+        <p:blipFill>
+          <a:blip r:embed="rId7"/>
+          <a:stretch>
+            <a:fillRect/>
+          </a:stretch>
+        </p:blipFill>
+        <p:spPr>
+          <a:xfrm>
+            <a:off x="533400" y="3162300"/>
+            <a:ext cx="3251150" cy="457200"/>
+          </a:xfrm>
+          <a:prstGeom prst="rect">
+            <a:avLst/>
+          </a:prstGeom>
+        </p:spPr>
+      </p:pic>
+      <p:pic>
+        <p:nvPicPr>
+          <p:cNvPr id="11" name="Image 9" descr="preencoded.png"/>
+          <p:cNvPicPr>
+            <a:picLocks noChangeAspect="1"/>
+          </p:cNvPicPr>
+          <p:nvPr/>
+        </p:nvPicPr>
+        <p:blipFill>
+          <a:blip r:embed="rId11"/>
+          <a:stretch>
+            <a:fillRect/>
+          </a:stretch>
+        </p:blipFill>
+        <p:spPr>
+          <a:xfrm>
+            <a:off x="647700" y="3314700"/>
+            <a:ext cx="190500" cy="152400"/>
+          </a:xfrm>
+          <a:prstGeom prst="rect">
+            <a:avLst/>
+          </a:prstGeom>
+        </p:spPr>
+      </p:pic>
+      <p:pic>
+        <p:nvPicPr>
+          <p:cNvPr id="12" name="Image 10" descr="preencoded.png"/>
+          <p:cNvPicPr>
+            <a:picLocks noChangeAspect="1"/>
+          </p:cNvPicPr>
+          <p:nvPr/>
+        </p:nvPicPr>
+        <p:blipFill>
+          <a:blip r:embed="rId7"/>
+          <a:stretch>
+            <a:fillRect/>
+          </a:stretch>
+        </p:blipFill>
+        <p:spPr>
+          <a:xfrm>
+            <a:off x="533400" y="3733800"/>
+            <a:ext cx="3251150" cy="457200"/>
+          </a:xfrm>
+          <a:prstGeom prst="rect">
+            <a:avLst/>
+          </a:prstGeom>
+        </p:spPr>
+      </p:pic>
+      <p:pic>
+        <p:nvPicPr>
+          <p:cNvPr id="13" name="Image 11" descr="preencoded.png"/>
+          <p:cNvPicPr>
+            <a:picLocks noChangeAspect="1"/>
+          </p:cNvPicPr>
+          <p:nvPr/>
+        </p:nvPicPr>
+        <p:blipFill>
+          <a:blip r:embed="rId12"/>
+          <a:stretch>
+            <a:fillRect/>
+          </a:stretch>
+        </p:blipFill>
+        <p:spPr>
+          <a:xfrm>
+            <a:off x="647700" y="3886200"/>
+            <a:ext cx="152400" cy="152400"/>
+          </a:xfrm>
+          <a:prstGeom prst="rect">
+            <a:avLst/>
+          </a:prstGeom>
+        </p:spPr>
+      </p:pic>
+      <p:pic>
+        <p:nvPicPr>
+          <p:cNvPr id="14" name="Image 12" descr="preencoded.png"/>
+          <p:cNvPicPr>
+            <a:picLocks noChangeAspect="1"/>
+          </p:cNvPicPr>
+          <p:nvPr/>
+        </p:nvPicPr>
+        <p:blipFill>
+          <a:blip r:embed="rId13"/>
+          <a:stretch>
+            <a:fillRect/>
+          </a:stretch>
+        </p:blipFill>
+        <p:spPr>
+          <a:xfrm>
+            <a:off x="4241750" y="1066800"/>
+            <a:ext cx="3708350" cy="4457700"/>
+          </a:xfrm>
+          <a:prstGeom prst="rect">
+            <a:avLst/>
+          </a:prstGeom>
+        </p:spPr>
+      </p:pic>
+      <p:pic>
+        <p:nvPicPr>
+          <p:cNvPr id="15" name="Image 13" descr="preencoded.png"/>
+          <p:cNvPicPr>
+            <a:picLocks noChangeAspect="1"/>
+          </p:cNvPicPr>
+          <p:nvPr/>
+        </p:nvPicPr>
+        <p:blipFill>
+          <a:blip r:embed="rId14"/>
+          <a:stretch>
+            <a:fillRect/>
+          </a:stretch>
+        </p:blipFill>
+        <p:spPr>
+          <a:xfrm>
+            <a:off x="4470350" y="1343025"/>
+            <a:ext cx="219075" cy="285750"/>
+          </a:xfrm>
+          <a:prstGeom prst="rect">
+            <a:avLst/>
+          </a:prstGeom>
+        </p:spPr>
+      </p:pic>
+      <p:pic>
+        <p:nvPicPr>
+          <p:cNvPr id="16" name="Image 14" descr="preencoded.png"/>
+          <p:cNvPicPr>
+            <a:picLocks noChangeAspect="1"/>
+          </p:cNvPicPr>
+          <p:nvPr/>
+        </p:nvPicPr>
+        <p:blipFill>
+          <a:blip r:embed="rId15"/>
+          <a:stretch>
+            <a:fillRect/>
+          </a:stretch>
+        </p:blipFill>
+        <p:spPr>
+          <a:xfrm>
+            <a:off x="4470350" y="1790700"/>
+            <a:ext cx="3251150" cy="1066800"/>
+          </a:xfrm>
+          <a:prstGeom prst="rect">
+            <a:avLst/>
+          </a:prstGeom>
+        </p:spPr>
+      </p:pic>
+      <p:pic>
+        <p:nvPicPr>
+          <p:cNvPr id="17" name="Image 15" descr="preencoded.png"/>
+          <p:cNvPicPr>
+            <a:picLocks noChangeAspect="1"/>
+          </p:cNvPicPr>
+          <p:nvPr/>
+        </p:nvPicPr>
+        <p:blipFill>
+          <a:blip r:embed="rId16"/>
+          <a:stretch>
+            <a:fillRect/>
+          </a:stretch>
+        </p:blipFill>
+        <p:spPr>
+          <a:xfrm>
+            <a:off x="4622750" y="1981200"/>
+            <a:ext cx="152400" cy="152400"/>
+          </a:xfrm>
+          <a:prstGeom prst="rect">
+            <a:avLst/>
+          </a:prstGeom>
+        </p:spPr>
+      </p:pic>
+      <p:pic>
+        <p:nvPicPr>
+          <p:cNvPr id="18" name="Image 16" descr="preencoded.png"/>
+          <p:cNvPicPr>
+            <a:picLocks noChangeAspect="1"/>
+          </p:cNvPicPr>
+          <p:nvPr/>
+        </p:nvPicPr>
+        <p:blipFill>
+          <a:blip r:embed="rId17"/>
+          <a:stretch>
+            <a:fillRect/>
+          </a:stretch>
+        </p:blipFill>
+        <p:spPr>
+          <a:xfrm>
+            <a:off x="4470350" y="3009900"/>
+            <a:ext cx="3251150" cy="1066800"/>
+          </a:xfrm>
+          <a:prstGeom prst="rect">
+            <a:avLst/>
+          </a:prstGeom>
+        </p:spPr>
+      </p:pic>
+      <p:pic>
+        <p:nvPicPr>
+          <p:cNvPr id="19" name="Image 17" descr="preencoded.png"/>
+          <p:cNvPicPr>
+            <a:picLocks noChangeAspect="1"/>
+          </p:cNvPicPr>
+          <p:nvPr/>
+        </p:nvPicPr>
+        <p:blipFill>
+          <a:blip r:embed="rId18"/>
+          <a:stretch>
+            <a:fillRect/>
+          </a:stretch>
+        </p:blipFill>
+        <p:spPr>
+          <a:xfrm>
+            <a:off x="4622750" y="3200400"/>
+            <a:ext cx="190500" cy="152400"/>
+          </a:xfrm>
+          <a:prstGeom prst="rect">
+            <a:avLst/>
+          </a:prstGeom>
+        </p:spPr>
+      </p:pic>
+      <p:pic>
+        <p:nvPicPr>
+          <p:cNvPr id="20" name="Image 18" descr="preencoded.png"/>
+          <p:cNvPicPr>
+            <a:picLocks noChangeAspect="1"/>
+          </p:cNvPicPr>
+          <p:nvPr/>
+        </p:nvPicPr>
+        <p:blipFill>
+          <a:blip r:embed="rId15"/>
+          <a:stretch>
+            <a:fillRect/>
+          </a:stretch>
+        </p:blipFill>
+        <p:spPr>
+          <a:xfrm>
+            <a:off x="4470350" y="4229100"/>
+            <a:ext cx="3251150" cy="1066800"/>
+          </a:xfrm>
+          <a:prstGeom prst="rect">
+            <a:avLst/>
+          </a:prstGeom>
+        </p:spPr>
+      </p:pic>
+      <p:pic>
+        <p:nvPicPr>
+          <p:cNvPr id="21" name="Image 19" descr="preencoded.png"/>
+          <p:cNvPicPr>
+            <a:picLocks noChangeAspect="1"/>
+          </p:cNvPicPr>
+          <p:nvPr/>
+        </p:nvPicPr>
+        <p:blipFill>
+          <a:blip r:embed="rId19"/>
+          <a:stretch>
+            <a:fillRect/>
+          </a:stretch>
+        </p:blipFill>
+        <p:spPr>
+          <a:xfrm>
+            <a:off x="4622750" y="4419600"/>
+            <a:ext cx="152400" cy="152400"/>
+          </a:xfrm>
+          <a:prstGeom prst="rect">
+            <a:avLst/>
+          </a:prstGeom>
+        </p:spPr>
+      </p:pic>
+      <p:pic>
+        <p:nvPicPr>
+          <p:cNvPr id="22" name="Image 20" descr="preencoded.png"/>
+          <p:cNvPicPr>
+            <a:picLocks noChangeAspect="1"/>
+          </p:cNvPicPr>
+          <p:nvPr/>
+        </p:nvPicPr>
+        <p:blipFill>
+          <a:blip r:embed="rId20"/>
+          <a:stretch>
+            <a:fillRect/>
+          </a:stretch>
+        </p:blipFill>
+        <p:spPr>
+          <a:xfrm>
+            <a:off x="8178701" y="1066800"/>
+            <a:ext cx="3708499" cy="4457700"/>
+          </a:xfrm>
+          <a:prstGeom prst="rect">
+            <a:avLst/>
+          </a:prstGeom>
+        </p:spPr>
+      </p:pic>
+      <p:pic>
+        <p:nvPicPr>
+          <p:cNvPr id="23" name="Image 21" descr="preencoded.png"/>
+          <p:cNvPicPr>
+            <a:picLocks noChangeAspect="1"/>
+          </p:cNvPicPr>
+          <p:nvPr/>
+        </p:nvPicPr>
+        <p:blipFill>
+          <a:blip r:embed="rId21"/>
+          <a:stretch>
+            <a:fillRect/>
+          </a:stretch>
+        </p:blipFill>
+        <p:spPr>
+          <a:xfrm>
+            <a:off x="8407301" y="1343025"/>
+            <a:ext cx="285750" cy="285750"/>
+          </a:xfrm>
+          <a:prstGeom prst="rect">
+            <a:avLst/>
+          </a:prstGeom>
+        </p:spPr>
+      </p:pic>
+      <p:pic>
+        <p:nvPicPr>
+          <p:cNvPr id="24" name="Image 22" descr="preencoded.png"/>
+          <p:cNvPicPr>
+            <a:picLocks noChangeAspect="1"/>
+          </p:cNvPicPr>
+          <p:nvPr/>
+        </p:nvPicPr>
+        <p:blipFill>
+          <a:blip r:embed="rId22"/>
+          <a:stretch>
+            <a:fillRect/>
+          </a:stretch>
+        </p:blipFill>
+        <p:spPr>
+          <a:xfrm>
+            <a:off x="8407301" y="1790700"/>
+            <a:ext cx="3251299" cy="685800"/>
+          </a:xfrm>
+          <a:prstGeom prst="rect">
+            <a:avLst/>
+          </a:prstGeom>
+        </p:spPr>
+      </p:pic>
+      <p:pic>
+        <p:nvPicPr>
+          <p:cNvPr id="25" name="Image 23" descr="preencoded.png"/>
+          <p:cNvPicPr>
+            <a:picLocks noChangeAspect="1"/>
+          </p:cNvPicPr>
+          <p:nvPr/>
+        </p:nvPicPr>
+        <p:blipFill>
+          <a:blip r:embed="rId23"/>
+          <a:stretch>
+            <a:fillRect/>
+          </a:stretch>
+        </p:blipFill>
+        <p:spPr>
+          <a:xfrm>
+            <a:off x="8521601" y="1943100"/>
+            <a:ext cx="133350" cy="152400"/>
+          </a:xfrm>
+          <a:prstGeom prst="rect">
+            <a:avLst/>
+          </a:prstGeom>
+        </p:spPr>
+      </p:pic>
+      <p:pic>
+        <p:nvPicPr>
+          <p:cNvPr id="26" name="Image 24" descr="preencoded.png"/>
+          <p:cNvPicPr>
+            <a:picLocks noChangeAspect="1"/>
+          </p:cNvPicPr>
+          <p:nvPr/>
+        </p:nvPicPr>
+        <p:blipFill>
+          <a:blip r:embed="rId24"/>
+          <a:stretch>
+            <a:fillRect/>
+          </a:stretch>
+        </p:blipFill>
+        <p:spPr>
+          <a:xfrm>
+            <a:off x="8407301" y="2590800"/>
+            <a:ext cx="3251299" cy="685800"/>
+          </a:xfrm>
+          <a:prstGeom prst="rect">
+            <a:avLst/>
+          </a:prstGeom>
+        </p:spPr>
+      </p:pic>
+      <p:pic>
+        <p:nvPicPr>
+          <p:cNvPr id="27" name="Image 25" descr="preencoded.png"/>
+          <p:cNvPicPr>
+            <a:picLocks noChangeAspect="1"/>
+          </p:cNvPicPr>
+          <p:nvPr/>
+        </p:nvPicPr>
+        <p:blipFill>
+          <a:blip r:embed="rId25"/>
+          <a:stretch>
+            <a:fillRect/>
+          </a:stretch>
+        </p:blipFill>
+        <p:spPr>
+          <a:xfrm>
+            <a:off x="8521601" y="2743200"/>
+            <a:ext cx="152400" cy="152400"/>
+          </a:xfrm>
+          <a:prstGeom prst="rect">
+            <a:avLst/>
+          </a:prstGeom>
+        </p:spPr>
+      </p:pic>
+      <p:pic>
+        <p:nvPicPr>
+          <p:cNvPr id="28" name="Image 26" descr="preencoded.png"/>
+          <p:cNvPicPr>
+            <a:picLocks noChangeAspect="1"/>
+          </p:cNvPicPr>
+          <p:nvPr/>
+        </p:nvPicPr>
+        <p:blipFill>
+          <a:blip r:embed="rId26"/>
+          <a:stretch>
+            <a:fillRect/>
+          </a:stretch>
+        </p:blipFill>
+        <p:spPr>
+          <a:xfrm>
+            <a:off x="8407301" y="3390900"/>
+            <a:ext cx="3251299" cy="685800"/>
+          </a:xfrm>
+          <a:prstGeom prst="rect">
+            <a:avLst/>
+          </a:prstGeom>
+        </p:spPr>
+      </p:pic>
+      <p:pic>
+        <p:nvPicPr>
+          <p:cNvPr id="29" name="Image 27" descr="preencoded.png"/>
+          <p:cNvPicPr>
+            <a:picLocks noChangeAspect="1"/>
+          </p:cNvPicPr>
+          <p:nvPr/>
+        </p:nvPicPr>
+        <p:blipFill>
+          <a:blip r:embed="rId27"/>
+          <a:stretch>
+            <a:fillRect/>
+          </a:stretch>
+        </p:blipFill>
+        <p:spPr>
+          <a:xfrm>
+            <a:off x="8521601" y="3543300"/>
+            <a:ext cx="152400" cy="152400"/>
+          </a:xfrm>
+          <a:prstGeom prst="rect">
+            <a:avLst/>
+          </a:prstGeom>
+        </p:spPr>
+      </p:pic>
+      <p:pic>
+        <p:nvPicPr>
+          <p:cNvPr id="30" name="Image 28" descr="preencoded.png"/>
+          <p:cNvPicPr>
+            <a:picLocks noChangeAspect="1"/>
+          </p:cNvPicPr>
+          <p:nvPr/>
+        </p:nvPicPr>
+        <p:blipFill>
+          <a:blip r:embed="rId28"/>
+          <a:stretch>
+            <a:fillRect/>
+          </a:stretch>
+        </p:blipFill>
+        <p:spPr>
+          <a:xfrm>
+            <a:off x="0" y="6781800"/>
+            <a:ext cx="12192000" cy="76200"/>
+          </a:xfrm>
+          <a:prstGeom prst="rect">
+            <a:avLst/>
+          </a:prstGeom>
+        </p:spPr>
+      </p:pic>
+      <p:sp>
+        <p:nvSpPr>
+          <p:cNvPr id="31" name="Text 0"/>
+          <p:cNvSpPr/>
+          <p:nvPr/>
+        </p:nvSpPr>
+        <p:spPr>
+          <a:xfrm>
+            <a:off x="381000" y="209550"/>
+            <a:ext cx="3063240" cy="342900"/>
+          </a:xfrm>
+          <a:prstGeom prst="rect">
+            <a:avLst/>
+          </a:prstGeom>
+          <a:noFill/>
+          <a:ln/>
+        </p:spPr>
+        <p:txBody>
+          <a:bodyPr vert="horz" wrap="square" lIns="0" tIns="0" rIns="0" bIns="0" rtlCol="0" anchor="t"/>
+          <a:lstStyle/>
+          <a:p>
+            <a:pPr marL="0" indent="0">
+              <a:lnSpc>
+                <a:spcPts val="2700"/>
+              </a:lnSpc>
+              <a:buNone/>
+            </a:pPr>
+            <a:r>
+              <a:rPr lang="en-US" sz="2250" b="1" dirty="0">
+                <a:solidFill>
+                  <a:srgbClr val="FFFFFF"/>
+                </a:solidFill>
+                <a:latin typeface="Noto Sans KR" pitchFamily="34" charset="0"/>
+                <a:ea typeface="Noto Sans KR" pitchFamily="34" charset="-122"/>
+                <a:cs typeface="Noto Sans KR" pitchFamily="34" charset="-120"/>
+              </a:rPr>
+              <a:t>데이터 개선 권장사항</a:t>
+            </a:r>
+            <a:endParaRPr lang="en-US" sz="2250" dirty="0"/>
+          </a:p>
+        </p:txBody>
+      </p:sp>
+      <p:sp>
+        <p:nvSpPr>
+          <p:cNvPr id="32" name="Text 1"/>
+          <p:cNvSpPr/>
+          <p:nvPr/>
+        </p:nvSpPr>
+        <p:spPr>
+          <a:xfrm>
+            <a:off x="11315700" y="247650"/>
+            <a:ext cx="594360" cy="266700"/>
+          </a:xfrm>
+          <a:prstGeom prst="rect">
+            <a:avLst/>
+          </a:prstGeom>
+          <a:noFill/>
+          <a:ln/>
+        </p:spPr>
+        <p:txBody>
+          <a:bodyPr vert="horz" wrap="square" lIns="0" tIns="0" rIns="0" bIns="0" rtlCol="0" anchor="t"/>
+          <a:lstStyle/>
+          <a:p>
+            <a:pPr marL="0" indent="0">
+              <a:lnSpc>
+                <a:spcPts val="2100"/>
+              </a:lnSpc>
+              <a:buNone/>
+            </a:pPr>
+            <a:r>
+              <a:rPr lang="en-US" sz="1500" dirty="0">
+                <a:solidFill>
+                  <a:srgbClr val="FFFFFF"/>
+                </a:solidFill>
+                <a:latin typeface="Noto Sans KR" pitchFamily="34" charset="0"/>
+                <a:ea typeface="Noto Sans KR" pitchFamily="34" charset="-122"/>
+                <a:cs typeface="Noto Sans KR" pitchFamily="34" charset="-120"/>
+              </a:rPr>
+              <a:t>17/20</a:t>
+            </a:r>
+            <a:endParaRPr lang="en-US" sz="1500" dirty="0"/>
+          </a:p>
+        </p:txBody>
+      </p:sp>
+      <p:sp>
+        <p:nvSpPr>
+          <p:cNvPr id="33" name="Text 2"/>
+          <p:cNvSpPr/>
+          <p:nvPr/>
+        </p:nvSpPr>
+        <p:spPr>
+          <a:xfrm>
+            <a:off x="895350" y="1333500"/>
+            <a:ext cx="1371600" cy="266700"/>
+          </a:xfrm>
+          <a:prstGeom prst="rect">
+            <a:avLst/>
+          </a:prstGeom>
+          <a:noFill/>
+          <a:ln/>
+        </p:spPr>
+        <p:txBody>
+          <a:bodyPr vert="horz" wrap="square" lIns="0" tIns="0" rIns="0" bIns="0" rtlCol="0" anchor="t"/>
+          <a:lstStyle/>
+          <a:p>
+            <a:pPr marL="0" indent="0">
+              <a:lnSpc>
+                <a:spcPts val="2100"/>
+              </a:lnSpc>
+              <a:buNone/>
+            </a:pPr>
+            <a:r>
+              <a:rPr lang="en-US" sz="1500" b="1" dirty="0">
+                <a:solidFill>
+                  <a:srgbClr val="1E40AF"/>
+                </a:solidFill>
+                <a:latin typeface="Noto Sans KR" pitchFamily="34" charset="0"/>
+                <a:ea typeface="Noto Sans KR" pitchFamily="34" charset="-122"/>
+                <a:cs typeface="Noto Sans KR" pitchFamily="34" charset="-120"/>
+              </a:rPr>
+              <a:t>추가 특징 수집</a:t>
+            </a:r>
+            <a:endParaRPr lang="en-US" sz="1500" dirty="0"/>
+          </a:p>
+        </p:txBody>
+      </p:sp>
+      <p:sp>
+        <p:nvSpPr>
+          <p:cNvPr id="34" name="Text 3"/>
+          <p:cNvSpPr/>
+          <p:nvPr/>
+        </p:nvSpPr>
+        <p:spPr>
+          <a:xfrm>
+            <a:off x="876300" y="1905000"/>
+            <a:ext cx="2034540" cy="228600"/>
+          </a:xfrm>
+          <a:prstGeom prst="rect">
+            <a:avLst/>
+          </a:prstGeom>
+          <a:noFill/>
+          <a:ln/>
+        </p:spPr>
+        <p:txBody>
+          <a:bodyPr vert="horz" wrap="square" lIns="0" tIns="0" rIns="0" bIns="0" rtlCol="0" anchor="t"/>
+          <a:lstStyle/>
+          <a:p>
+            <a:pPr marL="0" indent="0">
+              <a:lnSpc>
+                <a:spcPts val="1800"/>
+              </a:lnSpc>
+              <a:buNone/>
+            </a:pPr>
+            <a:r>
+              <a:rPr lang="en-US" sz="1200" dirty="0">
+                <a:solidFill>
+                  <a:srgbClr val="374151"/>
+                </a:solidFill>
+                <a:latin typeface="Noto Sans KR" pitchFamily="34" charset="0"/>
+                <a:ea typeface="Noto Sans KR" pitchFamily="34" charset="-122"/>
+                <a:cs typeface="Noto Sans KR" pitchFamily="34" charset="-120"/>
+              </a:rPr>
+              <a:t>고객 속성: 나이, 지역, 직업</a:t>
+            </a:r>
+            <a:endParaRPr lang="en-US" sz="1200" dirty="0"/>
+          </a:p>
+        </p:txBody>
+      </p:sp>
+      <p:sp>
+        <p:nvSpPr>
+          <p:cNvPr id="35" name="Text 4"/>
+          <p:cNvSpPr/>
+          <p:nvPr/>
+        </p:nvSpPr>
+        <p:spPr>
+          <a:xfrm>
+            <a:off x="895350" y="2476500"/>
+            <a:ext cx="2774900" cy="457200"/>
+          </a:xfrm>
+          <a:prstGeom prst="rect">
+            <a:avLst/>
+          </a:prstGeom>
+          <a:noFill/>
+          <a:ln/>
+        </p:spPr>
+        <p:txBody>
+          <a:bodyPr vert="horz" wrap="square" lIns="0" tIns="0" rIns="0" bIns="0" rtlCol="0" anchor="t"/>
+          <a:lstStyle/>
+          <a:p>
+            <a:pPr marL="0" indent="0">
+              <a:lnSpc>
+                <a:spcPts val="1800"/>
+              </a:lnSpc>
+              <a:buNone/>
+            </a:pPr>
+            <a:r>
+              <a:rPr lang="en-US" sz="1200" dirty="0">
+                <a:solidFill>
+                  <a:srgbClr val="374151"/>
+                </a:solidFill>
+                <a:latin typeface="Noto Sans KR" pitchFamily="34" charset="0"/>
+                <a:ea typeface="Noto Sans KR" pitchFamily="34" charset="-122"/>
+                <a:cs typeface="Noto Sans KR" pitchFamily="34" charset="-120"/>
+              </a:rPr>
+              <a:t>판매자 정보: 업 industry, 국가, 온라인/오프라인</a:t>
+            </a:r>
+            <a:endParaRPr lang="en-US" sz="1200" dirty="0"/>
+          </a:p>
+        </p:txBody>
+      </p:sp>
+      <p:sp>
+        <p:nvSpPr>
+          <p:cNvPr id="36" name="Text 5"/>
+          <p:cNvSpPr/>
+          <p:nvPr/>
+        </p:nvSpPr>
+        <p:spPr>
+          <a:xfrm>
+            <a:off x="914400" y="3276600"/>
+            <a:ext cx="2708910" cy="228600"/>
+          </a:xfrm>
+          <a:prstGeom prst="rect">
+            <a:avLst/>
+          </a:prstGeom>
+          <a:noFill/>
+          <a:ln/>
+        </p:spPr>
+        <p:txBody>
+          <a:bodyPr vert="horz" wrap="square" lIns="0" tIns="0" rIns="0" bIns="0" rtlCol="0" anchor="t"/>
+          <a:lstStyle/>
+          <a:p>
+            <a:pPr marL="0" indent="0">
+              <a:lnSpc>
+                <a:spcPts val="1800"/>
+              </a:lnSpc>
+              <a:buNone/>
+            </a:pPr>
+            <a:r>
+              <a:rPr lang="en-US" sz="1200" dirty="0">
+                <a:solidFill>
+                  <a:srgbClr val="374151"/>
+                </a:solidFill>
+                <a:latin typeface="Noto Sans KR" pitchFamily="34" charset="0"/>
+                <a:ea typeface="Noto Sans KR" pitchFamily="34" charset="-122"/>
+                <a:cs typeface="Noto Sans KR" pitchFamily="34" charset="-120"/>
+              </a:rPr>
+              <a:t>디바이스/네트워크: IP, 디바이스 ID</a:t>
+            </a:r>
+            <a:endParaRPr lang="en-US" sz="1200" dirty="0"/>
+          </a:p>
+        </p:txBody>
+      </p:sp>
+      <p:sp>
+        <p:nvSpPr>
+          <p:cNvPr id="37" name="Text 6"/>
+          <p:cNvSpPr/>
+          <p:nvPr/>
+        </p:nvSpPr>
+        <p:spPr>
+          <a:xfrm>
+            <a:off x="876300" y="3848100"/>
+            <a:ext cx="2720340" cy="228600"/>
+          </a:xfrm>
+          <a:prstGeom prst="rect">
+            <a:avLst/>
+          </a:prstGeom>
+          <a:noFill/>
+          <a:ln/>
+        </p:spPr>
+        <p:txBody>
+          <a:bodyPr vert="horz" wrap="square" lIns="0" tIns="0" rIns="0" bIns="0" rtlCol="0" anchor="t"/>
+          <a:lstStyle/>
+          <a:p>
+            <a:pPr marL="0" indent="0">
+              <a:lnSpc>
+                <a:spcPts val="1800"/>
+              </a:lnSpc>
+              <a:buNone/>
+            </a:pPr>
+            <a:r>
+              <a:rPr lang="en-US" sz="1200" dirty="0">
+                <a:solidFill>
+                  <a:srgbClr val="374151"/>
+                </a:solidFill>
+                <a:latin typeface="Noto Sans KR" pitchFamily="34" charset="0"/>
+                <a:ea typeface="Noto Sans KR" pitchFamily="34" charset="-122"/>
+                <a:cs typeface="Noto Sans KR" pitchFamily="34" charset="-120"/>
+              </a:rPr>
+              <a:t>통계적 특징: 평균 금액, 시간대 패턴</a:t>
+            </a:r>
+            <a:endParaRPr lang="en-US" sz="1200" dirty="0"/>
+          </a:p>
+        </p:txBody>
+      </p:sp>
+      <p:sp>
+        <p:nvSpPr>
+          <p:cNvPr id="38" name="Text 7"/>
+          <p:cNvSpPr/>
+          <p:nvPr/>
+        </p:nvSpPr>
+        <p:spPr>
+          <a:xfrm>
+            <a:off x="4803725" y="1333500"/>
+            <a:ext cx="1577340" cy="266700"/>
+          </a:xfrm>
+          <a:prstGeom prst="rect">
+            <a:avLst/>
+          </a:prstGeom>
+          <a:noFill/>
+          <a:ln/>
+        </p:spPr>
+        <p:txBody>
+          <a:bodyPr vert="horz" wrap="square" lIns="0" tIns="0" rIns="0" bIns="0" rtlCol="0" anchor="t"/>
+          <a:lstStyle/>
+          <a:p>
+            <a:pPr marL="0" indent="0">
+              <a:lnSpc>
+                <a:spcPts val="2100"/>
+              </a:lnSpc>
+              <a:buNone/>
+            </a:pPr>
+            <a:r>
+              <a:rPr lang="en-US" sz="1500" b="1" dirty="0">
+                <a:solidFill>
+                  <a:srgbClr val="1E40AF"/>
+                </a:solidFill>
+                <a:latin typeface="Noto Sans KR" pitchFamily="34" charset="0"/>
+                <a:ea typeface="Noto Sans KR" pitchFamily="34" charset="-122"/>
+                <a:cs typeface="Noto Sans KR" pitchFamily="34" charset="-120"/>
+              </a:rPr>
+              <a:t>외부 데이터 통합</a:t>
+            </a:r>
+            <a:endParaRPr lang="en-US" sz="1500" dirty="0"/>
+          </a:p>
+        </p:txBody>
+      </p:sp>
+      <p:sp>
+        <p:nvSpPr>
+          <p:cNvPr id="39" name="Text 8"/>
+          <p:cNvSpPr/>
+          <p:nvPr/>
+        </p:nvSpPr>
+        <p:spPr>
+          <a:xfrm>
+            <a:off x="4851350" y="1943100"/>
+            <a:ext cx="1245870" cy="228600"/>
+          </a:xfrm>
+          <a:prstGeom prst="rect">
+            <a:avLst/>
+          </a:prstGeom>
+          <a:noFill/>
+          <a:ln/>
+        </p:spPr>
+        <p:txBody>
+          <a:bodyPr vert="horz" wrap="square" lIns="0" tIns="0" rIns="0" bIns="0" rtlCol="0" anchor="t"/>
+          <a:lstStyle/>
+          <a:p>
+            <a:pPr marL="0" indent="0">
+              <a:lnSpc>
+                <a:spcPts val="1800"/>
+              </a:lnSpc>
+              <a:buNone/>
+            </a:pPr>
+            <a:r>
+              <a:rPr lang="en-US" sz="1200" b="1" dirty="0">
+                <a:solidFill>
+                  <a:srgbClr val="1D4ED8"/>
+                </a:solidFill>
+                <a:latin typeface="Noto Sans KR" pitchFamily="34" charset="0"/>
+                <a:ea typeface="Noto Sans KR" pitchFamily="34" charset="-122"/>
+                <a:cs typeface="Noto Sans KR" pitchFamily="34" charset="-120"/>
+              </a:rPr>
+              <a:t>블랙리스트 통합</a:t>
+            </a:r>
+            <a:endParaRPr lang="en-US" sz="1200" dirty="0"/>
+          </a:p>
+        </p:txBody>
+      </p:sp>
+      <p:sp>
+        <p:nvSpPr>
+          <p:cNvPr id="40" name="Text 9"/>
+          <p:cNvSpPr/>
+          <p:nvPr/>
+        </p:nvSpPr>
+        <p:spPr>
+          <a:xfrm>
+            <a:off x="4622750" y="2247900"/>
+            <a:ext cx="2946350" cy="457200"/>
+          </a:xfrm>
+          <a:prstGeom prst="rect">
+            <a:avLst/>
+          </a:prstGeom>
+          <a:noFill/>
+          <a:ln/>
+        </p:spPr>
+        <p:txBody>
+          <a:bodyPr vert="horz" wrap="square" lIns="0" tIns="0" rIns="0" bIns="0" rtlCol="0" anchor="t"/>
+          <a:lstStyle/>
+          <a:p>
+            <a:pPr marL="0" indent="0">
+              <a:lnSpc>
+                <a:spcPts val="1800"/>
+              </a:lnSpc>
+              <a:buNone/>
+            </a:pPr>
+            <a:r>
+              <a:rPr lang="en-US" sz="1200" dirty="0">
+                <a:solidFill>
+                  <a:srgbClr val="374151"/>
+                </a:solidFill>
+                <a:latin typeface="Noto Sans KR" pitchFamily="34" charset="0"/>
+                <a:ea typeface="Noto Sans KR" pitchFamily="34" charset="-122"/>
+                <a:cs typeface="Noto Sans KR" pitchFamily="34" charset="-120"/>
+              </a:rPr>
+              <a:t>거래 내역과 관련된 IP, 디바이스 ID, 카드 번호 등이 블랙리스트에 있는지 확인</a:t>
+            </a:r>
+            <a:endParaRPr lang="en-US" sz="1200" dirty="0"/>
+          </a:p>
+        </p:txBody>
+      </p:sp>
+      <p:sp>
+        <p:nvSpPr>
+          <p:cNvPr id="41" name="Text 10"/>
+          <p:cNvSpPr/>
+          <p:nvPr/>
+        </p:nvSpPr>
+        <p:spPr>
+          <a:xfrm>
+            <a:off x="4889450" y="3162300"/>
+            <a:ext cx="1508760" cy="228600"/>
+          </a:xfrm>
+          <a:prstGeom prst="rect">
+            <a:avLst/>
+          </a:prstGeom>
+          <a:noFill/>
+          <a:ln/>
+        </p:spPr>
+        <p:txBody>
+          <a:bodyPr vert="horz" wrap="square" lIns="0" tIns="0" rIns="0" bIns="0" rtlCol="0" anchor="t"/>
+          <a:lstStyle/>
+          <a:p>
+            <a:pPr marL="0" indent="0">
+              <a:lnSpc>
+                <a:spcPts val="1800"/>
+              </a:lnSpc>
+              <a:buNone/>
+            </a:pPr>
+            <a:r>
+              <a:rPr lang="en-US" sz="1200" b="1" dirty="0">
+                <a:solidFill>
+                  <a:srgbClr val="1D4ED8"/>
+                </a:solidFill>
+                <a:latin typeface="Noto Sans KR" pitchFamily="34" charset="0"/>
+                <a:ea typeface="Noto Sans KR" pitchFamily="34" charset="-122"/>
+                <a:cs typeface="Noto Sans KR" pitchFamily="34" charset="-120"/>
+              </a:rPr>
+              <a:t>규칙 기반 사기 점수</a:t>
+            </a:r>
+            <a:endParaRPr lang="en-US" sz="1200" dirty="0"/>
+          </a:p>
+        </p:txBody>
+      </p:sp>
+      <p:sp>
+        <p:nvSpPr>
+          <p:cNvPr id="42" name="Text 11"/>
+          <p:cNvSpPr/>
+          <p:nvPr/>
+        </p:nvSpPr>
+        <p:spPr>
+          <a:xfrm>
+            <a:off x="4622750" y="3467100"/>
+            <a:ext cx="2946350" cy="457200"/>
+          </a:xfrm>
+          <a:prstGeom prst="rect">
+            <a:avLst/>
+          </a:prstGeom>
+          <a:noFill/>
+          <a:ln/>
+        </p:spPr>
+        <p:txBody>
+          <a:bodyPr vert="horz" wrap="square" lIns="0" tIns="0" rIns="0" bIns="0" rtlCol="0" anchor="t"/>
+          <a:lstStyle/>
+          <a:p>
+            <a:pPr marL="0" indent="0">
+              <a:lnSpc>
+                <a:spcPts val="1800"/>
+              </a:lnSpc>
+              <a:buNone/>
+            </a:pPr>
+            <a:r>
+              <a:rPr lang="en-US" sz="1200" dirty="0">
+                <a:solidFill>
+                  <a:srgbClr val="374151"/>
+                </a:solidFill>
+                <a:latin typeface="Noto Sans KR" pitchFamily="34" charset="0"/>
+                <a:ea typeface="Noto Sans KR" pitchFamily="34" charset="-122"/>
+                <a:cs typeface="Noto Sans KR" pitchFamily="34" charset="-120"/>
+              </a:rPr>
+              <a:t>기존 규칙 기반 시스템의 사기 점수를 모델에 통합</a:t>
+            </a:r>
+            <a:endParaRPr lang="en-US" sz="1200" dirty="0"/>
+          </a:p>
+        </p:txBody>
+      </p:sp>
+      <p:sp>
+        <p:nvSpPr>
+          <p:cNvPr id="43" name="Text 12"/>
+          <p:cNvSpPr/>
+          <p:nvPr/>
+        </p:nvSpPr>
+        <p:spPr>
+          <a:xfrm>
+            <a:off x="4851350" y="4381500"/>
+            <a:ext cx="1120140" cy="228600"/>
+          </a:xfrm>
+          <a:prstGeom prst="rect">
+            <a:avLst/>
+          </a:prstGeom>
+          <a:noFill/>
+          <a:ln/>
+        </p:spPr>
+        <p:txBody>
+          <a:bodyPr vert="horz" wrap="square" lIns="0" tIns="0" rIns="0" bIns="0" rtlCol="0" anchor="t"/>
+          <a:lstStyle/>
+          <a:p>
+            <a:pPr marL="0" indent="0">
+              <a:lnSpc>
+                <a:spcPts val="1800"/>
+              </a:lnSpc>
+              <a:buNone/>
+            </a:pPr>
+            <a:r>
+              <a:rPr lang="en-US" sz="1200" b="1" dirty="0">
+                <a:solidFill>
+                  <a:srgbClr val="1D4ED8"/>
+                </a:solidFill>
+                <a:latin typeface="Noto Sans KR" pitchFamily="34" charset="0"/>
+                <a:ea typeface="Noto Sans KR" pitchFamily="34" charset="-122"/>
+                <a:cs typeface="Noto Sans KR" pitchFamily="34" charset="-120"/>
+              </a:rPr>
+              <a:t>외부 신용 정보</a:t>
+            </a:r>
+            <a:endParaRPr lang="en-US" sz="1200" dirty="0"/>
+          </a:p>
+        </p:txBody>
+      </p:sp>
+      <p:sp>
+        <p:nvSpPr>
+          <p:cNvPr id="44" name="Text 13"/>
+          <p:cNvSpPr/>
+          <p:nvPr/>
+        </p:nvSpPr>
+        <p:spPr>
+          <a:xfrm>
+            <a:off x="4622750" y="4686300"/>
+            <a:ext cx="2946350" cy="457200"/>
+          </a:xfrm>
+          <a:prstGeom prst="rect">
+            <a:avLst/>
+          </a:prstGeom>
+          <a:noFill/>
+          <a:ln/>
+        </p:spPr>
+        <p:txBody>
+          <a:bodyPr vert="horz" wrap="square" lIns="0" tIns="0" rIns="0" bIns="0" rtlCol="0" anchor="t"/>
+          <a:lstStyle/>
+          <a:p>
+            <a:pPr marL="0" indent="0">
+              <a:lnSpc>
+                <a:spcPts val="1800"/>
+              </a:lnSpc>
+              <a:buNone/>
+            </a:pPr>
+            <a:r>
+              <a:rPr lang="en-US" sz="1200" dirty="0">
+                <a:solidFill>
+                  <a:srgbClr val="374151"/>
+                </a:solidFill>
+                <a:latin typeface="Noto Sans KR" pitchFamily="34" charset="0"/>
+                <a:ea typeface="Noto Sans KR" pitchFamily="34" charset="-122"/>
+                <a:cs typeface="Noto Sans KR" pitchFamily="34" charset="-120"/>
+              </a:rPr>
+              <a:t>거래 시점의 신용 정보나 리스크 점수를 추가 특징으로 활용</a:t>
+            </a:r>
+            <a:endParaRPr lang="en-US" sz="1200" dirty="0"/>
+          </a:p>
+        </p:txBody>
+      </p:sp>
+      <p:sp>
+        <p:nvSpPr>
+          <p:cNvPr id="45" name="Text 14"/>
+          <p:cNvSpPr/>
+          <p:nvPr/>
+        </p:nvSpPr>
+        <p:spPr>
+          <a:xfrm>
+            <a:off x="8807351" y="1333500"/>
+            <a:ext cx="1577340" cy="266700"/>
+          </a:xfrm>
+          <a:prstGeom prst="rect">
+            <a:avLst/>
+          </a:prstGeom>
+          <a:noFill/>
+          <a:ln/>
+        </p:spPr>
+        <p:txBody>
+          <a:bodyPr vert="horz" wrap="square" lIns="0" tIns="0" rIns="0" bIns="0" rtlCol="0" anchor="t"/>
+          <a:lstStyle/>
+          <a:p>
+            <a:pPr marL="0" indent="0">
+              <a:lnSpc>
+                <a:spcPts val="2100"/>
+              </a:lnSpc>
+              <a:buNone/>
+            </a:pPr>
+            <a:r>
+              <a:rPr lang="en-US" sz="1500" b="1" dirty="0">
+                <a:solidFill>
+                  <a:srgbClr val="1E40AF"/>
+                </a:solidFill>
+                <a:latin typeface="Noto Sans KR" pitchFamily="34" charset="0"/>
+                <a:ea typeface="Noto Sans KR" pitchFamily="34" charset="-122"/>
+                <a:cs typeface="Noto Sans KR" pitchFamily="34" charset="-120"/>
+              </a:rPr>
+              <a:t>시계열 패턴 분석</a:t>
+            </a:r>
+            <a:endParaRPr lang="en-US" sz="1500" dirty="0"/>
+          </a:p>
+        </p:txBody>
+      </p:sp>
+      <p:sp>
+        <p:nvSpPr>
+          <p:cNvPr id="46" name="Text 15"/>
+          <p:cNvSpPr/>
+          <p:nvPr/>
+        </p:nvSpPr>
+        <p:spPr>
+          <a:xfrm>
+            <a:off x="8731151" y="1905000"/>
+            <a:ext cx="2609850" cy="228600"/>
+          </a:xfrm>
+          <a:prstGeom prst="rect">
+            <a:avLst/>
+          </a:prstGeom>
+          <a:noFill/>
+          <a:ln/>
+        </p:spPr>
+        <p:txBody>
+          <a:bodyPr vert="horz" wrap="square" lIns="0" tIns="0" rIns="0" bIns="0" rtlCol="0" anchor="t"/>
+          <a:lstStyle/>
+          <a:p>
+            <a:pPr marL="0" indent="0">
+              <a:lnSpc>
+                <a:spcPts val="1800"/>
+              </a:lnSpc>
+              <a:buNone/>
+            </a:pPr>
+            <a:r>
+              <a:rPr lang="en-US" sz="1200" b="1" dirty="0">
+                <a:solidFill>
+                  <a:srgbClr val="1D4ED8"/>
+                </a:solidFill>
+                <a:latin typeface="Noto Sans KR" pitchFamily="34" charset="0"/>
+                <a:ea typeface="Noto Sans KR" pitchFamily="34" charset="-122"/>
+                <a:cs typeface="Noto Sans KR" pitchFamily="34" charset="-120"/>
+              </a:rPr>
+              <a:t>시간대 특징</a:t>
+            </a:r>
+            <a:endParaRPr lang="en-US" sz="1200" dirty="0"/>
+          </a:p>
+        </p:txBody>
+      </p:sp>
+      <p:sp>
+        <p:nvSpPr>
+          <p:cNvPr id="47" name="Text 16"/>
+          <p:cNvSpPr/>
+          <p:nvPr/>
+        </p:nvSpPr>
+        <p:spPr>
+          <a:xfrm>
+            <a:off x="8731151" y="2133600"/>
+            <a:ext cx="3131820" cy="228600"/>
+          </a:xfrm>
+          <a:prstGeom prst="rect">
+            <a:avLst/>
+          </a:prstGeom>
+          <a:noFill/>
+          <a:ln/>
+        </p:spPr>
+        <p:txBody>
+          <a:bodyPr vert="horz" wrap="square" lIns="0" tIns="0" rIns="0" bIns="0" rtlCol="0" anchor="t"/>
+          <a:lstStyle/>
+          <a:p>
+            <a:pPr marL="0" indent="0">
+              <a:lnSpc>
+                <a:spcPts val="1800"/>
+              </a:lnSpc>
+              <a:buNone/>
+            </a:pPr>
+            <a:r>
+              <a:rPr lang="en-US" sz="1200" dirty="0">
+                <a:solidFill>
+                  <a:srgbClr val="374151"/>
+                </a:solidFill>
+                <a:latin typeface="Noto Sans KR" pitchFamily="34" charset="0"/>
+                <a:ea typeface="Noto Sans KR" pitchFamily="34" charset="-122"/>
+                <a:cs typeface="Noto Sans KR" pitchFamily="34" charset="-120"/>
+              </a:rPr>
+              <a:t>거래 시간대(시간대별 평균 금액, 거래 수)</a:t>
+            </a:r>
+            <a:endParaRPr lang="en-US" sz="1200" dirty="0"/>
+          </a:p>
+        </p:txBody>
+      </p:sp>
+      <p:sp>
+        <p:nvSpPr>
+          <p:cNvPr id="48" name="Text 17"/>
+          <p:cNvSpPr/>
+          <p:nvPr/>
+        </p:nvSpPr>
+        <p:spPr>
+          <a:xfrm>
+            <a:off x="8750201" y="2705100"/>
+            <a:ext cx="2162175" cy="228600"/>
+          </a:xfrm>
+          <a:prstGeom prst="rect">
+            <a:avLst/>
+          </a:prstGeom>
+          <a:noFill/>
+          <a:ln/>
+        </p:spPr>
+        <p:txBody>
+          <a:bodyPr vert="horz" wrap="square" lIns="0" tIns="0" rIns="0" bIns="0" rtlCol="0" anchor="t"/>
+          <a:lstStyle/>
+          <a:p>
+            <a:pPr marL="0" indent="0">
+              <a:lnSpc>
+                <a:spcPts val="1800"/>
+              </a:lnSpc>
+              <a:buNone/>
+            </a:pPr>
+            <a:r>
+              <a:rPr lang="en-US" sz="1200" b="1" dirty="0">
+                <a:solidFill>
+                  <a:srgbClr val="1D4ED8"/>
+                </a:solidFill>
+                <a:latin typeface="Noto Sans KR" pitchFamily="34" charset="0"/>
+                <a:ea typeface="Noto Sans KR" pitchFamily="34" charset="-122"/>
+                <a:cs typeface="Noto Sans KR" pitchFamily="34" charset="-120"/>
+              </a:rPr>
+              <a:t>시간 창 통계</a:t>
+            </a:r>
+            <a:endParaRPr lang="en-US" sz="1200" dirty="0"/>
+          </a:p>
+        </p:txBody>
+      </p:sp>
+      <p:sp>
+        <p:nvSpPr>
+          <p:cNvPr id="49" name="Text 18"/>
+          <p:cNvSpPr/>
+          <p:nvPr/>
+        </p:nvSpPr>
+        <p:spPr>
+          <a:xfrm>
+            <a:off x="8750201" y="2933700"/>
+            <a:ext cx="2594610" cy="228600"/>
+          </a:xfrm>
+          <a:prstGeom prst="rect">
+            <a:avLst/>
+          </a:prstGeom>
+          <a:noFill/>
+          <a:ln/>
+        </p:spPr>
+        <p:txBody>
+          <a:bodyPr vert="horz" wrap="square" lIns="0" tIns="0" rIns="0" bIns="0" rtlCol="0" anchor="t"/>
+          <a:lstStyle/>
+          <a:p>
+            <a:pPr marL="0" indent="0">
+              <a:lnSpc>
+                <a:spcPts val="1800"/>
+              </a:lnSpc>
+              <a:buNone/>
+            </a:pPr>
+            <a:r>
+              <a:rPr lang="en-US" sz="1200" dirty="0">
+                <a:solidFill>
+                  <a:srgbClr val="374151"/>
+                </a:solidFill>
+                <a:latin typeface="Noto Sans KR" pitchFamily="34" charset="0"/>
+                <a:ea typeface="Noto Sans KR" pitchFamily="34" charset="-122"/>
+                <a:cs typeface="Noto Sans KR" pitchFamily="34" charset="-120"/>
+              </a:rPr>
+              <a:t>특정 시간 창 내 거래 수, 누적 금액</a:t>
+            </a:r>
+            <a:endParaRPr lang="en-US" sz="1200" dirty="0"/>
+          </a:p>
+        </p:txBody>
+      </p:sp>
+      <p:sp>
+        <p:nvSpPr>
+          <p:cNvPr id="50" name="Text 19"/>
+          <p:cNvSpPr/>
+          <p:nvPr/>
+        </p:nvSpPr>
+        <p:spPr>
+          <a:xfrm>
+            <a:off x="8750201" y="3505200"/>
+            <a:ext cx="2695575" cy="228600"/>
+          </a:xfrm>
+          <a:prstGeom prst="rect">
+            <a:avLst/>
+          </a:prstGeom>
+          <a:noFill/>
+          <a:ln/>
+        </p:spPr>
+        <p:txBody>
+          <a:bodyPr vert="horz" wrap="square" lIns="0" tIns="0" rIns="0" bIns="0" rtlCol="0" anchor="t"/>
+          <a:lstStyle/>
+          <a:p>
+            <a:pPr marL="0" indent="0">
+              <a:lnSpc>
+                <a:spcPts val="1800"/>
+              </a:lnSpc>
+              <a:buNone/>
+            </a:pPr>
+            <a:r>
+              <a:rPr lang="en-US" sz="1200" b="1" dirty="0">
+                <a:solidFill>
+                  <a:srgbClr val="1D4ED8"/>
+                </a:solidFill>
+                <a:latin typeface="Noto Sans KR" pitchFamily="34" charset="0"/>
+                <a:ea typeface="Noto Sans KR" pitchFamily="34" charset="-122"/>
+                <a:cs typeface="Noto Sans KR" pitchFamily="34" charset="-120"/>
+              </a:rPr>
+              <a:t>시간 기반 분할</a:t>
+            </a:r>
+            <a:endParaRPr lang="en-US" sz="1200" dirty="0"/>
+          </a:p>
+        </p:txBody>
+      </p:sp>
+      <p:sp>
+        <p:nvSpPr>
+          <p:cNvPr id="51" name="Text 20"/>
+          <p:cNvSpPr/>
+          <p:nvPr/>
+        </p:nvSpPr>
+        <p:spPr>
+          <a:xfrm>
+            <a:off x="8750201" y="3733800"/>
+            <a:ext cx="3234690" cy="228600"/>
+          </a:xfrm>
+          <a:prstGeom prst="rect">
+            <a:avLst/>
+          </a:prstGeom>
+          <a:noFill/>
+          <a:ln/>
+        </p:spPr>
+        <p:txBody>
+          <a:bodyPr vert="horz" wrap="square" lIns="0" tIns="0" rIns="0" bIns="0" rtlCol="0" anchor="t"/>
+          <a:lstStyle/>
+          <a:p>
+            <a:pPr marL="0" indent="0">
+              <a:lnSpc>
+                <a:spcPts val="1800"/>
+              </a:lnSpc>
+              <a:buNone/>
+            </a:pPr>
+            <a:r>
+              <a:rPr lang="en-US" sz="1200" dirty="0">
+                <a:solidFill>
+                  <a:srgbClr val="374151"/>
+                </a:solidFill>
+                <a:latin typeface="Noto Sans KR" pitchFamily="34" charset="0"/>
+                <a:ea typeface="Noto Sans KR" pitchFamily="34" charset="-122"/>
+                <a:cs typeface="Noto Sans KR" pitchFamily="34" charset="-120"/>
+              </a:rPr>
+              <a:t>시간 기반 분할 또는 롤링 윈도우 교차 검증</a:t>
+            </a:r>
+            <a:endParaRPr lang="en-US" sz="1200" dirty="0"/>
+          </a:p>
+        </p:txBody>
+      </p:sp>
+    </p:spTree>
+  </p:cSld>
+  <p:clrMapOvr>
+    <a:masterClrMapping/>
+  </p:clrMapOvr>
+</p:sld>
+</file>
+
+<file path=ppt/slides/slide21.xml><?xml version="1.0" encoding="utf-8"?>
+<p:sld xmlns:a="http://schemas.openxmlformats.org/drawingml/2006/main" xmlns:r="http://schemas.openxmlformats.org/officeDocument/2006/relationships" xmlns:p="http://schemas.openxmlformats.org/presentationml/2006/main">
   <p:cSld name="Slide 18">
     <p:spTree>
       <p:nvGrpSpPr>
@@ -25096,7 +25758,7 @@
 </p:sld>
 </file>
 
-<file path=ppt/slides/slide21.xml><?xml version="1.0" encoding="utf-8"?>
+<file path=ppt/slides/slide22.xml><?xml version="1.0" encoding="utf-8"?>
 <p:sld xmlns:a="http://schemas.openxmlformats.org/drawingml/2006/main" xmlns:r="http://schemas.openxmlformats.org/officeDocument/2006/relationships" xmlns:p="http://schemas.openxmlformats.org/presentationml/2006/main">
   <p:cSld name="Slide 19">
     <p:spTree>
@@ -26705,7 +27367,7 @@
 </p:sld>
 </file>
 
-<file path=ppt/slides/slide22.xml><?xml version="1.0" encoding="utf-8"?>
+<file path=ppt/slides/slide23.xml><?xml version="1.0" encoding="utf-8"?>
 <p:sld xmlns:a="http://schemas.openxmlformats.org/drawingml/2006/main" xmlns:r="http://schemas.openxmlformats.org/officeDocument/2006/relationships" xmlns:p="http://schemas.openxmlformats.org/presentationml/2006/main">
   <p:cSld name="Slide 20">
     <p:spTree>

--- a/CreditCardFraud/report/신용카드 사기 탐지 프로젝트 분석.pptx
+++ b/CreditCardFraud/report/신용카드 사기 탐지 프로젝트 분석.pptx
@@ -27,10 +27,10 @@
     <p:sldId id="265" r:id="rId18"/>
     <p:sldId id="270" r:id="rId19"/>
     <p:sldId id="271" r:id="rId20"/>
-    <p:sldId id="272" r:id="rId21"/>
-    <p:sldId id="273" r:id="rId22"/>
-    <p:sldId id="274" r:id="rId23"/>
-    <p:sldId id="275" r:id="rId24"/>
+    <p:sldId id="273" r:id="rId21"/>
+    <p:sldId id="274" r:id="rId22"/>
+    <p:sldId id="275" r:id="rId23"/>
+    <p:sldId id="280" r:id="rId24"/>
   </p:sldIdLst>
   <p:sldSz cx="12192000" cy="6858000"/>
   <p:notesSz cx="6858000" cy="12192000"/>
@@ -128,7 +128,18 @@
   </p:defaultTextStyle>
   <p:extLst>
     <p:ext uri="{EFAFB233-063F-42B5-8137-9DF3F51BA10A}">
-      <p15:sldGuideLst xmlns:p15="http://schemas.microsoft.com/office/powerpoint/2012/main"/>
+      <p15:sldGuideLst xmlns:p15="http://schemas.microsoft.com/office/powerpoint/2012/main">
+        <p15:guide id="1" orient="horz" pos="2160" userDrawn="1">
+          <p15:clr>
+            <a:srgbClr val="A4A3A4"/>
+          </p15:clr>
+        </p15:guide>
+        <p15:guide id="2" pos="3840" userDrawn="1">
+          <p15:clr>
+            <a:srgbClr val="A4A3A4"/>
+          </p15:clr>
+        </p15:guide>
+      </p15:sldGuideLst>
     </p:ext>
   </p:extLst>
 </p:presentation>
@@ -1548,7 +1559,13 @@
   <p:cSld>
     <p:spTree>
       <p:nvGrpSpPr>
-        <p:cNvPr id="1" name=""/>
+        <p:cNvPr id="1" name="">
+          <a:extLst>
+            <a:ext uri="{FF2B5EF4-FFF2-40B4-BE49-F238E27FC236}">
+              <a16:creationId xmlns:a16="http://schemas.microsoft.com/office/drawing/2014/main" id="{2C9CCA47-A2D9-C2D4-C47E-5BC39F19D66E}"/>
+            </a:ext>
+          </a:extLst>
+        </p:cNvPr>
         <p:cNvGrpSpPr/>
         <p:nvPr/>
       </p:nvGrpSpPr>
@@ -1562,7 +1579,13 @@
       </p:grpSpPr>
       <p:sp>
         <p:nvSpPr>
-          <p:cNvPr id="2" name="Slide Image Placeholder 1"/>
+          <p:cNvPr id="2" name="Slide Image Placeholder 1">
+            <a:extLst>
+              <a:ext uri="{FF2B5EF4-FFF2-40B4-BE49-F238E27FC236}">
+                <a16:creationId xmlns:a16="http://schemas.microsoft.com/office/drawing/2014/main" id="{7FBD697B-8023-68F1-106A-DDFCFF20DF01}"/>
+              </a:ext>
+            </a:extLst>
+          </p:cNvPr>
           <p:cNvSpPr>
             <a:spLocks noGrp="1" noRot="1" noChangeAspect="1"/>
           </p:cNvSpPr>
@@ -1574,7 +1597,13 @@
       </p:sp>
       <p:sp>
         <p:nvSpPr>
-          <p:cNvPr id="3" name="Notes Placeholder 2"/>
+          <p:cNvPr id="3" name="Notes Placeholder 2">
+            <a:extLst>
+              <a:ext uri="{FF2B5EF4-FFF2-40B4-BE49-F238E27FC236}">
+                <a16:creationId xmlns:a16="http://schemas.microsoft.com/office/drawing/2014/main" id="{8862855E-7587-70F1-6D95-478D2328F3F8}"/>
+              </a:ext>
+            </a:extLst>
+          </p:cNvPr>
           <p:cNvSpPr>
             <a:spLocks noGrp="1"/>
           </p:cNvSpPr>
@@ -1593,7 +1622,13 @@
       </p:sp>
       <p:sp>
         <p:nvSpPr>
-          <p:cNvPr id="4" name="Slide Number Placeholder 3"/>
+          <p:cNvPr id="4" name="Slide Number Placeholder 3">
+            <a:extLst>
+              <a:ext uri="{FF2B5EF4-FFF2-40B4-BE49-F238E27FC236}">
+                <a16:creationId xmlns:a16="http://schemas.microsoft.com/office/drawing/2014/main" id="{108B3F0A-9073-D082-0EE3-E13110A4D149}"/>
+              </a:ext>
+            </a:extLst>
+          </p:cNvPr>
           <p:cNvSpPr>
             <a:spLocks noGrp="1"/>
           </p:cNvSpPr>
@@ -1617,7 +1652,7 @@
     </p:spTree>
     <p:extLst>
       <p:ext uri="{BB962C8B-B14F-4D97-AF65-F5344CB8AC3E}">
-        <p14:creationId xmlns:p14="http://schemas.microsoft.com/office/powerpoint/2010/main" val="1024086991"/>
+        <p14:creationId xmlns:p14="http://schemas.microsoft.com/office/powerpoint/2010/main" val="3025986684"/>
       </p:ext>
     </p:extLst>
   </p:cSld>
@@ -18297,7 +18332,62 @@
                 <a:ea typeface="Noto Sans KR" pitchFamily="34" charset="-122"/>
                 <a:cs typeface="Noto Sans KR" pitchFamily="34" charset="-120"/>
               </a:rPr>
-              <a:t>모델 성능은 SMOTE 파라미터 조정에 믉감하게 영향을 받습니다.</a:t>
+              <a:t>모델 성능은 SMOTE 파라미터 </a:t>
+            </a:r>
+            <a:r>
+              <a:rPr lang="en-US" sz="1200" dirty="0" err="1">
+                <a:solidFill>
+                  <a:srgbClr val="374151"/>
+                </a:solidFill>
+                <a:latin typeface="Noto Sans KR" pitchFamily="34" charset="0"/>
+                <a:ea typeface="Noto Sans KR" pitchFamily="34" charset="-122"/>
+                <a:cs typeface="Noto Sans KR" pitchFamily="34" charset="-120"/>
+              </a:rPr>
+              <a:t>조정에</a:t>
+            </a:r>
+            <a:r>
+              <a:rPr lang="en-US" sz="1200" dirty="0">
+                <a:solidFill>
+                  <a:srgbClr val="374151"/>
+                </a:solidFill>
+                <a:latin typeface="Noto Sans KR" pitchFamily="34" charset="0"/>
+                <a:ea typeface="Noto Sans KR" pitchFamily="34" charset="-122"/>
+                <a:cs typeface="Noto Sans KR" pitchFamily="34" charset="-120"/>
+              </a:rPr>
+              <a:t> </a:t>
+            </a:r>
+            <a:r>
+              <a:rPr lang="ko-KR" altLang="en-US" sz="1200" dirty="0">
+                <a:solidFill>
+                  <a:srgbClr val="374151"/>
+                </a:solidFill>
+                <a:latin typeface="Noto Sans KR" pitchFamily="34" charset="0"/>
+                <a:ea typeface="Noto Sans KR" pitchFamily="34" charset="-122"/>
+                <a:cs typeface="Noto Sans KR" pitchFamily="34" charset="-120"/>
+              </a:rPr>
+              <a:t>민</a:t>
+            </a:r>
+            <a:r>
+              <a:rPr lang="en-US" sz="1200" dirty="0" err="1">
+                <a:solidFill>
+                  <a:srgbClr val="374151"/>
+                </a:solidFill>
+                <a:latin typeface="Noto Sans KR" pitchFamily="34" charset="0"/>
+                <a:ea typeface="Noto Sans KR" pitchFamily="34" charset="-122"/>
+                <a:cs typeface="Noto Sans KR" pitchFamily="34" charset="-120"/>
+              </a:rPr>
+              <a:t>감하게</a:t>
+            </a:r>
+            <a:r>
+              <a:rPr lang="en-US" sz="1200" dirty="0">
+                <a:solidFill>
+                  <a:srgbClr val="374151"/>
+                </a:solidFill>
+                <a:latin typeface="Noto Sans KR" pitchFamily="34" charset="0"/>
+                <a:ea typeface="Noto Sans KR" pitchFamily="34" charset="-122"/>
+                <a:cs typeface="Noto Sans KR" pitchFamily="34" charset="-120"/>
+              </a:rPr>
+              <a:t> 영향을 받습니다.</a:t>
             </a:r>
             <a:endParaRPr lang="en-US" sz="1200" dirty="0"/>
           </a:p>
@@ -18794,7 +18884,7 @@
         </p:blipFill>
         <p:spPr>
           <a:xfrm>
-            <a:off x="571500" y="5267325"/>
+            <a:off x="6172200" y="4947231"/>
             <a:ext cx="190500" cy="190500"/>
           </a:xfrm>
           <a:prstGeom prst="rect">
@@ -18955,11 +19045,10 @@
           <a:bodyPr vert="horz" wrap="square" lIns="0" tIns="0" rIns="0" bIns="0" rtlCol="0" anchor="t"/>
           <a:lstStyle/>
           <a:p>
-            <a:pPr marL="0" indent="0">
+            <a:pPr>
               <a:lnSpc>
                 <a:spcPts val="2400"/>
               </a:lnSpc>
-              <a:buNone/>
             </a:pPr>
             <a:r>
               <a:rPr lang="en-US" sz="1800" b="1" dirty="0">
@@ -18970,7 +19059,62 @@
                 <a:ea typeface="Noto Sans KR" pitchFamily="34" charset="-122"/>
                 <a:cs typeface="Noto Sans KR" pitchFamily="34" charset="-120"/>
               </a:rPr>
-              <a:t>최종 모델: SMOTE 강화 MLP</a:t>
+              <a:t>최종 모델: </a:t>
+            </a:r>
+            <a:r>
+              <a:rPr lang="en-US" b="1" dirty="0">
+                <a:solidFill>
+                  <a:srgbClr val="1E40AF"/>
+                </a:solidFill>
+                <a:latin typeface="Noto Sans KR" pitchFamily="34" charset="0"/>
+                <a:ea typeface="Noto Sans KR" pitchFamily="34" charset="-122"/>
+                <a:cs typeface="Noto Sans KR" pitchFamily="34" charset="-120"/>
+              </a:rPr>
+              <a:t>MLP Oversampling </a:t>
+            </a:r>
+            <a:r>
+              <a:rPr lang="ko-KR" altLang="en-US" b="1" dirty="0">
+                <a:solidFill>
+                  <a:srgbClr val="1E40AF"/>
+                </a:solidFill>
+                <a:latin typeface="Noto Sans KR" pitchFamily="34" charset="0"/>
+                <a:ea typeface="Noto Sans KR" pitchFamily="34" charset="-122"/>
+                <a:cs typeface="Noto Sans KR" pitchFamily="34" charset="-120"/>
+              </a:rPr>
+              <a:t>모델</a:t>
+            </a:r>
+            <a:r>
+              <a:rPr lang="en-US" altLang="ko-KR" b="1" dirty="0">
+                <a:solidFill>
+                  <a:srgbClr val="1E40AF"/>
+                </a:solidFill>
+                <a:latin typeface="Noto Sans KR" pitchFamily="34" charset="0"/>
+                <a:ea typeface="Noto Sans KR" pitchFamily="34" charset="-122"/>
+                <a:cs typeface="Noto Sans KR" pitchFamily="34" charset="-120"/>
+              </a:rPr>
+              <a:t>(</a:t>
+            </a:r>
+            <a:r>
+              <a:rPr lang="en-US" b="1" dirty="0" err="1">
+                <a:solidFill>
+                  <a:srgbClr val="1E40AF"/>
+                </a:solidFill>
+                <a:latin typeface="Noto Sans KR" pitchFamily="34" charset="0"/>
+                <a:ea typeface="Noto Sans KR" pitchFamily="34" charset="-122"/>
+                <a:cs typeface="Noto Sans KR" pitchFamily="34" charset="-120"/>
+              </a:rPr>
+              <a:t>oversample_capped_mlp</a:t>
+            </a:r>
+            <a:r>
+              <a:rPr lang="en-US" b="1" dirty="0">
+                <a:solidFill>
+                  <a:srgbClr val="1E40AF"/>
+                </a:solidFill>
+                <a:latin typeface="Noto Sans KR" pitchFamily="34" charset="0"/>
+                <a:ea typeface="Noto Sans KR" pitchFamily="34" charset="-122"/>
+                <a:cs typeface="Noto Sans KR" pitchFamily="34" charset="-120"/>
+              </a:rPr>
+              <a:t>)</a:t>
             </a:r>
             <a:endParaRPr lang="en-US" sz="1800" dirty="0"/>
           </a:p>
@@ -19320,8 +19464,8 @@
         </p:nvSpPr>
         <p:spPr>
           <a:xfrm>
-            <a:off x="571500" y="4876800"/>
-            <a:ext cx="11049000" cy="266700"/>
+            <a:off x="583373" y="4785306"/>
+            <a:ext cx="2880038" cy="228600"/>
           </a:xfrm>
           <a:prstGeom prst="rect">
             <a:avLst/>
@@ -19362,7 +19506,7 @@
         </p:nvSpPr>
         <p:spPr>
           <a:xfrm>
-            <a:off x="876300" y="5219700"/>
+            <a:off x="6477000" y="4899606"/>
             <a:ext cx="3646170" cy="228600"/>
           </a:xfrm>
           <a:prstGeom prst="rect">
@@ -19382,7 +19526,7 @@
               <a:buNone/>
             </a:pPr>
             <a:r>
-              <a:rPr lang="en-US" sz="1200" dirty="0">
+              <a:rPr lang="en-US" sz="1200">
                 <a:solidFill>
                   <a:srgbClr val="374151"/>
                 </a:solidFill>
@@ -19432,7 +19576,190 @@
                 <a:ea typeface="Noto Sans KR" pitchFamily="34" charset="-122"/>
                 <a:cs typeface="Noto Sans KR" pitchFamily="34" charset="-120"/>
               </a:rPr>
-              <a:t>높은 정밀도(0.9994)로 합법적 거래의 잘못된 차단 최소화</a:t>
+              <a:t>높은 정밀도(0.9994)로 </a:t>
+            </a:r>
+            <a:r>
+              <a:rPr lang="ko-KR" altLang="en-US" sz="1200" dirty="0">
+                <a:solidFill>
+                  <a:srgbClr val="374151"/>
+                </a:solidFill>
+                <a:latin typeface="Noto Sans KR" pitchFamily="34" charset="0"/>
+                <a:ea typeface="Noto Sans KR" pitchFamily="34" charset="-122"/>
+                <a:cs typeface="Noto Sans KR" pitchFamily="34" charset="-120"/>
+              </a:rPr>
+              <a:t>정상 거래 </a:t>
+            </a:r>
+            <a:r>
+              <a:rPr lang="ko-KR" altLang="en-US" sz="1200" dirty="0" err="1">
+                <a:solidFill>
+                  <a:srgbClr val="374151"/>
+                </a:solidFill>
+                <a:latin typeface="Noto Sans KR" pitchFamily="34" charset="0"/>
+                <a:ea typeface="Noto Sans KR" pitchFamily="34" charset="-122"/>
+                <a:cs typeface="Noto Sans KR" pitchFamily="34" charset="-120"/>
+              </a:rPr>
+              <a:t>오탐</a:t>
+            </a:r>
+            <a:r>
+              <a:rPr lang="en-US" sz="1200" dirty="0">
+                <a:solidFill>
+                  <a:srgbClr val="374151"/>
+                </a:solidFill>
+                <a:latin typeface="Noto Sans KR" pitchFamily="34" charset="0"/>
+                <a:ea typeface="Noto Sans KR" pitchFamily="34" charset="-122"/>
+                <a:cs typeface="Noto Sans KR" pitchFamily="34" charset="-120"/>
+              </a:rPr>
+              <a:t> 최소화</a:t>
+            </a:r>
+            <a:endParaRPr lang="en-US" sz="1200" dirty="0"/>
+          </a:p>
+        </p:txBody>
+      </p:sp>
+      <p:sp>
+        <p:nvSpPr>
+          <p:cNvPr id="36" name="Text 12">
+            <a:extLst>
+              <a:ext uri="{FF2B5EF4-FFF2-40B4-BE49-F238E27FC236}">
+                <a16:creationId xmlns:a16="http://schemas.microsoft.com/office/drawing/2014/main" id="{5F10EE5A-FC2E-9DB3-8862-AB76395DD633}"/>
+              </a:ext>
+            </a:extLst>
+          </p:cNvPr>
+          <p:cNvSpPr/>
+          <p:nvPr/>
+        </p:nvSpPr>
+        <p:spPr>
+          <a:xfrm>
+            <a:off x="571500" y="5086350"/>
+            <a:ext cx="5143501" cy="190500"/>
+          </a:xfrm>
+          <a:prstGeom prst="rect">
+            <a:avLst/>
+          </a:prstGeom>
+          <a:noFill/>
+          <a:ln/>
+        </p:spPr>
+        <p:txBody>
+          <a:bodyPr vert="horz" wrap="square" lIns="0" tIns="0" rIns="0" bIns="0" rtlCol="0" anchor="t"/>
+          <a:lstStyle/>
+          <a:p>
+            <a:pPr>
+              <a:lnSpc>
+                <a:spcPts val="1800"/>
+              </a:lnSpc>
+            </a:pPr>
+            <a:r>
+              <a:rPr lang="ko-KR" altLang="en-US" sz="1200" dirty="0" err="1">
+                <a:solidFill>
+                  <a:srgbClr val="374151"/>
+                </a:solidFill>
+                <a:latin typeface="Noto Sans KR" pitchFamily="34" charset="0"/>
+                <a:ea typeface="Noto Sans KR" pitchFamily="34" charset="-122"/>
+                <a:cs typeface="Noto Sans KR" pitchFamily="34" charset="-120"/>
+              </a:rPr>
+              <a:t>오버샘플링과</a:t>
+            </a:r>
+            <a:r>
+              <a:rPr lang="ko-KR" altLang="en-US" sz="1200" dirty="0">
+                <a:solidFill>
+                  <a:srgbClr val="374151"/>
+                </a:solidFill>
+                <a:latin typeface="Noto Sans KR" pitchFamily="34" charset="0"/>
+                <a:ea typeface="Noto Sans KR" pitchFamily="34" charset="-122"/>
+                <a:cs typeface="Noto Sans KR" pitchFamily="34" charset="-120"/>
+              </a:rPr>
+              <a:t> </a:t>
+            </a:r>
+            <a:r>
+              <a:rPr lang="ko-KR" altLang="en-US" sz="1200" dirty="0" err="1">
+                <a:solidFill>
+                  <a:srgbClr val="374151"/>
+                </a:solidFill>
+                <a:latin typeface="Noto Sans KR" pitchFamily="34" charset="0"/>
+                <a:ea typeface="Noto Sans KR" pitchFamily="34" charset="-122"/>
+                <a:cs typeface="Noto Sans KR" pitchFamily="34" charset="-120"/>
+              </a:rPr>
+              <a:t>상한값</a:t>
+            </a:r>
+            <a:r>
+              <a:rPr lang="en-US" altLang="ko-KR" sz="1200" dirty="0">
+                <a:solidFill>
+                  <a:srgbClr val="374151"/>
+                </a:solidFill>
+                <a:latin typeface="Noto Sans KR" pitchFamily="34" charset="0"/>
+                <a:ea typeface="Noto Sans KR" pitchFamily="34" charset="-122"/>
+                <a:cs typeface="Noto Sans KR" pitchFamily="34" charset="-120"/>
+              </a:rPr>
+              <a:t>(Capping) </a:t>
+            </a:r>
+            <a:r>
+              <a:rPr lang="ko-KR" altLang="en-US" sz="1200" dirty="0" err="1">
+                <a:solidFill>
+                  <a:srgbClr val="374151"/>
+                </a:solidFill>
+                <a:latin typeface="Noto Sans KR" pitchFamily="34" charset="0"/>
+                <a:ea typeface="Noto Sans KR" pitchFamily="34" charset="-122"/>
+                <a:cs typeface="Noto Sans KR" pitchFamily="34" charset="-120"/>
+              </a:rPr>
+              <a:t>전처리</a:t>
+            </a:r>
+            <a:r>
+              <a:rPr lang="en-US" altLang="ko-KR" sz="1200" dirty="0">
+                <a:solidFill>
+                  <a:srgbClr val="374151"/>
+                </a:solidFill>
+                <a:latin typeface="Noto Sans KR" pitchFamily="34" charset="0"/>
+                <a:ea typeface="Noto Sans KR" pitchFamily="34" charset="-122"/>
+                <a:cs typeface="Noto Sans KR" pitchFamily="34" charset="-120"/>
+              </a:rPr>
+              <a:t>, MLP </a:t>
+            </a:r>
+            <a:r>
+              <a:rPr lang="ko-KR" altLang="en-US" sz="1200" dirty="0">
+                <a:solidFill>
+                  <a:srgbClr val="374151"/>
+                </a:solidFill>
+                <a:latin typeface="Noto Sans KR" pitchFamily="34" charset="0"/>
+                <a:ea typeface="Noto Sans KR" pitchFamily="34" charset="-122"/>
+                <a:cs typeface="Noto Sans KR" pitchFamily="34" charset="-120"/>
+              </a:rPr>
+              <a:t>구조의 조합이 </a:t>
+            </a:r>
+            <a:endParaRPr lang="en-US" altLang="ko-KR" sz="1200" dirty="0">
+              <a:solidFill>
+                <a:srgbClr val="374151"/>
+              </a:solidFill>
+              <a:latin typeface="Noto Sans KR" pitchFamily="34" charset="0"/>
+              <a:ea typeface="Noto Sans KR" pitchFamily="34" charset="-122"/>
+              <a:cs typeface="Noto Sans KR" pitchFamily="34" charset="-120"/>
+            </a:endParaRPr>
+          </a:p>
+          <a:p>
+            <a:pPr>
+              <a:lnSpc>
+                <a:spcPts val="1800"/>
+              </a:lnSpc>
+            </a:pPr>
+            <a:r>
+              <a:rPr lang="ko-KR" altLang="en-US" sz="1200" dirty="0">
+                <a:solidFill>
+                  <a:srgbClr val="374151"/>
+                </a:solidFill>
+                <a:latin typeface="Noto Sans KR" pitchFamily="34" charset="0"/>
+                <a:ea typeface="Noto Sans KR" pitchFamily="34" charset="-122"/>
+                <a:cs typeface="Noto Sans KR" pitchFamily="34" charset="-120"/>
+              </a:rPr>
+              <a:t>불균형 데이터에서의 분류 경계를 효과적으로 학습한 결과로 해석 되었습니다</a:t>
+            </a:r>
+            <a:r>
+              <a:rPr lang="en-US" altLang="ko-KR" sz="1200" dirty="0">
+                <a:solidFill>
+                  <a:srgbClr val="374151"/>
+                </a:solidFill>
+                <a:latin typeface="Noto Sans KR" pitchFamily="34" charset="0"/>
+                <a:ea typeface="Noto Sans KR" pitchFamily="34" charset="-122"/>
+                <a:cs typeface="Noto Sans KR" pitchFamily="34" charset="-120"/>
+              </a:rPr>
+              <a:t>.</a:t>
             </a:r>
             <a:endParaRPr lang="en-US" sz="1200" dirty="0"/>
           </a:p>
@@ -19575,7 +19902,7 @@
         </p:blipFill>
         <p:spPr>
           <a:xfrm>
-            <a:off x="228600" y="2819400"/>
+            <a:off x="228600" y="4362450"/>
             <a:ext cx="5715000" cy="2209800"/>
           </a:xfrm>
           <a:prstGeom prst="rect">
@@ -19623,8 +19950,8 @@
         </p:blipFill>
         <p:spPr>
           <a:xfrm>
-            <a:off x="6477000" y="1600200"/>
-            <a:ext cx="5257800" cy="1828800"/>
+            <a:off x="6350198" y="2047875"/>
+            <a:ext cx="6554433" cy="2314575"/>
           </a:xfrm>
           <a:prstGeom prst="rect">
             <a:avLst/>
@@ -19892,7 +20219,7 @@
         <p:spPr>
           <a:xfrm>
             <a:off x="800100" y="1219200"/>
-            <a:ext cx="5257800" cy="304800"/>
+            <a:ext cx="2934773" cy="342900"/>
           </a:xfrm>
           <a:prstGeom prst="rect">
             <a:avLst/>
@@ -19961,7 +20288,37 @@
                 <a:ea typeface="Noto Sans KR" pitchFamily="34" charset="-122"/>
                 <a:cs typeface="Noto Sans KR" pitchFamily="34" charset="-120"/>
               </a:rPr>
-              <a:t>신경망 접근법은 복잡한 비선형 패턴을 포착하는 데 효과적이며, 거래 데이터의 숨겨진 패턴을 학습할 수 있습니다.</a:t>
+              <a:t>신경망 접근법은 복잡한 비선형 패턴을 포착하는 데 효과적이며, </a:t>
+            </a:r>
+          </a:p>
+          <a:p>
+            <a:pPr marL="0" indent="0">
+              <a:lnSpc>
+                <a:spcPts val="1800"/>
+              </a:lnSpc>
+              <a:buNone/>
+            </a:pPr>
+            <a:r>
+              <a:rPr lang="en-US" sz="1200" dirty="0" err="1">
+                <a:solidFill>
+                  <a:srgbClr val="374151"/>
+                </a:solidFill>
+                <a:latin typeface="Noto Sans KR" pitchFamily="34" charset="0"/>
+                <a:ea typeface="Noto Sans KR" pitchFamily="34" charset="-122"/>
+                <a:cs typeface="Noto Sans KR" pitchFamily="34" charset="-120"/>
+              </a:rPr>
+              <a:t>거래</a:t>
+            </a:r>
+            <a:r>
+              <a:rPr lang="en-US" sz="1200" dirty="0">
+                <a:solidFill>
+                  <a:srgbClr val="374151"/>
+                </a:solidFill>
+                <a:latin typeface="Noto Sans KR" pitchFamily="34" charset="0"/>
+                <a:ea typeface="Noto Sans KR" pitchFamily="34" charset="-122"/>
+                <a:cs typeface="Noto Sans KR" pitchFamily="34" charset="-120"/>
+              </a:rPr>
+              <a:t> 데이터의 숨겨진 패턴을 학습할 수 있습니다.</a:t>
             </a:r>
             <a:endParaRPr lang="en-US" sz="1200" dirty="0"/>
           </a:p>
@@ -20017,7 +20374,7 @@
         </p:nvSpPr>
         <p:spPr>
           <a:xfrm>
-            <a:off x="457200" y="3048000"/>
+            <a:off x="457200" y="4591050"/>
             <a:ext cx="5257800" cy="266700"/>
           </a:xfrm>
           <a:prstGeom prst="rect">
@@ -20059,8 +20416,8 @@
         </p:nvSpPr>
         <p:spPr>
           <a:xfrm>
-            <a:off x="457200" y="3429000"/>
-            <a:ext cx="6309360" cy="228600"/>
+            <a:off x="457200" y="4972050"/>
+            <a:ext cx="3535251" cy="190500"/>
           </a:xfrm>
           <a:prstGeom prst="rect">
             <a:avLst/>
@@ -20102,8 +20459,8 @@
         </p:nvSpPr>
         <p:spPr>
           <a:xfrm>
-            <a:off x="457200" y="3733800"/>
-            <a:ext cx="6309360" cy="228600"/>
+            <a:off x="457200" y="5276850"/>
+            <a:ext cx="4797380" cy="266700"/>
           </a:xfrm>
           <a:prstGeom prst="rect">
             <a:avLst/>
@@ -20145,7 +20502,7 @@
         </p:nvSpPr>
         <p:spPr>
           <a:xfrm>
-            <a:off x="457200" y="4038600"/>
+            <a:off x="457200" y="5581650"/>
             <a:ext cx="5257800" cy="457200"/>
           </a:xfrm>
           <a:prstGeom prst="rect">
@@ -20188,8 +20545,8 @@
         </p:nvSpPr>
         <p:spPr>
           <a:xfrm>
-            <a:off x="457200" y="4572000"/>
-            <a:ext cx="6309360" cy="228600"/>
+            <a:off x="457200" y="6115050"/>
+            <a:ext cx="4990563" cy="228600"/>
           </a:xfrm>
           <a:prstGeom prst="rect">
             <a:avLst/>
@@ -20724,6 +21081,611 @@
               <a:t>0.7326</a:t>
             </a:r>
             <a:endParaRPr lang="en-US" sz="1800" dirty="0"/>
+          </a:p>
+        </p:txBody>
+      </p:sp>
+      <p:pic>
+        <p:nvPicPr>
+          <p:cNvPr id="38" name="Image 2" descr="preencoded.png">
+            <a:extLst>
+              <a:ext uri="{FF2B5EF4-FFF2-40B4-BE49-F238E27FC236}">
+                <a16:creationId xmlns:a16="http://schemas.microsoft.com/office/drawing/2014/main" id="{114E7C14-E4D3-36B5-5E87-AC552B6FDD2D}"/>
+              </a:ext>
+            </a:extLst>
+          </p:cNvPr>
+          <p:cNvPicPr>
+            <a:picLocks noChangeAspect="1"/>
+          </p:cNvPicPr>
+          <p:nvPr/>
+        </p:nvPicPr>
+        <p:blipFill>
+          <a:blip r:embed="rId5"/>
+          <a:stretch>
+            <a:fillRect/>
+          </a:stretch>
+        </p:blipFill>
+        <p:spPr>
+          <a:xfrm>
+            <a:off x="228600" y="2781300"/>
+            <a:ext cx="5715000" cy="1466850"/>
+          </a:xfrm>
+          <a:prstGeom prst="rect">
+            <a:avLst/>
+          </a:prstGeom>
+        </p:spPr>
+      </p:pic>
+      <p:sp>
+        <p:nvSpPr>
+          <p:cNvPr id="40" name="Text 7">
+            <a:extLst>
+              <a:ext uri="{FF2B5EF4-FFF2-40B4-BE49-F238E27FC236}">
+                <a16:creationId xmlns:a16="http://schemas.microsoft.com/office/drawing/2014/main" id="{2C8F4D9D-3FEF-2A96-87D4-D143EE6BC251}"/>
+              </a:ext>
+            </a:extLst>
+          </p:cNvPr>
+          <p:cNvSpPr/>
+          <p:nvPr/>
+        </p:nvSpPr>
+        <p:spPr>
+          <a:xfrm>
+            <a:off x="555938" y="3220121"/>
+            <a:ext cx="4797380" cy="208879"/>
+          </a:xfrm>
+          <a:prstGeom prst="rect">
+            <a:avLst/>
+          </a:prstGeom>
+          <a:noFill/>
+          <a:ln/>
+        </p:spPr>
+        <p:txBody>
+          <a:bodyPr vert="horz" wrap="square" lIns="0" tIns="0" rIns="0" bIns="0" rtlCol="0" anchor="t"/>
+          <a:lstStyle/>
+          <a:p>
+            <a:pPr marL="342900" indent="-342900">
+              <a:lnSpc>
+                <a:spcPts val="1800"/>
+              </a:lnSpc>
+              <a:buSzPct val="100000"/>
+              <a:buChar char="•"/>
+            </a:pPr>
+            <a:r>
+              <a:rPr lang="ko-KR" altLang="en-US" sz="1200" dirty="0">
+                <a:solidFill>
+                  <a:srgbClr val="374151"/>
+                </a:solidFill>
+                <a:latin typeface="Noto Sans KR" pitchFamily="34" charset="0"/>
+                <a:ea typeface="Noto Sans KR" pitchFamily="34" charset="-122"/>
+                <a:cs typeface="Noto Sans KR" pitchFamily="34" charset="-120"/>
+              </a:rPr>
+              <a:t>입</a:t>
+            </a:r>
+            <a:r>
+              <a:rPr lang="en-US" altLang="ko-KR" sz="1200" dirty="0">
+                <a:solidFill>
+                  <a:srgbClr val="374151"/>
+                </a:solidFill>
+                <a:latin typeface="Noto Sans KR" pitchFamily="34" charset="0"/>
+                <a:ea typeface="Noto Sans KR" pitchFamily="34" charset="-122"/>
+                <a:cs typeface="Noto Sans KR" pitchFamily="34" charset="-120"/>
+              </a:rPr>
+              <a:t>/</a:t>
+            </a:r>
+            <a:r>
+              <a:rPr lang="ko-KR" altLang="en-US" sz="1200" dirty="0">
+                <a:solidFill>
+                  <a:srgbClr val="374151"/>
+                </a:solidFill>
+                <a:latin typeface="Noto Sans KR" pitchFamily="34" charset="0"/>
+                <a:ea typeface="Noto Sans KR" pitchFamily="34" charset="-122"/>
+                <a:cs typeface="Noto Sans KR" pitchFamily="34" charset="-120"/>
+              </a:rPr>
+              <a:t>출력 변수의 비선형적 관계를 잘 표현합니다</a:t>
+            </a:r>
+            <a:r>
+              <a:rPr lang="en-US" altLang="ko-KR" sz="1200" dirty="0">
+                <a:solidFill>
+                  <a:srgbClr val="374151"/>
+                </a:solidFill>
+                <a:latin typeface="Noto Sans KR" pitchFamily="34" charset="0"/>
+                <a:ea typeface="Noto Sans KR" pitchFamily="34" charset="-122"/>
+                <a:cs typeface="Noto Sans KR" pitchFamily="34" charset="-120"/>
+              </a:rPr>
+              <a:t>.</a:t>
+            </a:r>
+            <a:endParaRPr lang="en-US" sz="1200" dirty="0"/>
+          </a:p>
+        </p:txBody>
+      </p:sp>
+      <p:sp>
+        <p:nvSpPr>
+          <p:cNvPr id="41" name="Text 5">
+            <a:extLst>
+              <a:ext uri="{FF2B5EF4-FFF2-40B4-BE49-F238E27FC236}">
+                <a16:creationId xmlns:a16="http://schemas.microsoft.com/office/drawing/2014/main" id="{A7BB7BCB-201B-01B9-5383-C3D9C1BF3AB3}"/>
+              </a:ext>
+            </a:extLst>
+          </p:cNvPr>
+          <p:cNvSpPr/>
+          <p:nvPr/>
+        </p:nvSpPr>
+        <p:spPr>
+          <a:xfrm>
+            <a:off x="457200" y="2876550"/>
+            <a:ext cx="5257800" cy="266700"/>
+          </a:xfrm>
+          <a:prstGeom prst="rect">
+            <a:avLst/>
+          </a:prstGeom>
+          <a:noFill/>
+          <a:ln/>
+        </p:spPr>
+        <p:txBody>
+          <a:bodyPr vert="horz" wrap="square" lIns="0" tIns="0" rIns="0" bIns="0" rtlCol="0" anchor="t"/>
+          <a:lstStyle/>
+          <a:p>
+            <a:pPr marL="0" indent="0">
+              <a:lnSpc>
+                <a:spcPts val="2100"/>
+              </a:lnSpc>
+              <a:buNone/>
+            </a:pPr>
+            <a:r>
+              <a:rPr lang="ko-KR" altLang="en-US" sz="1500" b="1" dirty="0">
+                <a:solidFill>
+                  <a:srgbClr val="1D4ED8"/>
+                </a:solidFill>
+                <a:latin typeface="Noto Sans KR" pitchFamily="34" charset="0"/>
+                <a:ea typeface="Noto Sans KR" pitchFamily="34" charset="-122"/>
+                <a:cs typeface="Noto Sans KR" pitchFamily="34" charset="-120"/>
+              </a:rPr>
+              <a:t>모델의 장단점</a:t>
+            </a:r>
+            <a:endParaRPr lang="en-US" sz="1500" dirty="0"/>
+          </a:p>
+        </p:txBody>
+      </p:sp>
+      <p:sp>
+        <p:nvSpPr>
+          <p:cNvPr id="42" name="Text 5">
+            <a:extLst>
+              <a:ext uri="{FF2B5EF4-FFF2-40B4-BE49-F238E27FC236}">
+                <a16:creationId xmlns:a16="http://schemas.microsoft.com/office/drawing/2014/main" id="{E33A5720-470D-4134-AAF9-00D213CBFBEB}"/>
+              </a:ext>
+            </a:extLst>
+          </p:cNvPr>
+          <p:cNvSpPr/>
+          <p:nvPr/>
+        </p:nvSpPr>
+        <p:spPr>
+          <a:xfrm>
+            <a:off x="6736616" y="1957623"/>
+            <a:ext cx="1385767" cy="407898"/>
+          </a:xfrm>
+          <a:prstGeom prst="rect">
+            <a:avLst/>
+          </a:prstGeom>
+          <a:noFill/>
+          <a:ln/>
+        </p:spPr>
+        <p:txBody>
+          <a:bodyPr vert="horz" wrap="square" lIns="0" tIns="0" rIns="0" bIns="0" rtlCol="0" anchor="t"/>
+          <a:lstStyle/>
+          <a:p>
+            <a:pPr marL="0" indent="0">
+              <a:lnSpc>
+                <a:spcPts val="2100"/>
+              </a:lnSpc>
+              <a:buNone/>
+            </a:pPr>
+            <a:r>
+              <a:rPr lang="ko-KR" altLang="en-US" sz="1500" b="1" dirty="0" err="1">
+                <a:solidFill>
+                  <a:srgbClr val="4A0E4E"/>
+                </a:solidFill>
+                <a:latin typeface="Noto Sans KR" pitchFamily="34" charset="0"/>
+                <a:ea typeface="Noto Sans KR" pitchFamily="34" charset="-122"/>
+                <a:cs typeface="Noto Sans KR" pitchFamily="34" charset="-120"/>
+              </a:rPr>
+              <a:t>입력층</a:t>
+            </a:r>
+            <a:endParaRPr lang="en-US" sz="1500" b="1" dirty="0">
+              <a:solidFill>
+                <a:srgbClr val="4A0E4E"/>
+              </a:solidFill>
+            </a:endParaRPr>
+          </a:p>
+        </p:txBody>
+      </p:sp>
+      <p:sp>
+        <p:nvSpPr>
+          <p:cNvPr id="43" name="Text 5">
+            <a:extLst>
+              <a:ext uri="{FF2B5EF4-FFF2-40B4-BE49-F238E27FC236}">
+                <a16:creationId xmlns:a16="http://schemas.microsoft.com/office/drawing/2014/main" id="{561F77CC-80A4-8265-09D4-DAFCB566D160}"/>
+              </a:ext>
+            </a:extLst>
+          </p:cNvPr>
+          <p:cNvSpPr/>
+          <p:nvPr/>
+        </p:nvSpPr>
+        <p:spPr>
+          <a:xfrm>
+            <a:off x="8724900" y="1957623"/>
+            <a:ext cx="1385767" cy="442074"/>
+          </a:xfrm>
+          <a:prstGeom prst="rect">
+            <a:avLst/>
+          </a:prstGeom>
+          <a:noFill/>
+          <a:ln/>
+        </p:spPr>
+        <p:txBody>
+          <a:bodyPr vert="horz" wrap="square" lIns="0" tIns="0" rIns="0" bIns="0" rtlCol="0" anchor="t"/>
+          <a:lstStyle/>
+          <a:p>
+            <a:pPr marL="0" indent="0">
+              <a:lnSpc>
+                <a:spcPts val="2100"/>
+              </a:lnSpc>
+              <a:buNone/>
+            </a:pPr>
+            <a:r>
+              <a:rPr lang="ko-KR" altLang="en-US" sz="1500" b="1" dirty="0" err="1">
+                <a:solidFill>
+                  <a:srgbClr val="4A0E4E"/>
+                </a:solidFill>
+                <a:latin typeface="Noto Sans KR" pitchFamily="34" charset="0"/>
+                <a:ea typeface="Noto Sans KR" pitchFamily="34" charset="-122"/>
+                <a:cs typeface="Noto Sans KR" pitchFamily="34" charset="-120"/>
+              </a:rPr>
+              <a:t>은닉층</a:t>
+            </a:r>
+            <a:endParaRPr lang="en-US" altLang="ko-KR" sz="1500" b="1" dirty="0">
+              <a:solidFill>
+                <a:srgbClr val="4A0E4E"/>
+              </a:solidFill>
+              <a:latin typeface="Noto Sans KR" pitchFamily="34" charset="0"/>
+              <a:ea typeface="Noto Sans KR" pitchFamily="34" charset="-122"/>
+              <a:cs typeface="Noto Sans KR" pitchFamily="34" charset="-120"/>
+            </a:endParaRPr>
+          </a:p>
+          <a:p>
+            <a:pPr marL="0" indent="0">
+              <a:lnSpc>
+                <a:spcPts val="2100"/>
+              </a:lnSpc>
+              <a:buNone/>
+            </a:pPr>
+            <a:endParaRPr lang="en-US" sz="1500" dirty="0">
+              <a:solidFill>
+                <a:srgbClr val="4A0E4E"/>
+              </a:solidFill>
+            </a:endParaRPr>
+          </a:p>
+        </p:txBody>
+      </p:sp>
+      <p:sp>
+        <p:nvSpPr>
+          <p:cNvPr id="44" name="Text 5">
+            <a:extLst>
+              <a:ext uri="{FF2B5EF4-FFF2-40B4-BE49-F238E27FC236}">
+                <a16:creationId xmlns:a16="http://schemas.microsoft.com/office/drawing/2014/main" id="{4C63ACBA-6D41-2040-27E5-B4A573C3E9AA}"/>
+              </a:ext>
+            </a:extLst>
+          </p:cNvPr>
+          <p:cNvSpPr/>
+          <p:nvPr/>
+        </p:nvSpPr>
+        <p:spPr>
+          <a:xfrm>
+            <a:off x="10668000" y="1957623"/>
+            <a:ext cx="1385767" cy="407898"/>
+          </a:xfrm>
+          <a:prstGeom prst="rect">
+            <a:avLst/>
+          </a:prstGeom>
+          <a:noFill/>
+          <a:ln/>
+        </p:spPr>
+        <p:txBody>
+          <a:bodyPr vert="horz" wrap="square" lIns="0" tIns="0" rIns="0" bIns="0" rtlCol="0" anchor="t"/>
+          <a:lstStyle/>
+          <a:p>
+            <a:pPr marL="0" indent="0">
+              <a:lnSpc>
+                <a:spcPts val="2100"/>
+              </a:lnSpc>
+              <a:buNone/>
+            </a:pPr>
+            <a:r>
+              <a:rPr lang="ko-KR" altLang="en-US" sz="1500" b="1" dirty="0" err="1">
+                <a:solidFill>
+                  <a:srgbClr val="4A0E4E"/>
+                </a:solidFill>
+                <a:latin typeface="Noto Sans KR" pitchFamily="34" charset="0"/>
+                <a:ea typeface="Noto Sans KR" pitchFamily="34" charset="-122"/>
+                <a:cs typeface="Noto Sans KR" pitchFamily="34" charset="-120"/>
+              </a:rPr>
+              <a:t>출력층</a:t>
+            </a:r>
+            <a:endParaRPr lang="en-US" altLang="ko-KR" sz="1500" b="1" dirty="0">
+              <a:solidFill>
+                <a:srgbClr val="4A0E4E"/>
+              </a:solidFill>
+              <a:latin typeface="Noto Sans KR" pitchFamily="34" charset="0"/>
+              <a:ea typeface="Noto Sans KR" pitchFamily="34" charset="-122"/>
+              <a:cs typeface="Noto Sans KR" pitchFamily="34" charset="-120"/>
+            </a:endParaRPr>
+          </a:p>
+          <a:p>
+            <a:pPr marL="0" indent="0">
+              <a:lnSpc>
+                <a:spcPts val="2100"/>
+              </a:lnSpc>
+              <a:buNone/>
+            </a:pPr>
+            <a:endParaRPr lang="en-US" sz="1500" dirty="0">
+              <a:solidFill>
+                <a:srgbClr val="4A0E4E"/>
+              </a:solidFill>
+            </a:endParaRPr>
+          </a:p>
+        </p:txBody>
+      </p:sp>
+      <p:sp>
+        <p:nvSpPr>
+          <p:cNvPr id="45" name="Text 7">
+            <a:extLst>
+              <a:ext uri="{FF2B5EF4-FFF2-40B4-BE49-F238E27FC236}">
+                <a16:creationId xmlns:a16="http://schemas.microsoft.com/office/drawing/2014/main" id="{3A7CBCB8-644C-7625-93BB-46A0DA4001DB}"/>
+              </a:ext>
+            </a:extLst>
+          </p:cNvPr>
+          <p:cNvSpPr/>
+          <p:nvPr/>
+        </p:nvSpPr>
+        <p:spPr>
+          <a:xfrm>
+            <a:off x="555938" y="3468442"/>
+            <a:ext cx="4797380" cy="208208"/>
+          </a:xfrm>
+          <a:prstGeom prst="rect">
+            <a:avLst/>
+          </a:prstGeom>
+          <a:noFill/>
+          <a:ln/>
+        </p:spPr>
+        <p:txBody>
+          <a:bodyPr vert="horz" wrap="square" lIns="0" tIns="0" rIns="0" bIns="0" rtlCol="0" anchor="t"/>
+          <a:lstStyle/>
+          <a:p>
+            <a:pPr marL="342900" indent="-342900">
+              <a:lnSpc>
+                <a:spcPts val="1800"/>
+              </a:lnSpc>
+              <a:buSzPct val="100000"/>
+              <a:buChar char="•"/>
+            </a:pPr>
+            <a:r>
+              <a:rPr lang="ko-KR" altLang="en-US" sz="1200" dirty="0">
+                <a:solidFill>
+                  <a:srgbClr val="374151"/>
+                </a:solidFill>
+                <a:latin typeface="Noto Sans KR" pitchFamily="34" charset="0"/>
+                <a:ea typeface="Noto Sans KR" pitchFamily="34" charset="-122"/>
+                <a:cs typeface="Noto Sans KR" pitchFamily="34" charset="-120"/>
+              </a:rPr>
+              <a:t>데이터가 많아도 메타모델을 생성할 수 있습니다</a:t>
+            </a:r>
+            <a:r>
+              <a:rPr lang="en-US" altLang="ko-KR" sz="1200" dirty="0">
+                <a:solidFill>
+                  <a:srgbClr val="374151"/>
+                </a:solidFill>
+                <a:latin typeface="Noto Sans KR" pitchFamily="34" charset="0"/>
+                <a:ea typeface="Noto Sans KR" pitchFamily="34" charset="-122"/>
+                <a:cs typeface="Noto Sans KR" pitchFamily="34" charset="-120"/>
+              </a:rPr>
+              <a:t>.</a:t>
+            </a:r>
+            <a:endParaRPr lang="en-US" sz="1200" dirty="0"/>
+          </a:p>
+        </p:txBody>
+      </p:sp>
+      <p:sp>
+        <p:nvSpPr>
+          <p:cNvPr id="46" name="Text 7">
+            <a:extLst>
+              <a:ext uri="{FF2B5EF4-FFF2-40B4-BE49-F238E27FC236}">
+                <a16:creationId xmlns:a16="http://schemas.microsoft.com/office/drawing/2014/main" id="{560F8589-B8F8-B6C3-1552-E22A69657FE1}"/>
+              </a:ext>
+            </a:extLst>
+          </p:cNvPr>
+          <p:cNvSpPr/>
+          <p:nvPr/>
+        </p:nvSpPr>
+        <p:spPr>
+          <a:xfrm>
+            <a:off x="553790" y="3705224"/>
+            <a:ext cx="5257799" cy="208208"/>
+          </a:xfrm>
+          <a:prstGeom prst="rect">
+            <a:avLst/>
+          </a:prstGeom>
+          <a:noFill/>
+          <a:ln/>
+        </p:spPr>
+        <p:txBody>
+          <a:bodyPr vert="horz" wrap="square" lIns="0" tIns="0" rIns="0" bIns="0" rtlCol="0" anchor="t"/>
+          <a:lstStyle/>
+          <a:p>
+            <a:pPr marL="342900" indent="-342900">
+              <a:lnSpc>
+                <a:spcPts val="1800"/>
+              </a:lnSpc>
+              <a:buSzPct val="100000"/>
+              <a:buChar char="•"/>
+            </a:pPr>
+            <a:r>
+              <a:rPr lang="en-US" altLang="ko-KR" sz="1200" dirty="0">
+                <a:solidFill>
+                  <a:srgbClr val="374151"/>
+                </a:solidFill>
+                <a:latin typeface="Noto Sans KR" pitchFamily="34" charset="0"/>
+                <a:ea typeface="Noto Sans KR" pitchFamily="34" charset="-122"/>
+                <a:cs typeface="Noto Sans KR" pitchFamily="34" charset="-120"/>
+              </a:rPr>
+              <a:t>Hidden Layer / Neuron </a:t>
+            </a:r>
+            <a:r>
+              <a:rPr lang="ko-KR" altLang="en-US" sz="1200" dirty="0">
+                <a:solidFill>
+                  <a:srgbClr val="374151"/>
+                </a:solidFill>
+                <a:latin typeface="Noto Sans KR" pitchFamily="34" charset="0"/>
+                <a:ea typeface="Noto Sans KR" pitchFamily="34" charset="-122"/>
+                <a:cs typeface="Noto Sans KR" pitchFamily="34" charset="-120"/>
+              </a:rPr>
+              <a:t>개수</a:t>
+            </a:r>
+            <a:r>
+              <a:rPr lang="en-US" altLang="ko-KR" sz="1200" dirty="0">
+                <a:solidFill>
+                  <a:srgbClr val="374151"/>
+                </a:solidFill>
+                <a:latin typeface="Noto Sans KR" pitchFamily="34" charset="0"/>
+                <a:ea typeface="Noto Sans KR" pitchFamily="34" charset="-122"/>
+                <a:cs typeface="Noto Sans KR" pitchFamily="34" charset="-120"/>
+              </a:rPr>
+              <a:t>, </a:t>
+            </a:r>
+            <a:r>
+              <a:rPr lang="ko-KR" altLang="en-US" sz="1200" dirty="0">
+                <a:solidFill>
+                  <a:srgbClr val="374151"/>
+                </a:solidFill>
+                <a:latin typeface="Noto Sans KR" pitchFamily="34" charset="0"/>
+                <a:ea typeface="Noto Sans KR" pitchFamily="34" charset="-122"/>
+                <a:cs typeface="Noto Sans KR" pitchFamily="34" charset="-120"/>
+              </a:rPr>
+              <a:t>활성함수 </a:t>
+            </a:r>
+            <a:r>
+              <a:rPr lang="ko-KR" altLang="en-US" sz="1200" dirty="0" err="1">
+                <a:solidFill>
+                  <a:srgbClr val="374151"/>
+                </a:solidFill>
+                <a:latin typeface="Noto Sans KR" pitchFamily="34" charset="0"/>
+                <a:ea typeface="Noto Sans KR" pitchFamily="34" charset="-122"/>
+                <a:cs typeface="Noto Sans KR" pitchFamily="34" charset="-120"/>
+              </a:rPr>
+              <a:t>형태등</a:t>
+            </a:r>
+            <a:r>
+              <a:rPr lang="ko-KR" altLang="en-US" sz="1200" dirty="0">
+                <a:solidFill>
+                  <a:srgbClr val="374151"/>
+                </a:solidFill>
+                <a:latin typeface="Noto Sans KR" pitchFamily="34" charset="0"/>
+                <a:ea typeface="Noto Sans KR" pitchFamily="34" charset="-122"/>
+                <a:cs typeface="Noto Sans KR" pitchFamily="34" charset="-120"/>
+              </a:rPr>
+              <a:t> 의존변수를 주의해야 합니다</a:t>
+            </a:r>
+            <a:r>
+              <a:rPr lang="en-US" altLang="ko-KR" sz="1200" dirty="0">
+                <a:solidFill>
+                  <a:srgbClr val="374151"/>
+                </a:solidFill>
+                <a:latin typeface="Noto Sans KR" pitchFamily="34" charset="0"/>
+                <a:ea typeface="Noto Sans KR" pitchFamily="34" charset="-122"/>
+                <a:cs typeface="Noto Sans KR" pitchFamily="34" charset="-120"/>
+              </a:rPr>
+              <a:t>.</a:t>
+            </a:r>
+            <a:endParaRPr lang="en-US" sz="1200" dirty="0"/>
+          </a:p>
+        </p:txBody>
+      </p:sp>
+      <p:sp>
+        <p:nvSpPr>
+          <p:cNvPr id="47" name="Text 7">
+            <a:extLst>
+              <a:ext uri="{FF2B5EF4-FFF2-40B4-BE49-F238E27FC236}">
+                <a16:creationId xmlns:a16="http://schemas.microsoft.com/office/drawing/2014/main" id="{9E26592F-14A7-C32C-D3CB-360E249A111A}"/>
+              </a:ext>
+            </a:extLst>
+          </p:cNvPr>
+          <p:cNvSpPr/>
+          <p:nvPr/>
+        </p:nvSpPr>
+        <p:spPr>
+          <a:xfrm>
+            <a:off x="555938" y="3943350"/>
+            <a:ext cx="4797380" cy="266700"/>
+          </a:xfrm>
+          <a:prstGeom prst="rect">
+            <a:avLst/>
+          </a:prstGeom>
+          <a:noFill/>
+          <a:ln/>
+        </p:spPr>
+        <p:txBody>
+          <a:bodyPr vert="horz" wrap="square" lIns="0" tIns="0" rIns="0" bIns="0" rtlCol="0" anchor="t"/>
+          <a:lstStyle/>
+          <a:p>
+            <a:pPr marL="342900" indent="-342900">
+              <a:lnSpc>
+                <a:spcPts val="1800"/>
+              </a:lnSpc>
+              <a:buSzPct val="100000"/>
+              <a:buChar char="•"/>
+            </a:pPr>
+            <a:r>
+              <a:rPr lang="ko-KR" altLang="en-US" sz="1200" dirty="0">
+                <a:solidFill>
+                  <a:srgbClr val="374151"/>
+                </a:solidFill>
+                <a:latin typeface="Noto Sans KR" pitchFamily="34" charset="0"/>
+                <a:ea typeface="Noto Sans KR" pitchFamily="34" charset="-122"/>
+                <a:cs typeface="Noto Sans KR" pitchFamily="34" charset="-120"/>
+              </a:rPr>
+              <a:t>생성을 위한 학습</a:t>
+            </a:r>
+            <a:r>
+              <a:rPr lang="en-US" altLang="ko-KR" sz="1200" dirty="0">
+                <a:solidFill>
+                  <a:srgbClr val="374151"/>
+                </a:solidFill>
+                <a:latin typeface="Noto Sans KR" pitchFamily="34" charset="0"/>
+                <a:ea typeface="Noto Sans KR" pitchFamily="34" charset="-122"/>
+                <a:cs typeface="Noto Sans KR" pitchFamily="34" charset="-120"/>
+              </a:rPr>
+              <a:t>(training) </a:t>
+            </a:r>
+            <a:r>
+              <a:rPr lang="ko-KR" altLang="en-US" sz="1200" dirty="0">
+                <a:solidFill>
+                  <a:srgbClr val="374151"/>
+                </a:solidFill>
+                <a:latin typeface="Noto Sans KR" pitchFamily="34" charset="0"/>
+                <a:ea typeface="Noto Sans KR" pitchFamily="34" charset="-122"/>
+                <a:cs typeface="Noto Sans KR" pitchFamily="34" charset="-120"/>
+              </a:rPr>
+              <a:t>시간이 많이 소요됩니다</a:t>
+            </a:r>
+            <a:r>
+              <a:rPr lang="en-US" altLang="ko-KR" sz="1200" dirty="0">
+                <a:solidFill>
+                  <a:srgbClr val="374151"/>
+                </a:solidFill>
+                <a:latin typeface="Noto Sans KR" pitchFamily="34" charset="0"/>
+                <a:ea typeface="Noto Sans KR" pitchFamily="34" charset="-122"/>
+                <a:cs typeface="Noto Sans KR" pitchFamily="34" charset="-120"/>
+              </a:rPr>
+              <a:t>.</a:t>
+            </a:r>
+            <a:endParaRPr lang="en-US" sz="1200" dirty="0"/>
           </a:p>
         </p:txBody>
       </p:sp>
@@ -20850,7 +21812,7 @@
       </p:pic>
       <p:pic>
         <p:nvPicPr>
-          <p:cNvPr id="6" name="Image 4" descr="preencoded.png"/>
+          <p:cNvPr id="8" name="Image 6" descr="preencoded.png"/>
           <p:cNvPicPr>
             <a:picLocks noChangeAspect="1"/>
           </p:cNvPicPr>
@@ -20864,17 +21826,17 @@
         </p:blipFill>
         <p:spPr>
           <a:xfrm>
-            <a:off x="304800" y="2476500"/>
-            <a:ext cx="5638800" cy="4000500"/>
-          </a:xfrm>
-          <a:prstGeom prst="rect">
-            <a:avLst/>
-          </a:prstGeom>
-        </p:spPr>
-      </p:pic>
-      <p:pic>
-        <p:nvPicPr>
-          <p:cNvPr id="7" name="Image 5" descr="preencoded.png"/>
+            <a:off x="6248400" y="2425700"/>
+            <a:ext cx="5638800" cy="2019300"/>
+          </a:xfrm>
+          <a:prstGeom prst="rect">
+            <a:avLst/>
+          </a:prstGeom>
+        </p:spPr>
+      </p:pic>
+      <p:pic>
+        <p:nvPicPr>
+          <p:cNvPr id="9" name="Image 7" descr="preencoded.png"/>
           <p:cNvPicPr>
             <a:picLocks noChangeAspect="1"/>
           </p:cNvPicPr>
@@ -20882,54 +21844,6 @@
         </p:nvPicPr>
         <p:blipFill>
           <a:blip r:embed="rId8"/>
-          <a:stretch>
-            <a:fillRect/>
-          </a:stretch>
-        </p:blipFill>
-        <p:spPr>
-          <a:xfrm>
-            <a:off x="495300" y="3086100"/>
-            <a:ext cx="5257800" cy="3200400"/>
-          </a:xfrm>
-          <a:prstGeom prst="rect">
-            <a:avLst/>
-          </a:prstGeom>
-        </p:spPr>
-      </p:pic>
-      <p:pic>
-        <p:nvPicPr>
-          <p:cNvPr id="8" name="Image 6" descr="preencoded.png"/>
-          <p:cNvPicPr>
-            <a:picLocks noChangeAspect="1"/>
-          </p:cNvPicPr>
-          <p:nvPr/>
-        </p:nvPicPr>
-        <p:blipFill>
-          <a:blip r:embed="rId9"/>
-          <a:stretch>
-            <a:fillRect/>
-          </a:stretch>
-        </p:blipFill>
-        <p:spPr>
-          <a:xfrm>
-            <a:off x="6248400" y="2476500"/>
-            <a:ext cx="5638800" cy="2019300"/>
-          </a:xfrm>
-          <a:prstGeom prst="rect">
-            <a:avLst/>
-          </a:prstGeom>
-        </p:spPr>
-      </p:pic>
-      <p:pic>
-        <p:nvPicPr>
-          <p:cNvPr id="9" name="Image 7" descr="preencoded.png"/>
-          <p:cNvPicPr>
-            <a:picLocks noChangeAspect="1"/>
-          </p:cNvPicPr>
-          <p:nvPr/>
-        </p:nvPicPr>
-        <p:blipFill>
-          <a:blip r:embed="rId10"/>
           <a:stretch>
             <a:fillRect/>
           </a:stretch>
@@ -20953,7 +21867,7 @@
           <p:nvPr/>
         </p:nvPicPr>
         <p:blipFill>
-          <a:blip r:embed="rId11"/>
+          <a:blip r:embed="rId9"/>
           <a:stretch>
             <a:fillRect/>
           </a:stretch>
@@ -20976,8 +21890,8 @@
         </p:nvSpPr>
         <p:spPr>
           <a:xfrm>
-            <a:off x="381000" y="209550"/>
-            <a:ext cx="2423160" cy="342900"/>
+            <a:off x="380999" y="209550"/>
+            <a:ext cx="7011473" cy="342900"/>
           </a:xfrm>
           <a:prstGeom prst="rect">
             <a:avLst/>
@@ -20996,6 +21910,17 @@
               <a:buNone/>
             </a:pPr>
             <a:r>
+              <a:rPr lang="en-US" sz="2250" b="1" dirty="0" err="1">
+                <a:solidFill>
+                  <a:srgbClr val="FFFFFF"/>
+                </a:solidFill>
+                <a:latin typeface="Noto Sans KR" pitchFamily="34" charset="0"/>
+                <a:ea typeface="Noto Sans KR" pitchFamily="34" charset="-122"/>
+                <a:cs typeface="Noto Sans KR" pitchFamily="34" charset="-120"/>
+              </a:rPr>
+              <a:t>특징</a:t>
+            </a:r>
+            <a:r>
               <a:rPr lang="en-US" sz="2250" b="1" dirty="0">
                 <a:solidFill>
                   <a:srgbClr val="FFFFFF"/>
@@ -21004,7 +21929,29 @@
                 <a:ea typeface="Noto Sans KR" pitchFamily="34" charset="-122"/>
                 <a:cs typeface="Noto Sans KR" pitchFamily="34" charset="-120"/>
               </a:rPr>
-              <a:t>특징 중요도 분석</a:t>
+              <a:t> </a:t>
+            </a:r>
+            <a:r>
+              <a:rPr lang="en-US" sz="2250" b="1" dirty="0" err="1">
+                <a:solidFill>
+                  <a:srgbClr val="FFFFFF"/>
+                </a:solidFill>
+                <a:latin typeface="Noto Sans KR" pitchFamily="34" charset="0"/>
+                <a:ea typeface="Noto Sans KR" pitchFamily="34" charset="-122"/>
+                <a:cs typeface="Noto Sans KR" pitchFamily="34" charset="-120"/>
+              </a:rPr>
+              <a:t>중요도</a:t>
+            </a:r>
+            <a:r>
+              <a:rPr lang="en-US" sz="2250" b="1" dirty="0">
+                <a:solidFill>
+                  <a:srgbClr val="FFFFFF"/>
+                </a:solidFill>
+                <a:latin typeface="Noto Sans KR" pitchFamily="34" charset="0"/>
+                <a:ea typeface="Noto Sans KR" pitchFamily="34" charset="-122"/>
+                <a:cs typeface="Noto Sans KR" pitchFamily="34" charset="-120"/>
+              </a:rPr>
+              <a:t> (Feature Importance) 분석</a:t>
             </a:r>
             <a:endParaRPr lang="en-US" sz="2250" dirty="0"/>
           </a:p>
@@ -21130,7 +22077,113 @@
                 <a:ea typeface="Noto Sans KR" pitchFamily="34" charset="-122"/>
                 <a:cs typeface="Noto Sans KR" pitchFamily="34" charset="-120"/>
               </a:rPr>
-              <a:t>Permutation Importance와 SHAP 분석을 통해 모델의 예측에 가장 큰 영향을 미친 특징을 식별했습니다. 이 분석은 MLP 모델의 흑박스 nature를 해독하고 모델의 결정 과정을 이해하는 데 도움이 됩니다.</a:t>
+              <a:t>Permutation Importance와 SHAP 분석을 통해 모델의 예측에 가장 큰 영향을 미친 특징을 식별했습니다. </a:t>
+            </a:r>
+          </a:p>
+          <a:p>
+            <a:pPr>
+              <a:lnSpc>
+                <a:spcPts val="1800"/>
+              </a:lnSpc>
+            </a:pPr>
+            <a:r>
+              <a:rPr lang="ko-KR" altLang="en-US" sz="1200" dirty="0">
+                <a:solidFill>
+                  <a:srgbClr val="374151"/>
+                </a:solidFill>
+                <a:latin typeface="Noto Sans KR" pitchFamily="34" charset="0"/>
+                <a:ea typeface="Noto Sans KR" pitchFamily="34" charset="-122"/>
+                <a:cs typeface="Noto Sans KR" pitchFamily="34" charset="-120"/>
+              </a:rPr>
+              <a:t>최종 선정된 </a:t>
+            </a:r>
+            <a:r>
+              <a:rPr lang="en-US" altLang="ko-KR" sz="1200" dirty="0">
+                <a:solidFill>
+                  <a:srgbClr val="374151"/>
+                </a:solidFill>
+                <a:latin typeface="Noto Sans KR" pitchFamily="34" charset="0"/>
+                <a:ea typeface="Noto Sans KR" pitchFamily="34" charset="-122"/>
+                <a:cs typeface="Noto Sans KR" pitchFamily="34" charset="-120"/>
+              </a:rPr>
+              <a:t>MLP </a:t>
+            </a:r>
+            <a:r>
+              <a:rPr lang="ko-KR" altLang="en-US" sz="1200" dirty="0">
+                <a:solidFill>
+                  <a:srgbClr val="374151"/>
+                </a:solidFill>
+                <a:latin typeface="Noto Sans KR" pitchFamily="34" charset="0"/>
+                <a:ea typeface="Noto Sans KR" pitchFamily="34" charset="-122"/>
+                <a:cs typeface="Noto Sans KR" pitchFamily="34" charset="-120"/>
+              </a:rPr>
+              <a:t>모델은 </a:t>
+            </a:r>
+            <a:r>
+              <a:rPr lang="ko-KR" altLang="en-US" sz="1200" dirty="0" err="1">
+                <a:solidFill>
+                  <a:srgbClr val="374151"/>
+                </a:solidFill>
+                <a:latin typeface="Noto Sans KR" pitchFamily="34" charset="0"/>
+                <a:ea typeface="Noto Sans KR" pitchFamily="34" charset="-122"/>
+                <a:cs typeface="Noto Sans KR" pitchFamily="34" charset="-120"/>
+              </a:rPr>
+              <a:t>결정트리</a:t>
+            </a:r>
+            <a:r>
+              <a:rPr lang="ko-KR" altLang="en-US" sz="1200" dirty="0">
+                <a:solidFill>
+                  <a:srgbClr val="374151"/>
+                </a:solidFill>
+                <a:latin typeface="Noto Sans KR" pitchFamily="34" charset="0"/>
+                <a:ea typeface="Noto Sans KR" pitchFamily="34" charset="-122"/>
+                <a:cs typeface="Noto Sans KR" pitchFamily="34" charset="-120"/>
+              </a:rPr>
+              <a:t> 계열 모델처럼 명시적인 분기 규칙을 제공하지 않기 때문에</a:t>
+            </a:r>
+            <a:r>
+              <a:rPr lang="en-US" altLang="ko-KR" sz="1200" dirty="0">
+                <a:solidFill>
+                  <a:srgbClr val="374151"/>
+                </a:solidFill>
+                <a:latin typeface="Noto Sans KR" pitchFamily="34" charset="0"/>
+                <a:ea typeface="Noto Sans KR" pitchFamily="34" charset="-122"/>
+                <a:cs typeface="Noto Sans KR" pitchFamily="34" charset="-120"/>
+              </a:rPr>
+              <a:t>, </a:t>
+            </a:r>
+            <a:r>
+              <a:rPr lang="ko-KR" altLang="en-US" sz="1200" dirty="0">
+                <a:solidFill>
+                  <a:srgbClr val="374151"/>
+                </a:solidFill>
+                <a:latin typeface="Noto Sans KR" pitchFamily="34" charset="0"/>
+                <a:ea typeface="Noto Sans KR" pitchFamily="34" charset="-122"/>
+                <a:cs typeface="Noto Sans KR" pitchFamily="34" charset="-120"/>
+              </a:rPr>
+              <a:t>이 분석은 </a:t>
+            </a:r>
+            <a:r>
+              <a:rPr lang="en-US" sz="1200" dirty="0" err="1">
+                <a:solidFill>
+                  <a:srgbClr val="374151"/>
+                </a:solidFill>
+                <a:latin typeface="Noto Sans KR" pitchFamily="34" charset="0"/>
+                <a:ea typeface="Noto Sans KR" pitchFamily="34" charset="-122"/>
+                <a:cs typeface="Noto Sans KR" pitchFamily="34" charset="-120"/>
+              </a:rPr>
+              <a:t>모델의</a:t>
+            </a:r>
+            <a:r>
+              <a:rPr lang="en-US" sz="1200" dirty="0">
+                <a:solidFill>
+                  <a:srgbClr val="374151"/>
+                </a:solidFill>
+                <a:latin typeface="Noto Sans KR" pitchFamily="34" charset="0"/>
+                <a:ea typeface="Noto Sans KR" pitchFamily="34" charset="-122"/>
+                <a:cs typeface="Noto Sans KR" pitchFamily="34" charset="-120"/>
+              </a:rPr>
+              <a:t> 결정 과정을 이해하는 데 도움이 됩니다.</a:t>
             </a:r>
             <a:endParaRPr lang="en-US" sz="1200" dirty="0"/>
           </a:p>
@@ -21138,13 +22191,13 @@
       </p:sp>
       <p:sp>
         <p:nvSpPr>
-          <p:cNvPr id="15" name="Text 4"/>
-          <p:cNvSpPr/>
-          <p:nvPr/>
-        </p:nvSpPr>
-        <p:spPr>
-          <a:xfrm>
-            <a:off x="495300" y="2667000"/>
+          <p:cNvPr id="16" name="Text 5"/>
+          <p:cNvSpPr/>
+          <p:nvPr/>
+        </p:nvSpPr>
+        <p:spPr>
+          <a:xfrm>
+            <a:off x="6438900" y="2616200"/>
             <a:ext cx="5257800" cy="266700"/>
           </a:xfrm>
           <a:prstGeom prst="rect">
@@ -21172,7 +22225,7 @@
                 <a:ea typeface="Noto Sans KR" pitchFamily="34" charset="-122"/>
                 <a:cs typeface="Noto Sans KR" pitchFamily="34" charset="-120"/>
               </a:rPr>
-              <a:t>상위 3개 특징 중요도</a:t>
+              <a:t>주요 발견 사항</a:t>
             </a:r>
             <a:endParaRPr lang="en-US" sz="1500" dirty="0"/>
           </a:p>
@@ -21180,55 +22233,13 @@
       </p:sp>
       <p:sp>
         <p:nvSpPr>
-          <p:cNvPr id="16" name="Text 5"/>
-          <p:cNvSpPr/>
-          <p:nvPr/>
-        </p:nvSpPr>
-        <p:spPr>
-          <a:xfrm>
-            <a:off x="6438900" y="2667000"/>
-            <a:ext cx="5257800" cy="266700"/>
-          </a:xfrm>
-          <a:prstGeom prst="rect">
-            <a:avLst/>
-          </a:prstGeom>
-          <a:noFill/>
-          <a:ln/>
-        </p:spPr>
-        <p:txBody>
-          <a:bodyPr vert="horz" wrap="square" lIns="0" tIns="0" rIns="0" bIns="0" rtlCol="0" anchor="t"/>
-          <a:lstStyle/>
-          <a:p>
-            <a:pPr marL="0" indent="0">
-              <a:lnSpc>
-                <a:spcPts val="2100"/>
-              </a:lnSpc>
-              <a:buNone/>
-            </a:pPr>
-            <a:r>
-              <a:rPr lang="en-US" sz="1500" b="1" dirty="0">
-                <a:solidFill>
-                  <a:srgbClr val="1E40AF"/>
-                </a:solidFill>
-                <a:latin typeface="Noto Sans KR" pitchFamily="34" charset="0"/>
-                <a:ea typeface="Noto Sans KR" pitchFamily="34" charset="-122"/>
-                <a:cs typeface="Noto Sans KR" pitchFamily="34" charset="-120"/>
-              </a:rPr>
-              <a:t>주요 발견 사항</a:t>
-            </a:r>
-            <a:endParaRPr lang="en-US" sz="1500" dirty="0"/>
-          </a:p>
-        </p:txBody>
-      </p:sp>
-      <p:sp>
-        <p:nvSpPr>
           <p:cNvPr id="17" name="Text 6"/>
           <p:cNvSpPr/>
           <p:nvPr/>
         </p:nvSpPr>
         <p:spPr>
           <a:xfrm>
-            <a:off x="6438900" y="3009900"/>
+            <a:off x="6438900" y="2959100"/>
             <a:ext cx="4876800" cy="114300"/>
           </a:xfrm>
           <a:prstGeom prst="rect">
@@ -21271,7 +22282,7 @@
         </p:nvSpPr>
         <p:spPr>
           <a:xfrm>
-            <a:off x="6438900" y="3314700"/>
+            <a:off x="6438900" y="3263900"/>
             <a:ext cx="5257800" cy="457200"/>
           </a:xfrm>
           <a:prstGeom prst="rect">
@@ -21292,6 +22303,17 @@
               <a:buChar char="•"/>
             </a:pPr>
             <a:r>
+              <a:rPr lang="en-US" sz="1200" dirty="0" err="1">
+                <a:solidFill>
+                  <a:srgbClr val="374151"/>
+                </a:solidFill>
+                <a:latin typeface="Noto Sans KR" pitchFamily="34" charset="0"/>
+                <a:ea typeface="Noto Sans KR" pitchFamily="34" charset="-122"/>
+                <a:cs typeface="Noto Sans KR" pitchFamily="34" charset="-120"/>
+              </a:rPr>
+              <a:t>이러한</a:t>
+            </a:r>
+            <a:r>
               <a:rPr lang="en-US" sz="1200" dirty="0">
                 <a:solidFill>
                   <a:srgbClr val="374151"/>
@@ -21300,7 +22322,29 @@
                 <a:ea typeface="Noto Sans KR" pitchFamily="34" charset="-122"/>
                 <a:cs typeface="Noto Sans KR" pitchFamily="34" charset="-120"/>
               </a:rPr>
-              <a:t>이러한 latent 변수들은 사기 거래를 합법적 거래와 구별하는 데 핵심적인 패턴을 캡처합니다</a:t>
+              <a:t> </a:t>
+            </a:r>
+            <a:r>
+              <a:rPr lang="en-US" sz="1200" dirty="0" err="1">
+                <a:solidFill>
+                  <a:srgbClr val="374151"/>
+                </a:solidFill>
+                <a:latin typeface="Noto Sans KR" pitchFamily="34" charset="0"/>
+                <a:ea typeface="Noto Sans KR" pitchFamily="34" charset="-122"/>
+                <a:cs typeface="Noto Sans KR" pitchFamily="34" charset="-120"/>
+              </a:rPr>
+              <a:t>변수들은</a:t>
+            </a:r>
+            <a:r>
+              <a:rPr lang="en-US" sz="1200" dirty="0">
+                <a:solidFill>
+                  <a:srgbClr val="374151"/>
+                </a:solidFill>
+                <a:latin typeface="Noto Sans KR" pitchFamily="34" charset="0"/>
+                <a:ea typeface="Noto Sans KR" pitchFamily="34" charset="-122"/>
+                <a:cs typeface="Noto Sans KR" pitchFamily="34" charset="-120"/>
+              </a:rPr>
+              <a:t> 사기 거래를 합법적 거래와 구별하는 데 핵심적인 패턴을 캡처합니다</a:t>
             </a:r>
             <a:endParaRPr lang="en-US" sz="1200" dirty="0"/>
           </a:p>
@@ -21314,7 +22358,7 @@
         </p:nvSpPr>
         <p:spPr>
           <a:xfrm>
-            <a:off x="6438900" y="3848100"/>
+            <a:off x="6438900" y="3797300"/>
             <a:ext cx="5257800" cy="457200"/>
           </a:xfrm>
           <a:prstGeom prst="rect">
@@ -21377,6 +22421,17 @@
               <a:buNone/>
             </a:pPr>
             <a:r>
+              <a:rPr lang="ko-KR" altLang="en-US" sz="1500" b="1" dirty="0">
+                <a:solidFill>
+                  <a:srgbClr val="1E40AF"/>
+                </a:solidFill>
+                <a:latin typeface="Noto Sans KR" pitchFamily="34" charset="0"/>
+                <a:ea typeface="Noto Sans KR" pitchFamily="34" charset="-122"/>
+                <a:cs typeface="Noto Sans KR" pitchFamily="34" charset="-120"/>
+              </a:rPr>
+              <a:t>실제</a:t>
+            </a:r>
+            <a:r>
               <a:rPr lang="en-US" sz="1500" b="1" dirty="0">
                 <a:solidFill>
                   <a:srgbClr val="1E40AF"/>
@@ -21385,7 +22440,7 @@
                 <a:ea typeface="Noto Sans KR" pitchFamily="34" charset="-122"/>
                 <a:cs typeface="Noto Sans KR" pitchFamily="34" charset="-120"/>
               </a:rPr>
-              <a:t>비즈니스 영향</a:t>
+              <a:t> 영향</a:t>
             </a:r>
             <a:endParaRPr lang="en-US" sz="1500" dirty="0"/>
           </a:p>
@@ -21427,12 +22482,86 @@
                 <a:ea typeface="Noto Sans KR" pitchFamily="34" charset="-122"/>
                 <a:cs typeface="Noto Sans KR" pitchFamily="34" charset="-120"/>
               </a:rPr>
-              <a:t>이 특징들이 실제 비즈니스 변수로 변환될 경우, 해당 변수들의 이상값은 사기 탐지 시 중요한 신호로 작용할 수 있습니다. 또한, 이 변수들이 나타내는 패턴은 새로운 사기 기법에 대한 인식에 기여할 수 있습니다.</a:t>
+              <a:t>이 특징들이 </a:t>
+            </a:r>
+            <a:r>
+              <a:rPr lang="en-US" sz="1200" dirty="0" err="1">
+                <a:solidFill>
+                  <a:srgbClr val="374151"/>
+                </a:solidFill>
+                <a:latin typeface="Noto Sans KR" pitchFamily="34" charset="0"/>
+                <a:ea typeface="Noto Sans KR" pitchFamily="34" charset="-122"/>
+                <a:cs typeface="Noto Sans KR" pitchFamily="34" charset="-120"/>
+              </a:rPr>
+              <a:t>실제</a:t>
+            </a:r>
+            <a:r>
+              <a:rPr lang="en-US" sz="1200" dirty="0">
+                <a:solidFill>
+                  <a:srgbClr val="374151"/>
+                </a:solidFill>
+                <a:latin typeface="Noto Sans KR" pitchFamily="34" charset="0"/>
+                <a:ea typeface="Noto Sans KR" pitchFamily="34" charset="-122"/>
+                <a:cs typeface="Noto Sans KR" pitchFamily="34" charset="-120"/>
+              </a:rPr>
+              <a:t> </a:t>
+            </a:r>
+            <a:r>
+              <a:rPr lang="ko-KR" altLang="en-US" sz="1200" dirty="0">
+                <a:solidFill>
+                  <a:srgbClr val="374151"/>
+                </a:solidFill>
+                <a:latin typeface="Noto Sans KR" pitchFamily="34" charset="0"/>
+                <a:ea typeface="Noto Sans KR" pitchFamily="34" charset="-122"/>
+                <a:cs typeface="Noto Sans KR" pitchFamily="34" charset="-120"/>
+              </a:rPr>
+              <a:t>사용 가능한</a:t>
+            </a:r>
+            <a:r>
+              <a:rPr lang="en-US" sz="1200" dirty="0">
+                <a:solidFill>
+                  <a:srgbClr val="374151"/>
+                </a:solidFill>
+                <a:latin typeface="Noto Sans KR" pitchFamily="34" charset="0"/>
+                <a:ea typeface="Noto Sans KR" pitchFamily="34" charset="-122"/>
+                <a:cs typeface="Noto Sans KR" pitchFamily="34" charset="-120"/>
+              </a:rPr>
+              <a:t> 변수로 변환될 경우, 해당 변수들의 이상값은 사기 탐지 시 중요한 신호로 작용할 수 있습니다. 또한, 이 변수들이 나타내는 패턴은 새로운 사기 기법에 대한 인식에 기여할 수 있습니다.</a:t>
             </a:r>
             <a:endParaRPr lang="en-US" sz="1200" dirty="0"/>
           </a:p>
         </p:txBody>
       </p:sp>
+      <p:pic>
+        <p:nvPicPr>
+          <p:cNvPr id="22" name="Picture 7">
+            <a:extLst>
+              <a:ext uri="{FF2B5EF4-FFF2-40B4-BE49-F238E27FC236}">
+                <a16:creationId xmlns:a16="http://schemas.microsoft.com/office/drawing/2014/main" id="{491EB056-E179-FCE7-15AC-3B1FD113F9DE}"/>
+              </a:ext>
+            </a:extLst>
+          </p:cNvPr>
+          <p:cNvPicPr>
+            <a:picLocks noChangeAspect="1"/>
+          </p:cNvPicPr>
+          <p:nvPr/>
+        </p:nvPicPr>
+        <p:blipFill>
+          <a:blip r:embed="rId10"/>
+          <a:stretch>
+            <a:fillRect/>
+          </a:stretch>
+        </p:blipFill>
+        <p:spPr>
+          <a:xfrm>
+            <a:off x="304800" y="2425700"/>
+            <a:ext cx="5753100" cy="4165600"/>
+          </a:xfrm>
+          <a:prstGeom prst="rect">
+            <a:avLst/>
+          </a:prstGeom>
+        </p:spPr>
+      </p:pic>
     </p:spTree>
   </p:cSld>
   <p:clrMapOvr>
@@ -21866,7 +22995,29 @@
                 <a:ea typeface="Noto Sans KR" pitchFamily="34" charset="-122"/>
                 <a:cs typeface="Noto Sans KR" pitchFamily="34" charset="-120"/>
               </a:rPr>
-              <a:t>이 프로젝트는 신용카드 사기 탐지 모델 개발에 있어 중요한 한계점을 가지고 있습니다. These limitations provide insights for future improvements.</a:t>
+              <a:t>이 프로젝트는 신용카드 사기 탐지 모델 개발에 있어 중요한 한계점을 가지고 </a:t>
+            </a:r>
+            <a:r>
+              <a:rPr lang="en-US" sz="1350" dirty="0" err="1">
+                <a:solidFill>
+                  <a:srgbClr val="374151"/>
+                </a:solidFill>
+                <a:latin typeface="Noto Sans KR" pitchFamily="34" charset="0"/>
+                <a:ea typeface="Noto Sans KR" pitchFamily="34" charset="-122"/>
+                <a:cs typeface="Noto Sans KR" pitchFamily="34" charset="-120"/>
+              </a:rPr>
+              <a:t>있습니다</a:t>
+            </a:r>
+            <a:r>
+              <a:rPr lang="en-US" sz="1350" dirty="0">
+                <a:solidFill>
+                  <a:srgbClr val="374151"/>
+                </a:solidFill>
+                <a:latin typeface="Noto Sans KR" pitchFamily="34" charset="0"/>
+                <a:ea typeface="Noto Sans KR" pitchFamily="34" charset="-122"/>
+                <a:cs typeface="Noto Sans KR" pitchFamily="34" charset="-120"/>
+              </a:rPr>
+              <a:t>.</a:t>
             </a:r>
             <a:endParaRPr lang="en-US" sz="1350" dirty="0"/>
           </a:p>
@@ -22974,1609 +24125,6 @@
 
 <file path=ppt/slides/slide20.xml><?xml version="1.0" encoding="utf-8"?>
 <p:sld xmlns:a="http://schemas.openxmlformats.org/drawingml/2006/main" xmlns:r="http://schemas.openxmlformats.org/officeDocument/2006/relationships" xmlns:p="http://schemas.openxmlformats.org/presentationml/2006/main">
-  <p:cSld name="Slide 17">
-    <p:spTree>
-      <p:nvGrpSpPr>
-        <p:cNvPr id="1" name=""/>
-        <p:cNvGrpSpPr/>
-        <p:nvPr/>
-      </p:nvGrpSpPr>
-      <p:grpSpPr>
-        <a:xfrm>
-          <a:off x="0" y="0"/>
-          <a:ext cx="0" cy="0"/>
-          <a:chOff x="0" y="0"/>
-          <a:chExt cx="0" cy="0"/>
-        </a:xfrm>
-      </p:grpSpPr>
-      <p:pic>
-        <p:nvPicPr>
-          <p:cNvPr id="2" name="Image 0" descr="preencoded.png"/>
-          <p:cNvPicPr>
-            <a:picLocks noChangeAspect="1"/>
-          </p:cNvPicPr>
-          <p:nvPr/>
-        </p:nvPicPr>
-        <p:blipFill>
-          <a:blip r:embed="rId3"/>
-          <a:stretch>
-            <a:fillRect/>
-          </a:stretch>
-        </p:blipFill>
-        <p:spPr>
-          <a:xfrm>
-            <a:off x="0" y="0"/>
-            <a:ext cx="12192000" cy="6858000"/>
-          </a:xfrm>
-          <a:prstGeom prst="rect">
-            <a:avLst/>
-          </a:prstGeom>
-        </p:spPr>
-      </p:pic>
-      <p:pic>
-        <p:nvPicPr>
-          <p:cNvPr id="3" name="Image 1" descr="preencoded.png"/>
-          <p:cNvPicPr>
-            <a:picLocks noChangeAspect="1"/>
-          </p:cNvPicPr>
-          <p:nvPr/>
-        </p:nvPicPr>
-        <p:blipFill>
-          <a:blip r:embed="rId4"/>
-          <a:stretch>
-            <a:fillRect/>
-          </a:stretch>
-        </p:blipFill>
-        <p:spPr>
-          <a:xfrm>
-            <a:off x="0" y="0"/>
-            <a:ext cx="12192000" cy="762000"/>
-          </a:xfrm>
-          <a:prstGeom prst="rect">
-            <a:avLst/>
-          </a:prstGeom>
-        </p:spPr>
-      </p:pic>
-      <p:pic>
-        <p:nvPicPr>
-          <p:cNvPr id="4" name="Image 2" descr="preencoded.png"/>
-          <p:cNvPicPr>
-            <a:picLocks noChangeAspect="1"/>
-          </p:cNvPicPr>
-          <p:nvPr/>
-        </p:nvPicPr>
-        <p:blipFill>
-          <a:blip r:embed="rId5"/>
-          <a:stretch>
-            <a:fillRect/>
-          </a:stretch>
-        </p:blipFill>
-        <p:spPr>
-          <a:xfrm>
-            <a:off x="304800" y="1066800"/>
-            <a:ext cx="3708350" cy="4457700"/>
-          </a:xfrm>
-          <a:prstGeom prst="rect">
-            <a:avLst/>
-          </a:prstGeom>
-        </p:spPr>
-      </p:pic>
-      <p:pic>
-        <p:nvPicPr>
-          <p:cNvPr id="5" name="Image 3" descr="preencoded.png"/>
-          <p:cNvPicPr>
-            <a:picLocks noChangeAspect="1"/>
-          </p:cNvPicPr>
-          <p:nvPr/>
-        </p:nvPicPr>
-        <p:blipFill>
-          <a:blip r:embed="rId6"/>
-          <a:stretch>
-            <a:fillRect/>
-          </a:stretch>
-        </p:blipFill>
-        <p:spPr>
-          <a:xfrm>
-            <a:off x="533400" y="1343025"/>
-            <a:ext cx="247650" cy="285750"/>
-          </a:xfrm>
-          <a:prstGeom prst="rect">
-            <a:avLst/>
-          </a:prstGeom>
-        </p:spPr>
-      </p:pic>
-      <p:pic>
-        <p:nvPicPr>
-          <p:cNvPr id="6" name="Image 4" descr="preencoded.png"/>
-          <p:cNvPicPr>
-            <a:picLocks noChangeAspect="1"/>
-          </p:cNvPicPr>
-          <p:nvPr/>
-        </p:nvPicPr>
-        <p:blipFill>
-          <a:blip r:embed="rId7"/>
-          <a:stretch>
-            <a:fillRect/>
-          </a:stretch>
-        </p:blipFill>
-        <p:spPr>
-          <a:xfrm>
-            <a:off x="533400" y="1790700"/>
-            <a:ext cx="3251150" cy="457200"/>
-          </a:xfrm>
-          <a:prstGeom prst="rect">
-            <a:avLst/>
-          </a:prstGeom>
-        </p:spPr>
-      </p:pic>
-      <p:pic>
-        <p:nvPicPr>
-          <p:cNvPr id="7" name="Image 5" descr="preencoded.png"/>
-          <p:cNvPicPr>
-            <a:picLocks noChangeAspect="1"/>
-          </p:cNvPicPr>
-          <p:nvPr/>
-        </p:nvPicPr>
-        <p:blipFill>
-          <a:blip r:embed="rId8"/>
-          <a:stretch>
-            <a:fillRect/>
-          </a:stretch>
-        </p:blipFill>
-        <p:spPr>
-          <a:xfrm>
-            <a:off x="647700" y="1943100"/>
-            <a:ext cx="152400" cy="152400"/>
-          </a:xfrm>
-          <a:prstGeom prst="rect">
-            <a:avLst/>
-          </a:prstGeom>
-        </p:spPr>
-      </p:pic>
-      <p:pic>
-        <p:nvPicPr>
-          <p:cNvPr id="8" name="Image 6" descr="preencoded.png"/>
-          <p:cNvPicPr>
-            <a:picLocks noChangeAspect="1"/>
-          </p:cNvPicPr>
-          <p:nvPr/>
-        </p:nvPicPr>
-        <p:blipFill>
-          <a:blip r:embed="rId9"/>
-          <a:stretch>
-            <a:fillRect/>
-          </a:stretch>
-        </p:blipFill>
-        <p:spPr>
-          <a:xfrm>
-            <a:off x="533400" y="2362200"/>
-            <a:ext cx="3251150" cy="685800"/>
-          </a:xfrm>
-          <a:prstGeom prst="rect">
-            <a:avLst/>
-          </a:prstGeom>
-        </p:spPr>
-      </p:pic>
-      <p:pic>
-        <p:nvPicPr>
-          <p:cNvPr id="9" name="Image 7" descr="preencoded.png"/>
-          <p:cNvPicPr>
-            <a:picLocks noChangeAspect="1"/>
-          </p:cNvPicPr>
-          <p:nvPr/>
-        </p:nvPicPr>
-        <p:blipFill>
-          <a:blip r:embed="rId10"/>
-          <a:stretch>
-            <a:fillRect/>
-          </a:stretch>
-        </p:blipFill>
-        <p:spPr>
-          <a:xfrm>
-            <a:off x="647700" y="2514600"/>
-            <a:ext cx="171450" cy="152400"/>
-          </a:xfrm>
-          <a:prstGeom prst="rect">
-            <a:avLst/>
-          </a:prstGeom>
-        </p:spPr>
-      </p:pic>
-      <p:pic>
-        <p:nvPicPr>
-          <p:cNvPr id="10" name="Image 8" descr="preencoded.png"/>
-          <p:cNvPicPr>
-            <a:picLocks noChangeAspect="1"/>
-          </p:cNvPicPr>
-          <p:nvPr/>
-        </p:nvPicPr>
-        <p:blipFill>
-          <a:blip r:embed="rId7"/>
-          <a:stretch>
-            <a:fillRect/>
-          </a:stretch>
-        </p:blipFill>
-        <p:spPr>
-          <a:xfrm>
-            <a:off x="533400" y="3162300"/>
-            <a:ext cx="3251150" cy="457200"/>
-          </a:xfrm>
-          <a:prstGeom prst="rect">
-            <a:avLst/>
-          </a:prstGeom>
-        </p:spPr>
-      </p:pic>
-      <p:pic>
-        <p:nvPicPr>
-          <p:cNvPr id="11" name="Image 9" descr="preencoded.png"/>
-          <p:cNvPicPr>
-            <a:picLocks noChangeAspect="1"/>
-          </p:cNvPicPr>
-          <p:nvPr/>
-        </p:nvPicPr>
-        <p:blipFill>
-          <a:blip r:embed="rId11"/>
-          <a:stretch>
-            <a:fillRect/>
-          </a:stretch>
-        </p:blipFill>
-        <p:spPr>
-          <a:xfrm>
-            <a:off x="647700" y="3314700"/>
-            <a:ext cx="190500" cy="152400"/>
-          </a:xfrm>
-          <a:prstGeom prst="rect">
-            <a:avLst/>
-          </a:prstGeom>
-        </p:spPr>
-      </p:pic>
-      <p:pic>
-        <p:nvPicPr>
-          <p:cNvPr id="12" name="Image 10" descr="preencoded.png"/>
-          <p:cNvPicPr>
-            <a:picLocks noChangeAspect="1"/>
-          </p:cNvPicPr>
-          <p:nvPr/>
-        </p:nvPicPr>
-        <p:blipFill>
-          <a:blip r:embed="rId7"/>
-          <a:stretch>
-            <a:fillRect/>
-          </a:stretch>
-        </p:blipFill>
-        <p:spPr>
-          <a:xfrm>
-            <a:off x="533400" y="3733800"/>
-            <a:ext cx="3251150" cy="457200"/>
-          </a:xfrm>
-          <a:prstGeom prst="rect">
-            <a:avLst/>
-          </a:prstGeom>
-        </p:spPr>
-      </p:pic>
-      <p:pic>
-        <p:nvPicPr>
-          <p:cNvPr id="13" name="Image 11" descr="preencoded.png"/>
-          <p:cNvPicPr>
-            <a:picLocks noChangeAspect="1"/>
-          </p:cNvPicPr>
-          <p:nvPr/>
-        </p:nvPicPr>
-        <p:blipFill>
-          <a:blip r:embed="rId12"/>
-          <a:stretch>
-            <a:fillRect/>
-          </a:stretch>
-        </p:blipFill>
-        <p:spPr>
-          <a:xfrm>
-            <a:off x="647700" y="3886200"/>
-            <a:ext cx="152400" cy="152400"/>
-          </a:xfrm>
-          <a:prstGeom prst="rect">
-            <a:avLst/>
-          </a:prstGeom>
-        </p:spPr>
-      </p:pic>
-      <p:pic>
-        <p:nvPicPr>
-          <p:cNvPr id="14" name="Image 12" descr="preencoded.png"/>
-          <p:cNvPicPr>
-            <a:picLocks noChangeAspect="1"/>
-          </p:cNvPicPr>
-          <p:nvPr/>
-        </p:nvPicPr>
-        <p:blipFill>
-          <a:blip r:embed="rId13"/>
-          <a:stretch>
-            <a:fillRect/>
-          </a:stretch>
-        </p:blipFill>
-        <p:spPr>
-          <a:xfrm>
-            <a:off x="4241750" y="1066800"/>
-            <a:ext cx="3708350" cy="4457700"/>
-          </a:xfrm>
-          <a:prstGeom prst="rect">
-            <a:avLst/>
-          </a:prstGeom>
-        </p:spPr>
-      </p:pic>
-      <p:pic>
-        <p:nvPicPr>
-          <p:cNvPr id="15" name="Image 13" descr="preencoded.png"/>
-          <p:cNvPicPr>
-            <a:picLocks noChangeAspect="1"/>
-          </p:cNvPicPr>
-          <p:nvPr/>
-        </p:nvPicPr>
-        <p:blipFill>
-          <a:blip r:embed="rId14"/>
-          <a:stretch>
-            <a:fillRect/>
-          </a:stretch>
-        </p:blipFill>
-        <p:spPr>
-          <a:xfrm>
-            <a:off x="4470350" y="1343025"/>
-            <a:ext cx="219075" cy="285750"/>
-          </a:xfrm>
-          <a:prstGeom prst="rect">
-            <a:avLst/>
-          </a:prstGeom>
-        </p:spPr>
-      </p:pic>
-      <p:pic>
-        <p:nvPicPr>
-          <p:cNvPr id="16" name="Image 14" descr="preencoded.png"/>
-          <p:cNvPicPr>
-            <a:picLocks noChangeAspect="1"/>
-          </p:cNvPicPr>
-          <p:nvPr/>
-        </p:nvPicPr>
-        <p:blipFill>
-          <a:blip r:embed="rId15"/>
-          <a:stretch>
-            <a:fillRect/>
-          </a:stretch>
-        </p:blipFill>
-        <p:spPr>
-          <a:xfrm>
-            <a:off x="4470350" y="1790700"/>
-            <a:ext cx="3251150" cy="1066800"/>
-          </a:xfrm>
-          <a:prstGeom prst="rect">
-            <a:avLst/>
-          </a:prstGeom>
-        </p:spPr>
-      </p:pic>
-      <p:pic>
-        <p:nvPicPr>
-          <p:cNvPr id="17" name="Image 15" descr="preencoded.png"/>
-          <p:cNvPicPr>
-            <a:picLocks noChangeAspect="1"/>
-          </p:cNvPicPr>
-          <p:nvPr/>
-        </p:nvPicPr>
-        <p:blipFill>
-          <a:blip r:embed="rId16"/>
-          <a:stretch>
-            <a:fillRect/>
-          </a:stretch>
-        </p:blipFill>
-        <p:spPr>
-          <a:xfrm>
-            <a:off x="4622750" y="1981200"/>
-            <a:ext cx="152400" cy="152400"/>
-          </a:xfrm>
-          <a:prstGeom prst="rect">
-            <a:avLst/>
-          </a:prstGeom>
-        </p:spPr>
-      </p:pic>
-      <p:pic>
-        <p:nvPicPr>
-          <p:cNvPr id="18" name="Image 16" descr="preencoded.png"/>
-          <p:cNvPicPr>
-            <a:picLocks noChangeAspect="1"/>
-          </p:cNvPicPr>
-          <p:nvPr/>
-        </p:nvPicPr>
-        <p:blipFill>
-          <a:blip r:embed="rId17"/>
-          <a:stretch>
-            <a:fillRect/>
-          </a:stretch>
-        </p:blipFill>
-        <p:spPr>
-          <a:xfrm>
-            <a:off x="4470350" y="3009900"/>
-            <a:ext cx="3251150" cy="1066800"/>
-          </a:xfrm>
-          <a:prstGeom prst="rect">
-            <a:avLst/>
-          </a:prstGeom>
-        </p:spPr>
-      </p:pic>
-      <p:pic>
-        <p:nvPicPr>
-          <p:cNvPr id="19" name="Image 17" descr="preencoded.png"/>
-          <p:cNvPicPr>
-            <a:picLocks noChangeAspect="1"/>
-          </p:cNvPicPr>
-          <p:nvPr/>
-        </p:nvPicPr>
-        <p:blipFill>
-          <a:blip r:embed="rId18"/>
-          <a:stretch>
-            <a:fillRect/>
-          </a:stretch>
-        </p:blipFill>
-        <p:spPr>
-          <a:xfrm>
-            <a:off x="4622750" y="3200400"/>
-            <a:ext cx="190500" cy="152400"/>
-          </a:xfrm>
-          <a:prstGeom prst="rect">
-            <a:avLst/>
-          </a:prstGeom>
-        </p:spPr>
-      </p:pic>
-      <p:pic>
-        <p:nvPicPr>
-          <p:cNvPr id="20" name="Image 18" descr="preencoded.png"/>
-          <p:cNvPicPr>
-            <a:picLocks noChangeAspect="1"/>
-          </p:cNvPicPr>
-          <p:nvPr/>
-        </p:nvPicPr>
-        <p:blipFill>
-          <a:blip r:embed="rId15"/>
-          <a:stretch>
-            <a:fillRect/>
-          </a:stretch>
-        </p:blipFill>
-        <p:spPr>
-          <a:xfrm>
-            <a:off x="4470350" y="4229100"/>
-            <a:ext cx="3251150" cy="1066800"/>
-          </a:xfrm>
-          <a:prstGeom prst="rect">
-            <a:avLst/>
-          </a:prstGeom>
-        </p:spPr>
-      </p:pic>
-      <p:pic>
-        <p:nvPicPr>
-          <p:cNvPr id="21" name="Image 19" descr="preencoded.png"/>
-          <p:cNvPicPr>
-            <a:picLocks noChangeAspect="1"/>
-          </p:cNvPicPr>
-          <p:nvPr/>
-        </p:nvPicPr>
-        <p:blipFill>
-          <a:blip r:embed="rId19"/>
-          <a:stretch>
-            <a:fillRect/>
-          </a:stretch>
-        </p:blipFill>
-        <p:spPr>
-          <a:xfrm>
-            <a:off x="4622750" y="4419600"/>
-            <a:ext cx="152400" cy="152400"/>
-          </a:xfrm>
-          <a:prstGeom prst="rect">
-            <a:avLst/>
-          </a:prstGeom>
-        </p:spPr>
-      </p:pic>
-      <p:pic>
-        <p:nvPicPr>
-          <p:cNvPr id="22" name="Image 20" descr="preencoded.png"/>
-          <p:cNvPicPr>
-            <a:picLocks noChangeAspect="1"/>
-          </p:cNvPicPr>
-          <p:nvPr/>
-        </p:nvPicPr>
-        <p:blipFill>
-          <a:blip r:embed="rId20"/>
-          <a:stretch>
-            <a:fillRect/>
-          </a:stretch>
-        </p:blipFill>
-        <p:spPr>
-          <a:xfrm>
-            <a:off x="8178701" y="1066800"/>
-            <a:ext cx="3708499" cy="4457700"/>
-          </a:xfrm>
-          <a:prstGeom prst="rect">
-            <a:avLst/>
-          </a:prstGeom>
-        </p:spPr>
-      </p:pic>
-      <p:pic>
-        <p:nvPicPr>
-          <p:cNvPr id="23" name="Image 21" descr="preencoded.png"/>
-          <p:cNvPicPr>
-            <a:picLocks noChangeAspect="1"/>
-          </p:cNvPicPr>
-          <p:nvPr/>
-        </p:nvPicPr>
-        <p:blipFill>
-          <a:blip r:embed="rId21"/>
-          <a:stretch>
-            <a:fillRect/>
-          </a:stretch>
-        </p:blipFill>
-        <p:spPr>
-          <a:xfrm>
-            <a:off x="8407301" y="1343025"/>
-            <a:ext cx="285750" cy="285750"/>
-          </a:xfrm>
-          <a:prstGeom prst="rect">
-            <a:avLst/>
-          </a:prstGeom>
-        </p:spPr>
-      </p:pic>
-      <p:pic>
-        <p:nvPicPr>
-          <p:cNvPr id="24" name="Image 22" descr="preencoded.png"/>
-          <p:cNvPicPr>
-            <a:picLocks noChangeAspect="1"/>
-          </p:cNvPicPr>
-          <p:nvPr/>
-        </p:nvPicPr>
-        <p:blipFill>
-          <a:blip r:embed="rId22"/>
-          <a:stretch>
-            <a:fillRect/>
-          </a:stretch>
-        </p:blipFill>
-        <p:spPr>
-          <a:xfrm>
-            <a:off x="8407301" y="1790700"/>
-            <a:ext cx="3251299" cy="685800"/>
-          </a:xfrm>
-          <a:prstGeom prst="rect">
-            <a:avLst/>
-          </a:prstGeom>
-        </p:spPr>
-      </p:pic>
-      <p:pic>
-        <p:nvPicPr>
-          <p:cNvPr id="25" name="Image 23" descr="preencoded.png"/>
-          <p:cNvPicPr>
-            <a:picLocks noChangeAspect="1"/>
-          </p:cNvPicPr>
-          <p:nvPr/>
-        </p:nvPicPr>
-        <p:blipFill>
-          <a:blip r:embed="rId23"/>
-          <a:stretch>
-            <a:fillRect/>
-          </a:stretch>
-        </p:blipFill>
-        <p:spPr>
-          <a:xfrm>
-            <a:off x="8521601" y="1943100"/>
-            <a:ext cx="133350" cy="152400"/>
-          </a:xfrm>
-          <a:prstGeom prst="rect">
-            <a:avLst/>
-          </a:prstGeom>
-        </p:spPr>
-      </p:pic>
-      <p:pic>
-        <p:nvPicPr>
-          <p:cNvPr id="26" name="Image 24" descr="preencoded.png"/>
-          <p:cNvPicPr>
-            <a:picLocks noChangeAspect="1"/>
-          </p:cNvPicPr>
-          <p:nvPr/>
-        </p:nvPicPr>
-        <p:blipFill>
-          <a:blip r:embed="rId24"/>
-          <a:stretch>
-            <a:fillRect/>
-          </a:stretch>
-        </p:blipFill>
-        <p:spPr>
-          <a:xfrm>
-            <a:off x="8407301" y="2590800"/>
-            <a:ext cx="3251299" cy="685800"/>
-          </a:xfrm>
-          <a:prstGeom prst="rect">
-            <a:avLst/>
-          </a:prstGeom>
-        </p:spPr>
-      </p:pic>
-      <p:pic>
-        <p:nvPicPr>
-          <p:cNvPr id="27" name="Image 25" descr="preencoded.png"/>
-          <p:cNvPicPr>
-            <a:picLocks noChangeAspect="1"/>
-          </p:cNvPicPr>
-          <p:nvPr/>
-        </p:nvPicPr>
-        <p:blipFill>
-          <a:blip r:embed="rId25"/>
-          <a:stretch>
-            <a:fillRect/>
-          </a:stretch>
-        </p:blipFill>
-        <p:spPr>
-          <a:xfrm>
-            <a:off x="8521601" y="2743200"/>
-            <a:ext cx="152400" cy="152400"/>
-          </a:xfrm>
-          <a:prstGeom prst="rect">
-            <a:avLst/>
-          </a:prstGeom>
-        </p:spPr>
-      </p:pic>
-      <p:pic>
-        <p:nvPicPr>
-          <p:cNvPr id="28" name="Image 26" descr="preencoded.png"/>
-          <p:cNvPicPr>
-            <a:picLocks noChangeAspect="1"/>
-          </p:cNvPicPr>
-          <p:nvPr/>
-        </p:nvPicPr>
-        <p:blipFill>
-          <a:blip r:embed="rId26"/>
-          <a:stretch>
-            <a:fillRect/>
-          </a:stretch>
-        </p:blipFill>
-        <p:spPr>
-          <a:xfrm>
-            <a:off x="8407301" y="3390900"/>
-            <a:ext cx="3251299" cy="685800"/>
-          </a:xfrm>
-          <a:prstGeom prst="rect">
-            <a:avLst/>
-          </a:prstGeom>
-        </p:spPr>
-      </p:pic>
-      <p:pic>
-        <p:nvPicPr>
-          <p:cNvPr id="29" name="Image 27" descr="preencoded.png"/>
-          <p:cNvPicPr>
-            <a:picLocks noChangeAspect="1"/>
-          </p:cNvPicPr>
-          <p:nvPr/>
-        </p:nvPicPr>
-        <p:blipFill>
-          <a:blip r:embed="rId27"/>
-          <a:stretch>
-            <a:fillRect/>
-          </a:stretch>
-        </p:blipFill>
-        <p:spPr>
-          <a:xfrm>
-            <a:off x="8521601" y="3543300"/>
-            <a:ext cx="152400" cy="152400"/>
-          </a:xfrm>
-          <a:prstGeom prst="rect">
-            <a:avLst/>
-          </a:prstGeom>
-        </p:spPr>
-      </p:pic>
-      <p:pic>
-        <p:nvPicPr>
-          <p:cNvPr id="30" name="Image 28" descr="preencoded.png"/>
-          <p:cNvPicPr>
-            <a:picLocks noChangeAspect="1"/>
-          </p:cNvPicPr>
-          <p:nvPr/>
-        </p:nvPicPr>
-        <p:blipFill>
-          <a:blip r:embed="rId28"/>
-          <a:stretch>
-            <a:fillRect/>
-          </a:stretch>
-        </p:blipFill>
-        <p:spPr>
-          <a:xfrm>
-            <a:off x="0" y="6781800"/>
-            <a:ext cx="12192000" cy="76200"/>
-          </a:xfrm>
-          <a:prstGeom prst="rect">
-            <a:avLst/>
-          </a:prstGeom>
-        </p:spPr>
-      </p:pic>
-      <p:sp>
-        <p:nvSpPr>
-          <p:cNvPr id="31" name="Text 0"/>
-          <p:cNvSpPr/>
-          <p:nvPr/>
-        </p:nvSpPr>
-        <p:spPr>
-          <a:xfrm>
-            <a:off x="381000" y="209550"/>
-            <a:ext cx="3063240" cy="342900"/>
-          </a:xfrm>
-          <a:prstGeom prst="rect">
-            <a:avLst/>
-          </a:prstGeom>
-          <a:noFill/>
-          <a:ln/>
-        </p:spPr>
-        <p:txBody>
-          <a:bodyPr vert="horz" wrap="square" lIns="0" tIns="0" rIns="0" bIns="0" rtlCol="0" anchor="t"/>
-          <a:lstStyle/>
-          <a:p>
-            <a:pPr marL="0" indent="0">
-              <a:lnSpc>
-                <a:spcPts val="2700"/>
-              </a:lnSpc>
-              <a:buNone/>
-            </a:pPr>
-            <a:r>
-              <a:rPr lang="en-US" sz="2250" b="1" dirty="0">
-                <a:solidFill>
-                  <a:srgbClr val="FFFFFF"/>
-                </a:solidFill>
-                <a:latin typeface="Noto Sans KR" pitchFamily="34" charset="0"/>
-                <a:ea typeface="Noto Sans KR" pitchFamily="34" charset="-122"/>
-                <a:cs typeface="Noto Sans KR" pitchFamily="34" charset="-120"/>
-              </a:rPr>
-              <a:t>데이터 개선 권장사항</a:t>
-            </a:r>
-            <a:endParaRPr lang="en-US" sz="2250" dirty="0"/>
-          </a:p>
-        </p:txBody>
-      </p:sp>
-      <p:sp>
-        <p:nvSpPr>
-          <p:cNvPr id="32" name="Text 1"/>
-          <p:cNvSpPr/>
-          <p:nvPr/>
-        </p:nvSpPr>
-        <p:spPr>
-          <a:xfrm>
-            <a:off x="11315700" y="247650"/>
-            <a:ext cx="594360" cy="266700"/>
-          </a:xfrm>
-          <a:prstGeom prst="rect">
-            <a:avLst/>
-          </a:prstGeom>
-          <a:noFill/>
-          <a:ln/>
-        </p:spPr>
-        <p:txBody>
-          <a:bodyPr vert="horz" wrap="square" lIns="0" tIns="0" rIns="0" bIns="0" rtlCol="0" anchor="t"/>
-          <a:lstStyle/>
-          <a:p>
-            <a:pPr marL="0" indent="0">
-              <a:lnSpc>
-                <a:spcPts val="2100"/>
-              </a:lnSpc>
-              <a:buNone/>
-            </a:pPr>
-            <a:r>
-              <a:rPr lang="en-US" sz="1500" dirty="0">
-                <a:solidFill>
-                  <a:srgbClr val="FFFFFF"/>
-                </a:solidFill>
-                <a:latin typeface="Noto Sans KR" pitchFamily="34" charset="0"/>
-                <a:ea typeface="Noto Sans KR" pitchFamily="34" charset="-122"/>
-                <a:cs typeface="Noto Sans KR" pitchFamily="34" charset="-120"/>
-              </a:rPr>
-              <a:t>17/20</a:t>
-            </a:r>
-            <a:endParaRPr lang="en-US" sz="1500" dirty="0"/>
-          </a:p>
-        </p:txBody>
-      </p:sp>
-      <p:sp>
-        <p:nvSpPr>
-          <p:cNvPr id="33" name="Text 2"/>
-          <p:cNvSpPr/>
-          <p:nvPr/>
-        </p:nvSpPr>
-        <p:spPr>
-          <a:xfrm>
-            <a:off x="895350" y="1333500"/>
-            <a:ext cx="1371600" cy="266700"/>
-          </a:xfrm>
-          <a:prstGeom prst="rect">
-            <a:avLst/>
-          </a:prstGeom>
-          <a:noFill/>
-          <a:ln/>
-        </p:spPr>
-        <p:txBody>
-          <a:bodyPr vert="horz" wrap="square" lIns="0" tIns="0" rIns="0" bIns="0" rtlCol="0" anchor="t"/>
-          <a:lstStyle/>
-          <a:p>
-            <a:pPr marL="0" indent="0">
-              <a:lnSpc>
-                <a:spcPts val="2100"/>
-              </a:lnSpc>
-              <a:buNone/>
-            </a:pPr>
-            <a:r>
-              <a:rPr lang="en-US" sz="1500" b="1" dirty="0">
-                <a:solidFill>
-                  <a:srgbClr val="1E40AF"/>
-                </a:solidFill>
-                <a:latin typeface="Noto Sans KR" pitchFamily="34" charset="0"/>
-                <a:ea typeface="Noto Sans KR" pitchFamily="34" charset="-122"/>
-                <a:cs typeface="Noto Sans KR" pitchFamily="34" charset="-120"/>
-              </a:rPr>
-              <a:t>추가 특징 수집</a:t>
-            </a:r>
-            <a:endParaRPr lang="en-US" sz="1500" dirty="0"/>
-          </a:p>
-        </p:txBody>
-      </p:sp>
-      <p:sp>
-        <p:nvSpPr>
-          <p:cNvPr id="34" name="Text 3"/>
-          <p:cNvSpPr/>
-          <p:nvPr/>
-        </p:nvSpPr>
-        <p:spPr>
-          <a:xfrm>
-            <a:off x="876300" y="1905000"/>
-            <a:ext cx="2034540" cy="228600"/>
-          </a:xfrm>
-          <a:prstGeom prst="rect">
-            <a:avLst/>
-          </a:prstGeom>
-          <a:noFill/>
-          <a:ln/>
-        </p:spPr>
-        <p:txBody>
-          <a:bodyPr vert="horz" wrap="square" lIns="0" tIns="0" rIns="0" bIns="0" rtlCol="0" anchor="t"/>
-          <a:lstStyle/>
-          <a:p>
-            <a:pPr marL="0" indent="0">
-              <a:lnSpc>
-                <a:spcPts val="1800"/>
-              </a:lnSpc>
-              <a:buNone/>
-            </a:pPr>
-            <a:r>
-              <a:rPr lang="en-US" sz="1200" dirty="0">
-                <a:solidFill>
-                  <a:srgbClr val="374151"/>
-                </a:solidFill>
-                <a:latin typeface="Noto Sans KR" pitchFamily="34" charset="0"/>
-                <a:ea typeface="Noto Sans KR" pitchFamily="34" charset="-122"/>
-                <a:cs typeface="Noto Sans KR" pitchFamily="34" charset="-120"/>
-              </a:rPr>
-              <a:t>고객 속성: 나이, 지역, 직업</a:t>
-            </a:r>
-            <a:endParaRPr lang="en-US" sz="1200" dirty="0"/>
-          </a:p>
-        </p:txBody>
-      </p:sp>
-      <p:sp>
-        <p:nvSpPr>
-          <p:cNvPr id="35" name="Text 4"/>
-          <p:cNvSpPr/>
-          <p:nvPr/>
-        </p:nvSpPr>
-        <p:spPr>
-          <a:xfrm>
-            <a:off x="895350" y="2476500"/>
-            <a:ext cx="2774900" cy="457200"/>
-          </a:xfrm>
-          <a:prstGeom prst="rect">
-            <a:avLst/>
-          </a:prstGeom>
-          <a:noFill/>
-          <a:ln/>
-        </p:spPr>
-        <p:txBody>
-          <a:bodyPr vert="horz" wrap="square" lIns="0" tIns="0" rIns="0" bIns="0" rtlCol="0" anchor="t"/>
-          <a:lstStyle/>
-          <a:p>
-            <a:pPr marL="0" indent="0">
-              <a:lnSpc>
-                <a:spcPts val="1800"/>
-              </a:lnSpc>
-              <a:buNone/>
-            </a:pPr>
-            <a:r>
-              <a:rPr lang="en-US" sz="1200" dirty="0">
-                <a:solidFill>
-                  <a:srgbClr val="374151"/>
-                </a:solidFill>
-                <a:latin typeface="Noto Sans KR" pitchFamily="34" charset="0"/>
-                <a:ea typeface="Noto Sans KR" pitchFamily="34" charset="-122"/>
-                <a:cs typeface="Noto Sans KR" pitchFamily="34" charset="-120"/>
-              </a:rPr>
-              <a:t>판매자 정보: 업 industry, 국가, 온라인/오프라인</a:t>
-            </a:r>
-            <a:endParaRPr lang="en-US" sz="1200" dirty="0"/>
-          </a:p>
-        </p:txBody>
-      </p:sp>
-      <p:sp>
-        <p:nvSpPr>
-          <p:cNvPr id="36" name="Text 5"/>
-          <p:cNvSpPr/>
-          <p:nvPr/>
-        </p:nvSpPr>
-        <p:spPr>
-          <a:xfrm>
-            <a:off x="914400" y="3276600"/>
-            <a:ext cx="2708910" cy="228600"/>
-          </a:xfrm>
-          <a:prstGeom prst="rect">
-            <a:avLst/>
-          </a:prstGeom>
-          <a:noFill/>
-          <a:ln/>
-        </p:spPr>
-        <p:txBody>
-          <a:bodyPr vert="horz" wrap="square" lIns="0" tIns="0" rIns="0" bIns="0" rtlCol="0" anchor="t"/>
-          <a:lstStyle/>
-          <a:p>
-            <a:pPr marL="0" indent="0">
-              <a:lnSpc>
-                <a:spcPts val="1800"/>
-              </a:lnSpc>
-              <a:buNone/>
-            </a:pPr>
-            <a:r>
-              <a:rPr lang="en-US" sz="1200" dirty="0">
-                <a:solidFill>
-                  <a:srgbClr val="374151"/>
-                </a:solidFill>
-                <a:latin typeface="Noto Sans KR" pitchFamily="34" charset="0"/>
-                <a:ea typeface="Noto Sans KR" pitchFamily="34" charset="-122"/>
-                <a:cs typeface="Noto Sans KR" pitchFamily="34" charset="-120"/>
-              </a:rPr>
-              <a:t>디바이스/네트워크: IP, 디바이스 ID</a:t>
-            </a:r>
-            <a:endParaRPr lang="en-US" sz="1200" dirty="0"/>
-          </a:p>
-        </p:txBody>
-      </p:sp>
-      <p:sp>
-        <p:nvSpPr>
-          <p:cNvPr id="37" name="Text 6"/>
-          <p:cNvSpPr/>
-          <p:nvPr/>
-        </p:nvSpPr>
-        <p:spPr>
-          <a:xfrm>
-            <a:off x="876300" y="3848100"/>
-            <a:ext cx="2720340" cy="228600"/>
-          </a:xfrm>
-          <a:prstGeom prst="rect">
-            <a:avLst/>
-          </a:prstGeom>
-          <a:noFill/>
-          <a:ln/>
-        </p:spPr>
-        <p:txBody>
-          <a:bodyPr vert="horz" wrap="square" lIns="0" tIns="0" rIns="0" bIns="0" rtlCol="0" anchor="t"/>
-          <a:lstStyle/>
-          <a:p>
-            <a:pPr marL="0" indent="0">
-              <a:lnSpc>
-                <a:spcPts val="1800"/>
-              </a:lnSpc>
-              <a:buNone/>
-            </a:pPr>
-            <a:r>
-              <a:rPr lang="en-US" sz="1200" dirty="0">
-                <a:solidFill>
-                  <a:srgbClr val="374151"/>
-                </a:solidFill>
-                <a:latin typeface="Noto Sans KR" pitchFamily="34" charset="0"/>
-                <a:ea typeface="Noto Sans KR" pitchFamily="34" charset="-122"/>
-                <a:cs typeface="Noto Sans KR" pitchFamily="34" charset="-120"/>
-              </a:rPr>
-              <a:t>통계적 특징: 평균 금액, 시간대 패턴</a:t>
-            </a:r>
-            <a:endParaRPr lang="en-US" sz="1200" dirty="0"/>
-          </a:p>
-        </p:txBody>
-      </p:sp>
-      <p:sp>
-        <p:nvSpPr>
-          <p:cNvPr id="38" name="Text 7"/>
-          <p:cNvSpPr/>
-          <p:nvPr/>
-        </p:nvSpPr>
-        <p:spPr>
-          <a:xfrm>
-            <a:off x="4803725" y="1333500"/>
-            <a:ext cx="1577340" cy="266700"/>
-          </a:xfrm>
-          <a:prstGeom prst="rect">
-            <a:avLst/>
-          </a:prstGeom>
-          <a:noFill/>
-          <a:ln/>
-        </p:spPr>
-        <p:txBody>
-          <a:bodyPr vert="horz" wrap="square" lIns="0" tIns="0" rIns="0" bIns="0" rtlCol="0" anchor="t"/>
-          <a:lstStyle/>
-          <a:p>
-            <a:pPr marL="0" indent="0">
-              <a:lnSpc>
-                <a:spcPts val="2100"/>
-              </a:lnSpc>
-              <a:buNone/>
-            </a:pPr>
-            <a:r>
-              <a:rPr lang="en-US" sz="1500" b="1" dirty="0">
-                <a:solidFill>
-                  <a:srgbClr val="1E40AF"/>
-                </a:solidFill>
-                <a:latin typeface="Noto Sans KR" pitchFamily="34" charset="0"/>
-                <a:ea typeface="Noto Sans KR" pitchFamily="34" charset="-122"/>
-                <a:cs typeface="Noto Sans KR" pitchFamily="34" charset="-120"/>
-              </a:rPr>
-              <a:t>외부 데이터 통합</a:t>
-            </a:r>
-            <a:endParaRPr lang="en-US" sz="1500" dirty="0"/>
-          </a:p>
-        </p:txBody>
-      </p:sp>
-      <p:sp>
-        <p:nvSpPr>
-          <p:cNvPr id="39" name="Text 8"/>
-          <p:cNvSpPr/>
-          <p:nvPr/>
-        </p:nvSpPr>
-        <p:spPr>
-          <a:xfrm>
-            <a:off x="4851350" y="1943100"/>
-            <a:ext cx="1245870" cy="228600"/>
-          </a:xfrm>
-          <a:prstGeom prst="rect">
-            <a:avLst/>
-          </a:prstGeom>
-          <a:noFill/>
-          <a:ln/>
-        </p:spPr>
-        <p:txBody>
-          <a:bodyPr vert="horz" wrap="square" lIns="0" tIns="0" rIns="0" bIns="0" rtlCol="0" anchor="t"/>
-          <a:lstStyle/>
-          <a:p>
-            <a:pPr marL="0" indent="0">
-              <a:lnSpc>
-                <a:spcPts val="1800"/>
-              </a:lnSpc>
-              <a:buNone/>
-            </a:pPr>
-            <a:r>
-              <a:rPr lang="en-US" sz="1200" b="1" dirty="0">
-                <a:solidFill>
-                  <a:srgbClr val="1D4ED8"/>
-                </a:solidFill>
-                <a:latin typeface="Noto Sans KR" pitchFamily="34" charset="0"/>
-                <a:ea typeface="Noto Sans KR" pitchFamily="34" charset="-122"/>
-                <a:cs typeface="Noto Sans KR" pitchFamily="34" charset="-120"/>
-              </a:rPr>
-              <a:t>블랙리스트 통합</a:t>
-            </a:r>
-            <a:endParaRPr lang="en-US" sz="1200" dirty="0"/>
-          </a:p>
-        </p:txBody>
-      </p:sp>
-      <p:sp>
-        <p:nvSpPr>
-          <p:cNvPr id="40" name="Text 9"/>
-          <p:cNvSpPr/>
-          <p:nvPr/>
-        </p:nvSpPr>
-        <p:spPr>
-          <a:xfrm>
-            <a:off x="4622750" y="2247900"/>
-            <a:ext cx="2946350" cy="457200"/>
-          </a:xfrm>
-          <a:prstGeom prst="rect">
-            <a:avLst/>
-          </a:prstGeom>
-          <a:noFill/>
-          <a:ln/>
-        </p:spPr>
-        <p:txBody>
-          <a:bodyPr vert="horz" wrap="square" lIns="0" tIns="0" rIns="0" bIns="0" rtlCol="0" anchor="t"/>
-          <a:lstStyle/>
-          <a:p>
-            <a:pPr marL="0" indent="0">
-              <a:lnSpc>
-                <a:spcPts val="1800"/>
-              </a:lnSpc>
-              <a:buNone/>
-            </a:pPr>
-            <a:r>
-              <a:rPr lang="en-US" sz="1200" dirty="0">
-                <a:solidFill>
-                  <a:srgbClr val="374151"/>
-                </a:solidFill>
-                <a:latin typeface="Noto Sans KR" pitchFamily="34" charset="0"/>
-                <a:ea typeface="Noto Sans KR" pitchFamily="34" charset="-122"/>
-                <a:cs typeface="Noto Sans KR" pitchFamily="34" charset="-120"/>
-              </a:rPr>
-              <a:t>거래 내역과 관련된 IP, 디바이스 ID, 카드 번호 등이 블랙리스트에 있는지 확인</a:t>
-            </a:r>
-            <a:endParaRPr lang="en-US" sz="1200" dirty="0"/>
-          </a:p>
-        </p:txBody>
-      </p:sp>
-      <p:sp>
-        <p:nvSpPr>
-          <p:cNvPr id="41" name="Text 10"/>
-          <p:cNvSpPr/>
-          <p:nvPr/>
-        </p:nvSpPr>
-        <p:spPr>
-          <a:xfrm>
-            <a:off x="4889450" y="3162300"/>
-            <a:ext cx="1508760" cy="228600"/>
-          </a:xfrm>
-          <a:prstGeom prst="rect">
-            <a:avLst/>
-          </a:prstGeom>
-          <a:noFill/>
-          <a:ln/>
-        </p:spPr>
-        <p:txBody>
-          <a:bodyPr vert="horz" wrap="square" lIns="0" tIns="0" rIns="0" bIns="0" rtlCol="0" anchor="t"/>
-          <a:lstStyle/>
-          <a:p>
-            <a:pPr marL="0" indent="0">
-              <a:lnSpc>
-                <a:spcPts val="1800"/>
-              </a:lnSpc>
-              <a:buNone/>
-            </a:pPr>
-            <a:r>
-              <a:rPr lang="en-US" sz="1200" b="1" dirty="0">
-                <a:solidFill>
-                  <a:srgbClr val="1D4ED8"/>
-                </a:solidFill>
-                <a:latin typeface="Noto Sans KR" pitchFamily="34" charset="0"/>
-                <a:ea typeface="Noto Sans KR" pitchFamily="34" charset="-122"/>
-                <a:cs typeface="Noto Sans KR" pitchFamily="34" charset="-120"/>
-              </a:rPr>
-              <a:t>규칙 기반 사기 점수</a:t>
-            </a:r>
-            <a:endParaRPr lang="en-US" sz="1200" dirty="0"/>
-          </a:p>
-        </p:txBody>
-      </p:sp>
-      <p:sp>
-        <p:nvSpPr>
-          <p:cNvPr id="42" name="Text 11"/>
-          <p:cNvSpPr/>
-          <p:nvPr/>
-        </p:nvSpPr>
-        <p:spPr>
-          <a:xfrm>
-            <a:off x="4622750" y="3467100"/>
-            <a:ext cx="2946350" cy="457200"/>
-          </a:xfrm>
-          <a:prstGeom prst="rect">
-            <a:avLst/>
-          </a:prstGeom>
-          <a:noFill/>
-          <a:ln/>
-        </p:spPr>
-        <p:txBody>
-          <a:bodyPr vert="horz" wrap="square" lIns="0" tIns="0" rIns="0" bIns="0" rtlCol="0" anchor="t"/>
-          <a:lstStyle/>
-          <a:p>
-            <a:pPr marL="0" indent="0">
-              <a:lnSpc>
-                <a:spcPts val="1800"/>
-              </a:lnSpc>
-              <a:buNone/>
-            </a:pPr>
-            <a:r>
-              <a:rPr lang="en-US" sz="1200" dirty="0">
-                <a:solidFill>
-                  <a:srgbClr val="374151"/>
-                </a:solidFill>
-                <a:latin typeface="Noto Sans KR" pitchFamily="34" charset="0"/>
-                <a:ea typeface="Noto Sans KR" pitchFamily="34" charset="-122"/>
-                <a:cs typeface="Noto Sans KR" pitchFamily="34" charset="-120"/>
-              </a:rPr>
-              <a:t>기존 규칙 기반 시스템의 사기 점수를 모델에 통합</a:t>
-            </a:r>
-            <a:endParaRPr lang="en-US" sz="1200" dirty="0"/>
-          </a:p>
-        </p:txBody>
-      </p:sp>
-      <p:sp>
-        <p:nvSpPr>
-          <p:cNvPr id="43" name="Text 12"/>
-          <p:cNvSpPr/>
-          <p:nvPr/>
-        </p:nvSpPr>
-        <p:spPr>
-          <a:xfrm>
-            <a:off x="4851350" y="4381500"/>
-            <a:ext cx="1120140" cy="228600"/>
-          </a:xfrm>
-          <a:prstGeom prst="rect">
-            <a:avLst/>
-          </a:prstGeom>
-          <a:noFill/>
-          <a:ln/>
-        </p:spPr>
-        <p:txBody>
-          <a:bodyPr vert="horz" wrap="square" lIns="0" tIns="0" rIns="0" bIns="0" rtlCol="0" anchor="t"/>
-          <a:lstStyle/>
-          <a:p>
-            <a:pPr marL="0" indent="0">
-              <a:lnSpc>
-                <a:spcPts val="1800"/>
-              </a:lnSpc>
-              <a:buNone/>
-            </a:pPr>
-            <a:r>
-              <a:rPr lang="en-US" sz="1200" b="1" dirty="0">
-                <a:solidFill>
-                  <a:srgbClr val="1D4ED8"/>
-                </a:solidFill>
-                <a:latin typeface="Noto Sans KR" pitchFamily="34" charset="0"/>
-                <a:ea typeface="Noto Sans KR" pitchFamily="34" charset="-122"/>
-                <a:cs typeface="Noto Sans KR" pitchFamily="34" charset="-120"/>
-              </a:rPr>
-              <a:t>외부 신용 정보</a:t>
-            </a:r>
-            <a:endParaRPr lang="en-US" sz="1200" dirty="0"/>
-          </a:p>
-        </p:txBody>
-      </p:sp>
-      <p:sp>
-        <p:nvSpPr>
-          <p:cNvPr id="44" name="Text 13"/>
-          <p:cNvSpPr/>
-          <p:nvPr/>
-        </p:nvSpPr>
-        <p:spPr>
-          <a:xfrm>
-            <a:off x="4622750" y="4686300"/>
-            <a:ext cx="2946350" cy="457200"/>
-          </a:xfrm>
-          <a:prstGeom prst="rect">
-            <a:avLst/>
-          </a:prstGeom>
-          <a:noFill/>
-          <a:ln/>
-        </p:spPr>
-        <p:txBody>
-          <a:bodyPr vert="horz" wrap="square" lIns="0" tIns="0" rIns="0" bIns="0" rtlCol="0" anchor="t"/>
-          <a:lstStyle/>
-          <a:p>
-            <a:pPr marL="0" indent="0">
-              <a:lnSpc>
-                <a:spcPts val="1800"/>
-              </a:lnSpc>
-              <a:buNone/>
-            </a:pPr>
-            <a:r>
-              <a:rPr lang="en-US" sz="1200" dirty="0">
-                <a:solidFill>
-                  <a:srgbClr val="374151"/>
-                </a:solidFill>
-                <a:latin typeface="Noto Sans KR" pitchFamily="34" charset="0"/>
-                <a:ea typeface="Noto Sans KR" pitchFamily="34" charset="-122"/>
-                <a:cs typeface="Noto Sans KR" pitchFamily="34" charset="-120"/>
-              </a:rPr>
-              <a:t>거래 시점의 신용 정보나 리스크 점수를 추가 특징으로 활용</a:t>
-            </a:r>
-            <a:endParaRPr lang="en-US" sz="1200" dirty="0"/>
-          </a:p>
-        </p:txBody>
-      </p:sp>
-      <p:sp>
-        <p:nvSpPr>
-          <p:cNvPr id="45" name="Text 14"/>
-          <p:cNvSpPr/>
-          <p:nvPr/>
-        </p:nvSpPr>
-        <p:spPr>
-          <a:xfrm>
-            <a:off x="8807351" y="1333500"/>
-            <a:ext cx="1577340" cy="266700"/>
-          </a:xfrm>
-          <a:prstGeom prst="rect">
-            <a:avLst/>
-          </a:prstGeom>
-          <a:noFill/>
-          <a:ln/>
-        </p:spPr>
-        <p:txBody>
-          <a:bodyPr vert="horz" wrap="square" lIns="0" tIns="0" rIns="0" bIns="0" rtlCol="0" anchor="t"/>
-          <a:lstStyle/>
-          <a:p>
-            <a:pPr marL="0" indent="0">
-              <a:lnSpc>
-                <a:spcPts val="2100"/>
-              </a:lnSpc>
-              <a:buNone/>
-            </a:pPr>
-            <a:r>
-              <a:rPr lang="en-US" sz="1500" b="1" dirty="0">
-                <a:solidFill>
-                  <a:srgbClr val="1E40AF"/>
-                </a:solidFill>
-                <a:latin typeface="Noto Sans KR" pitchFamily="34" charset="0"/>
-                <a:ea typeface="Noto Sans KR" pitchFamily="34" charset="-122"/>
-                <a:cs typeface="Noto Sans KR" pitchFamily="34" charset="-120"/>
-              </a:rPr>
-              <a:t>시계열 패턴 분석</a:t>
-            </a:r>
-            <a:endParaRPr lang="en-US" sz="1500" dirty="0"/>
-          </a:p>
-        </p:txBody>
-      </p:sp>
-      <p:sp>
-        <p:nvSpPr>
-          <p:cNvPr id="46" name="Text 15"/>
-          <p:cNvSpPr/>
-          <p:nvPr/>
-        </p:nvSpPr>
-        <p:spPr>
-          <a:xfrm>
-            <a:off x="8731151" y="1905000"/>
-            <a:ext cx="2609850" cy="228600"/>
-          </a:xfrm>
-          <a:prstGeom prst="rect">
-            <a:avLst/>
-          </a:prstGeom>
-          <a:noFill/>
-          <a:ln/>
-        </p:spPr>
-        <p:txBody>
-          <a:bodyPr vert="horz" wrap="square" lIns="0" tIns="0" rIns="0" bIns="0" rtlCol="0" anchor="t"/>
-          <a:lstStyle/>
-          <a:p>
-            <a:pPr marL="0" indent="0">
-              <a:lnSpc>
-                <a:spcPts val="1800"/>
-              </a:lnSpc>
-              <a:buNone/>
-            </a:pPr>
-            <a:r>
-              <a:rPr lang="en-US" sz="1200" b="1" dirty="0">
-                <a:solidFill>
-                  <a:srgbClr val="1D4ED8"/>
-                </a:solidFill>
-                <a:latin typeface="Noto Sans KR" pitchFamily="34" charset="0"/>
-                <a:ea typeface="Noto Sans KR" pitchFamily="34" charset="-122"/>
-                <a:cs typeface="Noto Sans KR" pitchFamily="34" charset="-120"/>
-              </a:rPr>
-              <a:t>시간대 특징</a:t>
-            </a:r>
-            <a:endParaRPr lang="en-US" sz="1200" dirty="0"/>
-          </a:p>
-        </p:txBody>
-      </p:sp>
-      <p:sp>
-        <p:nvSpPr>
-          <p:cNvPr id="47" name="Text 16"/>
-          <p:cNvSpPr/>
-          <p:nvPr/>
-        </p:nvSpPr>
-        <p:spPr>
-          <a:xfrm>
-            <a:off x="8731151" y="2133600"/>
-            <a:ext cx="3131820" cy="228600"/>
-          </a:xfrm>
-          <a:prstGeom prst="rect">
-            <a:avLst/>
-          </a:prstGeom>
-          <a:noFill/>
-          <a:ln/>
-        </p:spPr>
-        <p:txBody>
-          <a:bodyPr vert="horz" wrap="square" lIns="0" tIns="0" rIns="0" bIns="0" rtlCol="0" anchor="t"/>
-          <a:lstStyle/>
-          <a:p>
-            <a:pPr marL="0" indent="0">
-              <a:lnSpc>
-                <a:spcPts val="1800"/>
-              </a:lnSpc>
-              <a:buNone/>
-            </a:pPr>
-            <a:r>
-              <a:rPr lang="en-US" sz="1200" dirty="0">
-                <a:solidFill>
-                  <a:srgbClr val="374151"/>
-                </a:solidFill>
-                <a:latin typeface="Noto Sans KR" pitchFamily="34" charset="0"/>
-                <a:ea typeface="Noto Sans KR" pitchFamily="34" charset="-122"/>
-                <a:cs typeface="Noto Sans KR" pitchFamily="34" charset="-120"/>
-              </a:rPr>
-              <a:t>거래 시간대(시간대별 평균 금액, 거래 수)</a:t>
-            </a:r>
-            <a:endParaRPr lang="en-US" sz="1200" dirty="0"/>
-          </a:p>
-        </p:txBody>
-      </p:sp>
-      <p:sp>
-        <p:nvSpPr>
-          <p:cNvPr id="48" name="Text 17"/>
-          <p:cNvSpPr/>
-          <p:nvPr/>
-        </p:nvSpPr>
-        <p:spPr>
-          <a:xfrm>
-            <a:off x="8750201" y="2705100"/>
-            <a:ext cx="2162175" cy="228600"/>
-          </a:xfrm>
-          <a:prstGeom prst="rect">
-            <a:avLst/>
-          </a:prstGeom>
-          <a:noFill/>
-          <a:ln/>
-        </p:spPr>
-        <p:txBody>
-          <a:bodyPr vert="horz" wrap="square" lIns="0" tIns="0" rIns="0" bIns="0" rtlCol="0" anchor="t"/>
-          <a:lstStyle/>
-          <a:p>
-            <a:pPr marL="0" indent="0">
-              <a:lnSpc>
-                <a:spcPts val="1800"/>
-              </a:lnSpc>
-              <a:buNone/>
-            </a:pPr>
-            <a:r>
-              <a:rPr lang="en-US" sz="1200" b="1" dirty="0">
-                <a:solidFill>
-                  <a:srgbClr val="1D4ED8"/>
-                </a:solidFill>
-                <a:latin typeface="Noto Sans KR" pitchFamily="34" charset="0"/>
-                <a:ea typeface="Noto Sans KR" pitchFamily="34" charset="-122"/>
-                <a:cs typeface="Noto Sans KR" pitchFamily="34" charset="-120"/>
-              </a:rPr>
-              <a:t>시간 창 통계</a:t>
-            </a:r>
-            <a:endParaRPr lang="en-US" sz="1200" dirty="0"/>
-          </a:p>
-        </p:txBody>
-      </p:sp>
-      <p:sp>
-        <p:nvSpPr>
-          <p:cNvPr id="49" name="Text 18"/>
-          <p:cNvSpPr/>
-          <p:nvPr/>
-        </p:nvSpPr>
-        <p:spPr>
-          <a:xfrm>
-            <a:off x="8750201" y="2933700"/>
-            <a:ext cx="2594610" cy="228600"/>
-          </a:xfrm>
-          <a:prstGeom prst="rect">
-            <a:avLst/>
-          </a:prstGeom>
-          <a:noFill/>
-          <a:ln/>
-        </p:spPr>
-        <p:txBody>
-          <a:bodyPr vert="horz" wrap="square" lIns="0" tIns="0" rIns="0" bIns="0" rtlCol="0" anchor="t"/>
-          <a:lstStyle/>
-          <a:p>
-            <a:pPr marL="0" indent="0">
-              <a:lnSpc>
-                <a:spcPts val="1800"/>
-              </a:lnSpc>
-              <a:buNone/>
-            </a:pPr>
-            <a:r>
-              <a:rPr lang="en-US" sz="1200" dirty="0">
-                <a:solidFill>
-                  <a:srgbClr val="374151"/>
-                </a:solidFill>
-                <a:latin typeface="Noto Sans KR" pitchFamily="34" charset="0"/>
-                <a:ea typeface="Noto Sans KR" pitchFamily="34" charset="-122"/>
-                <a:cs typeface="Noto Sans KR" pitchFamily="34" charset="-120"/>
-              </a:rPr>
-              <a:t>특정 시간 창 내 거래 수, 누적 금액</a:t>
-            </a:r>
-            <a:endParaRPr lang="en-US" sz="1200" dirty="0"/>
-          </a:p>
-        </p:txBody>
-      </p:sp>
-      <p:sp>
-        <p:nvSpPr>
-          <p:cNvPr id="50" name="Text 19"/>
-          <p:cNvSpPr/>
-          <p:nvPr/>
-        </p:nvSpPr>
-        <p:spPr>
-          <a:xfrm>
-            <a:off x="8750201" y="3505200"/>
-            <a:ext cx="2695575" cy="228600"/>
-          </a:xfrm>
-          <a:prstGeom prst="rect">
-            <a:avLst/>
-          </a:prstGeom>
-          <a:noFill/>
-          <a:ln/>
-        </p:spPr>
-        <p:txBody>
-          <a:bodyPr vert="horz" wrap="square" lIns="0" tIns="0" rIns="0" bIns="0" rtlCol="0" anchor="t"/>
-          <a:lstStyle/>
-          <a:p>
-            <a:pPr marL="0" indent="0">
-              <a:lnSpc>
-                <a:spcPts val="1800"/>
-              </a:lnSpc>
-              <a:buNone/>
-            </a:pPr>
-            <a:r>
-              <a:rPr lang="en-US" sz="1200" b="1" dirty="0">
-                <a:solidFill>
-                  <a:srgbClr val="1D4ED8"/>
-                </a:solidFill>
-                <a:latin typeface="Noto Sans KR" pitchFamily="34" charset="0"/>
-                <a:ea typeface="Noto Sans KR" pitchFamily="34" charset="-122"/>
-                <a:cs typeface="Noto Sans KR" pitchFamily="34" charset="-120"/>
-              </a:rPr>
-              <a:t>시간 기반 분할</a:t>
-            </a:r>
-            <a:endParaRPr lang="en-US" sz="1200" dirty="0"/>
-          </a:p>
-        </p:txBody>
-      </p:sp>
-      <p:sp>
-        <p:nvSpPr>
-          <p:cNvPr id="51" name="Text 20"/>
-          <p:cNvSpPr/>
-          <p:nvPr/>
-        </p:nvSpPr>
-        <p:spPr>
-          <a:xfrm>
-            <a:off x="8750201" y="3733800"/>
-            <a:ext cx="3234690" cy="228600"/>
-          </a:xfrm>
-          <a:prstGeom prst="rect">
-            <a:avLst/>
-          </a:prstGeom>
-          <a:noFill/>
-          <a:ln/>
-        </p:spPr>
-        <p:txBody>
-          <a:bodyPr vert="horz" wrap="square" lIns="0" tIns="0" rIns="0" bIns="0" rtlCol="0" anchor="t"/>
-          <a:lstStyle/>
-          <a:p>
-            <a:pPr marL="0" indent="0">
-              <a:lnSpc>
-                <a:spcPts val="1800"/>
-              </a:lnSpc>
-              <a:buNone/>
-            </a:pPr>
-            <a:r>
-              <a:rPr lang="en-US" sz="1200" dirty="0">
-                <a:solidFill>
-                  <a:srgbClr val="374151"/>
-                </a:solidFill>
-                <a:latin typeface="Noto Sans KR" pitchFamily="34" charset="0"/>
-                <a:ea typeface="Noto Sans KR" pitchFamily="34" charset="-122"/>
-                <a:cs typeface="Noto Sans KR" pitchFamily="34" charset="-120"/>
-              </a:rPr>
-              <a:t>시간 기반 분할 또는 롤링 윈도우 교차 검증</a:t>
-            </a:r>
-            <a:endParaRPr lang="en-US" sz="1200" dirty="0"/>
-          </a:p>
-        </p:txBody>
-      </p:sp>
-    </p:spTree>
-  </p:cSld>
-  <p:clrMapOvr>
-    <a:masterClrMapping/>
-  </p:clrMapOvr>
-</p:sld>
-</file>
-
-<file path=ppt/slides/slide21.xml><?xml version="1.0" encoding="utf-8"?>
-<p:sld xmlns:a="http://schemas.openxmlformats.org/drawingml/2006/main" xmlns:r="http://schemas.openxmlformats.org/officeDocument/2006/relationships" xmlns:p="http://schemas.openxmlformats.org/presentationml/2006/main">
   <p:cSld name="Slide 18">
     <p:spTree>
       <p:nvGrpSpPr>
@@ -25758,7 +25306,7 @@
 </p:sld>
 </file>
 
-<file path=ppt/slides/slide22.xml><?xml version="1.0" encoding="utf-8"?>
+<file path=ppt/slides/slide21.xml><?xml version="1.0" encoding="utf-8"?>
 <p:sld xmlns:a="http://schemas.openxmlformats.org/drawingml/2006/main" xmlns:r="http://schemas.openxmlformats.org/officeDocument/2006/relationships" xmlns:p="http://schemas.openxmlformats.org/presentationml/2006/main">
   <p:cSld name="Slide 19">
     <p:spTree>
@@ -27367,7 +26915,7 @@
 </p:sld>
 </file>
 
-<file path=ppt/slides/slide23.xml><?xml version="1.0" encoding="utf-8"?>
+<file path=ppt/slides/slide22.xml><?xml version="1.0" encoding="utf-8"?>
 <p:sld xmlns:a="http://schemas.openxmlformats.org/drawingml/2006/main" xmlns:r="http://schemas.openxmlformats.org/officeDocument/2006/relationships" xmlns:p="http://schemas.openxmlformats.org/presentationml/2006/main">
   <p:cSld name="Slide 20">
     <p:spTree>
@@ -28249,6 +27797,306 @@
         </p:txBody>
       </p:sp>
     </p:spTree>
+  </p:cSld>
+  <p:clrMapOvr>
+    <a:masterClrMapping/>
+  </p:clrMapOvr>
+</p:sld>
+</file>
+
+<file path=ppt/slides/slide23.xml><?xml version="1.0" encoding="utf-8"?>
+<p:sld xmlns:a="http://schemas.openxmlformats.org/drawingml/2006/main" xmlns:r="http://schemas.openxmlformats.org/officeDocument/2006/relationships" xmlns:p="http://schemas.openxmlformats.org/presentationml/2006/main">
+  <p:cSld>
+    <p:spTree>
+      <p:nvGrpSpPr>
+        <p:cNvPr id="1" name="">
+          <a:extLst>
+            <a:ext uri="{FF2B5EF4-FFF2-40B4-BE49-F238E27FC236}">
+              <a16:creationId xmlns:a16="http://schemas.microsoft.com/office/drawing/2014/main" id="{4472B901-9A35-628F-3F1A-94DADB2418A8}"/>
+            </a:ext>
+          </a:extLst>
+        </p:cNvPr>
+        <p:cNvGrpSpPr/>
+        <p:nvPr/>
+      </p:nvGrpSpPr>
+      <p:grpSpPr>
+        <a:xfrm>
+          <a:off x="0" y="0"/>
+          <a:ext cx="0" cy="0"/>
+          <a:chOff x="0" y="0"/>
+          <a:chExt cx="0" cy="0"/>
+        </a:xfrm>
+      </p:grpSpPr>
+      <p:pic>
+        <p:nvPicPr>
+          <p:cNvPr id="2" name="Image 0" descr="preencoded.png">
+            <a:extLst>
+              <a:ext uri="{FF2B5EF4-FFF2-40B4-BE49-F238E27FC236}">
+                <a16:creationId xmlns:a16="http://schemas.microsoft.com/office/drawing/2014/main" id="{37E41198-884A-2538-0CB7-187575CB0B1E}"/>
+              </a:ext>
+            </a:extLst>
+          </p:cNvPr>
+          <p:cNvPicPr>
+            <a:picLocks noChangeAspect="1"/>
+          </p:cNvPicPr>
+          <p:nvPr/>
+        </p:nvPicPr>
+        <p:blipFill>
+          <a:blip r:embed="rId3"/>
+          <a:stretch>
+            <a:fillRect/>
+          </a:stretch>
+        </p:blipFill>
+        <p:spPr>
+          <a:xfrm>
+            <a:off x="0" y="0"/>
+            <a:ext cx="12192000" cy="6858000"/>
+          </a:xfrm>
+          <a:prstGeom prst="rect">
+            <a:avLst/>
+          </a:prstGeom>
+        </p:spPr>
+      </p:pic>
+      <p:pic>
+        <p:nvPicPr>
+          <p:cNvPr id="3" name="Image 1" descr="preencoded.png">
+            <a:extLst>
+              <a:ext uri="{FF2B5EF4-FFF2-40B4-BE49-F238E27FC236}">
+                <a16:creationId xmlns:a16="http://schemas.microsoft.com/office/drawing/2014/main" id="{367FFF48-C9A0-A2C0-1327-97D346598E81}"/>
+              </a:ext>
+            </a:extLst>
+          </p:cNvPr>
+          <p:cNvPicPr>
+            <a:picLocks noChangeAspect="1"/>
+          </p:cNvPicPr>
+          <p:nvPr/>
+        </p:nvPicPr>
+        <p:blipFill>
+          <a:blip r:embed="rId4"/>
+          <a:stretch>
+            <a:fillRect/>
+          </a:stretch>
+        </p:blipFill>
+        <p:spPr>
+          <a:xfrm>
+            <a:off x="0" y="0"/>
+            <a:ext cx="12192000" cy="762000"/>
+          </a:xfrm>
+          <a:prstGeom prst="rect">
+            <a:avLst/>
+          </a:prstGeom>
+        </p:spPr>
+      </p:pic>
+      <p:pic>
+        <p:nvPicPr>
+          <p:cNvPr id="4" name="Image 2" descr="preencoded.png">
+            <a:extLst>
+              <a:ext uri="{FF2B5EF4-FFF2-40B4-BE49-F238E27FC236}">
+                <a16:creationId xmlns:a16="http://schemas.microsoft.com/office/drawing/2014/main" id="{084179F9-80A9-5E30-0BC5-B782704E0D9B}"/>
+              </a:ext>
+            </a:extLst>
+          </p:cNvPr>
+          <p:cNvPicPr>
+            <a:picLocks noChangeAspect="1"/>
+          </p:cNvPicPr>
+          <p:nvPr/>
+        </p:nvPicPr>
+        <p:blipFill>
+          <a:blip r:embed="rId5"/>
+          <a:stretch>
+            <a:fillRect/>
+          </a:stretch>
+        </p:blipFill>
+        <p:spPr>
+          <a:xfrm>
+            <a:off x="3374265" y="3086100"/>
+            <a:ext cx="5267460" cy="1371600"/>
+          </a:xfrm>
+          <a:prstGeom prst="rect">
+            <a:avLst/>
+          </a:prstGeom>
+        </p:spPr>
+      </p:pic>
+      <p:pic>
+        <p:nvPicPr>
+          <p:cNvPr id="16" name="Image 14" descr="preencoded.png">
+            <a:extLst>
+              <a:ext uri="{FF2B5EF4-FFF2-40B4-BE49-F238E27FC236}">
+                <a16:creationId xmlns:a16="http://schemas.microsoft.com/office/drawing/2014/main" id="{637A46FC-B58D-BAB8-E315-F794D7C2F5C4}"/>
+              </a:ext>
+            </a:extLst>
+          </p:cNvPr>
+          <p:cNvPicPr>
+            <a:picLocks noChangeAspect="1"/>
+          </p:cNvPicPr>
+          <p:nvPr/>
+        </p:nvPicPr>
+        <p:blipFill>
+          <a:blip r:embed="rId6"/>
+          <a:stretch>
+            <a:fillRect/>
+          </a:stretch>
+        </p:blipFill>
+        <p:spPr>
+          <a:xfrm>
+            <a:off x="0" y="6781800"/>
+            <a:ext cx="12192000" cy="76200"/>
+          </a:xfrm>
+          <a:prstGeom prst="rect">
+            <a:avLst/>
+          </a:prstGeom>
+        </p:spPr>
+      </p:pic>
+      <p:sp>
+        <p:nvSpPr>
+          <p:cNvPr id="17" name="Text 0">
+            <a:extLst>
+              <a:ext uri="{FF2B5EF4-FFF2-40B4-BE49-F238E27FC236}">
+                <a16:creationId xmlns:a16="http://schemas.microsoft.com/office/drawing/2014/main" id="{E5265D86-68FB-AD03-1916-3C2C23033CD4}"/>
+              </a:ext>
+            </a:extLst>
+          </p:cNvPr>
+          <p:cNvSpPr/>
+          <p:nvPr/>
+        </p:nvSpPr>
+        <p:spPr>
+          <a:xfrm>
+            <a:off x="381000" y="209550"/>
+            <a:ext cx="3154680" cy="342900"/>
+          </a:xfrm>
+          <a:prstGeom prst="rect">
+            <a:avLst/>
+          </a:prstGeom>
+          <a:noFill/>
+          <a:ln/>
+        </p:spPr>
+        <p:txBody>
+          <a:bodyPr vert="horz" wrap="square" lIns="0" tIns="0" rIns="0" bIns="0" rtlCol="0" anchor="t"/>
+          <a:lstStyle/>
+          <a:p>
+            <a:pPr marL="0" indent="0">
+              <a:lnSpc>
+                <a:spcPts val="2700"/>
+              </a:lnSpc>
+              <a:buNone/>
+            </a:pPr>
+            <a:endParaRPr lang="en-US" sz="2250" dirty="0"/>
+          </a:p>
+        </p:txBody>
+      </p:sp>
+      <p:sp>
+        <p:nvSpPr>
+          <p:cNvPr id="18" name="Text 1">
+            <a:extLst>
+              <a:ext uri="{FF2B5EF4-FFF2-40B4-BE49-F238E27FC236}">
+                <a16:creationId xmlns:a16="http://schemas.microsoft.com/office/drawing/2014/main" id="{800C31D4-5C23-5295-89B5-B47907F1CEE6}"/>
+              </a:ext>
+            </a:extLst>
+          </p:cNvPr>
+          <p:cNvSpPr/>
+          <p:nvPr/>
+        </p:nvSpPr>
+        <p:spPr>
+          <a:xfrm>
+            <a:off x="11315700" y="247650"/>
+            <a:ext cx="594360" cy="266700"/>
+          </a:xfrm>
+          <a:prstGeom prst="rect">
+            <a:avLst/>
+          </a:prstGeom>
+          <a:noFill/>
+          <a:ln/>
+        </p:spPr>
+        <p:txBody>
+          <a:bodyPr vert="horz" wrap="square" lIns="0" tIns="0" rIns="0" bIns="0" rtlCol="0" anchor="t"/>
+          <a:lstStyle/>
+          <a:p>
+            <a:pPr marL="0" indent="0">
+              <a:lnSpc>
+                <a:spcPts val="2100"/>
+              </a:lnSpc>
+              <a:buNone/>
+            </a:pPr>
+            <a:r>
+              <a:rPr lang="en-US" sz="1500" dirty="0">
+                <a:solidFill>
+                  <a:srgbClr val="FFFFFF"/>
+                </a:solidFill>
+                <a:latin typeface="Noto Sans KR" pitchFamily="34" charset="0"/>
+                <a:ea typeface="Noto Sans KR" pitchFamily="34" charset="-122"/>
+                <a:cs typeface="Noto Sans KR" pitchFamily="34" charset="-120"/>
+              </a:rPr>
+              <a:t>20/20</a:t>
+            </a:r>
+            <a:endParaRPr lang="en-US" sz="1500" dirty="0"/>
+          </a:p>
+        </p:txBody>
+      </p:sp>
+      <p:sp>
+        <p:nvSpPr>
+          <p:cNvPr id="19" name="Text 2">
+            <a:extLst>
+              <a:ext uri="{FF2B5EF4-FFF2-40B4-BE49-F238E27FC236}">
+                <a16:creationId xmlns:a16="http://schemas.microsoft.com/office/drawing/2014/main" id="{93A9A53D-DB65-E42B-3E92-C1F05E0FD28D}"/>
+              </a:ext>
+            </a:extLst>
+          </p:cNvPr>
+          <p:cNvSpPr/>
+          <p:nvPr/>
+        </p:nvSpPr>
+        <p:spPr>
+          <a:xfrm>
+            <a:off x="4778063" y="3770290"/>
+            <a:ext cx="4033771" cy="932108"/>
+          </a:xfrm>
+          <a:prstGeom prst="rect">
+            <a:avLst/>
+          </a:prstGeom>
+          <a:noFill/>
+          <a:ln/>
+        </p:spPr>
+        <p:txBody>
+          <a:bodyPr vert="horz" wrap="square" lIns="0" tIns="0" rIns="0" bIns="0" rtlCol="0" anchor="t"/>
+          <a:lstStyle/>
+          <a:p>
+            <a:pPr marL="0" indent="0">
+              <a:lnSpc>
+                <a:spcPts val="2400"/>
+              </a:lnSpc>
+              <a:buNone/>
+            </a:pPr>
+            <a:r>
+              <a:rPr lang="ko-KR" altLang="en-US" sz="4000" b="1" dirty="0">
+                <a:solidFill>
+                  <a:srgbClr val="1E40AF"/>
+                </a:solidFill>
+                <a:latin typeface="Noto Sans KR" pitchFamily="34" charset="0"/>
+                <a:ea typeface="Noto Sans KR" pitchFamily="34" charset="-122"/>
+                <a:cs typeface="Noto Sans KR" pitchFamily="34" charset="-120"/>
+              </a:rPr>
+              <a:t>감사합니다</a:t>
+            </a:r>
+            <a:r>
+              <a:rPr lang="en-US" altLang="ko-KR" sz="4000" b="1" dirty="0">
+                <a:solidFill>
+                  <a:srgbClr val="1E40AF"/>
+                </a:solidFill>
+                <a:latin typeface="Noto Sans KR" pitchFamily="34" charset="0"/>
+                <a:ea typeface="Noto Sans KR" pitchFamily="34" charset="-122"/>
+                <a:cs typeface="Noto Sans KR" pitchFamily="34" charset="-120"/>
+              </a:rPr>
+              <a:t>!</a:t>
+            </a:r>
+            <a:endParaRPr lang="en-US" sz="4000" dirty="0"/>
+          </a:p>
+        </p:txBody>
+      </p:sp>
+    </p:spTree>
+    <p:extLst>
+      <p:ext uri="{BB962C8B-B14F-4D97-AF65-F5344CB8AC3E}">
+        <p14:creationId xmlns:p14="http://schemas.microsoft.com/office/powerpoint/2010/main" val="4162346577"/>
+      </p:ext>
+    </p:extLst>
   </p:cSld>
   <p:clrMapOvr>
     <a:masterClrMapping/>

--- a/CreditCardFraud/report/신용카드 사기 탐지 프로젝트 분석.pptx
+++ b/CreditCardFraud/report/신용카드 사기 탐지 프로젝트 분석.pptx
@@ -5,7 +5,7 @@
     <p:sldMasterId id="2147483648" r:id="rId1"/>
   </p:sldMasterIdLst>
   <p:notesMasterIdLst>
-    <p:notesMasterId r:id="rId25"/>
+    <p:notesMasterId r:id="rId24"/>
   </p:notesMasterIdLst>
   <p:sldIdLst>
     <p:sldId id="256" r:id="rId2"/>
@@ -28,9 +28,8 @@
     <p:sldId id="270" r:id="rId19"/>
     <p:sldId id="271" r:id="rId20"/>
     <p:sldId id="273" r:id="rId21"/>
-    <p:sldId id="274" r:id="rId22"/>
-    <p:sldId id="275" r:id="rId23"/>
-    <p:sldId id="280" r:id="rId24"/>
+    <p:sldId id="275" r:id="rId22"/>
+    <p:sldId id="280" r:id="rId23"/>
   </p:sldIdLst>
   <p:sldSz cx="12192000" cy="6858000"/>
   <p:notesSz cx="6858000" cy="12192000"/>
@@ -1475,90 +1474,6 @@
   <p:cSld>
     <p:spTree>
       <p:nvGrpSpPr>
-        <p:cNvPr id="1" name=""/>
-        <p:cNvGrpSpPr/>
-        <p:nvPr/>
-      </p:nvGrpSpPr>
-      <p:grpSpPr>
-        <a:xfrm>
-          <a:off x="0" y="0"/>
-          <a:ext cx="0" cy="0"/>
-          <a:chOff x="0" y="0"/>
-          <a:chExt cx="0" cy="0"/>
-        </a:xfrm>
-      </p:grpSpPr>
-      <p:sp>
-        <p:nvSpPr>
-          <p:cNvPr id="2" name="Slide Image Placeholder 1"/>
-          <p:cNvSpPr>
-            <a:spLocks noGrp="1" noRot="1" noChangeAspect="1"/>
-          </p:cNvSpPr>
-          <p:nvPr>
-            <p:ph type="sldImg"/>
-          </p:nvPr>
-        </p:nvSpPr>
-        <p:spPr/>
-      </p:sp>
-      <p:sp>
-        <p:nvSpPr>
-          <p:cNvPr id="3" name="Notes Placeholder 2"/>
-          <p:cNvSpPr>
-            <a:spLocks noGrp="1"/>
-          </p:cNvSpPr>
-          <p:nvPr>
-            <p:ph type="body" idx="1"/>
-          </p:nvPr>
-        </p:nvSpPr>
-        <p:spPr/>
-        <p:txBody>
-          <a:bodyPr/>
-          <a:lstStyle/>
-          <a:p>
-            <a:endParaRPr lang="en-US" dirty="0"/>
-          </a:p>
-        </p:txBody>
-      </p:sp>
-      <p:sp>
-        <p:nvSpPr>
-          <p:cNvPr id="4" name="Slide Number Placeholder 3"/>
-          <p:cNvSpPr>
-            <a:spLocks noGrp="1"/>
-          </p:cNvSpPr>
-          <p:nvPr>
-            <p:ph type="sldNum" sz="quarter" idx="10"/>
-          </p:nvPr>
-        </p:nvSpPr>
-        <p:spPr/>
-        <p:txBody>
-          <a:bodyPr/>
-          <a:lstStyle/>
-          <a:p>
-            <a:fld id="{F7021451-1387-4CA6-816F-3879F97B5CBC}" type="slidenum">
-              <a:rPr lang="en-US"/>
-              <a:t>22</a:t>
-            </a:fld>
-            <a:endParaRPr lang="en-US"/>
-          </a:p>
-        </p:txBody>
-      </p:sp>
-    </p:spTree>
-    <p:extLst>
-      <p:ext uri="{BB962C8B-B14F-4D97-AF65-F5344CB8AC3E}">
-        <p14:creationId xmlns:p14="http://schemas.microsoft.com/office/powerpoint/2010/main" val="1024086991"/>
-      </p:ext>
-    </p:extLst>
-  </p:cSld>
-  <p:clrMapOvr>
-    <a:masterClrMapping/>
-  </p:clrMapOvr>
-</p:notes>
-</file>
-
-<file path=ppt/notesSlides/notesSlide23.xml><?xml version="1.0" encoding="utf-8"?>
-<p:notes xmlns:a="http://schemas.openxmlformats.org/drawingml/2006/main" xmlns:r="http://schemas.openxmlformats.org/officeDocument/2006/relationships" xmlns:p="http://schemas.openxmlformats.org/presentationml/2006/main">
-  <p:cSld>
-    <p:spTree>
-      <p:nvGrpSpPr>
         <p:cNvPr id="1" name="">
           <a:extLst>
             <a:ext uri="{FF2B5EF4-FFF2-40B4-BE49-F238E27FC236}">
@@ -1643,7 +1558,7 @@
           <a:p>
             <a:fld id="{F7021451-1387-4CA6-816F-3879F97B5CBC}" type="slidenum">
               <a:rPr lang="en-US"/>
-              <a:t>23</a:t>
+              <a:t>22</a:t>
             </a:fld>
             <a:endParaRPr lang="en-US"/>
           </a:p>
@@ -4310,8 +4225,8 @@
         </p:nvSpPr>
         <p:spPr>
           <a:xfrm>
-            <a:off x="11420475" y="247650"/>
-            <a:ext cx="468630" cy="266700"/>
+            <a:off x="11346287" y="304800"/>
+            <a:ext cx="542818" cy="209549"/>
           </a:xfrm>
           <a:prstGeom prst="rect">
             <a:avLst/>
@@ -4338,7 +4253,7 @@
                 <a:ea typeface="Noto Sans KR" pitchFamily="34" charset="-122"/>
                 <a:cs typeface="Noto Sans KR" pitchFamily="34" charset="-120"/>
               </a:rPr>
-              <a:t>8/20</a:t>
+              <a:t>10/22</a:t>
             </a:r>
             <a:endParaRPr lang="en-US" sz="1500" dirty="0"/>
           </a:p>
@@ -9212,8 +9127,8 @@
         </p:nvSpPr>
         <p:spPr>
           <a:xfrm>
-            <a:off x="11420475" y="247650"/>
-            <a:ext cx="468630" cy="266700"/>
+            <a:off x="11307651" y="266700"/>
+            <a:ext cx="581454" cy="247650"/>
           </a:xfrm>
           <a:prstGeom prst="rect">
             <a:avLst/>
@@ -9240,7 +9155,7 @@
                 <a:ea typeface="Noto Sans KR" pitchFamily="34" charset="-122"/>
                 <a:cs typeface="Noto Sans KR" pitchFamily="34" charset="-120"/>
               </a:rPr>
-              <a:t>9/20</a:t>
+              <a:t>11/22</a:t>
             </a:r>
             <a:endParaRPr lang="en-US" sz="1500" dirty="0"/>
           </a:p>
@@ -12189,7 +12104,7 @@
                 <a:ea typeface="Noto Sans KR" pitchFamily="34" charset="-122"/>
                 <a:cs typeface="Noto Sans KR" pitchFamily="34" charset="-120"/>
               </a:rPr>
-              <a:t>11/20</a:t>
+              <a:t>12/22</a:t>
             </a:r>
             <a:endParaRPr lang="en-US" sz="1500" dirty="0"/>
           </a:p>
@@ -15483,7 +15398,7 @@
                 <a:ea typeface="Noto Sans KR" pitchFamily="34" charset="-122"/>
                 <a:cs typeface="Noto Sans KR" pitchFamily="34" charset="-120"/>
               </a:rPr>
-              <a:t>12/20</a:t>
+              <a:t>13/22</a:t>
             </a:r>
             <a:endParaRPr lang="en-US" sz="1500" dirty="0"/>
           </a:p>
@@ -16845,7 +16760,7 @@
                 <a:ea typeface="Noto Sans KR" pitchFamily="34" charset="-122"/>
                 <a:cs typeface="Noto Sans KR" pitchFamily="34" charset="-120"/>
               </a:rPr>
-              <a:t>11/20</a:t>
+              <a:t>14/22</a:t>
             </a:r>
             <a:endParaRPr lang="en-US" sz="1500" dirty="0"/>
           </a:p>
@@ -17909,7 +17824,7 @@
                 <a:ea typeface="Noto Sans KR" pitchFamily="34" charset="-122"/>
                 <a:cs typeface="Noto Sans KR" pitchFamily="34" charset="-120"/>
               </a:rPr>
-              <a:t>13/20</a:t>
+              <a:t>15/22</a:t>
             </a:r>
             <a:endParaRPr lang="en-US" sz="1500" dirty="0"/>
           </a:p>
@@ -19018,7 +18933,7 @@
                 <a:ea typeface="Noto Sans KR" pitchFamily="34" charset="-122"/>
                 <a:cs typeface="Noto Sans KR" pitchFamily="34" charset="-120"/>
               </a:rPr>
-              <a:t>14/20</a:t>
+              <a:t>16/22</a:t>
             </a:r>
             <a:endParaRPr lang="en-US" sz="1500" dirty="0"/>
           </a:p>
@@ -20204,7 +20119,7 @@
                 <a:ea typeface="Noto Sans KR" pitchFamily="34" charset="-122"/>
                 <a:cs typeface="Noto Sans KR" pitchFamily="34" charset="-120"/>
               </a:rPr>
-              <a:t>10/20</a:t>
+              <a:t>17/22</a:t>
             </a:r>
             <a:endParaRPr lang="en-US" sz="1500" dirty="0"/>
           </a:p>
@@ -21568,29 +21483,7 @@
                 <a:ea typeface="Noto Sans KR" pitchFamily="34" charset="-122"/>
                 <a:cs typeface="Noto Sans KR" pitchFamily="34" charset="-120"/>
               </a:rPr>
-              <a:t>활성함수 </a:t>
-            </a:r>
-            <a:r>
-              <a:rPr lang="ko-KR" altLang="en-US" sz="1200" dirty="0" err="1">
-                <a:solidFill>
-                  <a:srgbClr val="374151"/>
-                </a:solidFill>
-                <a:latin typeface="Noto Sans KR" pitchFamily="34" charset="0"/>
-                <a:ea typeface="Noto Sans KR" pitchFamily="34" charset="-122"/>
-                <a:cs typeface="Noto Sans KR" pitchFamily="34" charset="-120"/>
-              </a:rPr>
-              <a:t>형태등</a:t>
-            </a:r>
-            <a:r>
-              <a:rPr lang="ko-KR" altLang="en-US" sz="1200" dirty="0">
-                <a:solidFill>
-                  <a:srgbClr val="374151"/>
-                </a:solidFill>
-                <a:latin typeface="Noto Sans KR" pitchFamily="34" charset="0"/>
-                <a:ea typeface="Noto Sans KR" pitchFamily="34" charset="-122"/>
-                <a:cs typeface="Noto Sans KR" pitchFamily="34" charset="-120"/>
-              </a:rPr>
-              <a:t> 의존변수를 주의해야 합니다</a:t>
+              <a:t>활성함수 형태 등 의존변수를 주의해야 합니다</a:t>
             </a:r>
             <a:r>
               <a:rPr lang="en-US" altLang="ko-KR" sz="1200" dirty="0">
@@ -21993,7 +21886,7 @@
                 <a:ea typeface="Noto Sans KR" pitchFamily="34" charset="-122"/>
                 <a:cs typeface="Noto Sans KR" pitchFamily="34" charset="-120"/>
               </a:rPr>
-              <a:t>15/20</a:t>
+              <a:t>18/22</a:t>
             </a:r>
             <a:endParaRPr lang="en-US" sz="1500" dirty="0"/>
           </a:p>
@@ -22953,7 +22846,7 @@
                 <a:ea typeface="Noto Sans KR" pitchFamily="34" charset="-122"/>
                 <a:cs typeface="Noto Sans KR" pitchFamily="34" charset="-120"/>
               </a:rPr>
-              <a:t>16/20</a:t>
+              <a:t>19/22</a:t>
             </a:r>
             <a:endParaRPr lang="en-US" sz="1500" dirty="0"/>
           </a:p>
@@ -23101,7 +22994,81 @@
                 <a:ea typeface="Noto Sans KR" pitchFamily="34" charset="-122"/>
                 <a:cs typeface="Noto Sans KR" pitchFamily="34" charset="-120"/>
               </a:rPr>
-              <a:t>PCA 변환된 변수(V1-V28)는 개인정보 보호를 위해 익명화되었지만, 비즈니스 해석이 어렵습니다. 이로 인해 왜 특정 거래가 사기로 신호될지 설명하기 어려워 rule-based 시스템과의 통합이 필요합니다.</a:t>
+              <a:t>PCA 변환된 변수(V1-V28)는 개인정보 보호를 위해 익명화되었지만, 비즈니스 해석이 어렵습니다. 이로 인해 왜 특정 거래가 사기로 신호될지 </a:t>
+            </a:r>
+            <a:r>
+              <a:rPr lang="en-US" sz="1200" dirty="0" err="1">
+                <a:solidFill>
+                  <a:srgbClr val="374151"/>
+                </a:solidFill>
+                <a:latin typeface="Noto Sans KR" pitchFamily="34" charset="0"/>
+                <a:ea typeface="Noto Sans KR" pitchFamily="34" charset="-122"/>
+                <a:cs typeface="Noto Sans KR" pitchFamily="34" charset="-120"/>
+              </a:rPr>
+              <a:t>설명하기</a:t>
+            </a:r>
+            <a:r>
+              <a:rPr lang="en-US" sz="1200" dirty="0">
+                <a:solidFill>
+                  <a:srgbClr val="374151"/>
+                </a:solidFill>
+                <a:latin typeface="Noto Sans KR" pitchFamily="34" charset="0"/>
+                <a:ea typeface="Noto Sans KR" pitchFamily="34" charset="-122"/>
+                <a:cs typeface="Noto Sans KR" pitchFamily="34" charset="-120"/>
+              </a:rPr>
+              <a:t> </a:t>
+            </a:r>
+          </a:p>
+          <a:p>
+            <a:pPr marL="0" indent="0">
+              <a:lnSpc>
+                <a:spcPts val="1800"/>
+              </a:lnSpc>
+              <a:buNone/>
+            </a:pPr>
+            <a:r>
+              <a:rPr lang="en-US" sz="1200" dirty="0" err="1">
+                <a:solidFill>
+                  <a:srgbClr val="374151"/>
+                </a:solidFill>
+                <a:latin typeface="Noto Sans KR" pitchFamily="34" charset="0"/>
+                <a:ea typeface="Noto Sans KR" pitchFamily="34" charset="-122"/>
+                <a:cs typeface="Noto Sans KR" pitchFamily="34" charset="-120"/>
+              </a:rPr>
+              <a:t>어려워</a:t>
+            </a:r>
+            <a:r>
+              <a:rPr lang="en-US" sz="1200" dirty="0">
+                <a:solidFill>
+                  <a:srgbClr val="374151"/>
+                </a:solidFill>
+                <a:latin typeface="Noto Sans KR" pitchFamily="34" charset="0"/>
+                <a:ea typeface="Noto Sans KR" pitchFamily="34" charset="-122"/>
+                <a:cs typeface="Noto Sans KR" pitchFamily="34" charset="-120"/>
+              </a:rPr>
+              <a:t> </a:t>
+            </a:r>
+            <a:r>
+              <a:rPr lang="ko-KR" altLang="en-US" sz="1200" dirty="0">
+                <a:solidFill>
+                  <a:srgbClr val="374151"/>
+                </a:solidFill>
+                <a:latin typeface="Noto Sans KR" pitchFamily="34" charset="0"/>
+                <a:ea typeface="Noto Sans KR" pitchFamily="34" charset="-122"/>
+                <a:cs typeface="Noto Sans KR" pitchFamily="34" charset="-120"/>
+              </a:rPr>
+              <a:t>직접 해석이 어렵습니다</a:t>
+            </a:r>
+            <a:r>
+              <a:rPr lang="en-US" altLang="ko-KR" sz="1200" dirty="0">
+                <a:solidFill>
+                  <a:srgbClr val="374151"/>
+                </a:solidFill>
+                <a:latin typeface="Noto Sans KR" pitchFamily="34" charset="0"/>
+                <a:ea typeface="Noto Sans KR" pitchFamily="34" charset="-122"/>
+                <a:cs typeface="Noto Sans KR" pitchFamily="34" charset="-120"/>
+              </a:rPr>
+              <a:t>.</a:t>
             </a:r>
             <a:endParaRPr lang="en-US" sz="1200" dirty="0"/>
           </a:p>
@@ -23177,7 +23144,7 @@
               <a:buNone/>
             </a:pPr>
             <a:r>
-              <a:rPr lang="en-US" sz="1200" dirty="0">
+              <a:rPr lang="ko-KR" altLang="en-US" sz="1200" dirty="0">
                 <a:solidFill>
                   <a:srgbClr val="374151"/>
                 </a:solidFill>
@@ -23185,7 +23152,172 @@
                 <a:ea typeface="Noto Sans KR" pitchFamily="34" charset="-122"/>
                 <a:cs typeface="Noto Sans KR" pitchFamily="34" charset="-120"/>
               </a:rPr>
-              <a:t>랜덤 분할을 사용한 반면, 실제 월드 시나리오에서는 과거 데이터를 기반으로 향후 사기 패턴을 예측해야 합니다. 시간 기반 분할이나 rolling window 교차 검증이 필요합니다.</a:t>
+              <a:t>본 프로젝트에서는 </a:t>
+            </a:r>
+            <a:r>
+              <a:rPr lang="en-US" altLang="ko-KR" sz="1200" dirty="0">
+                <a:solidFill>
+                  <a:srgbClr val="374151"/>
+                </a:solidFill>
+                <a:latin typeface="Noto Sans KR" pitchFamily="34" charset="0"/>
+                <a:ea typeface="Noto Sans KR" pitchFamily="34" charset="-122"/>
+                <a:cs typeface="Noto Sans KR" pitchFamily="34" charset="-120"/>
+              </a:rPr>
+              <a:t>EDA </a:t>
+            </a:r>
+            <a:r>
+              <a:rPr lang="ko-KR" altLang="en-US" sz="1200" dirty="0">
+                <a:solidFill>
+                  <a:srgbClr val="374151"/>
+                </a:solidFill>
+                <a:latin typeface="Noto Sans KR" pitchFamily="34" charset="0"/>
+                <a:ea typeface="Noto Sans KR" pitchFamily="34" charset="-122"/>
+                <a:cs typeface="Noto Sans KR" pitchFamily="34" charset="-120"/>
+              </a:rPr>
+              <a:t>이후 모델링 단계에서 </a:t>
+            </a:r>
+            <a:r>
+              <a:rPr lang="en-US" altLang="ko-KR" sz="1200" dirty="0">
+                <a:solidFill>
+                  <a:srgbClr val="374151"/>
+                </a:solidFill>
+                <a:latin typeface="Noto Sans KR" pitchFamily="34" charset="0"/>
+                <a:ea typeface="Noto Sans KR" pitchFamily="34" charset="-122"/>
+                <a:cs typeface="Noto Sans KR" pitchFamily="34" charset="-120"/>
+              </a:rPr>
+              <a:t>Time</a:t>
+            </a:r>
+            <a:r>
+              <a:rPr lang="ko-KR" altLang="en-US" sz="1200" dirty="0">
+                <a:solidFill>
+                  <a:srgbClr val="374151"/>
+                </a:solidFill>
+                <a:latin typeface="Noto Sans KR" pitchFamily="34" charset="0"/>
+                <a:ea typeface="Noto Sans KR" pitchFamily="34" charset="-122"/>
+                <a:cs typeface="Noto Sans KR" pitchFamily="34" charset="-120"/>
+              </a:rPr>
+              <a:t>을 제거하고 학습을 진행했습니다</a:t>
+            </a:r>
+            <a:r>
+              <a:rPr lang="en-US" altLang="ko-KR" sz="1200" dirty="0">
+                <a:solidFill>
+                  <a:srgbClr val="374151"/>
+                </a:solidFill>
+                <a:latin typeface="Noto Sans KR" pitchFamily="34" charset="0"/>
+                <a:ea typeface="Noto Sans KR" pitchFamily="34" charset="-122"/>
+                <a:cs typeface="Noto Sans KR" pitchFamily="34" charset="-120"/>
+              </a:rPr>
+              <a:t>. </a:t>
+            </a:r>
+            <a:r>
+              <a:rPr lang="ko-KR" altLang="en-US" sz="1200" dirty="0">
+                <a:solidFill>
+                  <a:srgbClr val="374151"/>
+                </a:solidFill>
+                <a:latin typeface="Noto Sans KR" pitchFamily="34" charset="0"/>
+                <a:ea typeface="Noto Sans KR" pitchFamily="34" charset="-122"/>
+                <a:cs typeface="Noto Sans KR" pitchFamily="34" charset="-120"/>
+              </a:rPr>
+              <a:t>그 결과 사기 패턴 변화</a:t>
+            </a:r>
+            <a:r>
+              <a:rPr lang="en-US" altLang="ko-KR" sz="1200" dirty="0">
+                <a:solidFill>
+                  <a:srgbClr val="374151"/>
+                </a:solidFill>
+                <a:latin typeface="Noto Sans KR" pitchFamily="34" charset="0"/>
+                <a:ea typeface="Noto Sans KR" pitchFamily="34" charset="-122"/>
+                <a:cs typeface="Noto Sans KR" pitchFamily="34" charset="-120"/>
+              </a:rPr>
+              <a:t>, </a:t>
+            </a:r>
+            <a:r>
+              <a:rPr lang="ko-KR" altLang="en-US" sz="1200" dirty="0">
+                <a:solidFill>
+                  <a:srgbClr val="374151"/>
+                </a:solidFill>
+                <a:latin typeface="Noto Sans KR" pitchFamily="34" charset="0"/>
+                <a:ea typeface="Noto Sans KR" pitchFamily="34" charset="-122"/>
+                <a:cs typeface="Noto Sans KR" pitchFamily="34" charset="-120"/>
+              </a:rPr>
+              <a:t>특정 기간</a:t>
+            </a:r>
+            <a:r>
+              <a:rPr lang="en-US" altLang="ko-KR" sz="1200" dirty="0">
+                <a:solidFill>
+                  <a:srgbClr val="374151"/>
+                </a:solidFill>
+                <a:latin typeface="Noto Sans KR" pitchFamily="34" charset="0"/>
+                <a:ea typeface="Noto Sans KR" pitchFamily="34" charset="-122"/>
+                <a:cs typeface="Noto Sans KR" pitchFamily="34" charset="-120"/>
+              </a:rPr>
+              <a:t>(</a:t>
+            </a:r>
+            <a:r>
+              <a:rPr lang="ko-KR" altLang="en-US" sz="1200" dirty="0">
+                <a:solidFill>
+                  <a:srgbClr val="374151"/>
+                </a:solidFill>
+                <a:latin typeface="Noto Sans KR" pitchFamily="34" charset="0"/>
+                <a:ea typeface="Noto Sans KR" pitchFamily="34" charset="-122"/>
+                <a:cs typeface="Noto Sans KR" pitchFamily="34" charset="-120"/>
+              </a:rPr>
+              <a:t>명절</a:t>
+            </a:r>
+            <a:r>
+              <a:rPr lang="en-US" altLang="ko-KR" sz="1200" dirty="0">
+                <a:solidFill>
+                  <a:srgbClr val="374151"/>
+                </a:solidFill>
+                <a:latin typeface="Noto Sans KR" pitchFamily="34" charset="0"/>
+                <a:ea typeface="Noto Sans KR" pitchFamily="34" charset="-122"/>
+                <a:cs typeface="Noto Sans KR" pitchFamily="34" charset="-120"/>
+              </a:rPr>
+              <a:t>, </a:t>
+            </a:r>
+            <a:r>
+              <a:rPr lang="ko-KR" altLang="en-US" sz="1200" dirty="0">
+                <a:solidFill>
+                  <a:srgbClr val="374151"/>
+                </a:solidFill>
+                <a:latin typeface="Noto Sans KR" pitchFamily="34" charset="0"/>
+                <a:ea typeface="Noto Sans KR" pitchFamily="34" charset="-122"/>
+                <a:cs typeface="Noto Sans KR" pitchFamily="34" charset="-120"/>
+              </a:rPr>
+              <a:t>세일 시즌</a:t>
+            </a:r>
+            <a:r>
+              <a:rPr lang="en-US" altLang="ko-KR" sz="1200" dirty="0">
+                <a:solidFill>
+                  <a:srgbClr val="374151"/>
+                </a:solidFill>
+                <a:latin typeface="Noto Sans KR" pitchFamily="34" charset="0"/>
+                <a:ea typeface="Noto Sans KR" pitchFamily="34" charset="-122"/>
+                <a:cs typeface="Noto Sans KR" pitchFamily="34" charset="-120"/>
+              </a:rPr>
+              <a:t>)</a:t>
+            </a:r>
+            <a:r>
+              <a:rPr lang="ko-KR" altLang="en-US" sz="1200" dirty="0">
+                <a:solidFill>
+                  <a:srgbClr val="374151"/>
+                </a:solidFill>
+                <a:latin typeface="Noto Sans KR" pitchFamily="34" charset="0"/>
+                <a:ea typeface="Noto Sans KR" pitchFamily="34" charset="-122"/>
+                <a:cs typeface="Noto Sans KR" pitchFamily="34" charset="-120"/>
+              </a:rPr>
+              <a:t>에 집중되는 사기 패턴에 대한 모델의 일반화 능력을 충분히 검증하기 못했습니다</a:t>
+            </a:r>
+            <a:r>
+              <a:rPr lang="en-US" altLang="ko-KR" sz="1200" dirty="0">
+                <a:solidFill>
+                  <a:srgbClr val="374151"/>
+                </a:solidFill>
+                <a:latin typeface="Noto Sans KR" pitchFamily="34" charset="0"/>
+                <a:ea typeface="Noto Sans KR" pitchFamily="34" charset="-122"/>
+                <a:cs typeface="Noto Sans KR" pitchFamily="34" charset="-120"/>
+              </a:rPr>
+              <a:t>.</a:t>
             </a:r>
             <a:endParaRPr lang="en-US" sz="1200" dirty="0"/>
           </a:p>
@@ -23269,7 +23401,235 @@
                 <a:ea typeface="Noto Sans KR" pitchFamily="34" charset="-122"/>
                 <a:cs typeface="Noto Sans KR" pitchFamily="34" charset="-120"/>
               </a:rPr>
-              <a:t>near-perfect 성능 지표(AUC=1.0)는 실제 월드 금융 데이터에서는 드물습니다. SMOTE 오버샘플링과의 상호작용으로 인해 모델이 훈련 데이터에 과적합되었을 가능성이 있습니다.</a:t>
+              <a:t>SMOTE + MLP </a:t>
+            </a:r>
+            <a:r>
+              <a:rPr lang="ko-KR" altLang="en-US" sz="1200" dirty="0">
+                <a:solidFill>
+                  <a:srgbClr val="374151"/>
+                </a:solidFill>
+                <a:latin typeface="Noto Sans KR" pitchFamily="34" charset="0"/>
+                <a:ea typeface="Noto Sans KR" pitchFamily="34" charset="-122"/>
+                <a:cs typeface="Noto Sans KR" pitchFamily="34" charset="-120"/>
+              </a:rPr>
+              <a:t>조합의 </a:t>
+            </a:r>
+            <a:r>
+              <a:rPr lang="en-US" sz="1200" dirty="0" err="1">
+                <a:solidFill>
+                  <a:srgbClr val="374151"/>
+                </a:solidFill>
+                <a:latin typeface="Noto Sans KR" pitchFamily="34" charset="0"/>
+                <a:ea typeface="Noto Sans KR" pitchFamily="34" charset="-122"/>
+                <a:cs typeface="Noto Sans KR" pitchFamily="34" charset="-120"/>
+              </a:rPr>
+              <a:t>성능</a:t>
+            </a:r>
+            <a:r>
+              <a:rPr lang="en-US" sz="1200" dirty="0">
+                <a:solidFill>
+                  <a:srgbClr val="374151"/>
+                </a:solidFill>
+                <a:latin typeface="Noto Sans KR" pitchFamily="34" charset="0"/>
+                <a:ea typeface="Noto Sans KR" pitchFamily="34" charset="-122"/>
+                <a:cs typeface="Noto Sans KR" pitchFamily="34" charset="-120"/>
+              </a:rPr>
+              <a:t> 지표(AUC=1.0)는 </a:t>
+            </a:r>
+            <a:r>
+              <a:rPr lang="ko-KR" altLang="en-US" sz="1200" dirty="0">
+                <a:solidFill>
+                  <a:srgbClr val="374151"/>
+                </a:solidFill>
+                <a:latin typeface="Noto Sans KR" pitchFamily="34" charset="0"/>
+                <a:ea typeface="Noto Sans KR" pitchFamily="34" charset="-122"/>
+                <a:cs typeface="Noto Sans KR" pitchFamily="34" charset="-120"/>
+              </a:rPr>
+              <a:t>이상적이었지만</a:t>
+            </a:r>
+            <a:r>
+              <a:rPr lang="en-US" altLang="ko-KR" sz="1200" dirty="0">
+                <a:solidFill>
+                  <a:srgbClr val="374151"/>
+                </a:solidFill>
+                <a:latin typeface="Noto Sans KR" pitchFamily="34" charset="0"/>
+                <a:ea typeface="Noto Sans KR" pitchFamily="34" charset="-122"/>
+                <a:cs typeface="Noto Sans KR" pitchFamily="34" charset="-120"/>
+              </a:rPr>
+              <a:t>,</a:t>
+            </a:r>
+            <a:r>
+              <a:rPr lang="en-US" sz="1200" dirty="0">
+                <a:solidFill>
+                  <a:srgbClr val="374151"/>
+                </a:solidFill>
+                <a:latin typeface="Noto Sans KR" pitchFamily="34" charset="0"/>
+                <a:ea typeface="Noto Sans KR" pitchFamily="34" charset="-122"/>
+                <a:cs typeface="Noto Sans KR" pitchFamily="34" charset="-120"/>
+              </a:rPr>
+              <a:t> </a:t>
+            </a:r>
+            <a:r>
+              <a:rPr lang="en-US" sz="1200" dirty="0" err="1">
+                <a:solidFill>
+                  <a:srgbClr val="374151"/>
+                </a:solidFill>
+                <a:latin typeface="Noto Sans KR" pitchFamily="34" charset="0"/>
+                <a:ea typeface="Noto Sans KR" pitchFamily="34" charset="-122"/>
+                <a:cs typeface="Noto Sans KR" pitchFamily="34" charset="-120"/>
+              </a:rPr>
+              <a:t>실제</a:t>
+            </a:r>
+            <a:r>
+              <a:rPr lang="en-US" sz="1200" dirty="0">
+                <a:solidFill>
+                  <a:srgbClr val="374151"/>
+                </a:solidFill>
+                <a:latin typeface="Noto Sans KR" pitchFamily="34" charset="0"/>
+                <a:ea typeface="Noto Sans KR" pitchFamily="34" charset="-122"/>
+                <a:cs typeface="Noto Sans KR" pitchFamily="34" charset="-120"/>
+              </a:rPr>
+              <a:t> </a:t>
+            </a:r>
+            <a:r>
+              <a:rPr lang="en-US" sz="1200" dirty="0" err="1">
+                <a:solidFill>
+                  <a:srgbClr val="374151"/>
+                </a:solidFill>
+                <a:latin typeface="Noto Sans KR" pitchFamily="34" charset="0"/>
+                <a:ea typeface="Noto Sans KR" pitchFamily="34" charset="-122"/>
+                <a:cs typeface="Noto Sans KR" pitchFamily="34" charset="-120"/>
+              </a:rPr>
+              <a:t>금융</a:t>
+            </a:r>
+            <a:r>
+              <a:rPr lang="en-US" sz="1200" dirty="0">
+                <a:solidFill>
+                  <a:srgbClr val="374151"/>
+                </a:solidFill>
+                <a:latin typeface="Noto Sans KR" pitchFamily="34" charset="0"/>
+                <a:ea typeface="Noto Sans KR" pitchFamily="34" charset="-122"/>
+                <a:cs typeface="Noto Sans KR" pitchFamily="34" charset="-120"/>
+              </a:rPr>
+              <a:t> </a:t>
+            </a:r>
+            <a:r>
+              <a:rPr lang="en-US" sz="1200" dirty="0" err="1">
+                <a:solidFill>
+                  <a:srgbClr val="374151"/>
+                </a:solidFill>
+                <a:latin typeface="Noto Sans KR" pitchFamily="34" charset="0"/>
+                <a:ea typeface="Noto Sans KR" pitchFamily="34" charset="-122"/>
+                <a:cs typeface="Noto Sans KR" pitchFamily="34" charset="-120"/>
+              </a:rPr>
+              <a:t>데이터에서는</a:t>
+            </a:r>
+            <a:r>
+              <a:rPr lang="en-US" sz="1200" dirty="0">
+                <a:solidFill>
+                  <a:srgbClr val="374151"/>
+                </a:solidFill>
+                <a:latin typeface="Noto Sans KR" pitchFamily="34" charset="0"/>
+                <a:ea typeface="Noto Sans KR" pitchFamily="34" charset="-122"/>
+                <a:cs typeface="Noto Sans KR" pitchFamily="34" charset="-120"/>
+              </a:rPr>
+              <a:t> </a:t>
+            </a:r>
+            <a:r>
+              <a:rPr lang="ko-KR" altLang="en-US" sz="1200" dirty="0">
+                <a:solidFill>
+                  <a:srgbClr val="374151"/>
+                </a:solidFill>
+                <a:latin typeface="Noto Sans KR" pitchFamily="34" charset="0"/>
+                <a:ea typeface="Noto Sans KR" pitchFamily="34" charset="-122"/>
+                <a:cs typeface="Noto Sans KR" pitchFamily="34" charset="-120"/>
+              </a:rPr>
+              <a:t>발생하기 어렵습니다</a:t>
+            </a:r>
+            <a:r>
+              <a:rPr lang="en-US" sz="1200" dirty="0">
+                <a:solidFill>
+                  <a:srgbClr val="374151"/>
+                </a:solidFill>
+                <a:latin typeface="Noto Sans KR" pitchFamily="34" charset="0"/>
+                <a:ea typeface="Noto Sans KR" pitchFamily="34" charset="-122"/>
+                <a:cs typeface="Noto Sans KR" pitchFamily="34" charset="-120"/>
+              </a:rPr>
+              <a:t>. </a:t>
+            </a:r>
+            <a:r>
+              <a:rPr lang="ko-KR" altLang="en-US" sz="1200" dirty="0">
+                <a:solidFill>
+                  <a:srgbClr val="374151"/>
+                </a:solidFill>
+                <a:latin typeface="Noto Sans KR" pitchFamily="34" charset="0"/>
+                <a:ea typeface="Noto Sans KR" pitchFamily="34" charset="-122"/>
+                <a:cs typeface="Noto Sans KR" pitchFamily="34" charset="-120"/>
+              </a:rPr>
+              <a:t>이는</a:t>
+            </a:r>
+            <a:r>
+              <a:rPr lang="en-US" sz="1200" dirty="0">
+                <a:solidFill>
+                  <a:srgbClr val="374151"/>
+                </a:solidFill>
+                <a:latin typeface="Noto Sans KR" pitchFamily="34" charset="0"/>
+                <a:ea typeface="Noto Sans KR" pitchFamily="34" charset="-122"/>
+                <a:cs typeface="Noto Sans KR" pitchFamily="34" charset="-120"/>
+              </a:rPr>
+              <a:t> 오버샘플링과의 상호작용으로 </a:t>
+            </a:r>
+            <a:r>
+              <a:rPr lang="en-US" sz="1200" dirty="0" err="1">
+                <a:solidFill>
+                  <a:srgbClr val="374151"/>
+                </a:solidFill>
+                <a:latin typeface="Noto Sans KR" pitchFamily="34" charset="0"/>
+                <a:ea typeface="Noto Sans KR" pitchFamily="34" charset="-122"/>
+                <a:cs typeface="Noto Sans KR" pitchFamily="34" charset="-120"/>
+              </a:rPr>
+              <a:t>인해</a:t>
+            </a:r>
+            <a:r>
+              <a:rPr lang="en-US" sz="1200" dirty="0">
+                <a:solidFill>
+                  <a:srgbClr val="374151"/>
+                </a:solidFill>
+                <a:latin typeface="Noto Sans KR" pitchFamily="34" charset="0"/>
+                <a:ea typeface="Noto Sans KR" pitchFamily="34" charset="-122"/>
+                <a:cs typeface="Noto Sans KR" pitchFamily="34" charset="-120"/>
+              </a:rPr>
+              <a:t> </a:t>
+            </a:r>
+          </a:p>
+          <a:p>
+            <a:pPr marL="0" indent="0">
+              <a:lnSpc>
+                <a:spcPts val="1800"/>
+              </a:lnSpc>
+              <a:buNone/>
+            </a:pPr>
+            <a:r>
+              <a:rPr lang="en-US" sz="1200" dirty="0" err="1">
+                <a:solidFill>
+                  <a:srgbClr val="374151"/>
+                </a:solidFill>
+                <a:latin typeface="Noto Sans KR" pitchFamily="34" charset="0"/>
+                <a:ea typeface="Noto Sans KR" pitchFamily="34" charset="-122"/>
+                <a:cs typeface="Noto Sans KR" pitchFamily="34" charset="-120"/>
+              </a:rPr>
+              <a:t>모델이</a:t>
+            </a:r>
+            <a:r>
+              <a:rPr lang="en-US" sz="1200" dirty="0">
+                <a:solidFill>
+                  <a:srgbClr val="374151"/>
+                </a:solidFill>
+                <a:latin typeface="Noto Sans KR" pitchFamily="34" charset="0"/>
+                <a:ea typeface="Noto Sans KR" pitchFamily="34" charset="-122"/>
+                <a:cs typeface="Noto Sans KR" pitchFamily="34" charset="-120"/>
+              </a:rPr>
+              <a:t> 훈련 데이터에 과적합되었을 가능성이 있습니다.</a:t>
             </a:r>
             <a:endParaRPr lang="en-US" sz="1200" dirty="0"/>
           </a:p>
@@ -23345,6 +23705,17 @@
               <a:buNone/>
             </a:pPr>
             <a:r>
+              <a:rPr lang="en-US" sz="1200" dirty="0" err="1">
+                <a:solidFill>
+                  <a:srgbClr val="374151"/>
+                </a:solidFill>
+                <a:latin typeface="Noto Sans KR" pitchFamily="34" charset="0"/>
+                <a:ea typeface="Noto Sans KR" pitchFamily="34" charset="-122"/>
+                <a:cs typeface="Noto Sans KR" pitchFamily="34" charset="-120"/>
+              </a:rPr>
+              <a:t>최종</a:t>
+            </a:r>
+            <a:r>
               <a:rPr lang="en-US" sz="1200" dirty="0">
                 <a:solidFill>
                   <a:srgbClr val="374151"/>
@@ -23353,7 +23724,227 @@
                 <a:ea typeface="Noto Sans KR" pitchFamily="34" charset="-122"/>
                 <a:cs typeface="Noto Sans KR" pitchFamily="34" charset="-120"/>
               </a:rPr>
-              <a:t>최종 MLPClassifier는 "블랙박스" 모델로, 개별 피처의 기여도를 직관적으로 설명하기 어렵습니다. 이는 규제 요구사항과 신뢰 구축을 위해 문제가 됩니다.</a:t>
+              <a:t> </a:t>
+            </a:r>
+            <a:r>
+              <a:rPr lang="ko-KR" altLang="en-US" sz="1200" dirty="0">
+                <a:solidFill>
+                  <a:srgbClr val="374151"/>
+                </a:solidFill>
+                <a:latin typeface="Noto Sans KR" pitchFamily="34" charset="0"/>
+                <a:ea typeface="Noto Sans KR" pitchFamily="34" charset="-122"/>
+                <a:cs typeface="Noto Sans KR" pitchFamily="34" charset="-120"/>
+              </a:rPr>
+              <a:t>모델인 </a:t>
+            </a:r>
+            <a:r>
+              <a:rPr lang="en-US" sz="1200" dirty="0" err="1">
+                <a:solidFill>
+                  <a:srgbClr val="374151"/>
+                </a:solidFill>
+                <a:latin typeface="Noto Sans KR" pitchFamily="34" charset="0"/>
+                <a:ea typeface="Noto Sans KR" pitchFamily="34" charset="-122"/>
+                <a:cs typeface="Noto Sans KR" pitchFamily="34" charset="-120"/>
+              </a:rPr>
+              <a:t>MLPClassifier는</a:t>
+            </a:r>
+            <a:r>
+              <a:rPr lang="en-US" sz="1200" dirty="0">
+                <a:solidFill>
+                  <a:srgbClr val="374151"/>
+                </a:solidFill>
+                <a:latin typeface="Noto Sans KR" pitchFamily="34" charset="0"/>
+                <a:ea typeface="Noto Sans KR" pitchFamily="34" charset="-122"/>
+                <a:cs typeface="Noto Sans KR" pitchFamily="34" charset="-120"/>
+              </a:rPr>
+              <a:t> </a:t>
+            </a:r>
+            <a:r>
+              <a:rPr lang="ko-KR" altLang="en-US" sz="1200" b="1" dirty="0">
+                <a:solidFill>
+                  <a:srgbClr val="374151"/>
+                </a:solidFill>
+                <a:latin typeface="Noto Sans KR" pitchFamily="34" charset="0"/>
+                <a:ea typeface="Noto Sans KR" pitchFamily="34" charset="-122"/>
+                <a:cs typeface="Noto Sans KR" pitchFamily="34" charset="-120"/>
+              </a:rPr>
+              <a:t>신경망 기반의 </a:t>
+            </a:r>
+            <a:r>
+              <a:rPr lang="en-US" sz="1200" b="1" dirty="0" err="1">
+                <a:solidFill>
+                  <a:srgbClr val="374151"/>
+                </a:solidFill>
+                <a:latin typeface="Noto Sans KR" pitchFamily="34" charset="0"/>
+                <a:ea typeface="Noto Sans KR" pitchFamily="34" charset="-122"/>
+                <a:cs typeface="Noto Sans KR" pitchFamily="34" charset="-120"/>
+              </a:rPr>
+              <a:t>블랙박스</a:t>
+            </a:r>
+            <a:r>
+              <a:rPr lang="en-US" sz="1200" b="1" dirty="0">
+                <a:solidFill>
+                  <a:srgbClr val="374151"/>
+                </a:solidFill>
+                <a:latin typeface="Noto Sans KR" pitchFamily="34" charset="0"/>
+                <a:ea typeface="Noto Sans KR" pitchFamily="34" charset="-122"/>
+                <a:cs typeface="Noto Sans KR" pitchFamily="34" charset="-120"/>
+              </a:rPr>
+              <a:t> 모델</a:t>
+            </a:r>
+            <a:r>
+              <a:rPr lang="en-US" sz="1200" dirty="0">
+                <a:solidFill>
+                  <a:srgbClr val="374151"/>
+                </a:solidFill>
+                <a:latin typeface="Noto Sans KR" pitchFamily="34" charset="0"/>
+                <a:ea typeface="Noto Sans KR" pitchFamily="34" charset="-122"/>
+                <a:cs typeface="Noto Sans KR" pitchFamily="34" charset="-120"/>
+              </a:rPr>
+              <a:t>로, </a:t>
+            </a:r>
+            <a:r>
+              <a:rPr lang="ko-KR" altLang="en-US" sz="1200" dirty="0">
+                <a:solidFill>
+                  <a:srgbClr val="374151"/>
+                </a:solidFill>
+                <a:latin typeface="Noto Sans KR" pitchFamily="34" charset="0"/>
+                <a:ea typeface="Noto Sans KR" pitchFamily="34" charset="-122"/>
+                <a:cs typeface="Noto Sans KR" pitchFamily="34" charset="-120"/>
+              </a:rPr>
+              <a:t>변수 해석 난이도가 높아 </a:t>
+            </a:r>
+            <a:r>
+              <a:rPr lang="en-US" sz="1200" dirty="0" err="1">
+                <a:solidFill>
+                  <a:srgbClr val="374151"/>
+                </a:solidFill>
+                <a:latin typeface="Noto Sans KR" pitchFamily="34" charset="0"/>
+                <a:ea typeface="Noto Sans KR" pitchFamily="34" charset="-122"/>
+                <a:cs typeface="Noto Sans KR" pitchFamily="34" charset="-120"/>
+              </a:rPr>
+              <a:t>개별</a:t>
+            </a:r>
+            <a:r>
+              <a:rPr lang="en-US" sz="1200" dirty="0">
+                <a:solidFill>
+                  <a:srgbClr val="374151"/>
+                </a:solidFill>
+                <a:latin typeface="Noto Sans KR" pitchFamily="34" charset="0"/>
+                <a:ea typeface="Noto Sans KR" pitchFamily="34" charset="-122"/>
+                <a:cs typeface="Noto Sans KR" pitchFamily="34" charset="-120"/>
+              </a:rPr>
+              <a:t> </a:t>
+            </a:r>
+            <a:r>
+              <a:rPr lang="en-US" sz="1200" dirty="0" err="1">
+                <a:solidFill>
+                  <a:srgbClr val="374151"/>
+                </a:solidFill>
+                <a:latin typeface="Noto Sans KR" pitchFamily="34" charset="0"/>
+                <a:ea typeface="Noto Sans KR" pitchFamily="34" charset="-122"/>
+                <a:cs typeface="Noto Sans KR" pitchFamily="34" charset="-120"/>
+              </a:rPr>
+              <a:t>피처의</a:t>
+            </a:r>
+            <a:r>
+              <a:rPr lang="en-US" sz="1200" dirty="0">
+                <a:solidFill>
+                  <a:srgbClr val="374151"/>
+                </a:solidFill>
+                <a:latin typeface="Noto Sans KR" pitchFamily="34" charset="0"/>
+                <a:ea typeface="Noto Sans KR" pitchFamily="34" charset="-122"/>
+                <a:cs typeface="Noto Sans KR" pitchFamily="34" charset="-120"/>
+              </a:rPr>
+              <a:t> </a:t>
+            </a:r>
+            <a:r>
+              <a:rPr lang="en-US" sz="1200" dirty="0" err="1">
+                <a:solidFill>
+                  <a:srgbClr val="374151"/>
+                </a:solidFill>
+                <a:latin typeface="Noto Sans KR" pitchFamily="34" charset="0"/>
+                <a:ea typeface="Noto Sans KR" pitchFamily="34" charset="-122"/>
+                <a:cs typeface="Noto Sans KR" pitchFamily="34" charset="-120"/>
+              </a:rPr>
+              <a:t>기여도를</a:t>
+            </a:r>
+            <a:r>
+              <a:rPr lang="en-US" sz="1200" dirty="0">
+                <a:solidFill>
+                  <a:srgbClr val="374151"/>
+                </a:solidFill>
+                <a:latin typeface="Noto Sans KR" pitchFamily="34" charset="0"/>
+                <a:ea typeface="Noto Sans KR" pitchFamily="34" charset="-122"/>
+                <a:cs typeface="Noto Sans KR" pitchFamily="34" charset="-120"/>
+              </a:rPr>
+              <a:t> 직관적으로 설명하기 어렵습니다. </a:t>
+            </a:r>
+            <a:r>
+              <a:rPr lang="en-US" sz="1200" dirty="0" err="1">
+                <a:solidFill>
+                  <a:srgbClr val="374151"/>
+                </a:solidFill>
+                <a:latin typeface="Noto Sans KR" pitchFamily="34" charset="0"/>
+                <a:ea typeface="Noto Sans KR" pitchFamily="34" charset="-122"/>
+                <a:cs typeface="Noto Sans KR" pitchFamily="34" charset="-120"/>
+              </a:rPr>
+              <a:t>이는</a:t>
+            </a:r>
+            <a:r>
+              <a:rPr lang="en-US" sz="1200" dirty="0">
+                <a:solidFill>
+                  <a:srgbClr val="374151"/>
+                </a:solidFill>
+                <a:latin typeface="Noto Sans KR" pitchFamily="34" charset="0"/>
+                <a:ea typeface="Noto Sans KR" pitchFamily="34" charset="-122"/>
+                <a:cs typeface="Noto Sans KR" pitchFamily="34" charset="-120"/>
+              </a:rPr>
+              <a:t> ‘</a:t>
+            </a:r>
+            <a:r>
+              <a:rPr lang="ko-KR" altLang="en-US" sz="1200" dirty="0">
+                <a:solidFill>
+                  <a:srgbClr val="374151"/>
+                </a:solidFill>
+                <a:latin typeface="Noto Sans KR" pitchFamily="34" charset="0"/>
+                <a:ea typeface="Noto Sans KR" pitchFamily="34" charset="-122"/>
+                <a:cs typeface="Noto Sans KR" pitchFamily="34" charset="-120"/>
+              </a:rPr>
+              <a:t>설명 가능한 </a:t>
+            </a:r>
+            <a:r>
+              <a:rPr lang="en-US" altLang="ko-KR" sz="1200" dirty="0">
+                <a:solidFill>
+                  <a:srgbClr val="374151"/>
+                </a:solidFill>
+                <a:latin typeface="Noto Sans KR" pitchFamily="34" charset="0"/>
+                <a:ea typeface="Noto Sans KR" pitchFamily="34" charset="-122"/>
+                <a:cs typeface="Noto Sans KR" pitchFamily="34" charset="-120"/>
+              </a:rPr>
+              <a:t>AI’</a:t>
+            </a:r>
+            <a:r>
+              <a:rPr lang="ko-KR" altLang="en-US" sz="1200" dirty="0">
+                <a:solidFill>
+                  <a:srgbClr val="374151"/>
+                </a:solidFill>
+                <a:latin typeface="Noto Sans KR" pitchFamily="34" charset="0"/>
+                <a:ea typeface="Noto Sans KR" pitchFamily="34" charset="-122"/>
+                <a:cs typeface="Noto Sans KR" pitchFamily="34" charset="-120"/>
+              </a:rPr>
+              <a:t>의 요구사항을 만족시키기 어렵다는 한계점이 있습니다</a:t>
+            </a:r>
+            <a:r>
+              <a:rPr lang="en-US" altLang="ko-KR" sz="1200" dirty="0">
+                <a:solidFill>
+                  <a:srgbClr val="374151"/>
+                </a:solidFill>
+                <a:latin typeface="Noto Sans KR" pitchFamily="34" charset="0"/>
+                <a:ea typeface="Noto Sans KR" pitchFamily="34" charset="-122"/>
+                <a:cs typeface="Noto Sans KR" pitchFamily="34" charset="-120"/>
+              </a:rPr>
+              <a:t>.</a:t>
             </a:r>
             <a:endParaRPr lang="en-US" sz="1200" dirty="0"/>
           </a:p>
@@ -23726,7 +24317,7 @@
                 <a:ea typeface="Noto Sans KR" pitchFamily="34" charset="-122"/>
                 <a:cs typeface="Noto Sans KR" pitchFamily="34" charset="-120"/>
               </a:rPr>
-              <a:t>2/20</a:t>
+              <a:t>2/22</a:t>
             </a:r>
             <a:endParaRPr lang="en-US" sz="1500" dirty="0"/>
           </a:p>
@@ -24746,7 +25337,7 @@
                 <a:ea typeface="Noto Sans KR" pitchFamily="34" charset="-122"/>
                 <a:cs typeface="Noto Sans KR" pitchFamily="34" charset="-120"/>
               </a:rPr>
-              <a:t>18/20</a:t>
+              <a:t>20/22</a:t>
             </a:r>
             <a:endParaRPr lang="en-US" sz="1500" dirty="0"/>
           </a:p>
@@ -25307,1615 +25898,6 @@
 </file>
 
 <file path=ppt/slides/slide21.xml><?xml version="1.0" encoding="utf-8"?>
-<p:sld xmlns:a="http://schemas.openxmlformats.org/drawingml/2006/main" xmlns:r="http://schemas.openxmlformats.org/officeDocument/2006/relationships" xmlns:p="http://schemas.openxmlformats.org/presentationml/2006/main">
-  <p:cSld name="Slide 19">
-    <p:spTree>
-      <p:nvGrpSpPr>
-        <p:cNvPr id="1" name=""/>
-        <p:cNvGrpSpPr/>
-        <p:nvPr/>
-      </p:nvGrpSpPr>
-      <p:grpSpPr>
-        <a:xfrm>
-          <a:off x="0" y="0"/>
-          <a:ext cx="0" cy="0"/>
-          <a:chOff x="0" y="0"/>
-          <a:chExt cx="0" cy="0"/>
-        </a:xfrm>
-      </p:grpSpPr>
-      <p:pic>
-        <p:nvPicPr>
-          <p:cNvPr id="2" name="Image 0" descr="preencoded.png"/>
-          <p:cNvPicPr>
-            <a:picLocks noChangeAspect="1"/>
-          </p:cNvPicPr>
-          <p:nvPr/>
-        </p:nvPicPr>
-        <p:blipFill>
-          <a:blip r:embed="rId3"/>
-          <a:stretch>
-            <a:fillRect/>
-          </a:stretch>
-        </p:blipFill>
-        <p:spPr>
-          <a:xfrm>
-            <a:off x="0" y="0"/>
-            <a:ext cx="12192000" cy="6858000"/>
-          </a:xfrm>
-          <a:prstGeom prst="rect">
-            <a:avLst/>
-          </a:prstGeom>
-        </p:spPr>
-      </p:pic>
-      <p:pic>
-        <p:nvPicPr>
-          <p:cNvPr id="3" name="Image 1" descr="preencoded.png"/>
-          <p:cNvPicPr>
-            <a:picLocks noChangeAspect="1"/>
-          </p:cNvPicPr>
-          <p:nvPr/>
-        </p:nvPicPr>
-        <p:blipFill>
-          <a:blip r:embed="rId4"/>
-          <a:stretch>
-            <a:fillRect/>
-          </a:stretch>
-        </p:blipFill>
-        <p:spPr>
-          <a:xfrm>
-            <a:off x="0" y="0"/>
-            <a:ext cx="12192000" cy="762000"/>
-          </a:xfrm>
-          <a:prstGeom prst="rect">
-            <a:avLst/>
-          </a:prstGeom>
-        </p:spPr>
-      </p:pic>
-      <p:pic>
-        <p:nvPicPr>
-          <p:cNvPr id="4" name="Image 2" descr="preencoded.png"/>
-          <p:cNvPicPr>
-            <a:picLocks noChangeAspect="1"/>
-          </p:cNvPicPr>
-          <p:nvPr/>
-        </p:nvPicPr>
-        <p:blipFill>
-          <a:blip r:embed="rId5"/>
-          <a:stretch>
-            <a:fillRect/>
-          </a:stretch>
-        </p:blipFill>
-        <p:spPr>
-          <a:xfrm>
-            <a:off x="304800" y="1066800"/>
-            <a:ext cx="5638800" cy="5010150"/>
-          </a:xfrm>
-          <a:prstGeom prst="rect">
-            <a:avLst/>
-          </a:prstGeom>
-        </p:spPr>
-      </p:pic>
-      <p:pic>
-        <p:nvPicPr>
-          <p:cNvPr id="5" name="Image 3" descr="preencoded.png"/>
-          <p:cNvPicPr>
-            <a:picLocks noChangeAspect="1"/>
-          </p:cNvPicPr>
-          <p:nvPr/>
-        </p:nvPicPr>
-        <p:blipFill>
-          <a:blip r:embed="rId6"/>
-          <a:stretch>
-            <a:fillRect/>
-          </a:stretch>
-        </p:blipFill>
-        <p:spPr>
-          <a:xfrm>
-            <a:off x="533400" y="1333500"/>
-            <a:ext cx="171450" cy="228600"/>
-          </a:xfrm>
-          <a:prstGeom prst="rect">
-            <a:avLst/>
-          </a:prstGeom>
-        </p:spPr>
-      </p:pic>
-      <p:pic>
-        <p:nvPicPr>
-          <p:cNvPr id="6" name="Image 4" descr="preencoded.png"/>
-          <p:cNvPicPr>
-            <a:picLocks noChangeAspect="1"/>
-          </p:cNvPicPr>
-          <p:nvPr/>
-        </p:nvPicPr>
-        <p:blipFill>
-          <a:blip r:embed="rId7"/>
-          <a:stretch>
-            <a:fillRect/>
-          </a:stretch>
-        </p:blipFill>
-        <p:spPr>
-          <a:xfrm>
-            <a:off x="533400" y="1828800"/>
-            <a:ext cx="2514600" cy="1933575"/>
-          </a:xfrm>
-          <a:prstGeom prst="rect">
-            <a:avLst/>
-          </a:prstGeom>
-        </p:spPr>
-      </p:pic>
-      <p:pic>
-        <p:nvPicPr>
-          <p:cNvPr id="7" name="Image 5" descr="preencoded.png"/>
-          <p:cNvPicPr>
-            <a:picLocks noChangeAspect="1"/>
-          </p:cNvPicPr>
-          <p:nvPr/>
-        </p:nvPicPr>
-        <p:blipFill>
-          <a:blip r:embed="rId8"/>
-          <a:stretch>
-            <a:fillRect/>
-          </a:stretch>
-        </p:blipFill>
-        <p:spPr>
-          <a:xfrm>
-            <a:off x="1504950" y="1981200"/>
-            <a:ext cx="571500" cy="571500"/>
-          </a:xfrm>
-          <a:prstGeom prst="rect">
-            <a:avLst/>
-          </a:prstGeom>
-        </p:spPr>
-      </p:pic>
-      <p:pic>
-        <p:nvPicPr>
-          <p:cNvPr id="8" name="Image 6" descr="preencoded.png"/>
-          <p:cNvPicPr>
-            <a:picLocks noChangeAspect="1"/>
-          </p:cNvPicPr>
-          <p:nvPr/>
-        </p:nvPicPr>
-        <p:blipFill>
-          <a:blip r:embed="rId9"/>
-          <a:stretch>
-            <a:fillRect/>
-          </a:stretch>
-        </p:blipFill>
-        <p:spPr>
-          <a:xfrm>
-            <a:off x="1690688" y="2114550"/>
-            <a:ext cx="200025" cy="304800"/>
-          </a:xfrm>
-          <a:prstGeom prst="rect">
-            <a:avLst/>
-          </a:prstGeom>
-        </p:spPr>
-      </p:pic>
-      <p:pic>
-        <p:nvPicPr>
-          <p:cNvPr id="9" name="Image 7" descr="preencoded.png"/>
-          <p:cNvPicPr>
-            <a:picLocks noChangeAspect="1"/>
-          </p:cNvPicPr>
-          <p:nvPr/>
-        </p:nvPicPr>
-        <p:blipFill>
-          <a:blip r:embed="rId10"/>
-          <a:stretch>
-            <a:fillRect/>
-          </a:stretch>
-        </p:blipFill>
-        <p:spPr>
-          <a:xfrm>
-            <a:off x="3200400" y="1828800"/>
-            <a:ext cx="2514600" cy="1933575"/>
-          </a:xfrm>
-          <a:prstGeom prst="rect">
-            <a:avLst/>
-          </a:prstGeom>
-        </p:spPr>
-      </p:pic>
-      <p:pic>
-        <p:nvPicPr>
-          <p:cNvPr id="10" name="Image 8" descr="preencoded.png"/>
-          <p:cNvPicPr>
-            <a:picLocks noChangeAspect="1"/>
-          </p:cNvPicPr>
-          <p:nvPr/>
-        </p:nvPicPr>
-        <p:blipFill>
-          <a:blip r:embed="rId11"/>
-          <a:stretch>
-            <a:fillRect/>
-          </a:stretch>
-        </p:blipFill>
-        <p:spPr>
-          <a:xfrm>
-            <a:off x="4171950" y="1981200"/>
-            <a:ext cx="571500" cy="571500"/>
-          </a:xfrm>
-          <a:prstGeom prst="rect">
-            <a:avLst/>
-          </a:prstGeom>
-        </p:spPr>
-      </p:pic>
-      <p:pic>
-        <p:nvPicPr>
-          <p:cNvPr id="11" name="Image 9" descr="preencoded.png"/>
-          <p:cNvPicPr>
-            <a:picLocks noChangeAspect="1"/>
-          </p:cNvPicPr>
-          <p:nvPr/>
-        </p:nvPicPr>
-        <p:blipFill>
-          <a:blip r:embed="rId12"/>
-          <a:stretch>
-            <a:fillRect/>
-          </a:stretch>
-        </p:blipFill>
-        <p:spPr>
-          <a:xfrm>
-            <a:off x="4343400" y="2114550"/>
-            <a:ext cx="228600" cy="304800"/>
-          </a:xfrm>
-          <a:prstGeom prst="rect">
-            <a:avLst/>
-          </a:prstGeom>
-        </p:spPr>
-      </p:pic>
-      <p:pic>
-        <p:nvPicPr>
-          <p:cNvPr id="12" name="Image 10" descr="preencoded.png"/>
-          <p:cNvPicPr>
-            <a:picLocks noChangeAspect="1"/>
-          </p:cNvPicPr>
-          <p:nvPr/>
-        </p:nvPicPr>
-        <p:blipFill>
-          <a:blip r:embed="rId7"/>
-          <a:stretch>
-            <a:fillRect/>
-          </a:stretch>
-        </p:blipFill>
-        <p:spPr>
-          <a:xfrm>
-            <a:off x="533400" y="3914775"/>
-            <a:ext cx="2514600" cy="1933575"/>
-          </a:xfrm>
-          <a:prstGeom prst="rect">
-            <a:avLst/>
-          </a:prstGeom>
-        </p:spPr>
-      </p:pic>
-      <p:pic>
-        <p:nvPicPr>
-          <p:cNvPr id="13" name="Image 11" descr="preencoded.png"/>
-          <p:cNvPicPr>
-            <a:picLocks noChangeAspect="1"/>
-          </p:cNvPicPr>
-          <p:nvPr/>
-        </p:nvPicPr>
-        <p:blipFill>
-          <a:blip r:embed="rId13"/>
-          <a:stretch>
-            <a:fillRect/>
-          </a:stretch>
-        </p:blipFill>
-        <p:spPr>
-          <a:xfrm>
-            <a:off x="1504950" y="4067175"/>
-            <a:ext cx="571500" cy="571500"/>
-          </a:xfrm>
-          <a:prstGeom prst="rect">
-            <a:avLst/>
-          </a:prstGeom>
-        </p:spPr>
-      </p:pic>
-      <p:pic>
-        <p:nvPicPr>
-          <p:cNvPr id="14" name="Image 12" descr="preencoded.png"/>
-          <p:cNvPicPr>
-            <a:picLocks noChangeAspect="1"/>
-          </p:cNvPicPr>
-          <p:nvPr/>
-        </p:nvPicPr>
-        <p:blipFill>
-          <a:blip r:embed="rId14"/>
-          <a:stretch>
-            <a:fillRect/>
-          </a:stretch>
-        </p:blipFill>
-        <p:spPr>
-          <a:xfrm>
-            <a:off x="1662113" y="4200525"/>
-            <a:ext cx="257175" cy="304800"/>
-          </a:xfrm>
-          <a:prstGeom prst="rect">
-            <a:avLst/>
-          </a:prstGeom>
-        </p:spPr>
-      </p:pic>
-      <p:pic>
-        <p:nvPicPr>
-          <p:cNvPr id="15" name="Image 13" descr="preencoded.png"/>
-          <p:cNvPicPr>
-            <a:picLocks noChangeAspect="1"/>
-          </p:cNvPicPr>
-          <p:nvPr/>
-        </p:nvPicPr>
-        <p:blipFill>
-          <a:blip r:embed="rId10"/>
-          <a:stretch>
-            <a:fillRect/>
-          </a:stretch>
-        </p:blipFill>
-        <p:spPr>
-          <a:xfrm>
-            <a:off x="3200400" y="3914775"/>
-            <a:ext cx="2514600" cy="1933575"/>
-          </a:xfrm>
-          <a:prstGeom prst="rect">
-            <a:avLst/>
-          </a:prstGeom>
-        </p:spPr>
-      </p:pic>
-      <p:pic>
-        <p:nvPicPr>
-          <p:cNvPr id="16" name="Image 14" descr="preencoded.png"/>
-          <p:cNvPicPr>
-            <a:picLocks noChangeAspect="1"/>
-          </p:cNvPicPr>
-          <p:nvPr/>
-        </p:nvPicPr>
-        <p:blipFill>
-          <a:blip r:embed="rId15"/>
-          <a:stretch>
-            <a:fillRect/>
-          </a:stretch>
-        </p:blipFill>
-        <p:spPr>
-          <a:xfrm>
-            <a:off x="4171950" y="4067175"/>
-            <a:ext cx="571500" cy="571500"/>
-          </a:xfrm>
-          <a:prstGeom prst="rect">
-            <a:avLst/>
-          </a:prstGeom>
-        </p:spPr>
-      </p:pic>
-      <p:pic>
-        <p:nvPicPr>
-          <p:cNvPr id="17" name="Image 15" descr="preencoded.png"/>
-          <p:cNvPicPr>
-            <a:picLocks noChangeAspect="1"/>
-          </p:cNvPicPr>
-          <p:nvPr/>
-        </p:nvPicPr>
-        <p:blipFill>
-          <a:blip r:embed="rId16"/>
-          <a:stretch>
-            <a:fillRect/>
-          </a:stretch>
-        </p:blipFill>
-        <p:spPr>
-          <a:xfrm>
-            <a:off x="4314825" y="4200525"/>
-            <a:ext cx="285750" cy="304800"/>
-          </a:xfrm>
-          <a:prstGeom prst="rect">
-            <a:avLst/>
-          </a:prstGeom>
-        </p:spPr>
-      </p:pic>
-      <p:pic>
-        <p:nvPicPr>
-          <p:cNvPr id="18" name="Image 16" descr="preencoded.png"/>
-          <p:cNvPicPr>
-            <a:picLocks noChangeAspect="1"/>
-          </p:cNvPicPr>
-          <p:nvPr/>
-        </p:nvPicPr>
-        <p:blipFill>
-          <a:blip r:embed="rId5"/>
-          <a:stretch>
-            <a:fillRect/>
-          </a:stretch>
-        </p:blipFill>
-        <p:spPr>
-          <a:xfrm>
-            <a:off x="6248400" y="1066800"/>
-            <a:ext cx="5638800" cy="5010150"/>
-          </a:xfrm>
-          <a:prstGeom prst="rect">
-            <a:avLst/>
-          </a:prstGeom>
-        </p:spPr>
-      </p:pic>
-      <p:pic>
-        <p:nvPicPr>
-          <p:cNvPr id="19" name="Image 17" descr="preencoded.png"/>
-          <p:cNvPicPr>
-            <a:picLocks noChangeAspect="1"/>
-          </p:cNvPicPr>
-          <p:nvPr/>
-        </p:nvPicPr>
-        <p:blipFill>
-          <a:blip r:embed="rId17"/>
-          <a:stretch>
-            <a:fillRect/>
-          </a:stretch>
-        </p:blipFill>
-        <p:spPr>
-          <a:xfrm>
-            <a:off x="6477000" y="1333500"/>
-            <a:ext cx="285750" cy="228600"/>
-          </a:xfrm>
-          <a:prstGeom prst="rect">
-            <a:avLst/>
-          </a:prstGeom>
-        </p:spPr>
-      </p:pic>
-      <p:pic>
-        <p:nvPicPr>
-          <p:cNvPr id="20" name="Image 18" descr="preencoded.png"/>
-          <p:cNvPicPr>
-            <a:picLocks noChangeAspect="1"/>
-          </p:cNvPicPr>
-          <p:nvPr/>
-        </p:nvPicPr>
-        <p:blipFill>
-          <a:blip r:embed="rId7"/>
-          <a:stretch>
-            <a:fillRect/>
-          </a:stretch>
-        </p:blipFill>
-        <p:spPr>
-          <a:xfrm>
-            <a:off x="6477000" y="1828800"/>
-            <a:ext cx="2514600" cy="1933575"/>
-          </a:xfrm>
-          <a:prstGeom prst="rect">
-            <a:avLst/>
-          </a:prstGeom>
-        </p:spPr>
-      </p:pic>
-      <p:pic>
-        <p:nvPicPr>
-          <p:cNvPr id="21" name="Image 19" descr="preencoded.png"/>
-          <p:cNvPicPr>
-            <a:picLocks noChangeAspect="1"/>
-          </p:cNvPicPr>
-          <p:nvPr/>
-        </p:nvPicPr>
-        <p:blipFill>
-          <a:blip r:embed="rId11"/>
-          <a:stretch>
-            <a:fillRect/>
-          </a:stretch>
-        </p:blipFill>
-        <p:spPr>
-          <a:xfrm>
-            <a:off x="7448550" y="1981200"/>
-            <a:ext cx="571500" cy="571500"/>
-          </a:xfrm>
-          <a:prstGeom prst="rect">
-            <a:avLst/>
-          </a:prstGeom>
-        </p:spPr>
-      </p:pic>
-      <p:pic>
-        <p:nvPicPr>
-          <p:cNvPr id="22" name="Image 20" descr="preencoded.png"/>
-          <p:cNvPicPr>
-            <a:picLocks noChangeAspect="1"/>
-          </p:cNvPicPr>
-          <p:nvPr/>
-        </p:nvPicPr>
-        <p:blipFill>
-          <a:blip r:embed="rId18"/>
-          <a:stretch>
-            <a:fillRect/>
-          </a:stretch>
-        </p:blipFill>
-        <p:spPr>
-          <a:xfrm>
-            <a:off x="7620000" y="2114550"/>
-            <a:ext cx="228600" cy="304800"/>
-          </a:xfrm>
-          <a:prstGeom prst="rect">
-            <a:avLst/>
-          </a:prstGeom>
-        </p:spPr>
-      </p:pic>
-      <p:pic>
-        <p:nvPicPr>
-          <p:cNvPr id="23" name="Image 21" descr="preencoded.png"/>
-          <p:cNvPicPr>
-            <a:picLocks noChangeAspect="1"/>
-          </p:cNvPicPr>
-          <p:nvPr/>
-        </p:nvPicPr>
-        <p:blipFill>
-          <a:blip r:embed="rId7"/>
-          <a:stretch>
-            <a:fillRect/>
-          </a:stretch>
-        </p:blipFill>
-        <p:spPr>
-          <a:xfrm>
-            <a:off x="9144000" y="1828800"/>
-            <a:ext cx="2514600" cy="1933575"/>
-          </a:xfrm>
-          <a:prstGeom prst="rect">
-            <a:avLst/>
-          </a:prstGeom>
-        </p:spPr>
-      </p:pic>
-      <p:pic>
-        <p:nvPicPr>
-          <p:cNvPr id="24" name="Image 22" descr="preencoded.png"/>
-          <p:cNvPicPr>
-            <a:picLocks noChangeAspect="1"/>
-          </p:cNvPicPr>
-          <p:nvPr/>
-        </p:nvPicPr>
-        <p:blipFill>
-          <a:blip r:embed="rId19"/>
-          <a:stretch>
-            <a:fillRect/>
-          </a:stretch>
-        </p:blipFill>
-        <p:spPr>
-          <a:xfrm>
-            <a:off x="10115550" y="1981200"/>
-            <a:ext cx="571500" cy="571500"/>
-          </a:xfrm>
-          <a:prstGeom prst="rect">
-            <a:avLst/>
-          </a:prstGeom>
-        </p:spPr>
-      </p:pic>
-      <p:pic>
-        <p:nvPicPr>
-          <p:cNvPr id="25" name="Image 23" descr="preencoded.png"/>
-          <p:cNvPicPr>
-            <a:picLocks noChangeAspect="1"/>
-          </p:cNvPicPr>
-          <p:nvPr/>
-        </p:nvPicPr>
-        <p:blipFill>
-          <a:blip r:embed="rId20"/>
-          <a:stretch>
-            <a:fillRect/>
-          </a:stretch>
-        </p:blipFill>
-        <p:spPr>
-          <a:xfrm>
-            <a:off x="10287000" y="2114550"/>
-            <a:ext cx="228600" cy="304800"/>
-          </a:xfrm>
-          <a:prstGeom prst="rect">
-            <a:avLst/>
-          </a:prstGeom>
-        </p:spPr>
-      </p:pic>
-      <p:pic>
-        <p:nvPicPr>
-          <p:cNvPr id="26" name="Image 24" descr="preencoded.png"/>
-          <p:cNvPicPr>
-            <a:picLocks noChangeAspect="1"/>
-          </p:cNvPicPr>
-          <p:nvPr/>
-        </p:nvPicPr>
-        <p:blipFill>
-          <a:blip r:embed="rId7"/>
-          <a:stretch>
-            <a:fillRect/>
-          </a:stretch>
-        </p:blipFill>
-        <p:spPr>
-          <a:xfrm>
-            <a:off x="6477000" y="3914775"/>
-            <a:ext cx="2514600" cy="1933575"/>
-          </a:xfrm>
-          <a:prstGeom prst="rect">
-            <a:avLst/>
-          </a:prstGeom>
-        </p:spPr>
-      </p:pic>
-      <p:pic>
-        <p:nvPicPr>
-          <p:cNvPr id="27" name="Image 25" descr="preencoded.png"/>
-          <p:cNvPicPr>
-            <a:picLocks noChangeAspect="1"/>
-          </p:cNvPicPr>
-          <p:nvPr/>
-        </p:nvPicPr>
-        <p:blipFill>
-          <a:blip r:embed="rId15"/>
-          <a:stretch>
-            <a:fillRect/>
-          </a:stretch>
-        </p:blipFill>
-        <p:spPr>
-          <a:xfrm>
-            <a:off x="7448550" y="4067175"/>
-            <a:ext cx="571500" cy="571500"/>
-          </a:xfrm>
-          <a:prstGeom prst="rect">
-            <a:avLst/>
-          </a:prstGeom>
-        </p:spPr>
-      </p:pic>
-      <p:pic>
-        <p:nvPicPr>
-          <p:cNvPr id="28" name="Image 26" descr="preencoded.png"/>
-          <p:cNvPicPr>
-            <a:picLocks noChangeAspect="1"/>
-          </p:cNvPicPr>
-          <p:nvPr/>
-        </p:nvPicPr>
-        <p:blipFill>
-          <a:blip r:embed="rId21"/>
-          <a:stretch>
-            <a:fillRect/>
-          </a:stretch>
-        </p:blipFill>
-        <p:spPr>
-          <a:xfrm>
-            <a:off x="7620000" y="4200525"/>
-            <a:ext cx="228600" cy="304800"/>
-          </a:xfrm>
-          <a:prstGeom prst="rect">
-            <a:avLst/>
-          </a:prstGeom>
-        </p:spPr>
-      </p:pic>
-      <p:pic>
-        <p:nvPicPr>
-          <p:cNvPr id="29" name="Image 27" descr="preencoded.png"/>
-          <p:cNvPicPr>
-            <a:picLocks noChangeAspect="1"/>
-          </p:cNvPicPr>
-          <p:nvPr/>
-        </p:nvPicPr>
-        <p:blipFill>
-          <a:blip r:embed="rId7"/>
-          <a:stretch>
-            <a:fillRect/>
-          </a:stretch>
-        </p:blipFill>
-        <p:spPr>
-          <a:xfrm>
-            <a:off x="9144000" y="3914775"/>
-            <a:ext cx="2514600" cy="1933575"/>
-          </a:xfrm>
-          <a:prstGeom prst="rect">
-            <a:avLst/>
-          </a:prstGeom>
-        </p:spPr>
-      </p:pic>
-      <p:pic>
-        <p:nvPicPr>
-          <p:cNvPr id="30" name="Image 28" descr="preencoded.png"/>
-          <p:cNvPicPr>
-            <a:picLocks noChangeAspect="1"/>
-          </p:cNvPicPr>
-          <p:nvPr/>
-        </p:nvPicPr>
-        <p:blipFill>
-          <a:blip r:embed="rId22"/>
-          <a:stretch>
-            <a:fillRect/>
-          </a:stretch>
-        </p:blipFill>
-        <p:spPr>
-          <a:xfrm>
-            <a:off x="10115550" y="4067175"/>
-            <a:ext cx="571500" cy="571500"/>
-          </a:xfrm>
-          <a:prstGeom prst="rect">
-            <a:avLst/>
-          </a:prstGeom>
-        </p:spPr>
-      </p:pic>
-      <p:pic>
-        <p:nvPicPr>
-          <p:cNvPr id="31" name="Image 29" descr="preencoded.png"/>
-          <p:cNvPicPr>
-            <a:picLocks noChangeAspect="1"/>
-          </p:cNvPicPr>
-          <p:nvPr/>
-        </p:nvPicPr>
-        <p:blipFill>
-          <a:blip r:embed="rId23"/>
-          <a:stretch>
-            <a:fillRect/>
-          </a:stretch>
-        </p:blipFill>
-        <p:spPr>
-          <a:xfrm>
-            <a:off x="10287000" y="4200525"/>
-            <a:ext cx="228600" cy="304800"/>
-          </a:xfrm>
-          <a:prstGeom prst="rect">
-            <a:avLst/>
-          </a:prstGeom>
-        </p:spPr>
-      </p:pic>
-      <p:pic>
-        <p:nvPicPr>
-          <p:cNvPr id="32" name="Image 30" descr="preencoded.png"/>
-          <p:cNvPicPr>
-            <a:picLocks noChangeAspect="1"/>
-          </p:cNvPicPr>
-          <p:nvPr/>
-        </p:nvPicPr>
-        <p:blipFill>
-          <a:blip r:embed="rId24"/>
-          <a:stretch>
-            <a:fillRect/>
-          </a:stretch>
-        </p:blipFill>
-        <p:spPr>
-          <a:xfrm>
-            <a:off x="0" y="6781800"/>
-            <a:ext cx="12192000" cy="76200"/>
-          </a:xfrm>
-          <a:prstGeom prst="rect">
-            <a:avLst/>
-          </a:prstGeom>
-        </p:spPr>
-      </p:pic>
-      <p:sp>
-        <p:nvSpPr>
-          <p:cNvPr id="33" name="Text 0"/>
-          <p:cNvSpPr/>
-          <p:nvPr/>
-        </p:nvSpPr>
-        <p:spPr>
-          <a:xfrm>
-            <a:off x="381000" y="209550"/>
-            <a:ext cx="3063240" cy="342900"/>
-          </a:xfrm>
-          <a:prstGeom prst="rect">
-            <a:avLst/>
-          </a:prstGeom>
-          <a:noFill/>
-          <a:ln/>
-        </p:spPr>
-        <p:txBody>
-          <a:bodyPr vert="horz" wrap="square" lIns="0" tIns="0" rIns="0" bIns="0" rtlCol="0" anchor="t"/>
-          <a:lstStyle/>
-          <a:p>
-            <a:pPr marL="0" indent="0">
-              <a:lnSpc>
-                <a:spcPts val="2700"/>
-              </a:lnSpc>
-              <a:buNone/>
-            </a:pPr>
-            <a:r>
-              <a:rPr lang="en-US" sz="2250" b="1" dirty="0">
-                <a:solidFill>
-                  <a:srgbClr val="FFFFFF"/>
-                </a:solidFill>
-                <a:latin typeface="Noto Sans KR" pitchFamily="34" charset="0"/>
-                <a:ea typeface="Noto Sans KR" pitchFamily="34" charset="-122"/>
-                <a:cs typeface="Noto Sans KR" pitchFamily="34" charset="-120"/>
-              </a:rPr>
-              <a:t>시스템 구현 고려사항</a:t>
-            </a:r>
-            <a:endParaRPr lang="en-US" sz="2250" dirty="0"/>
-          </a:p>
-        </p:txBody>
-      </p:sp>
-      <p:sp>
-        <p:nvSpPr>
-          <p:cNvPr id="34" name="Text 1"/>
-          <p:cNvSpPr/>
-          <p:nvPr/>
-        </p:nvSpPr>
-        <p:spPr>
-          <a:xfrm>
-            <a:off x="11315700" y="247650"/>
-            <a:ext cx="594360" cy="266700"/>
-          </a:xfrm>
-          <a:prstGeom prst="rect">
-            <a:avLst/>
-          </a:prstGeom>
-          <a:noFill/>
-          <a:ln/>
-        </p:spPr>
-        <p:txBody>
-          <a:bodyPr vert="horz" wrap="square" lIns="0" tIns="0" rIns="0" bIns="0" rtlCol="0" anchor="t"/>
-          <a:lstStyle/>
-          <a:p>
-            <a:pPr marL="0" indent="0">
-              <a:lnSpc>
-                <a:spcPts val="2100"/>
-              </a:lnSpc>
-              <a:buNone/>
-            </a:pPr>
-            <a:r>
-              <a:rPr lang="en-US" sz="1500" dirty="0">
-                <a:solidFill>
-                  <a:srgbClr val="FFFFFF"/>
-                </a:solidFill>
-                <a:latin typeface="Noto Sans KR" pitchFamily="34" charset="0"/>
-                <a:ea typeface="Noto Sans KR" pitchFamily="34" charset="-122"/>
-                <a:cs typeface="Noto Sans KR" pitchFamily="34" charset="-120"/>
-              </a:rPr>
-              <a:t>19/20</a:t>
-            </a:r>
-            <a:endParaRPr lang="en-US" sz="1500" dirty="0"/>
-          </a:p>
-        </p:txBody>
-      </p:sp>
-      <p:sp>
-        <p:nvSpPr>
-          <p:cNvPr id="35" name="Text 2"/>
-          <p:cNvSpPr/>
-          <p:nvPr/>
-        </p:nvSpPr>
-        <p:spPr>
-          <a:xfrm>
-            <a:off x="819150" y="1295400"/>
-            <a:ext cx="6217920" cy="304800"/>
-          </a:xfrm>
-          <a:prstGeom prst="rect">
-            <a:avLst/>
-          </a:prstGeom>
-          <a:noFill/>
-          <a:ln/>
-        </p:spPr>
-        <p:txBody>
-          <a:bodyPr vert="horz" wrap="square" lIns="0" tIns="0" rIns="0" bIns="0" rtlCol="0" anchor="t"/>
-          <a:lstStyle/>
-          <a:p>
-            <a:pPr marL="0" indent="0">
-              <a:lnSpc>
-                <a:spcPts val="2400"/>
-              </a:lnSpc>
-              <a:buNone/>
-            </a:pPr>
-            <a:r>
-              <a:rPr lang="en-US" sz="1800" b="1" dirty="0">
-                <a:solidFill>
-                  <a:srgbClr val="1E40AF"/>
-                </a:solidFill>
-                <a:latin typeface="Noto Sans KR" pitchFamily="34" charset="0"/>
-                <a:ea typeface="Noto Sans KR" pitchFamily="34" charset="-122"/>
-                <a:cs typeface="Noto Sans KR" pitchFamily="34" charset="-120"/>
-              </a:rPr>
-              <a:t>실시간 탐지를 위한 경량 모델 개발</a:t>
-            </a:r>
-            <a:endParaRPr lang="en-US" sz="1800" dirty="0"/>
-          </a:p>
-        </p:txBody>
-      </p:sp>
-      <p:sp>
-        <p:nvSpPr>
-          <p:cNvPr id="36" name="Text 3"/>
-          <p:cNvSpPr/>
-          <p:nvPr/>
-        </p:nvSpPr>
-        <p:spPr>
-          <a:xfrm>
-            <a:off x="464820" y="2695575"/>
-            <a:ext cx="2651760" cy="266700"/>
-          </a:xfrm>
-          <a:prstGeom prst="rect">
-            <a:avLst/>
-          </a:prstGeom>
-          <a:noFill/>
-          <a:ln/>
-        </p:spPr>
-        <p:txBody>
-          <a:bodyPr vert="horz" wrap="square" lIns="0" tIns="0" rIns="0" bIns="0" rtlCol="0" anchor="t"/>
-          <a:lstStyle/>
-          <a:p>
-            <a:pPr marL="0" indent="0" algn="ctr">
-              <a:lnSpc>
-                <a:spcPts val="2100"/>
-              </a:lnSpc>
-              <a:buNone/>
-            </a:pPr>
-            <a:r>
-              <a:rPr lang="en-US" sz="1350" b="1" dirty="0">
-                <a:solidFill>
-                  <a:srgbClr val="1D4ED8"/>
-                </a:solidFill>
-                <a:latin typeface="Noto Sans KR" pitchFamily="34" charset="0"/>
-                <a:ea typeface="Noto Sans KR" pitchFamily="34" charset="-122"/>
-                <a:cs typeface="Noto Sans KR" pitchFamily="34" charset="-120"/>
-              </a:rPr>
-              <a:t>트리 기반 모델 최적화</a:t>
-            </a:r>
-            <a:endParaRPr lang="en-US" sz="1350" dirty="0"/>
-          </a:p>
-        </p:txBody>
-      </p:sp>
-      <p:sp>
-        <p:nvSpPr>
-          <p:cNvPr id="37" name="Text 4"/>
-          <p:cNvSpPr/>
-          <p:nvPr/>
-        </p:nvSpPr>
-        <p:spPr>
-          <a:xfrm>
-            <a:off x="685800" y="3038475"/>
-            <a:ext cx="2209800" cy="571500"/>
-          </a:xfrm>
-          <a:prstGeom prst="rect">
-            <a:avLst/>
-          </a:prstGeom>
-          <a:noFill/>
-          <a:ln/>
-        </p:spPr>
-        <p:txBody>
-          <a:bodyPr vert="horz" wrap="square" lIns="0" tIns="0" rIns="0" bIns="0" rtlCol="0" anchor="t"/>
-          <a:lstStyle/>
-          <a:p>
-            <a:pPr marL="0" indent="0">
-              <a:lnSpc>
-                <a:spcPts val="1500"/>
-              </a:lnSpc>
-              <a:buNone/>
-            </a:pPr>
-            <a:r>
-              <a:rPr lang="en-US" sz="1050" dirty="0">
-                <a:solidFill>
-                  <a:srgbClr val="374151"/>
-                </a:solidFill>
-                <a:latin typeface="Noto Sans KR" pitchFamily="34" charset="0"/>
-                <a:ea typeface="Noto Sans KR" pitchFamily="34" charset="-122"/>
-                <a:cs typeface="Noto Sans KR" pitchFamily="34" charset="-120"/>
-              </a:rPr>
-              <a:t>CatBoost, XGBoost와 같은 복잡한 모델의 경우 feature reduction, 얕은 트리, 양자화 기법을 적용</a:t>
-            </a:r>
-            <a:endParaRPr lang="en-US" sz="1050" dirty="0"/>
-          </a:p>
-        </p:txBody>
-      </p:sp>
-      <p:sp>
-        <p:nvSpPr>
-          <p:cNvPr id="38" name="Text 5"/>
-          <p:cNvSpPr/>
-          <p:nvPr/>
-        </p:nvSpPr>
-        <p:spPr>
-          <a:xfrm>
-            <a:off x="3352800" y="2695575"/>
-            <a:ext cx="2209800" cy="266700"/>
-          </a:xfrm>
-          <a:prstGeom prst="rect">
-            <a:avLst/>
-          </a:prstGeom>
-          <a:noFill/>
-          <a:ln/>
-        </p:spPr>
-        <p:txBody>
-          <a:bodyPr vert="horz" wrap="square" lIns="0" tIns="0" rIns="0" bIns="0" rtlCol="0" anchor="t"/>
-          <a:lstStyle/>
-          <a:p>
-            <a:pPr marL="0" indent="0" algn="ctr">
-              <a:lnSpc>
-                <a:spcPts val="2100"/>
-              </a:lnSpc>
-              <a:buNone/>
-            </a:pPr>
-            <a:r>
-              <a:rPr lang="en-US" sz="1350" b="1" dirty="0">
-                <a:solidFill>
-                  <a:srgbClr val="1D4ED8"/>
-                </a:solidFill>
-                <a:latin typeface="Noto Sans KR" pitchFamily="34" charset="0"/>
-                <a:ea typeface="Noto Sans KR" pitchFamily="34" charset="-122"/>
-                <a:cs typeface="Noto Sans KR" pitchFamily="34" charset="-120"/>
-              </a:rPr>
-              <a:t>신경망 축소</a:t>
-            </a:r>
-            <a:endParaRPr lang="en-US" sz="1350" dirty="0"/>
-          </a:p>
-        </p:txBody>
-      </p:sp>
-      <p:sp>
-        <p:nvSpPr>
-          <p:cNvPr id="39" name="Text 6"/>
-          <p:cNvSpPr/>
-          <p:nvPr/>
-        </p:nvSpPr>
-        <p:spPr>
-          <a:xfrm>
-            <a:off x="3352800" y="3038475"/>
-            <a:ext cx="2209800" cy="571500"/>
-          </a:xfrm>
-          <a:prstGeom prst="rect">
-            <a:avLst/>
-          </a:prstGeom>
-          <a:noFill/>
-          <a:ln/>
-        </p:spPr>
-        <p:txBody>
-          <a:bodyPr vert="horz" wrap="square" lIns="0" tIns="0" rIns="0" bIns="0" rtlCol="0" anchor="t"/>
-          <a:lstStyle/>
-          <a:p>
-            <a:pPr marL="0" indent="0">
-              <a:lnSpc>
-                <a:spcPts val="1500"/>
-              </a:lnSpc>
-              <a:buNone/>
-            </a:pPr>
-            <a:r>
-              <a:rPr lang="en-US" sz="1050" dirty="0">
-                <a:solidFill>
-                  <a:srgbClr val="374151"/>
-                </a:solidFill>
-                <a:latin typeface="Noto Sans KR" pitchFamily="34" charset="0"/>
-                <a:ea typeface="Noto Sans KR" pitchFamily="34" charset="-122"/>
-                <a:cs typeface="Noto Sans KR" pitchFamily="34" charset="-120"/>
-              </a:rPr>
-              <a:t>MLP 모델의 레이어와 뉴런 수를 줄이고, ONNX 포맷으로 변환하여 서버/클라우드 환경에서 효율적으로 배포</a:t>
-            </a:r>
-            <a:endParaRPr lang="en-US" sz="1050" dirty="0"/>
-          </a:p>
-        </p:txBody>
-      </p:sp>
-      <p:sp>
-        <p:nvSpPr>
-          <p:cNvPr id="40" name="Text 7"/>
-          <p:cNvSpPr/>
-          <p:nvPr/>
-        </p:nvSpPr>
-        <p:spPr>
-          <a:xfrm>
-            <a:off x="685800" y="4781550"/>
-            <a:ext cx="2209800" cy="266700"/>
-          </a:xfrm>
-          <a:prstGeom prst="rect">
-            <a:avLst/>
-          </a:prstGeom>
-          <a:noFill/>
-          <a:ln/>
-        </p:spPr>
-        <p:txBody>
-          <a:bodyPr vert="horz" wrap="square" lIns="0" tIns="0" rIns="0" bIns="0" rtlCol="0" anchor="t"/>
-          <a:lstStyle/>
-          <a:p>
-            <a:pPr marL="0" indent="0" algn="ctr">
-              <a:lnSpc>
-                <a:spcPts val="2100"/>
-              </a:lnSpc>
-              <a:buNone/>
-            </a:pPr>
-            <a:r>
-              <a:rPr lang="en-US" sz="1350" b="1" dirty="0">
-                <a:solidFill>
-                  <a:srgbClr val="1D4ED8"/>
-                </a:solidFill>
-                <a:latin typeface="Noto Sans KR" pitchFamily="34" charset="0"/>
-                <a:ea typeface="Noto Sans KR" pitchFamily="34" charset="-122"/>
-                <a:cs typeface="Noto Sans KR" pitchFamily="34" charset="-120"/>
-              </a:rPr>
-              <a:t>추론 속도 향상</a:t>
-            </a:r>
-            <a:endParaRPr lang="en-US" sz="1350" dirty="0"/>
-          </a:p>
-        </p:txBody>
-      </p:sp>
-      <p:sp>
-        <p:nvSpPr>
-          <p:cNvPr id="41" name="Text 8"/>
-          <p:cNvSpPr/>
-          <p:nvPr/>
-        </p:nvSpPr>
-        <p:spPr>
-          <a:xfrm>
-            <a:off x="685800" y="5124450"/>
-            <a:ext cx="2209800" cy="571500"/>
-          </a:xfrm>
-          <a:prstGeom prst="rect">
-            <a:avLst/>
-          </a:prstGeom>
-          <a:noFill/>
-          <a:ln/>
-        </p:spPr>
-        <p:txBody>
-          <a:bodyPr vert="horz" wrap="square" lIns="0" tIns="0" rIns="0" bIns="0" rtlCol="0" anchor="t"/>
-          <a:lstStyle/>
-          <a:p>
-            <a:pPr marL="0" indent="0">
-              <a:lnSpc>
-                <a:spcPts val="1500"/>
-              </a:lnSpc>
-              <a:buNone/>
-            </a:pPr>
-            <a:r>
-              <a:rPr lang="en-US" sz="1050" dirty="0">
-                <a:solidFill>
-                  <a:srgbClr val="374151"/>
-                </a:solidFill>
-                <a:latin typeface="Noto Sans KR" pitchFamily="34" charset="0"/>
-                <a:ea typeface="Noto Sans KR" pitchFamily="34" charset="-122"/>
-                <a:cs typeface="Noto Sans KR" pitchFamily="34" charset="-120"/>
-              </a:rPr>
-              <a:t>모델 압축 및 최적화를 통해 추론 시간을 최소화하여 실시간 거래 처리 가능하도록 함</a:t>
-            </a:r>
-            <a:endParaRPr lang="en-US" sz="1050" dirty="0"/>
-          </a:p>
-        </p:txBody>
-      </p:sp>
-      <p:sp>
-        <p:nvSpPr>
-          <p:cNvPr id="42" name="Text 9"/>
-          <p:cNvSpPr/>
-          <p:nvPr/>
-        </p:nvSpPr>
-        <p:spPr>
-          <a:xfrm>
-            <a:off x="3352800" y="4781550"/>
-            <a:ext cx="2209800" cy="266700"/>
-          </a:xfrm>
-          <a:prstGeom prst="rect">
-            <a:avLst/>
-          </a:prstGeom>
-          <a:noFill/>
-          <a:ln/>
-        </p:spPr>
-        <p:txBody>
-          <a:bodyPr vert="horz" wrap="square" lIns="0" tIns="0" rIns="0" bIns="0" rtlCol="0" anchor="t"/>
-          <a:lstStyle/>
-          <a:p>
-            <a:pPr marL="0" indent="0" algn="ctr">
-              <a:lnSpc>
-                <a:spcPts val="2100"/>
-              </a:lnSpc>
-              <a:buNone/>
-            </a:pPr>
-            <a:r>
-              <a:rPr lang="en-US" sz="1350" b="1" dirty="0">
-                <a:solidFill>
-                  <a:srgbClr val="1D4ED8"/>
-                </a:solidFill>
-                <a:latin typeface="Noto Sans KR" pitchFamily="34" charset="0"/>
-                <a:ea typeface="Noto Sans KR" pitchFamily="34" charset="-122"/>
-                <a:cs typeface="Noto Sans KR" pitchFamily="34" charset="-120"/>
-              </a:rPr>
-              <a:t>모델 교체 전략</a:t>
-            </a:r>
-            <a:endParaRPr lang="en-US" sz="1350" dirty="0"/>
-          </a:p>
-        </p:txBody>
-      </p:sp>
-      <p:sp>
-        <p:nvSpPr>
-          <p:cNvPr id="43" name="Text 10"/>
-          <p:cNvSpPr/>
-          <p:nvPr/>
-        </p:nvSpPr>
-        <p:spPr>
-          <a:xfrm>
-            <a:off x="3352800" y="5124450"/>
-            <a:ext cx="2209800" cy="571500"/>
-          </a:xfrm>
-          <a:prstGeom prst="rect">
-            <a:avLst/>
-          </a:prstGeom>
-          <a:noFill/>
-          <a:ln/>
-        </p:spPr>
-        <p:txBody>
-          <a:bodyPr vert="horz" wrap="square" lIns="0" tIns="0" rIns="0" bIns="0" rtlCol="0" anchor="t"/>
-          <a:lstStyle/>
-          <a:p>
-            <a:pPr marL="0" indent="0">
-              <a:lnSpc>
-                <a:spcPts val="1500"/>
-              </a:lnSpc>
-              <a:buNone/>
-            </a:pPr>
-            <a:r>
-              <a:rPr lang="en-US" sz="1050" dirty="0">
-                <a:solidFill>
-                  <a:srgbClr val="374151"/>
-                </a:solidFill>
-                <a:latin typeface="Noto Sans KR" pitchFamily="34" charset="0"/>
-                <a:ea typeface="Noto Sans KR" pitchFamily="34" charset="-122"/>
-                <a:cs typeface="Noto Sans KR" pitchFamily="34" charset="-120"/>
-              </a:rPr>
-              <a:t>원활한 모델 업데이트를 위해 새로운 버전 모델과의 호환성 유지 및 점진적 전환 전략 수립</a:t>
-            </a:r>
-            <a:endParaRPr lang="en-US" sz="1050" dirty="0"/>
-          </a:p>
-        </p:txBody>
-      </p:sp>
-      <p:sp>
-        <p:nvSpPr>
-          <p:cNvPr id="44" name="Text 11"/>
-          <p:cNvSpPr/>
-          <p:nvPr/>
-        </p:nvSpPr>
-        <p:spPr>
-          <a:xfrm>
-            <a:off x="6877050" y="1295400"/>
-            <a:ext cx="5181600" cy="304800"/>
-          </a:xfrm>
-          <a:prstGeom prst="rect">
-            <a:avLst/>
-          </a:prstGeom>
-          <a:noFill/>
-          <a:ln/>
-        </p:spPr>
-        <p:txBody>
-          <a:bodyPr vert="horz" wrap="square" lIns="0" tIns="0" rIns="0" bIns="0" rtlCol="0" anchor="t"/>
-          <a:lstStyle/>
-          <a:p>
-            <a:pPr marL="0" indent="0">
-              <a:lnSpc>
-                <a:spcPts val="2400"/>
-              </a:lnSpc>
-              <a:buNone/>
-            </a:pPr>
-            <a:r>
-              <a:rPr lang="en-US" sz="1800" b="1" dirty="0">
-                <a:solidFill>
-                  <a:srgbClr val="1E40AF"/>
-                </a:solidFill>
-                <a:latin typeface="Noto Sans KR" pitchFamily="34" charset="0"/>
-                <a:ea typeface="Noto Sans KR" pitchFamily="34" charset="-122"/>
-                <a:cs typeface="Noto Sans KR" pitchFamily="34" charset="-120"/>
-              </a:rPr>
-              <a:t>모니터링 및 재훈련 파이프라인</a:t>
-            </a:r>
-            <a:endParaRPr lang="en-US" sz="1800" dirty="0"/>
-          </a:p>
-        </p:txBody>
-      </p:sp>
-      <p:sp>
-        <p:nvSpPr>
-          <p:cNvPr id="45" name="Text 12"/>
-          <p:cNvSpPr/>
-          <p:nvPr/>
-        </p:nvSpPr>
-        <p:spPr>
-          <a:xfrm>
-            <a:off x="6629400" y="2695575"/>
-            <a:ext cx="2209800" cy="266700"/>
-          </a:xfrm>
-          <a:prstGeom prst="rect">
-            <a:avLst/>
-          </a:prstGeom>
-          <a:noFill/>
-          <a:ln/>
-        </p:spPr>
-        <p:txBody>
-          <a:bodyPr vert="horz" wrap="square" lIns="0" tIns="0" rIns="0" bIns="0" rtlCol="0" anchor="t"/>
-          <a:lstStyle/>
-          <a:p>
-            <a:pPr marL="0" indent="0" algn="ctr">
-              <a:lnSpc>
-                <a:spcPts val="2100"/>
-              </a:lnSpc>
-              <a:buNone/>
-            </a:pPr>
-            <a:r>
-              <a:rPr lang="en-US" sz="1350" b="1" dirty="0">
-                <a:solidFill>
-                  <a:srgbClr val="1D4ED8"/>
-                </a:solidFill>
-                <a:latin typeface="Noto Sans KR" pitchFamily="34" charset="0"/>
-                <a:ea typeface="Noto Sans KR" pitchFamily="34" charset="-122"/>
-                <a:cs typeface="Noto Sans KR" pitchFamily="34" charset="-120"/>
-              </a:rPr>
-              <a:t>성능 모니터링</a:t>
-            </a:r>
-            <a:endParaRPr lang="en-US" sz="1350" dirty="0"/>
-          </a:p>
-        </p:txBody>
-      </p:sp>
-      <p:sp>
-        <p:nvSpPr>
-          <p:cNvPr id="46" name="Text 13"/>
-          <p:cNvSpPr/>
-          <p:nvPr/>
-        </p:nvSpPr>
-        <p:spPr>
-          <a:xfrm>
-            <a:off x="6629400" y="3038475"/>
-            <a:ext cx="2209800" cy="571500"/>
-          </a:xfrm>
-          <a:prstGeom prst="rect">
-            <a:avLst/>
-          </a:prstGeom>
-          <a:noFill/>
-          <a:ln/>
-        </p:spPr>
-        <p:txBody>
-          <a:bodyPr vert="horz" wrap="square" lIns="0" tIns="0" rIns="0" bIns="0" rtlCol="0" anchor="t"/>
-          <a:lstStyle/>
-          <a:p>
-            <a:pPr marL="0" indent="0">
-              <a:lnSpc>
-                <a:spcPts val="1500"/>
-              </a:lnSpc>
-              <a:buNone/>
-            </a:pPr>
-            <a:r>
-              <a:rPr lang="en-US" sz="1050" dirty="0">
-                <a:solidFill>
-                  <a:srgbClr val="374151"/>
-                </a:solidFill>
-                <a:latin typeface="Noto Sans KR" pitchFamily="34" charset="0"/>
-                <a:ea typeface="Noto Sans KR" pitchFamily="34" charset="-122"/>
-                <a:cs typeface="Noto Sans KR" pitchFamily="34" charset="-120"/>
-              </a:rPr>
-              <a:t>일간/주간/월간 정기적 Recall, Precision, F1/F2 점수 모니터링 및 알림 시스템 구축</a:t>
-            </a:r>
-            <a:endParaRPr lang="en-US" sz="1050" dirty="0"/>
-          </a:p>
-        </p:txBody>
-      </p:sp>
-      <p:sp>
-        <p:nvSpPr>
-          <p:cNvPr id="47" name="Text 14"/>
-          <p:cNvSpPr/>
-          <p:nvPr/>
-        </p:nvSpPr>
-        <p:spPr>
-          <a:xfrm>
-            <a:off x="9296400" y="2695575"/>
-            <a:ext cx="2209800" cy="266700"/>
-          </a:xfrm>
-          <a:prstGeom prst="rect">
-            <a:avLst/>
-          </a:prstGeom>
-          <a:noFill/>
-          <a:ln/>
-        </p:spPr>
-        <p:txBody>
-          <a:bodyPr vert="horz" wrap="square" lIns="0" tIns="0" rIns="0" bIns="0" rtlCol="0" anchor="t"/>
-          <a:lstStyle/>
-          <a:p>
-            <a:pPr marL="0" indent="0" algn="ctr">
-              <a:lnSpc>
-                <a:spcPts val="2100"/>
-              </a:lnSpc>
-              <a:buNone/>
-            </a:pPr>
-            <a:r>
-              <a:rPr lang="en-US" sz="1350" b="1" dirty="0">
-                <a:solidFill>
-                  <a:srgbClr val="1D4ED8"/>
-                </a:solidFill>
-                <a:latin typeface="Noto Sans KR" pitchFamily="34" charset="0"/>
-                <a:ea typeface="Noto Sans KR" pitchFamily="34" charset="-122"/>
-                <a:cs typeface="Noto Sans KR" pitchFamily="34" charset="-120"/>
-              </a:rPr>
-              <a:t>드리프트 감지</a:t>
-            </a:r>
-            <a:endParaRPr lang="en-US" sz="1350" dirty="0"/>
-          </a:p>
-        </p:txBody>
-      </p:sp>
-      <p:sp>
-        <p:nvSpPr>
-          <p:cNvPr id="48" name="Text 15"/>
-          <p:cNvSpPr/>
-          <p:nvPr/>
-        </p:nvSpPr>
-        <p:spPr>
-          <a:xfrm>
-            <a:off x="9296400" y="3038475"/>
-            <a:ext cx="2209800" cy="571500"/>
-          </a:xfrm>
-          <a:prstGeom prst="rect">
-            <a:avLst/>
-          </a:prstGeom>
-          <a:noFill/>
-          <a:ln/>
-        </p:spPr>
-        <p:txBody>
-          <a:bodyPr vert="horz" wrap="square" lIns="0" tIns="0" rIns="0" bIns="0" rtlCol="0" anchor="t"/>
-          <a:lstStyle/>
-          <a:p>
-            <a:pPr marL="0" indent="0">
-              <a:lnSpc>
-                <a:spcPts val="1500"/>
-              </a:lnSpc>
-              <a:buNone/>
-            </a:pPr>
-            <a:r>
-              <a:rPr lang="en-US" sz="1050" dirty="0">
-                <a:solidFill>
-                  <a:srgbClr val="374151"/>
-                </a:solidFill>
-                <a:latin typeface="Noto Sans KR" pitchFamily="34" charset="0"/>
-                <a:ea typeface="Noto Sans KR" pitchFamily="34" charset="-122"/>
-                <a:cs typeface="Noto Sans KR" pitchFamily="34" charset="-120"/>
-              </a:rPr>
-              <a:t>거래 금액, 시간 패턴 등의 입력 분포 변화 및 사기 패턴 진화 감지 알고리즘 개발</a:t>
-            </a:r>
-            <a:endParaRPr lang="en-US" sz="1050" dirty="0"/>
-          </a:p>
-        </p:txBody>
-      </p:sp>
-      <p:sp>
-        <p:nvSpPr>
-          <p:cNvPr id="49" name="Text 16"/>
-          <p:cNvSpPr/>
-          <p:nvPr/>
-        </p:nvSpPr>
-        <p:spPr>
-          <a:xfrm>
-            <a:off x="6629400" y="4781550"/>
-            <a:ext cx="2209800" cy="266700"/>
-          </a:xfrm>
-          <a:prstGeom prst="rect">
-            <a:avLst/>
-          </a:prstGeom>
-          <a:noFill/>
-          <a:ln/>
-        </p:spPr>
-        <p:txBody>
-          <a:bodyPr vert="horz" wrap="square" lIns="0" tIns="0" rIns="0" bIns="0" rtlCol="0" anchor="t"/>
-          <a:lstStyle/>
-          <a:p>
-            <a:pPr marL="0" indent="0" algn="ctr">
-              <a:lnSpc>
-                <a:spcPts val="2100"/>
-              </a:lnSpc>
-              <a:buNone/>
-            </a:pPr>
-            <a:r>
-              <a:rPr lang="en-US" sz="1350" b="1" dirty="0">
-                <a:solidFill>
-                  <a:srgbClr val="1D4ED8"/>
-                </a:solidFill>
-                <a:latin typeface="Noto Sans KR" pitchFamily="34" charset="0"/>
-                <a:ea typeface="Noto Sans KR" pitchFamily="34" charset="-122"/>
-                <a:cs typeface="Noto Sans KR" pitchFamily="34" charset="-120"/>
-              </a:rPr>
-              <a:t>자동 재훈련</a:t>
-            </a:r>
-            <a:endParaRPr lang="en-US" sz="1350" dirty="0"/>
-          </a:p>
-        </p:txBody>
-      </p:sp>
-      <p:sp>
-        <p:nvSpPr>
-          <p:cNvPr id="50" name="Text 17"/>
-          <p:cNvSpPr/>
-          <p:nvPr/>
-        </p:nvSpPr>
-        <p:spPr>
-          <a:xfrm>
-            <a:off x="6629400" y="5124450"/>
-            <a:ext cx="2209800" cy="571500"/>
-          </a:xfrm>
-          <a:prstGeom prst="rect">
-            <a:avLst/>
-          </a:prstGeom>
-          <a:noFill/>
-          <a:ln/>
-        </p:spPr>
-        <p:txBody>
-          <a:bodyPr vert="horz" wrap="square" lIns="0" tIns="0" rIns="0" bIns="0" rtlCol="0" anchor="t"/>
-          <a:lstStyle/>
-          <a:p>
-            <a:pPr marL="0" indent="0">
-              <a:lnSpc>
-                <a:spcPts val="1500"/>
-              </a:lnSpc>
-              <a:buNone/>
-            </a:pPr>
-            <a:r>
-              <a:rPr lang="en-US" sz="1050" dirty="0">
-                <a:solidFill>
-                  <a:srgbClr val="374151"/>
-                </a:solidFill>
-                <a:latin typeface="Noto Sans KR" pitchFamily="34" charset="0"/>
-                <a:ea typeface="Noto Sans KR" pitchFamily="34" charset="-122"/>
-                <a:cs typeface="Noto Sans KR" pitchFamily="34" charset="-120"/>
-              </a:rPr>
-              <a:t>성능 저하 감지 시 자동으로 재훈련 파이프라인 실행 및 모델 버전 관리 시스템 구축</a:t>
-            </a:r>
-            <a:endParaRPr lang="en-US" sz="1050" dirty="0"/>
-          </a:p>
-        </p:txBody>
-      </p:sp>
-      <p:sp>
-        <p:nvSpPr>
-          <p:cNvPr id="51" name="Text 18"/>
-          <p:cNvSpPr/>
-          <p:nvPr/>
-        </p:nvSpPr>
-        <p:spPr>
-          <a:xfrm>
-            <a:off x="9296400" y="4781550"/>
-            <a:ext cx="2209800" cy="266700"/>
-          </a:xfrm>
-          <a:prstGeom prst="rect">
-            <a:avLst/>
-          </a:prstGeom>
-          <a:noFill/>
-          <a:ln/>
-        </p:spPr>
-        <p:txBody>
-          <a:bodyPr vert="horz" wrap="square" lIns="0" tIns="0" rIns="0" bIns="0" rtlCol="0" anchor="t"/>
-          <a:lstStyle/>
-          <a:p>
-            <a:pPr marL="0" indent="0" algn="ctr">
-              <a:lnSpc>
-                <a:spcPts val="2100"/>
-              </a:lnSpc>
-              <a:buNone/>
-            </a:pPr>
-            <a:r>
-              <a:rPr lang="en-US" sz="1350" b="1" dirty="0">
-                <a:solidFill>
-                  <a:srgbClr val="1D4ED8"/>
-                </a:solidFill>
-                <a:latin typeface="Noto Sans KR" pitchFamily="34" charset="0"/>
-                <a:ea typeface="Noto Sans KR" pitchFamily="34" charset="-122"/>
-                <a:cs typeface="Noto Sans KR" pitchFamily="34" charset="-120"/>
-              </a:rPr>
-              <a:t>롤백 전략</a:t>
-            </a:r>
-            <a:endParaRPr lang="en-US" sz="1350" dirty="0"/>
-          </a:p>
-        </p:txBody>
-      </p:sp>
-      <p:sp>
-        <p:nvSpPr>
-          <p:cNvPr id="52" name="Text 19"/>
-          <p:cNvSpPr/>
-          <p:nvPr/>
-        </p:nvSpPr>
-        <p:spPr>
-          <a:xfrm>
-            <a:off x="9296400" y="5124450"/>
-            <a:ext cx="2209800" cy="571500"/>
-          </a:xfrm>
-          <a:prstGeom prst="rect">
-            <a:avLst/>
-          </a:prstGeom>
-          <a:noFill/>
-          <a:ln/>
-        </p:spPr>
-        <p:txBody>
-          <a:bodyPr vert="horz" wrap="square" lIns="0" tIns="0" rIns="0" bIns="0" rtlCol="0" anchor="t"/>
-          <a:lstStyle/>
-          <a:p>
-            <a:pPr marL="0" indent="0">
-              <a:lnSpc>
-                <a:spcPts val="1500"/>
-              </a:lnSpc>
-              <a:buNone/>
-            </a:pPr>
-            <a:r>
-              <a:rPr lang="en-US" sz="1050" dirty="0">
-                <a:solidFill>
-                  <a:srgbClr val="374151"/>
-                </a:solidFill>
-                <a:latin typeface="Noto Sans KR" pitchFamily="34" charset="0"/>
-                <a:ea typeface="Noto Sans KR" pitchFamily="34" charset="-122"/>
-                <a:cs typeface="Noto Sans KR" pitchFamily="34" charset="-120"/>
-              </a:rPr>
-              <a:t>안정적인 모델 운영을 위해 이전 버전으로의 빠른 롤백 가능하도록 복구 지점 관리 체계 수립</a:t>
-            </a:r>
-            <a:endParaRPr lang="en-US" sz="1050" dirty="0"/>
-          </a:p>
-        </p:txBody>
-      </p:sp>
-    </p:spTree>
-  </p:cSld>
-  <p:clrMapOvr>
-    <a:masterClrMapping/>
-  </p:clrMapOvr>
-</p:sld>
-</file>
-
-<file path=ppt/slides/slide22.xml><?xml version="1.0" encoding="utf-8"?>
 <p:sld xmlns:a="http://schemas.openxmlformats.org/drawingml/2006/main" xmlns:r="http://schemas.openxmlformats.org/officeDocument/2006/relationships" xmlns:p="http://schemas.openxmlformats.org/presentationml/2006/main">
   <p:cSld name="Slide 20">
     <p:spTree>
@@ -27370,7 +26352,7 @@
                 <a:ea typeface="Noto Sans KR" pitchFamily="34" charset="-122"/>
                 <a:cs typeface="Noto Sans KR" pitchFamily="34" charset="-120"/>
               </a:rPr>
-              <a:t>20/20</a:t>
+              <a:t>21/22</a:t>
             </a:r>
             <a:endParaRPr lang="en-US" sz="1500" dirty="0"/>
           </a:p>
@@ -27804,7 +26786,7 @@
 </p:sld>
 </file>
 
-<file path=ppt/slides/slide23.xml><?xml version="1.0" encoding="utf-8"?>
+<file path=ppt/slides/slide22.xml><?xml version="1.0" encoding="utf-8"?>
 <p:sld xmlns:a="http://schemas.openxmlformats.org/drawingml/2006/main" xmlns:r="http://schemas.openxmlformats.org/officeDocument/2006/relationships" xmlns:p="http://schemas.openxmlformats.org/presentationml/2006/main">
   <p:cSld>
     <p:spTree>
@@ -28026,7 +27008,7 @@
                 <a:ea typeface="Noto Sans KR" pitchFamily="34" charset="-122"/>
                 <a:cs typeface="Noto Sans KR" pitchFamily="34" charset="-120"/>
               </a:rPr>
-              <a:t>20/20</a:t>
+              <a:t>22/22</a:t>
             </a:r>
             <a:endParaRPr lang="en-US" sz="1500" dirty="0"/>
           </a:p>
@@ -28655,7 +27637,7 @@
                 <a:ea typeface="Noto Sans KR" pitchFamily="34" charset="-122"/>
                 <a:cs typeface="Noto Sans KR" pitchFamily="34" charset="-120"/>
               </a:rPr>
-              <a:t>3/20</a:t>
+              <a:t>3/22</a:t>
             </a:r>
             <a:endParaRPr lang="en-US" sz="1500" dirty="0"/>
           </a:p>
@@ -29766,7 +28748,7 @@
                 <a:ea typeface="Noto Sans KR" pitchFamily="34" charset="-122"/>
                 <a:cs typeface="Noto Sans KR" pitchFamily="34" charset="-120"/>
               </a:rPr>
-              <a:t>4/20</a:t>
+              <a:t>4/22</a:t>
             </a:r>
             <a:endParaRPr lang="en-US" sz="1500" dirty="0"/>
           </a:p>
@@ -31016,7 +29998,7 @@
                 <a:ea typeface="Noto Sans KR" pitchFamily="34" charset="-122"/>
                 <a:cs typeface="Noto Sans KR" pitchFamily="34" charset="-120"/>
               </a:rPr>
-              <a:t>5/20</a:t>
+              <a:t>5/22</a:t>
             </a:r>
             <a:endParaRPr lang="en-US" sz="1500" dirty="0"/>
           </a:p>
@@ -32147,7 +31129,7 @@
                 <a:ea typeface="Noto Sans KR" pitchFamily="34" charset="-122"/>
                 <a:cs typeface="Noto Sans KR" pitchFamily="34" charset="-120"/>
               </a:rPr>
-              <a:t>5/20</a:t>
+              <a:t>6/22</a:t>
             </a:r>
             <a:endParaRPr lang="en-US" sz="1500" dirty="0"/>
           </a:p>
@@ -33502,7 +32484,7 @@
                 <a:ea typeface="Noto Sans KR" pitchFamily="34" charset="-122"/>
                 <a:cs typeface="Noto Sans KR" pitchFamily="34" charset="-120"/>
               </a:rPr>
-              <a:t>6/20</a:t>
+              <a:t>7/22</a:t>
             </a:r>
             <a:endParaRPr lang="en-US" sz="1500" dirty="0"/>
           </a:p>
@@ -35162,7 +34144,7 @@
                 <a:ea typeface="Noto Sans KR" pitchFamily="34" charset="-122"/>
                 <a:cs typeface="Noto Sans KR" pitchFamily="34" charset="-120"/>
               </a:rPr>
-              <a:t>7/20</a:t>
+              <a:t>8/22</a:t>
             </a:r>
             <a:endParaRPr lang="en-US" sz="1500" dirty="0"/>
           </a:p>
@@ -35992,7 +34974,7 @@
                 <a:ea typeface="Noto Sans KR" pitchFamily="34" charset="-122"/>
                 <a:cs typeface="Noto Sans KR" pitchFamily="34" charset="-120"/>
               </a:rPr>
-              <a:t>7/20</a:t>
+              <a:t>9/22</a:t>
             </a:r>
             <a:endParaRPr lang="en-US" sz="1500" dirty="0"/>
           </a:p>
